--- a/An introduction to  OpenStudio & Energyplus.pptx
+++ b/An introduction to  OpenStudio & Energyplus.pptx
@@ -190,7 +190,7 @@
           <p:cNvPr id="2" name="Header Placeholder 1">
             <a:extLst>
               <a:ext uri="{FF2B5EF4-FFF2-40B4-BE49-F238E27FC236}">
-                <a16:creationId xmlns="" xmlns:a16="http://schemas.microsoft.com/office/drawing/2014/main" id="{72BF7510-B9ED-40E0-8274-4F64AD62B839}"/>
+                <a16:creationId xmlns:a16="http://schemas.microsoft.com/office/drawing/2014/main" id="{72BF7510-B9ED-40E0-8274-4F64AD62B839}"/>
               </a:ext>
             </a:extLst>
           </p:cNvPr>
@@ -227,7 +227,7 @@
           <p:cNvPr id="3" name="Date Placeholder 2">
             <a:extLst>
               <a:ext uri="{FF2B5EF4-FFF2-40B4-BE49-F238E27FC236}">
-                <a16:creationId xmlns="" xmlns:a16="http://schemas.microsoft.com/office/drawing/2014/main" id="{D95E24B0-B97F-4932-93CD-4307D6181DCF}"/>
+                <a16:creationId xmlns:a16="http://schemas.microsoft.com/office/drawing/2014/main" id="{D95E24B0-B97F-4932-93CD-4307D6181DCF}"/>
               </a:ext>
             </a:extLst>
           </p:cNvPr>
@@ -257,7 +257,7 @@
           <a:p>
             <a:fld id="{7C0AA17F-CB06-445B-ACD3-321E84E51A80}" type="datetimeFigureOut">
               <a:rPr lang="en-US" smtClean="0"/>
-              <a:t>2/18/2023</a:t>
+              <a:t>3/5/2026</a:t>
             </a:fld>
             <a:endParaRPr lang="en-US" dirty="0"/>
           </a:p>
@@ -268,7 +268,7 @@
           <p:cNvPr id="4" name="Footer Placeholder 3">
             <a:extLst>
               <a:ext uri="{FF2B5EF4-FFF2-40B4-BE49-F238E27FC236}">
-                <a16:creationId xmlns="" xmlns:a16="http://schemas.microsoft.com/office/drawing/2014/main" id="{7FC3A0DF-A8A7-4EF4-96E5-757FFFC2A931}"/>
+                <a16:creationId xmlns:a16="http://schemas.microsoft.com/office/drawing/2014/main" id="{7FC3A0DF-A8A7-4EF4-96E5-757FFFC2A931}"/>
               </a:ext>
             </a:extLst>
           </p:cNvPr>
@@ -305,7 +305,7 @@
           <p:cNvPr id="5" name="Slide Number Placeholder 4">
             <a:extLst>
               <a:ext uri="{FF2B5EF4-FFF2-40B4-BE49-F238E27FC236}">
-                <a16:creationId xmlns="" xmlns:a16="http://schemas.microsoft.com/office/drawing/2014/main" id="{22BEC987-E8F6-4FD2-BFB2-04815BD1D2F3}"/>
+                <a16:creationId xmlns:a16="http://schemas.microsoft.com/office/drawing/2014/main" id="{22BEC987-E8F6-4FD2-BFB2-04815BD1D2F3}"/>
               </a:ext>
             </a:extLst>
           </p:cNvPr>
@@ -434,7 +434,7 @@
           <a:p>
             <a:fld id="{B06141C0-BF72-4A20-AFA7-D05563D549B7}" type="datetimeFigureOut">
               <a:rPr lang="en-US" smtClean="0"/>
-              <a:t>2/18/2023</a:t>
+              <a:t>3/5/2026</a:t>
             </a:fld>
             <a:endParaRPr lang="en-US" dirty="0"/>
           </a:p>
@@ -808,10 +808,9 @@
           </a:lstStyle>
           <a:p>
             <a:r>
-              <a:rPr lang="en-US" noProof="0" smtClean="0"/>
+              <a:rPr lang="en-US" noProof="0"/>
               <a:t>Click to edit Master title style</a:t>
             </a:r>
-            <a:endParaRPr lang="en-US" noProof="0"/>
           </a:p>
         </p:txBody>
       </p:sp>
@@ -837,38 +836,37 @@
           <a:p>
             <a:pPr lvl="0"/>
             <a:r>
-              <a:rPr lang="en-US" noProof="0" smtClean="0"/>
+              <a:rPr lang="en-US" noProof="0"/>
               <a:t>Click to edit Master text styles</a:t>
             </a:r>
           </a:p>
           <a:p>
             <a:pPr lvl="1"/>
             <a:r>
-              <a:rPr lang="en-US" noProof="0" smtClean="0"/>
+              <a:rPr lang="en-US" noProof="0"/>
               <a:t>Second level</a:t>
             </a:r>
           </a:p>
           <a:p>
             <a:pPr lvl="2"/>
             <a:r>
-              <a:rPr lang="en-US" noProof="0" smtClean="0"/>
+              <a:rPr lang="en-US" noProof="0"/>
               <a:t>Third level</a:t>
             </a:r>
           </a:p>
           <a:p>
             <a:pPr lvl="3"/>
             <a:r>
-              <a:rPr lang="en-US" noProof="0" smtClean="0"/>
+              <a:rPr lang="en-US" noProof="0"/>
               <a:t>Fourth level</a:t>
             </a:r>
           </a:p>
           <a:p>
             <a:pPr lvl="4"/>
             <a:r>
-              <a:rPr lang="en-US" noProof="0" smtClean="0"/>
+              <a:rPr lang="en-US" noProof="0"/>
               <a:t>Fifth level</a:t>
             </a:r>
-            <a:endParaRPr lang="en-US" noProof="0"/>
           </a:p>
         </p:txBody>
       </p:sp>
@@ -889,7 +887,7 @@
           <a:p>
             <a:fld id="{984B7D2A-0DF8-424B-9572-B79AEBB2D9DC}" type="datetimeFigureOut">
               <a:rPr lang="en-US" noProof="0" smtClean="0"/>
-              <a:t>2/18/2023</a:t>
+              <a:t>3/5/2026</a:t>
             </a:fld>
             <a:endParaRPr lang="en-US" noProof="0" dirty="0"/>
           </a:p>
@@ -945,10 +943,10 @@
           <p:cNvPr id="8" name="Straight Connector 7">
             <a:extLst>
               <a:ext uri="{FF2B5EF4-FFF2-40B4-BE49-F238E27FC236}">
-                <a16:creationId xmlns="" xmlns:a16="http://schemas.microsoft.com/office/drawing/2014/main" id="{328F7C25-BFB6-430F-87B6-7D0D2C7493D6}"/>
+                <a16:creationId xmlns:a16="http://schemas.microsoft.com/office/drawing/2014/main" id="{328F7C25-BFB6-430F-87B6-7D0D2C7493D6}"/>
               </a:ext>
               <a:ext uri="{C183D7F6-B498-43B3-948B-1728B52AA6E4}">
-                <adec:decorative xmlns="" xmlns:adec="http://schemas.microsoft.com/office/drawing/2017/decorative" val="1"/>
+                <adec:decorative xmlns:adec="http://schemas.microsoft.com/office/drawing/2017/decorative" val="1"/>
               </a:ext>
             </a:extLst>
           </p:cNvPr>
@@ -1193,7 +1191,7 @@
           <a:p>
             <a:pPr lvl="0"/>
             <a:r>
-              <a:rPr lang="en-US" noProof="0" smtClean="0"/>
+              <a:rPr lang="en-US" noProof="0"/>
               <a:t>Click to edit Master text styles</a:t>
             </a:r>
           </a:p>
@@ -1216,7 +1214,7 @@
           <a:p>
             <a:fld id="{984B7D2A-0DF8-424B-9572-B79AEBB2D9DC}" type="datetimeFigureOut">
               <a:rPr lang="en-US" noProof="0" smtClean="0"/>
-              <a:t>2/18/2023</a:t>
+              <a:t>3/5/2026</a:t>
             </a:fld>
             <a:endParaRPr lang="en-US" noProof="0" dirty="0"/>
           </a:p>
@@ -1354,10 +1352,9 @@
           </a:lstStyle>
           <a:p>
             <a:r>
-              <a:rPr lang="en-US" noProof="0" smtClean="0"/>
+              <a:rPr lang="en-US" noProof="0"/>
               <a:t>Click to edit Master title style</a:t>
             </a:r>
-            <a:endParaRPr lang="en-US" noProof="0"/>
           </a:p>
         </p:txBody>
       </p:sp>
@@ -1378,7 +1375,7 @@
           <a:p>
             <a:fld id="{984B7D2A-0DF8-424B-9572-B79AEBB2D9DC}" type="datetimeFigureOut">
               <a:rPr lang="en-US" noProof="0" smtClean="0"/>
-              <a:t>2/18/2023</a:t>
+              <a:t>3/5/2026</a:t>
             </a:fld>
             <a:endParaRPr lang="en-US" noProof="0" dirty="0"/>
           </a:p>
@@ -1506,7 +1503,7 @@
           <a:p>
             <a:fld id="{984B7D2A-0DF8-424B-9572-B79AEBB2D9DC}" type="datetimeFigureOut">
               <a:rPr lang="en-US" noProof="0" smtClean="0"/>
-              <a:t>2/18/2023</a:t>
+              <a:t>3/5/2026</a:t>
             </a:fld>
             <a:endParaRPr lang="en-US" noProof="0" dirty="0"/>
           </a:p>
@@ -1679,10 +1676,9 @@
           </a:lstStyle>
           <a:p>
             <a:r>
-              <a:rPr lang="en-US" noProof="0" smtClean="0"/>
+              <a:rPr lang="en-US" noProof="0"/>
               <a:t>Click to edit Master title style</a:t>
             </a:r>
-            <a:endParaRPr lang="en-US" noProof="0"/>
           </a:p>
         </p:txBody>
       </p:sp>
@@ -1798,10 +1794,9 @@
           </a:lstStyle>
           <a:p>
             <a:r>
-              <a:rPr lang="en-US" noProof="0" smtClean="0"/>
+              <a:rPr lang="en-US" noProof="0"/>
               <a:t>Click to edit Master subtitle style</a:t>
             </a:r>
-            <a:endParaRPr lang="en-US" noProof="0"/>
           </a:p>
         </p:txBody>
       </p:sp>
@@ -1827,7 +1822,7 @@
           <a:p>
             <a:fld id="{984B7D2A-0DF8-424B-9572-B79AEBB2D9DC}" type="datetimeFigureOut">
               <a:rPr lang="en-US" noProof="0" smtClean="0"/>
-              <a:t>2/18/2023</a:t>
+              <a:t>3/5/2026</a:t>
             </a:fld>
             <a:endParaRPr lang="en-US" noProof="0" dirty="0"/>
           </a:p>
@@ -1975,10 +1970,9 @@
           </a:lstStyle>
           <a:p>
             <a:r>
-              <a:rPr lang="en-US" noProof="0" smtClean="0"/>
+              <a:rPr lang="en-US" noProof="0"/>
               <a:t>Click to edit Master title style</a:t>
             </a:r>
-            <a:endParaRPr lang="en-US" noProof="0"/>
           </a:p>
         </p:txBody>
       </p:sp>
@@ -2006,38 +2000,37 @@
           <a:p>
             <a:pPr lvl="0"/>
             <a:r>
-              <a:rPr lang="en-US" noProof="0" smtClean="0"/>
+              <a:rPr lang="en-US" noProof="0"/>
               <a:t>Click to edit Master text styles</a:t>
             </a:r>
           </a:p>
           <a:p>
             <a:pPr lvl="1"/>
             <a:r>
-              <a:rPr lang="en-US" noProof="0" smtClean="0"/>
+              <a:rPr lang="en-US" noProof="0"/>
               <a:t>Second level</a:t>
             </a:r>
           </a:p>
           <a:p>
             <a:pPr lvl="2"/>
             <a:r>
-              <a:rPr lang="en-US" noProof="0" smtClean="0"/>
+              <a:rPr lang="en-US" noProof="0"/>
               <a:t>Third level</a:t>
             </a:r>
           </a:p>
           <a:p>
             <a:pPr lvl="3"/>
             <a:r>
-              <a:rPr lang="en-US" noProof="0" smtClean="0"/>
+              <a:rPr lang="en-US" noProof="0"/>
               <a:t>Fourth level</a:t>
             </a:r>
           </a:p>
           <a:p>
             <a:pPr lvl="4"/>
             <a:r>
-              <a:rPr lang="en-US" noProof="0" smtClean="0"/>
+              <a:rPr lang="en-US" noProof="0"/>
               <a:t>Fifth level</a:t>
             </a:r>
-            <a:endParaRPr lang="en-US" noProof="0"/>
           </a:p>
         </p:txBody>
       </p:sp>
@@ -2102,7 +2095,7 @@
           <a:p>
             <a:pPr lvl="0"/>
             <a:r>
-              <a:rPr lang="en-US" noProof="0" smtClean="0"/>
+              <a:rPr lang="en-US" noProof="0"/>
               <a:t>Click to edit Master text styles</a:t>
             </a:r>
           </a:p>
@@ -2125,7 +2118,7 @@
           <a:p>
             <a:fld id="{984B7D2A-0DF8-424B-9572-B79AEBB2D9DC}" type="datetimeFigureOut">
               <a:rPr lang="en-US" noProof="0" smtClean="0"/>
-              <a:t>2/18/2023</a:t>
+              <a:t>3/5/2026</a:t>
             </a:fld>
             <a:endParaRPr lang="en-US" noProof="0" dirty="0"/>
           </a:p>
@@ -2211,7 +2204,7 @@
           <p:cNvPr id="11" name="Picture 10" descr="Celestia-R1---OverlayContentHD.png">
             <a:extLst>
               <a:ext uri="{FF2B5EF4-FFF2-40B4-BE49-F238E27FC236}">
-                <a16:creationId xmlns="" xmlns:a16="http://schemas.microsoft.com/office/drawing/2014/main" id="{A1E35E73-B2F7-41DF-AAD2-58E6BE2710DD}"/>
+                <a16:creationId xmlns:a16="http://schemas.microsoft.com/office/drawing/2014/main" id="{A1E35E73-B2F7-41DF-AAD2-58E6BE2710DD}"/>
               </a:ext>
             </a:extLst>
           </p:cNvPr>
@@ -2269,10 +2262,9 @@
           </a:lstStyle>
           <a:p>
             <a:r>
-              <a:rPr lang="en-US" noProof="0" smtClean="0"/>
+              <a:rPr lang="en-US" noProof="0"/>
               <a:t>Click to edit Master title style</a:t>
             </a:r>
-            <a:endParaRPr lang="en-US" noProof="0"/>
           </a:p>
         </p:txBody>
       </p:sp>
@@ -2337,7 +2329,7 @@
           <a:p>
             <a:pPr lvl="0"/>
             <a:r>
-              <a:rPr lang="en-US" noProof="0" smtClean="0"/>
+              <a:rPr lang="en-US" noProof="0"/>
               <a:t>Click to edit Master text styles</a:t>
             </a:r>
           </a:p>
@@ -2360,7 +2352,7 @@
           <a:p>
             <a:fld id="{984B7D2A-0DF8-424B-9572-B79AEBB2D9DC}" type="datetimeFigureOut">
               <a:rPr lang="en-US" noProof="0" smtClean="0"/>
-              <a:t>2/18/2023</a:t>
+              <a:t>3/5/2026</a:t>
             </a:fld>
             <a:endParaRPr lang="en-US" noProof="0" dirty="0"/>
           </a:p>
@@ -2393,7 +2385,7 @@
           <p:cNvPr id="6" name="Text Placeholder 5">
             <a:extLst>
               <a:ext uri="{FF2B5EF4-FFF2-40B4-BE49-F238E27FC236}">
-                <a16:creationId xmlns="" xmlns:a16="http://schemas.microsoft.com/office/drawing/2014/main" id="{B47DAE59-9D63-4159-8F3E-560C31F19A89}"/>
+                <a16:creationId xmlns:a16="http://schemas.microsoft.com/office/drawing/2014/main" id="{B47DAE59-9D63-4159-8F3E-560C31F19A89}"/>
               </a:ext>
             </a:extLst>
           </p:cNvPr>
@@ -2430,7 +2422,7 @@
           <a:p>
             <a:pPr lvl="0"/>
             <a:r>
-              <a:rPr lang="en-US" noProof="0" smtClean="0"/>
+              <a:rPr lang="en-US" noProof="0"/>
               <a:t>Click to edit Master text styles</a:t>
             </a:r>
           </a:p>
@@ -2464,7 +2456,7 @@
           <p:cNvPr id="12" name="Text Placeholder 2">
             <a:extLst>
               <a:ext uri="{FF2B5EF4-FFF2-40B4-BE49-F238E27FC236}">
-                <a16:creationId xmlns="" xmlns:a16="http://schemas.microsoft.com/office/drawing/2014/main" id="{4249143D-80A5-4E4C-BBFD-F253500CE226}"/>
+                <a16:creationId xmlns:a16="http://schemas.microsoft.com/office/drawing/2014/main" id="{4249143D-80A5-4E4C-BBFD-F253500CE226}"/>
               </a:ext>
             </a:extLst>
           </p:cNvPr>
@@ -2526,7 +2518,7 @@
           <a:p>
             <a:pPr lvl="0"/>
             <a:r>
-              <a:rPr lang="en-US" noProof="0" smtClean="0"/>
+              <a:rPr lang="en-US" noProof="0"/>
               <a:t>Click to edit Master text styles</a:t>
             </a:r>
           </a:p>
@@ -2537,7 +2529,7 @@
           <p:cNvPr id="20" name="Text Placeholder 5">
             <a:extLst>
               <a:ext uri="{FF2B5EF4-FFF2-40B4-BE49-F238E27FC236}">
-                <a16:creationId xmlns="" xmlns:a16="http://schemas.microsoft.com/office/drawing/2014/main" id="{B06123F0-984B-4EF8-9945-3621C401B7AD}"/>
+                <a16:creationId xmlns:a16="http://schemas.microsoft.com/office/drawing/2014/main" id="{B06123F0-984B-4EF8-9945-3621C401B7AD}"/>
               </a:ext>
             </a:extLst>
           </p:cNvPr>
@@ -2574,7 +2566,7 @@
           <a:p>
             <a:pPr lvl="0"/>
             <a:r>
-              <a:rPr lang="en-US" noProof="0" smtClean="0"/>
+              <a:rPr lang="en-US" noProof="0"/>
               <a:t>Click to edit Master text styles</a:t>
             </a:r>
           </a:p>
@@ -2585,7 +2577,7 @@
           <p:cNvPr id="21" name="Text Placeholder 5">
             <a:extLst>
               <a:ext uri="{FF2B5EF4-FFF2-40B4-BE49-F238E27FC236}">
-                <a16:creationId xmlns="" xmlns:a16="http://schemas.microsoft.com/office/drawing/2014/main" id="{A669C074-A9BE-4B07-ACEE-3B34AAC8B9E7}"/>
+                <a16:creationId xmlns:a16="http://schemas.microsoft.com/office/drawing/2014/main" id="{A669C074-A9BE-4B07-ACEE-3B34AAC8B9E7}"/>
               </a:ext>
             </a:extLst>
           </p:cNvPr>
@@ -2622,7 +2614,7 @@
           <a:p>
             <a:pPr lvl="0"/>
             <a:r>
-              <a:rPr lang="en-US" noProof="0" smtClean="0"/>
+              <a:rPr lang="en-US" noProof="0"/>
               <a:t>Click to edit Master text styles</a:t>
             </a:r>
           </a:p>
@@ -2633,7 +2625,7 @@
           <p:cNvPr id="19" name="Text Placeholder 5">
             <a:extLst>
               <a:ext uri="{FF2B5EF4-FFF2-40B4-BE49-F238E27FC236}">
-                <a16:creationId xmlns="" xmlns:a16="http://schemas.microsoft.com/office/drawing/2014/main" id="{84A40D78-D6DD-41A7-A132-9D48DF8649A9}"/>
+                <a16:creationId xmlns:a16="http://schemas.microsoft.com/office/drawing/2014/main" id="{84A40D78-D6DD-41A7-A132-9D48DF8649A9}"/>
               </a:ext>
             </a:extLst>
           </p:cNvPr>
@@ -2670,7 +2662,7 @@
           <a:p>
             <a:pPr lvl="0"/>
             <a:r>
-              <a:rPr lang="en-US" noProof="0" smtClean="0"/>
+              <a:rPr lang="en-US" noProof="0"/>
               <a:t>Click to edit Master text styles</a:t>
             </a:r>
           </a:p>
@@ -2681,7 +2673,7 @@
           <p:cNvPr id="18" name="Text Placeholder 5">
             <a:extLst>
               <a:ext uri="{FF2B5EF4-FFF2-40B4-BE49-F238E27FC236}">
-                <a16:creationId xmlns="" xmlns:a16="http://schemas.microsoft.com/office/drawing/2014/main" id="{4A9CFAA7-850F-4C92-A9BE-56452E5CA04D}"/>
+                <a16:creationId xmlns:a16="http://schemas.microsoft.com/office/drawing/2014/main" id="{4A9CFAA7-850F-4C92-A9BE-56452E5CA04D}"/>
               </a:ext>
             </a:extLst>
           </p:cNvPr>
@@ -2718,7 +2710,7 @@
           <a:p>
             <a:pPr lvl="0"/>
             <a:r>
-              <a:rPr lang="en-US" noProof="0" smtClean="0"/>
+              <a:rPr lang="en-US" noProof="0"/>
               <a:t>Click to edit Master text styles</a:t>
             </a:r>
           </a:p>
@@ -2729,10 +2721,10 @@
           <p:cNvPr id="14" name="Straight Connector 13">
             <a:extLst>
               <a:ext uri="{FF2B5EF4-FFF2-40B4-BE49-F238E27FC236}">
-                <a16:creationId xmlns="" xmlns:a16="http://schemas.microsoft.com/office/drawing/2014/main" id="{CC5A0CF1-9FE7-4149-97DC-5221639144C8}"/>
+                <a16:creationId xmlns:a16="http://schemas.microsoft.com/office/drawing/2014/main" id="{CC5A0CF1-9FE7-4149-97DC-5221639144C8}"/>
               </a:ext>
               <a:ext uri="{C183D7F6-B498-43B3-948B-1728B52AA6E4}">
-                <adec:decorative xmlns="" xmlns:adec="http://schemas.microsoft.com/office/drawing/2017/decorative" val="1"/>
+                <adec:decorative xmlns:adec="http://schemas.microsoft.com/office/drawing/2017/decorative" val="1"/>
               </a:ext>
             </a:extLst>
           </p:cNvPr>
@@ -2858,10 +2850,9 @@
           </a:lstStyle>
           <a:p>
             <a:r>
-              <a:rPr lang="en-US" noProof="0" smtClean="0"/>
+              <a:rPr lang="en-US" noProof="0"/>
               <a:t>Click to edit Master title style</a:t>
             </a:r>
-            <a:endParaRPr lang="en-US" noProof="0"/>
           </a:p>
         </p:txBody>
       </p:sp>
@@ -2951,7 +2942,7 @@
           </a:lstStyle>
           <a:p>
             <a:r>
-              <a:rPr lang="en-US" noProof="0" smtClean="0"/>
+              <a:rPr lang="en-US" noProof="0"/>
               <a:t>Click icon to add picture</a:t>
             </a:r>
             <a:endParaRPr lang="en-US" noProof="0" dirty="0"/>
@@ -3019,7 +3010,7 @@
           <a:p>
             <a:pPr lvl="0"/>
             <a:r>
-              <a:rPr lang="en-US" noProof="0" smtClean="0"/>
+              <a:rPr lang="en-US" noProof="0"/>
               <a:t>Click to edit Master text styles</a:t>
             </a:r>
           </a:p>
@@ -3042,7 +3033,7 @@
           <a:p>
             <a:fld id="{984B7D2A-0DF8-424B-9572-B79AEBB2D9DC}" type="datetimeFigureOut">
               <a:rPr lang="en-US" noProof="0" smtClean="0"/>
-              <a:t>2/18/2023</a:t>
+              <a:t>3/5/2026</a:t>
             </a:fld>
             <a:endParaRPr lang="en-US" noProof="0" dirty="0"/>
           </a:p>
@@ -3180,10 +3171,9 @@
           </a:lstStyle>
           <a:p>
             <a:r>
-              <a:rPr lang="en-US" noProof="0" smtClean="0"/>
+              <a:rPr lang="en-US" noProof="0"/>
               <a:t>Click to edit Master title style</a:t>
             </a:r>
-            <a:endParaRPr lang="en-US" noProof="0"/>
           </a:p>
         </p:txBody>
       </p:sp>
@@ -3273,7 +3263,7 @@
           </a:lstStyle>
           <a:p>
             <a:r>
-              <a:rPr lang="en-US" noProof="0" smtClean="0"/>
+              <a:rPr lang="en-US" noProof="0"/>
               <a:t>Click icon to add picture</a:t>
             </a:r>
             <a:endParaRPr lang="en-US" noProof="0" dirty="0"/>
@@ -3341,7 +3331,7 @@
           <a:p>
             <a:pPr lvl="0"/>
             <a:r>
-              <a:rPr lang="en-US" noProof="0" smtClean="0"/>
+              <a:rPr lang="en-US" noProof="0"/>
               <a:t>Click to edit Master text styles</a:t>
             </a:r>
           </a:p>
@@ -3364,7 +3354,7 @@
           <a:p>
             <a:fld id="{984B7D2A-0DF8-424B-9572-B79AEBB2D9DC}" type="datetimeFigureOut">
               <a:rPr lang="en-US" noProof="0" smtClean="0"/>
-              <a:t>2/18/2023</a:t>
+              <a:t>3/5/2026</a:t>
             </a:fld>
             <a:endParaRPr lang="en-US" noProof="0" dirty="0"/>
           </a:p>
@@ -3794,7 +3784,7 @@
           <a:p>
             <a:pPr lvl="0"/>
             <a:r>
-              <a:rPr lang="en-US" noProof="0" smtClean="0"/>
+              <a:rPr lang="en-US" noProof="0"/>
               <a:t>Click to edit Master text styles</a:t>
             </a:r>
           </a:p>
@@ -3805,7 +3795,7 @@
           <p:cNvPr id="7" name="Rectangle: Rounded Corners 6">
             <a:extLst>
               <a:ext uri="{FF2B5EF4-FFF2-40B4-BE49-F238E27FC236}">
-                <a16:creationId xmlns="" xmlns:a16="http://schemas.microsoft.com/office/drawing/2014/main" id="{1AD7857E-8E0E-4AC1-ABDC-E42462C788DE}"/>
+                <a16:creationId xmlns:a16="http://schemas.microsoft.com/office/drawing/2014/main" id="{1AD7857E-8E0E-4AC1-ABDC-E42462C788DE}"/>
               </a:ext>
             </a:extLst>
           </p:cNvPr>
@@ -3969,7 +3959,7 @@
           <a:p>
             <a:pPr lvl="0"/>
             <a:r>
-              <a:rPr lang="en-US" noProof="0" smtClean="0"/>
+              <a:rPr lang="en-US" noProof="0"/>
               <a:t>Click to edit Master text styles</a:t>
             </a:r>
           </a:p>
@@ -3992,7 +3982,7 @@
           <a:p>
             <a:fld id="{984B7D2A-0DF8-424B-9572-B79AEBB2D9DC}" type="datetimeFigureOut">
               <a:rPr lang="en-US" noProof="0" smtClean="0"/>
-              <a:t>2/18/2023</a:t>
+              <a:t>3/5/2026</a:t>
             </a:fld>
             <a:endParaRPr lang="en-US" noProof="0" dirty="0"/>
           </a:p>
@@ -4075,7 +4065,7 @@
           <p:cNvPr id="11" name="Picture 10" descr="Celestia-R1---OverlayContentHD.png">
             <a:extLst>
               <a:ext uri="{FF2B5EF4-FFF2-40B4-BE49-F238E27FC236}">
-                <a16:creationId xmlns="" xmlns:a16="http://schemas.microsoft.com/office/drawing/2014/main" id="{A1E35E73-B2F7-41DF-AAD2-58E6BE2710DD}"/>
+                <a16:creationId xmlns:a16="http://schemas.microsoft.com/office/drawing/2014/main" id="{A1E35E73-B2F7-41DF-AAD2-58E6BE2710DD}"/>
               </a:ext>
             </a:extLst>
           </p:cNvPr>
@@ -4133,10 +4123,9 @@
           </a:lstStyle>
           <a:p>
             <a:r>
-              <a:rPr lang="en-US" noProof="0" smtClean="0"/>
+              <a:rPr lang="en-US" noProof="0"/>
               <a:t>Click to edit Master title style</a:t>
             </a:r>
-            <a:endParaRPr lang="en-US" noProof="0"/>
           </a:p>
         </p:txBody>
       </p:sp>
@@ -4201,7 +4190,7 @@
           <a:p>
             <a:pPr lvl="0"/>
             <a:r>
-              <a:rPr lang="en-US" noProof="0" smtClean="0"/>
+              <a:rPr lang="en-US" noProof="0"/>
               <a:t>Click to edit Master text styles</a:t>
             </a:r>
           </a:p>
@@ -4250,38 +4239,37 @@
           <a:p>
             <a:pPr lvl="0"/>
             <a:r>
-              <a:rPr lang="en-US" noProof="0" dirty="0" smtClean="0"/>
+              <a:rPr lang="en-US" noProof="0" dirty="0"/>
               <a:t>Click to edit Master text styles</a:t>
             </a:r>
           </a:p>
           <a:p>
             <a:pPr lvl="1"/>
             <a:r>
-              <a:rPr lang="en-US" noProof="0" dirty="0" smtClean="0"/>
+              <a:rPr lang="en-US" noProof="0" dirty="0"/>
               <a:t>Second level</a:t>
             </a:r>
           </a:p>
           <a:p>
             <a:pPr lvl="2"/>
             <a:r>
-              <a:rPr lang="en-US" noProof="0" dirty="0" smtClean="0"/>
+              <a:rPr lang="en-US" noProof="0" dirty="0"/>
               <a:t>Third level</a:t>
             </a:r>
           </a:p>
           <a:p>
             <a:pPr lvl="3"/>
             <a:r>
-              <a:rPr lang="en-US" noProof="0" dirty="0" smtClean="0"/>
+              <a:rPr lang="en-US" noProof="0" dirty="0"/>
               <a:t>Fourth level</a:t>
             </a:r>
           </a:p>
           <a:p>
             <a:pPr lvl="4"/>
             <a:r>
-              <a:rPr lang="en-US" noProof="0" dirty="0" smtClean="0"/>
+              <a:rPr lang="en-US" noProof="0" dirty="0"/>
               <a:t>Fifth level</a:t>
             </a:r>
-            <a:endParaRPr lang="en-US" noProof="0" dirty="0"/>
           </a:p>
         </p:txBody>
       </p:sp>
@@ -4346,7 +4334,7 @@
           <a:p>
             <a:pPr lvl="0"/>
             <a:r>
-              <a:rPr lang="en-US" noProof="0" smtClean="0"/>
+              <a:rPr lang="en-US" noProof="0"/>
               <a:t>Click to edit Master text styles</a:t>
             </a:r>
           </a:p>
@@ -4395,38 +4383,37 @@
           <a:p>
             <a:pPr lvl="0"/>
             <a:r>
-              <a:rPr lang="en-US" noProof="0" smtClean="0"/>
+              <a:rPr lang="en-US" noProof="0"/>
               <a:t>Click to edit Master text styles</a:t>
             </a:r>
           </a:p>
           <a:p>
             <a:pPr lvl="1"/>
             <a:r>
-              <a:rPr lang="en-US" noProof="0" smtClean="0"/>
+              <a:rPr lang="en-US" noProof="0"/>
               <a:t>Second level</a:t>
             </a:r>
           </a:p>
           <a:p>
             <a:pPr lvl="2"/>
             <a:r>
-              <a:rPr lang="en-US" noProof="0" smtClean="0"/>
+              <a:rPr lang="en-US" noProof="0"/>
               <a:t>Third level</a:t>
             </a:r>
           </a:p>
           <a:p>
             <a:pPr lvl="3"/>
             <a:r>
-              <a:rPr lang="en-US" noProof="0" smtClean="0"/>
+              <a:rPr lang="en-US" noProof="0"/>
               <a:t>Fourth level</a:t>
             </a:r>
           </a:p>
           <a:p>
             <a:pPr lvl="4"/>
             <a:r>
-              <a:rPr lang="en-US" noProof="0" smtClean="0"/>
+              <a:rPr lang="en-US" noProof="0"/>
               <a:t>Fifth level</a:t>
             </a:r>
-            <a:endParaRPr lang="en-US" noProof="0"/>
           </a:p>
         </p:txBody>
       </p:sp>
@@ -4447,7 +4434,7 @@
           <a:p>
             <a:fld id="{984B7D2A-0DF8-424B-9572-B79AEBB2D9DC}" type="datetimeFigureOut">
               <a:rPr lang="en-US" noProof="0" smtClean="0"/>
-              <a:t>2/18/2023</a:t>
+              <a:t>3/5/2026</a:t>
             </a:fld>
             <a:endParaRPr lang="en-US" noProof="0" dirty="0"/>
           </a:p>
@@ -4503,10 +4490,10 @@
           <p:cNvPr id="12" name="Straight Connector 11">
             <a:extLst>
               <a:ext uri="{FF2B5EF4-FFF2-40B4-BE49-F238E27FC236}">
-                <a16:creationId xmlns="" xmlns:a16="http://schemas.microsoft.com/office/drawing/2014/main" id="{8031B0A9-3E16-4C5B-A6CE-045BCB91A008}"/>
+                <a16:creationId xmlns:a16="http://schemas.microsoft.com/office/drawing/2014/main" id="{8031B0A9-3E16-4C5B-A6CE-045BCB91A008}"/>
               </a:ext>
               <a:ext uri="{C183D7F6-B498-43B3-948B-1728B52AA6E4}">
-                <adec:decorative xmlns="" xmlns:adec="http://schemas.microsoft.com/office/drawing/2017/decorative" val="1"/>
+                <adec:decorative xmlns:adec="http://schemas.microsoft.com/office/drawing/2017/decorative" val="1"/>
               </a:ext>
             </a:extLst>
           </p:cNvPr>
@@ -4632,10 +4619,9 @@
           </a:lstStyle>
           <a:p>
             <a:r>
-              <a:rPr lang="en-US" noProof="0" smtClean="0"/>
+              <a:rPr lang="en-US" noProof="0"/>
               <a:t>Click to edit Master title style</a:t>
             </a:r>
-            <a:endParaRPr lang="en-US" noProof="0"/>
           </a:p>
         </p:txBody>
       </p:sp>
@@ -4644,7 +4630,7 @@
           <p:cNvPr id="9" name="Rectangle: Rounded Corners 8">
             <a:extLst>
               <a:ext uri="{FF2B5EF4-FFF2-40B4-BE49-F238E27FC236}">
-                <a16:creationId xmlns="" xmlns:a16="http://schemas.microsoft.com/office/drawing/2014/main" id="{E44449DE-635B-4B23-9B8B-C95A5B8764DB}"/>
+                <a16:creationId xmlns:a16="http://schemas.microsoft.com/office/drawing/2014/main" id="{E44449DE-635B-4B23-9B8B-C95A5B8764DB}"/>
               </a:ext>
             </a:extLst>
           </p:cNvPr>
@@ -4728,38 +4714,37 @@
           <a:p>
             <a:pPr lvl="0"/>
             <a:r>
-              <a:rPr lang="en-US" noProof="0" smtClean="0"/>
+              <a:rPr lang="en-US" noProof="0"/>
               <a:t>Click to edit Master text styles</a:t>
             </a:r>
           </a:p>
           <a:p>
             <a:pPr lvl="1"/>
             <a:r>
-              <a:rPr lang="en-US" noProof="0" smtClean="0"/>
+              <a:rPr lang="en-US" noProof="0"/>
               <a:t>Second level</a:t>
             </a:r>
           </a:p>
           <a:p>
             <a:pPr lvl="2"/>
             <a:r>
-              <a:rPr lang="en-US" noProof="0" smtClean="0"/>
+              <a:rPr lang="en-US" noProof="0"/>
               <a:t>Third level</a:t>
             </a:r>
           </a:p>
           <a:p>
             <a:pPr lvl="3"/>
             <a:r>
-              <a:rPr lang="en-US" noProof="0" smtClean="0"/>
+              <a:rPr lang="en-US" noProof="0"/>
               <a:t>Fourth level</a:t>
             </a:r>
           </a:p>
           <a:p>
             <a:pPr lvl="4"/>
             <a:r>
-              <a:rPr lang="en-US" noProof="0" smtClean="0"/>
+              <a:rPr lang="en-US" noProof="0"/>
               <a:t>Fifth level</a:t>
             </a:r>
-            <a:endParaRPr lang="en-US" noProof="0"/>
           </a:p>
         </p:txBody>
       </p:sp>
@@ -4796,38 +4781,37 @@
           <a:p>
             <a:pPr lvl="0"/>
             <a:r>
-              <a:rPr lang="en-US" noProof="0" smtClean="0"/>
+              <a:rPr lang="en-US" noProof="0"/>
               <a:t>Click to edit Master text styles</a:t>
             </a:r>
           </a:p>
           <a:p>
             <a:pPr lvl="1"/>
             <a:r>
-              <a:rPr lang="en-US" noProof="0" smtClean="0"/>
+              <a:rPr lang="en-US" noProof="0"/>
               <a:t>Second level</a:t>
             </a:r>
           </a:p>
           <a:p>
             <a:pPr lvl="2"/>
             <a:r>
-              <a:rPr lang="en-US" noProof="0" smtClean="0"/>
+              <a:rPr lang="en-US" noProof="0"/>
               <a:t>Third level</a:t>
             </a:r>
           </a:p>
           <a:p>
             <a:pPr lvl="3"/>
             <a:r>
-              <a:rPr lang="en-US" noProof="0" smtClean="0"/>
+              <a:rPr lang="en-US" noProof="0"/>
               <a:t>Fourth level</a:t>
             </a:r>
           </a:p>
           <a:p>
             <a:pPr lvl="4"/>
             <a:r>
-              <a:rPr lang="en-US" noProof="0" smtClean="0"/>
+              <a:rPr lang="en-US" noProof="0"/>
               <a:t>Fifth level</a:t>
             </a:r>
-            <a:endParaRPr lang="en-US" noProof="0"/>
           </a:p>
         </p:txBody>
       </p:sp>
@@ -4848,7 +4832,7 @@
           <a:p>
             <a:fld id="{984B7D2A-0DF8-424B-9572-B79AEBB2D9DC}" type="datetimeFigureOut">
               <a:rPr lang="en-US" noProof="0" smtClean="0"/>
-              <a:t>2/18/2023</a:t>
+              <a:t>3/5/2026</a:t>
             </a:fld>
             <a:endParaRPr lang="en-US" noProof="0" dirty="0"/>
           </a:p>
@@ -4904,10 +4888,10 @@
           <p:cNvPr id="10" name="Straight Connector 9">
             <a:extLst>
               <a:ext uri="{FF2B5EF4-FFF2-40B4-BE49-F238E27FC236}">
-                <a16:creationId xmlns="" xmlns:a16="http://schemas.microsoft.com/office/drawing/2014/main" id="{E8539E0A-8009-4A6E-A7A1-5AEFA52206C3}"/>
+                <a16:creationId xmlns:a16="http://schemas.microsoft.com/office/drawing/2014/main" id="{E8539E0A-8009-4A6E-A7A1-5AEFA52206C3}"/>
               </a:ext>
               <a:ext uri="{C183D7F6-B498-43B3-948B-1728B52AA6E4}">
-                <adec:decorative xmlns="" xmlns:adec="http://schemas.microsoft.com/office/drawing/2017/decorative" val="1"/>
+                <adec:decorative xmlns:adec="http://schemas.microsoft.com/office/drawing/2017/decorative" val="1"/>
               </a:ext>
             </a:extLst>
           </p:cNvPr>
@@ -5036,10 +5020,9 @@
           <a:lstStyle/>
           <a:p>
             <a:r>
-              <a:rPr lang="en-US" noProof="0" smtClean="0"/>
+              <a:rPr lang="en-US" noProof="0"/>
               <a:t>Click to edit Master title style</a:t>
             </a:r>
-            <a:endParaRPr lang="en-US" noProof="0"/>
           </a:p>
         </p:txBody>
       </p:sp>
@@ -5070,38 +5053,37 @@
           <a:p>
             <a:pPr lvl="0"/>
             <a:r>
-              <a:rPr lang="en-US" noProof="0" dirty="0" smtClean="0"/>
+              <a:rPr lang="en-US" noProof="0" dirty="0"/>
               <a:t>Click to edit Master text styles</a:t>
             </a:r>
           </a:p>
           <a:p>
             <a:pPr lvl="1"/>
             <a:r>
-              <a:rPr lang="en-US" noProof="0" dirty="0" smtClean="0"/>
+              <a:rPr lang="en-US" noProof="0" dirty="0"/>
               <a:t>Second level</a:t>
             </a:r>
           </a:p>
           <a:p>
             <a:pPr lvl="2"/>
             <a:r>
-              <a:rPr lang="en-US" noProof="0" dirty="0" smtClean="0"/>
+              <a:rPr lang="en-US" noProof="0" dirty="0"/>
               <a:t>Third level</a:t>
             </a:r>
           </a:p>
           <a:p>
             <a:pPr lvl="3"/>
             <a:r>
-              <a:rPr lang="en-US" noProof="0" dirty="0" smtClean="0"/>
+              <a:rPr lang="en-US" noProof="0" dirty="0"/>
               <a:t>Fourth level</a:t>
             </a:r>
           </a:p>
           <a:p>
             <a:pPr lvl="4"/>
             <a:r>
-              <a:rPr lang="en-US" noProof="0" dirty="0" smtClean="0"/>
+              <a:rPr lang="en-US" noProof="0" dirty="0"/>
               <a:t>Fifth level</a:t>
             </a:r>
-            <a:endParaRPr lang="en-US" noProof="0" dirty="0"/>
           </a:p>
         </p:txBody>
       </p:sp>
@@ -5140,7 +5122,7 @@
           <a:p>
             <a:fld id="{984B7D2A-0DF8-424B-9572-B79AEBB2D9DC}" type="datetimeFigureOut">
               <a:rPr lang="en-US" noProof="0" smtClean="0"/>
-              <a:t>2/18/2023</a:t>
+              <a:t>3/5/2026</a:t>
             </a:fld>
             <a:endParaRPr lang="en-US" noProof="0" dirty="0"/>
           </a:p>
@@ -5656,7 +5638,7 @@
           <p:cNvPr id="2" name="Title 1">
             <a:extLst>
               <a:ext uri="{FF2B5EF4-FFF2-40B4-BE49-F238E27FC236}">
-                <a16:creationId xmlns="" xmlns:a16="http://schemas.microsoft.com/office/drawing/2014/main" id="{7635B398-1E7F-44AD-8356-8345134C958C}"/>
+                <a16:creationId xmlns:a16="http://schemas.microsoft.com/office/drawing/2014/main" id="{7635B398-1E7F-44AD-8356-8345134C958C}"/>
               </a:ext>
             </a:extLst>
           </p:cNvPr>
@@ -5675,19 +5657,19 @@
           <a:lstStyle/>
           <a:p>
             <a:r>
-              <a:rPr lang="en-US" dirty="0" smtClean="0"/>
+              <a:rPr lang="en-US" dirty="0"/>
               <a:t>An introduction to </a:t>
             </a:r>
             <a:r>
-              <a:rPr lang="en-US" dirty="0" err="1" smtClean="0"/>
+              <a:rPr lang="en-US" dirty="0" err="1"/>
               <a:t>openstudio</a:t>
             </a:r>
             <a:r>
-              <a:rPr lang="en-US" dirty="0" smtClean="0"/>
+              <a:rPr lang="en-US" dirty="0"/>
               <a:t> and </a:t>
             </a:r>
             <a:r>
-              <a:rPr lang="en-US" dirty="0" err="1" smtClean="0"/>
+              <a:rPr lang="en-US" dirty="0" err="1"/>
               <a:t>energyplus</a:t>
             </a:r>
             <a:endParaRPr lang="en-US" dirty="0"/>
@@ -5699,7 +5681,7 @@
           <p:cNvPr id="3" name="Subtitle 2">
             <a:extLst>
               <a:ext uri="{FF2B5EF4-FFF2-40B4-BE49-F238E27FC236}">
-                <a16:creationId xmlns="" xmlns:a16="http://schemas.microsoft.com/office/drawing/2014/main" id="{852A3D91-AB3F-4EDF-B87E-FDDF6C5DC4CF}"/>
+                <a16:creationId xmlns:a16="http://schemas.microsoft.com/office/drawing/2014/main" id="{852A3D91-AB3F-4EDF-B87E-FDDF6C5DC4CF}"/>
               </a:ext>
             </a:extLst>
           </p:cNvPr>
@@ -5716,10 +5698,9 @@
           <a:lstStyle/>
           <a:p>
             <a:r>
-              <a:rPr lang="en-US" dirty="0" smtClean="0"/>
+              <a:rPr lang="en-US" dirty="0"/>
               <a:t>Edward Vuong</a:t>
             </a:r>
-            <a:endParaRPr lang="en-US" dirty="0"/>
           </a:p>
         </p:txBody>
       </p:sp>
@@ -5733,13 +5714,6 @@
   <p:clrMapOvr>
     <a:masterClrMapping/>
   </p:clrMapOvr>
-  <p:timing>
-    <p:tnLst>
-      <p:par>
-        <p:cTn id="1" dur="indefinite" restart="never" nodeType="tmRoot"/>
-      </p:par>
-    </p:tnLst>
-  </p:timing>
 </p:sld>
 </file>
 
@@ -5805,68 +5779,54 @@
           <a:lstStyle/>
           <a:p>
             <a:r>
-              <a:rPr lang="en-CA" dirty="0" smtClean="0"/>
+              <a:rPr lang="en-CA" dirty="0"/>
               <a:t>Volume of air with a single average temperature</a:t>
             </a:r>
           </a:p>
           <a:p>
             <a:r>
-              <a:rPr lang="en-CA" dirty="0" smtClean="0"/>
-              <a:t>The </a:t>
-            </a:r>
-            <a:r>
-              <a:rPr lang="en-CA" dirty="0" smtClean="0"/>
-              <a:t>building we’re in right now</a:t>
-            </a:r>
-          </a:p>
-          <a:p>
-            <a:r>
-              <a:rPr lang="en-CA" dirty="0" smtClean="0"/>
+              <a:rPr lang="en-CA" dirty="0"/>
+              <a:t>The building we’re in right now</a:t>
+            </a:r>
+          </a:p>
+          <a:p>
+            <a:r>
+              <a:rPr lang="en-CA" dirty="0"/>
               <a:t>Approximate as a box with air</a:t>
             </a:r>
           </a:p>
           <a:p>
             <a:pPr lvl="1"/>
             <a:r>
-              <a:rPr lang="en-CA" dirty="0" smtClean="0"/>
+              <a:rPr lang="en-CA" dirty="0"/>
               <a:t>Avoid temperature variations</a:t>
             </a:r>
           </a:p>
           <a:p>
             <a:pPr lvl="1"/>
             <a:r>
-              <a:rPr lang="en-CA" dirty="0" smtClean="0"/>
+              <a:rPr lang="en-CA" dirty="0"/>
               <a:t>Entire building – too coarse</a:t>
             </a:r>
           </a:p>
           <a:p>
             <a:r>
-              <a:rPr lang="en-CA" dirty="0" smtClean="0"/>
+              <a:rPr lang="en-CA" dirty="0"/>
               <a:t>Rule of thumbs</a:t>
             </a:r>
           </a:p>
           <a:p>
             <a:pPr lvl="1"/>
             <a:r>
-              <a:rPr lang="en-CA" dirty="0" smtClean="0"/>
+              <a:rPr lang="en-CA" dirty="0"/>
               <a:t>Similar activity/occupancy, HVAC, orientation/location (windows)</a:t>
             </a:r>
-            <a:endParaRPr lang="en-CA" dirty="0"/>
-          </a:p>
-          <a:p>
-            <a:r>
-              <a:rPr lang="en-CA" dirty="0"/>
-              <a:t>N</a:t>
-            </a:r>
-            <a:r>
-              <a:rPr lang="en-CA" dirty="0" smtClean="0"/>
-              <a:t>o </a:t>
-            </a:r>
-            <a:r>
-              <a:rPr lang="en-CA" dirty="0" smtClean="0"/>
-              <a:t>single right answer</a:t>
-            </a:r>
-            <a:endParaRPr lang="en-CA" dirty="0"/>
+          </a:p>
+          <a:p>
+            <a:r>
+              <a:rPr lang="en-CA" dirty="0"/>
+              <a:t>No single right answer</a:t>
+            </a:r>
           </a:p>
         </p:txBody>
       </p:sp>
@@ -5916,12 +5876,8 @@
           <a:lstStyle/>
           <a:p>
             <a:r>
-              <a:rPr lang="en-CA" sz="1200" dirty="0" smtClean="0"/>
-              <a:t>Figure 2. Ft. Monmouth floor plan (GARD </a:t>
-            </a:r>
-            <a:r>
               <a:rPr lang="en-CA" sz="1200" dirty="0"/>
-              <a:t>Analytics and University of Illinois, 2003)</a:t>
+              <a:t>Figure 2. Ft. Monmouth floor plan (GARD Analytics and University of Illinois, 2003)</a:t>
             </a:r>
           </a:p>
         </p:txBody>
@@ -5936,13 +5892,6 @@
   <p:clrMapOvr>
     <a:masterClrMapping/>
   </p:clrMapOvr>
-  <p:timing>
-    <p:tnLst>
-      <p:par>
-        <p:cTn id="1" dur="indefinite" restart="never" nodeType="tmRoot"/>
-      </p:par>
-    </p:tnLst>
-  </p:timing>
 </p:sld>
 </file>
 
@@ -6053,12 +6002,8 @@
           <a:lstStyle/>
           <a:p>
             <a:r>
-              <a:rPr lang="en-CA" sz="1200" dirty="0" smtClean="0"/>
-              <a:t>Figure 3. Ft. Monmouth floor plan zoned (GARD </a:t>
-            </a:r>
-            <a:r>
               <a:rPr lang="en-CA" sz="1200" dirty="0"/>
-              <a:t>Analytics and University of Illinois, 2003)</a:t>
+              <a:t>Figure 3. Ft. Monmouth floor plan zoned (GARD Analytics and University of Illinois, 2003)</a:t>
             </a:r>
           </a:p>
         </p:txBody>
@@ -6073,13 +6018,6 @@
   <p:clrMapOvr>
     <a:masterClrMapping/>
   </p:clrMapOvr>
-  <p:timing>
-    <p:tnLst>
-      <p:par>
-        <p:cTn id="1" dur="indefinite" restart="never" nodeType="tmRoot"/>
-      </p:par>
-    </p:tnLst>
-  </p:timing>
 </p:sld>
 </file>
 
@@ -6153,16 +6091,8 @@
               <a:buNone/>
             </a:pPr>
             <a:r>
-              <a:rPr lang="en-CA" dirty="0" smtClean="0"/>
-              <a:t>Differences: Cooling </a:t>
-            </a:r>
-            <a:r>
-              <a:rPr lang="en-CA" dirty="0"/>
-              <a:t>load &lt; </a:t>
-            </a:r>
-            <a:r>
-              <a:rPr lang="en-CA" dirty="0" smtClean="0"/>
-              <a:t>10%, Heating load &lt; 1%</a:t>
+              <a:rPr lang="en-CA" dirty="0"/>
+              <a:t>Differences: Cooling load &lt; 10%, Heating load &lt; 1%</a:t>
             </a:r>
           </a:p>
           <a:p>
@@ -6170,10 +6100,9 @@
               <a:buNone/>
             </a:pPr>
             <a:r>
-              <a:rPr lang="en-CA" dirty="0" smtClean="0"/>
+              <a:rPr lang="en-CA" dirty="0"/>
               <a:t>Is this acceptable?</a:t>
             </a:r>
-            <a:endParaRPr lang="en-CA" dirty="0"/>
           </a:p>
         </p:txBody>
       </p:sp>
@@ -6247,12 +6176,8 @@
           <a:lstStyle/>
           <a:p>
             <a:r>
-              <a:rPr lang="en-CA" sz="1200" dirty="0" smtClean="0"/>
-              <a:t>Figure 4a. Ft. Monmouth zone cooling load and Figure 4b Ft. Monmouth 1 &amp; 6 zone cooling load  (GARD </a:t>
-            </a:r>
-            <a:r>
               <a:rPr lang="en-CA" sz="1200" dirty="0"/>
-              <a:t>Analytics and University of Illinois, 2003)</a:t>
+              <a:t>Figure 4a. Ft. Monmouth zone cooling load and Figure 4b Ft. Monmouth 1 &amp; 6 zone cooling load  (GARD Analytics and University of Illinois, 2003)</a:t>
             </a:r>
           </a:p>
         </p:txBody>
@@ -6267,13 +6192,6 @@
   <p:clrMapOvr>
     <a:masterClrMapping/>
   </p:clrMapOvr>
-  <p:timing>
-    <p:tnLst>
-      <p:par>
-        <p:cTn id="1" dur="indefinite" restart="never" nodeType="tmRoot"/>
-      </p:par>
-    </p:tnLst>
-  </p:timing>
 </p:sld>
 </file>
 
@@ -6339,120 +6257,106 @@
           <a:lstStyle/>
           <a:p>
             <a:r>
-              <a:rPr lang="en-CA" dirty="0" smtClean="0"/>
+              <a:rPr lang="en-CA" dirty="0"/>
               <a:t>Timestep</a:t>
             </a:r>
-            <a:endParaRPr lang="en-CA" dirty="0" smtClean="0"/>
           </a:p>
           <a:p>
             <a:pPr lvl="1"/>
             <a:r>
-              <a:rPr lang="en-CA" dirty="0" smtClean="0"/>
+              <a:rPr lang="en-CA" dirty="0"/>
               <a:t>Discrete time intervals</a:t>
             </a:r>
           </a:p>
           <a:p>
             <a:pPr lvl="1"/>
             <a:r>
-              <a:rPr lang="en-CA" dirty="0" smtClean="0"/>
+              <a:rPr lang="en-CA" dirty="0"/>
               <a:t>“Usually” 10 - 15 min</a:t>
             </a:r>
           </a:p>
           <a:p>
             <a:r>
-              <a:rPr lang="en-CA" dirty="0" smtClean="0"/>
+              <a:rPr lang="en-CA" dirty="0"/>
               <a:t>Shadow calculation</a:t>
             </a:r>
           </a:p>
           <a:p>
             <a:pPr lvl="1"/>
             <a:r>
-              <a:rPr lang="en-CA" dirty="0" smtClean="0"/>
-              <a:t>Shadows cast by building, </a:t>
-            </a:r>
-            <a:r>
-              <a:rPr lang="en-CA" dirty="0" smtClean="0"/>
-              <a:t>shading devices</a:t>
-            </a:r>
-            <a:endParaRPr lang="en-CA" dirty="0" smtClean="0"/>
+              <a:rPr lang="en-CA" dirty="0"/>
+              <a:t>Shadows cast by building, shading devices</a:t>
+            </a:r>
           </a:p>
           <a:p>
             <a:pPr lvl="1"/>
             <a:r>
-              <a:rPr lang="en-CA" dirty="0" smtClean="0"/>
+              <a:rPr lang="en-CA" dirty="0"/>
               <a:t>OS default: 20 day average (daylighting modelling – more frequent)</a:t>
             </a:r>
           </a:p>
           <a:p>
             <a:r>
-              <a:rPr lang="en-CA" dirty="0" smtClean="0"/>
+              <a:rPr lang="en-CA" dirty="0"/>
               <a:t>Ground temperature</a:t>
             </a:r>
           </a:p>
           <a:p>
             <a:pPr lvl="1"/>
             <a:r>
-              <a:rPr lang="en-CA" dirty="0" smtClean="0"/>
+              <a:rPr lang="en-CA" dirty="0"/>
               <a:t>Gradual change</a:t>
             </a:r>
           </a:p>
           <a:p>
             <a:pPr lvl="1"/>
             <a:r>
-              <a:rPr lang="en-CA" dirty="0" smtClean="0"/>
-              <a:t>Can be s</a:t>
-            </a:r>
-            <a:r>
-              <a:rPr lang="en-CA" dirty="0" smtClean="0"/>
-              <a:t>ignificant </a:t>
-            </a:r>
-            <a:r>
-              <a:rPr lang="en-CA" dirty="0" smtClean="0"/>
-              <a:t>for residential; less for commercial</a:t>
-            </a:r>
-          </a:p>
-          <a:p>
-            <a:r>
-              <a:rPr lang="en-CA" dirty="0" err="1" smtClean="0"/>
+              <a:rPr lang="en-CA" dirty="0"/>
+              <a:t>Can be significant for residential; less for commercial</a:t>
+            </a:r>
+          </a:p>
+          <a:p>
+            <a:r>
+              <a:rPr lang="en-CA" dirty="0" err="1"/>
               <a:t>Autosizing</a:t>
             </a:r>
             <a:r>
-              <a:rPr lang="en-CA" dirty="0" smtClean="0"/>
+              <a:rPr lang="en-CA" dirty="0"/>
               <a:t> </a:t>
             </a:r>
           </a:p>
           <a:p>
             <a:pPr lvl="1"/>
             <a:r>
-              <a:rPr lang="en-CA" dirty="0" smtClean="0"/>
+              <a:rPr lang="en-CA" dirty="0"/>
               <a:t>Eqp capacity, flowrate, load, fan power</a:t>
             </a:r>
           </a:p>
           <a:p>
             <a:pPr lvl="1"/>
             <a:r>
-              <a:rPr lang="en-CA" dirty="0" smtClean="0"/>
+              <a:rPr lang="en-CA" dirty="0"/>
               <a:t>Sizing factor</a:t>
             </a:r>
           </a:p>
           <a:p>
             <a:pPr lvl="1"/>
             <a:r>
-              <a:rPr lang="en-CA" dirty="0" smtClean="0"/>
+              <a:rPr lang="en-CA" dirty="0"/>
               <a:t>Sequential &amp; uniform loading</a:t>
             </a:r>
           </a:p>
           <a:p>
             <a:pPr lvl="1"/>
             <a:r>
-              <a:rPr lang="en-CA" dirty="0" smtClean="0"/>
+              <a:rPr lang="en-CA" dirty="0"/>
               <a:t>Design day</a:t>
             </a:r>
           </a:p>
           <a:p>
             <a:pPr lvl="2"/>
             <a:r>
-              <a:rPr lang="en-CA" dirty="0" smtClean="0"/>
+              <a:rPr lang="en-CA" dirty="0"/>
               <a:t>ASHRAE design day conditions</a:t>
             </a:r>
           </a:p>
@@ -6468,13 +6372,6 @@
   <p:clrMapOvr>
     <a:masterClrMapping/>
   </p:clrMapOvr>
-  <p:timing>
-    <p:tnLst>
-      <p:par>
-        <p:cTn id="1" dur="indefinite" restart="never" nodeType="tmRoot"/>
-      </p:par>
-    </p:tnLst>
-  </p:timing>
 </p:sld>
 </file>
 
@@ -6516,18 +6413,17 @@
           <a:lstStyle/>
           <a:p>
             <a:r>
-              <a:rPr lang="en-CA" dirty="0" smtClean="0"/>
+              <a:rPr lang="en-CA" dirty="0"/>
               <a:t>Exercise: Let’s </a:t>
             </a:r>
             <a:r>
-              <a:rPr lang="en-CA" dirty="0" err="1" smtClean="0"/>
+              <a:rPr lang="en-CA" dirty="0" err="1"/>
               <a:t>sketchup</a:t>
             </a:r>
             <a:r>
-              <a:rPr lang="en-CA" dirty="0" smtClean="0"/>
+              <a:rPr lang="en-CA" dirty="0"/>
               <a:t> our building</a:t>
             </a:r>
-            <a:endParaRPr lang="en-CA" dirty="0"/>
           </a:p>
         </p:txBody>
       </p:sp>
@@ -6573,7 +6469,7 @@
         <p:spPr>
           <a:xfrm>
             <a:off x="716692" y="1919072"/>
-            <a:ext cx="4794422" cy="4247317"/>
+            <a:ext cx="4794422" cy="4801314"/>
           </a:xfrm>
           <a:prstGeom prst="rect">
             <a:avLst/>
@@ -6591,8 +6487,28 @@
               <a:buChar char="•"/>
             </a:pPr>
             <a:r>
-              <a:rPr lang="en-CA" dirty="0" smtClean="0"/>
-              <a:t>Create a model </a:t>
+              <a:rPr lang="en-CA" dirty="0">
+                <a:solidFill>
+                  <a:srgbClr val="FF0000"/>
+                </a:solidFill>
+              </a:rPr>
+              <a:t>First, set up OpenStudio (</a:t>
+            </a:r>
+            <a:r>
+              <a:rPr lang="en-CA" dirty="0" err="1">
+                <a:solidFill>
+                  <a:srgbClr val="FF0000"/>
+                </a:solidFill>
+              </a:rPr>
+              <a:t>Dview</a:t>
+            </a:r>
+            <a:r>
+              <a:rPr lang="en-CA" dirty="0">
+                <a:solidFill>
+                  <a:srgbClr val="FF0000"/>
+                </a:solidFill>
+              </a:rPr>
+              <a:t> and default libraries) </a:t>
             </a:r>
           </a:p>
           <a:p>
@@ -6601,16 +6517,18 @@
               <a:buChar char="•"/>
             </a:pPr>
             <a:r>
-              <a:rPr lang="en-CA" dirty="0" smtClean="0"/>
-              <a:t>Canadian </a:t>
-            </a:r>
-            <a:r>
-              <a:rPr lang="en-CA" dirty="0" smtClean="0"/>
-              <a:t>Centre for Housing Technology research </a:t>
-            </a:r>
-            <a:r>
-              <a:rPr lang="en-CA" dirty="0" smtClean="0"/>
-              <a:t>facility</a:t>
+              <a:rPr lang="en-CA" dirty="0"/>
+              <a:t>Create a model </a:t>
+            </a:r>
+          </a:p>
+          <a:p>
+            <a:pPr marL="285750" indent="-285750">
+              <a:buFont typeface="Arial" panose="020B0604020202020204" pitchFamily="34" charset="0"/>
+              <a:buChar char="•"/>
+            </a:pPr>
+            <a:r>
+              <a:rPr lang="en-CA" dirty="0"/>
+              <a:t>Canadian Centre for Housing Technology research facility</a:t>
             </a:r>
           </a:p>
           <a:p>
@@ -6619,7 +6537,7 @@
               <a:buChar char="•"/>
             </a:pPr>
             <a:r>
-              <a:rPr lang="en-CA" dirty="0" smtClean="0"/>
+              <a:rPr lang="en-CA" dirty="0"/>
               <a:t>NZER</a:t>
             </a:r>
           </a:p>
@@ -6629,10 +6547,9 @@
               <a:buChar char="•"/>
             </a:pPr>
             <a:r>
-              <a:rPr lang="en-CA" dirty="0" smtClean="0"/>
+              <a:rPr lang="en-CA" dirty="0"/>
               <a:t>Semi-detached</a:t>
             </a:r>
-            <a:endParaRPr lang="en-CA" dirty="0" smtClean="0"/>
           </a:p>
           <a:p>
             <a:pPr marL="742950" lvl="1" indent="-285750">
@@ -6640,11 +6557,11 @@
               <a:buChar char="•"/>
             </a:pPr>
             <a:r>
-              <a:rPr lang="en-CA" dirty="0" smtClean="0"/>
+              <a:rPr lang="en-CA" dirty="0"/>
               <a:t>150 m</a:t>
             </a:r>
             <a:r>
-              <a:rPr lang="en-CA" baseline="30000" dirty="0" smtClean="0"/>
+              <a:rPr lang="en-CA" baseline="30000" dirty="0"/>
               <a:t>2</a:t>
             </a:r>
           </a:p>
@@ -6654,7 +6571,7 @@
               <a:buChar char="•"/>
             </a:pPr>
             <a:r>
-              <a:rPr lang="en-CA" dirty="0" smtClean="0"/>
+              <a:rPr lang="en-CA" dirty="0"/>
               <a:t>Side by side comparison</a:t>
             </a:r>
           </a:p>
@@ -6664,7 +6581,7 @@
               <a:buChar char="•"/>
             </a:pPr>
             <a:r>
-              <a:rPr lang="en-CA" dirty="0" smtClean="0"/>
+              <a:rPr lang="en-CA" dirty="0"/>
               <a:t>CCHT-F is the test facility (left)</a:t>
             </a:r>
           </a:p>
@@ -6674,7 +6591,7 @@
               <a:buChar char="•"/>
             </a:pPr>
             <a:r>
-              <a:rPr lang="en-CA" dirty="0" smtClean="0"/>
+              <a:rPr lang="en-CA" dirty="0"/>
               <a:t>500  sensors (incl. assembly)</a:t>
             </a:r>
           </a:p>
@@ -6684,12 +6601,8 @@
               <a:buChar char="•"/>
             </a:pPr>
             <a:r>
-              <a:rPr lang="en-CA" dirty="0" smtClean="0"/>
-              <a:t>Gas, electricity, </a:t>
-            </a:r>
-            <a:r>
-              <a:rPr lang="en-CA" dirty="0" smtClean="0"/>
-              <a:t>water</a:t>
+              <a:rPr lang="en-CA" dirty="0"/>
+              <a:t>Gas, electricity, water</a:t>
             </a:r>
           </a:p>
           <a:p>
@@ -6705,27 +6618,27 @@
               <a:buChar char="•"/>
             </a:pPr>
             <a:r>
-              <a:rPr lang="en-CA" dirty="0" err="1" smtClean="0"/>
+              <a:rPr lang="en-CA" dirty="0" err="1"/>
               <a:t>OS_exercise</a:t>
             </a:r>
             <a:r>
-              <a:rPr lang="en-CA" dirty="0" smtClean="0"/>
+              <a:rPr lang="en-CA" dirty="0"/>
               <a:t>&gt;</a:t>
             </a:r>
             <a:r>
-              <a:rPr lang="en-CA" dirty="0" err="1" smtClean="0"/>
+              <a:rPr lang="en-CA" dirty="0" err="1"/>
               <a:t>sketchup</a:t>
             </a:r>
             <a:r>
-              <a:rPr lang="en-CA" dirty="0" smtClean="0"/>
+              <a:rPr lang="en-CA" dirty="0"/>
               <a:t>&gt;</a:t>
             </a:r>
             <a:r>
-              <a:rPr lang="en-CA" dirty="0" err="1" smtClean="0"/>
+              <a:rPr lang="en-CA" dirty="0" err="1"/>
               <a:t>CCHT_plans</a:t>
             </a:r>
             <a:r>
-              <a:rPr lang="en-CA" dirty="0" smtClean="0"/>
+              <a:rPr lang="en-CA" dirty="0"/>
               <a:t> “CCHT-F” plans</a:t>
             </a:r>
           </a:p>
@@ -6735,7 +6648,7 @@
               <a:buChar char="•"/>
             </a:pPr>
             <a:r>
-              <a:rPr lang="en-CA" dirty="0" smtClean="0"/>
+              <a:rPr lang="en-CA" dirty="0"/>
               <a:t>3_sketchup_exercise.pdf</a:t>
             </a:r>
           </a:p>
@@ -6745,10 +6658,9 @@
               <a:buChar char="•"/>
             </a:pPr>
             <a:r>
-              <a:rPr lang="en-CA" dirty="0" smtClean="0"/>
+              <a:rPr lang="en-CA" dirty="0"/>
               <a:t>4 zones</a:t>
             </a:r>
-            <a:endParaRPr lang="en-CA" dirty="0"/>
           </a:p>
         </p:txBody>
       </p:sp>
@@ -6779,15 +6691,7 @@
                 <a:ea typeface="Calibri" panose="020F0502020204030204" pitchFamily="34" charset="0"/>
                 <a:cs typeface="Times New Roman" panose="02020603050405020304" pitchFamily="18" charset="0"/>
               </a:rPr>
-              <a:t>Figure </a:t>
-            </a:r>
-            <a:r>
-              <a:rPr lang="en-CA" sz="1200" dirty="0" smtClean="0">
-                <a:latin typeface="Bookman Old Style" panose="02050604050505020204" pitchFamily="18" charset="0"/>
-                <a:ea typeface="Calibri" panose="020F0502020204030204" pitchFamily="34" charset="0"/>
-                <a:cs typeface="Times New Roman" panose="02020603050405020304" pitchFamily="18" charset="0"/>
-              </a:rPr>
-              <a:t>5. CCHT E and F</a:t>
+              <a:t>Figure 5. CCHT E and F</a:t>
             </a:r>
             <a:endParaRPr lang="en-CA" sz="1200" dirty="0"/>
           </a:p>
@@ -6803,13 +6707,6 @@
   <p:clrMapOvr>
     <a:masterClrMapping/>
   </p:clrMapOvr>
-  <p:timing>
-    <p:tnLst>
-      <p:par>
-        <p:cTn id="1" dur="indefinite" restart="never" nodeType="tmRoot"/>
-      </p:par>
-    </p:tnLst>
-  </p:timing>
 </p:sld>
 </file>
 
@@ -6846,10 +6743,9 @@
           <a:lstStyle/>
           <a:p>
             <a:r>
-              <a:rPr lang="en-CA" dirty="0" smtClean="0"/>
+              <a:rPr lang="en-CA" dirty="0"/>
               <a:t>building envelope</a:t>
             </a:r>
-            <a:endParaRPr lang="en-CA" dirty="0"/>
           </a:p>
         </p:txBody>
       </p:sp>
@@ -6869,84 +6765,62 @@
           <a:lstStyle/>
           <a:p>
             <a:r>
-              <a:rPr lang="en-CA" dirty="0" smtClean="0"/>
+              <a:rPr lang="en-CA" dirty="0"/>
               <a:t>Envelope – walls, roofs, floor, fenestration (doors, windows, skylights)</a:t>
             </a:r>
           </a:p>
           <a:p>
             <a:r>
-              <a:rPr lang="en-CA" dirty="0" smtClean="0"/>
+              <a:rPr lang="en-CA" dirty="0"/>
               <a:t>Construction – assembly of layers of materials that form the envelope</a:t>
             </a:r>
           </a:p>
           <a:p>
             <a:r>
-              <a:rPr lang="en-CA" dirty="0" smtClean="0"/>
+              <a:rPr lang="en-CA" dirty="0"/>
               <a:t>Thermal bridge (thermal bypass) – areas of an construction that allows heat to easily flow through</a:t>
             </a:r>
           </a:p>
           <a:p>
             <a:pPr lvl="1"/>
             <a:r>
-              <a:rPr lang="en-CA" dirty="0" smtClean="0"/>
+              <a:rPr lang="en-CA" dirty="0"/>
               <a:t>Studs, balconies, window perimeters</a:t>
             </a:r>
           </a:p>
           <a:p>
             <a:pPr lvl="1"/>
             <a:r>
-              <a:rPr lang="en-CA" dirty="0" err="1" smtClean="0"/>
-              <a:t>Derates</a:t>
-            </a:r>
-            <a:r>
-              <a:rPr lang="en-CA" dirty="0" smtClean="0"/>
-              <a:t> insulation (R-value)</a:t>
+              <a:rPr lang="en-CA" dirty="0"/>
+              <a:t>Derate insulation (R-value)</a:t>
             </a:r>
           </a:p>
           <a:p>
             <a:pPr lvl="2"/>
             <a:r>
-              <a:rPr lang="en-CA" dirty="0" smtClean="0"/>
-              <a:t>E.g</a:t>
-            </a:r>
-            <a:r>
-              <a:rPr lang="en-CA" dirty="0" smtClean="0"/>
-              <a:t>. 77% insulation &amp; 23</a:t>
-            </a:r>
-            <a:r>
-              <a:rPr lang="en-CA" dirty="0"/>
-              <a:t>%</a:t>
-            </a:r>
-            <a:r>
-              <a:rPr lang="en-CA" dirty="0" smtClean="0"/>
-              <a:t> stud vs 100% insulation</a:t>
+              <a:rPr lang="en-CA" dirty="0"/>
+              <a:t>E.g. 77% insulation &amp; 23% stud vs 100% insulation</a:t>
             </a:r>
           </a:p>
           <a:p>
             <a:pPr lvl="1"/>
             <a:r>
-              <a:rPr lang="en-CA" u="sng" dirty="0" smtClean="0">
+              <a:rPr lang="en-CA" u="sng" dirty="0">
                 <a:hlinkClick r:id="rId2"/>
               </a:rPr>
-              <a:t>Extensive guide from Morrison </a:t>
-            </a:r>
-            <a:r>
-              <a:rPr lang="en-CA" u="sng" dirty="0" err="1" smtClean="0">
-                <a:hlinkClick r:id="rId2"/>
-              </a:rPr>
-              <a:t>Hershfield</a:t>
-            </a:r>
-            <a:endParaRPr lang="en-CA" u="sng" dirty="0" smtClean="0"/>
+              <a:t>Extensive guide from Morrison Hershfield</a:t>
+            </a:r>
+            <a:endParaRPr lang="en-CA" u="sng" dirty="0"/>
           </a:p>
           <a:p>
             <a:pPr lvl="1"/>
-            <a:endParaRPr lang="en-CA" u="sng" dirty="0" smtClean="0"/>
+            <a:endParaRPr lang="en-CA" u="sng" dirty="0"/>
           </a:p>
           <a:p>
             <a:pPr marL="457200" lvl="1" indent="0">
               <a:buNone/>
             </a:pPr>
-            <a:endParaRPr lang="en-CA" u="sng" dirty="0" smtClean="0"/>
+            <a:endParaRPr lang="en-CA" u="sng" dirty="0"/>
           </a:p>
         </p:txBody>
       </p:sp>
@@ -6999,18 +6873,10 @@
                 <a:ea typeface="Calibri" panose="020F0502020204030204" pitchFamily="34" charset="0"/>
                 <a:cs typeface="Times New Roman" panose="02020603050405020304" pitchFamily="18" charset="0"/>
               </a:rPr>
-              <a:t>Figure </a:t>
-            </a:r>
-            <a:r>
-              <a:rPr lang="en-CA" sz="1200" dirty="0" smtClean="0">
-                <a:latin typeface="Bookman Old Style" panose="02050604050505020204" pitchFamily="18" charset="0"/>
-                <a:ea typeface="Calibri" panose="020F0502020204030204" pitchFamily="34" charset="0"/>
-                <a:cs typeface="Times New Roman" panose="02020603050405020304" pitchFamily="18" charset="0"/>
-              </a:rPr>
-              <a:t>6. Wall cross section (Morrison-</a:t>
-            </a:r>
-            <a:r>
-              <a:rPr lang="en-CA" sz="1200" dirty="0" err="1" smtClean="0">
+              <a:t>Figure 6. Wall cross section (Morrison-</a:t>
+            </a:r>
+            <a:r>
+              <a:rPr lang="en-CA" sz="1200" dirty="0" err="1">
                 <a:latin typeface="Bookman Old Style" panose="02050604050505020204" pitchFamily="18" charset="0"/>
                 <a:ea typeface="Calibri" panose="020F0502020204030204" pitchFamily="34" charset="0"/>
                 <a:cs typeface="Times New Roman" panose="02020603050405020304" pitchFamily="18" charset="0"/>
@@ -7018,7 +6884,7 @@
               <a:t>Hershfield</a:t>
             </a:r>
             <a:r>
-              <a:rPr lang="en-CA" sz="1200" dirty="0" smtClean="0">
+              <a:rPr lang="en-CA" sz="1200" dirty="0">
                 <a:latin typeface="Bookman Old Style" panose="02050604050505020204" pitchFamily="18" charset="0"/>
                 <a:ea typeface="Calibri" panose="020F0502020204030204" pitchFamily="34" charset="0"/>
                 <a:cs typeface="Times New Roman" panose="02020603050405020304" pitchFamily="18" charset="0"/>
@@ -7039,13 +6905,6 @@
   <p:clrMapOvr>
     <a:masterClrMapping/>
   </p:clrMapOvr>
-  <p:timing>
-    <p:tnLst>
-      <p:par>
-        <p:cTn id="1" dur="indefinite" restart="never" nodeType="tmRoot"/>
-      </p:par>
-    </p:tnLst>
-  </p:timing>
 </p:sld>
 </file>
 
@@ -7082,10 +6941,9 @@
           <a:lstStyle/>
           <a:p>
             <a:r>
-              <a:rPr lang="en-CA" dirty="0" smtClean="0"/>
+              <a:rPr lang="en-CA" dirty="0"/>
               <a:t>Air Leakage</a:t>
             </a:r>
-            <a:endParaRPr lang="en-CA" dirty="0"/>
           </a:p>
         </p:txBody>
       </p:sp>
@@ -7111,7 +6969,7 @@
           </a:p>
           <a:p>
             <a:r>
-              <a:rPr lang="en-CA" dirty="0" smtClean="0"/>
+              <a:rPr lang="en-CA" dirty="0"/>
               <a:t>Blower door test</a:t>
             </a:r>
           </a:p>
@@ -7124,7 +6982,7 @@
           </a:p>
           <a:p>
             <a:pPr lvl="1"/>
-            <a:endParaRPr lang="en-CA" dirty="0" smtClean="0"/>
+            <a:endParaRPr lang="en-CA" dirty="0"/>
           </a:p>
         </p:txBody>
       </p:sp>
@@ -7191,15 +7049,7 @@
                 <a:ea typeface="Calibri" panose="020F0502020204030204" pitchFamily="34" charset="0"/>
                 <a:cs typeface="Times New Roman" panose="02020603050405020304" pitchFamily="18" charset="0"/>
               </a:rPr>
-              <a:t>Figure </a:t>
-            </a:r>
-            <a:r>
-              <a:rPr lang="en-CA" sz="1200" dirty="0" smtClean="0">
-                <a:latin typeface="Bookman Old Style" panose="02050604050505020204" pitchFamily="18" charset="0"/>
-                <a:ea typeface="Calibri" panose="020F0502020204030204" pitchFamily="34" charset="0"/>
-                <a:cs typeface="Times New Roman" panose="02020603050405020304" pitchFamily="18" charset="0"/>
-              </a:rPr>
-              <a:t>7. Blower door test fan</a:t>
+              <a:t>Figure 7. Blower door test fan</a:t>
             </a:r>
             <a:endParaRPr lang="en-CA" sz="1200" dirty="0"/>
           </a:p>
@@ -7215,13 +7065,6 @@
   <p:clrMapOvr>
     <a:masterClrMapping/>
   </p:clrMapOvr>
-  <p:timing>
-    <p:tnLst>
-      <p:par>
-        <p:cTn id="1" dur="indefinite" restart="never" nodeType="tmRoot"/>
-      </p:par>
-    </p:tnLst>
-  </p:timing>
 </p:sld>
 </file>
 
@@ -7258,10 +7101,9 @@
           <a:lstStyle/>
           <a:p>
             <a:r>
-              <a:rPr lang="en-CA" dirty="0" smtClean="0"/>
+              <a:rPr lang="en-CA" dirty="0"/>
               <a:t>Air Leakage </a:t>
             </a:r>
-            <a:endParaRPr lang="en-CA" dirty="0"/>
           </a:p>
         </p:txBody>
       </p:sp>
@@ -7281,7 +7123,7 @@
           <a:lstStyle/>
           <a:p>
             <a:r>
-              <a:rPr lang="en-CA" dirty="0" smtClean="0"/>
+              <a:rPr lang="en-CA" dirty="0"/>
               <a:t>Blower door test cont.</a:t>
             </a:r>
           </a:p>
@@ -7295,34 +7137,16 @@
           <a:p>
             <a:pPr lvl="1"/>
             <a:r>
-              <a:rPr lang="en-CA" dirty="0" smtClean="0"/>
-              <a:t>Negative</a:t>
-            </a:r>
-            <a:r>
-              <a:rPr lang="en-CA" dirty="0"/>
-              <a:t>, positive, </a:t>
-            </a:r>
-            <a:r>
-              <a:rPr lang="en-CA" dirty="0" smtClean="0"/>
-              <a:t>single/multi-point (pressure)</a:t>
-            </a:r>
-            <a:endParaRPr lang="en-CA" dirty="0"/>
+              <a:rPr lang="en-CA" dirty="0"/>
+              <a:t>Negative, positive, single/multi-point (pressure)</a:t>
+            </a:r>
           </a:p>
           <a:p>
             <a:pPr lvl="1"/>
             <a:r>
-              <a:rPr lang="en-CA" dirty="0" smtClean="0"/>
-              <a:t>ACH50, </a:t>
-            </a:r>
-            <a:r>
-              <a:rPr lang="en-CA" dirty="0"/>
-              <a:t>Flow coefficient, Effective leakage </a:t>
-            </a:r>
-            <a:r>
-              <a:rPr lang="en-CA" dirty="0" smtClean="0"/>
-              <a:t>area (4Pa or 10Pa), flow per exterior area (75Pa)</a:t>
-            </a:r>
-            <a:endParaRPr lang="en-CA" dirty="0"/>
+              <a:rPr lang="en-CA" dirty="0"/>
+              <a:t>ACH50, Flow coefficient, Effective leakage area (4Pa or 10Pa), flow per exterior area (75Pa)</a:t>
+            </a:r>
           </a:p>
           <a:p>
             <a:pPr lvl="1"/>
@@ -7417,15 +7241,7 @@
                 <a:ea typeface="Calibri" panose="020F0502020204030204" pitchFamily="34" charset="0"/>
                 <a:cs typeface="Times New Roman" panose="02020603050405020304" pitchFamily="18" charset="0"/>
               </a:rPr>
-              <a:t>Figure </a:t>
-            </a:r>
-            <a:r>
-              <a:rPr lang="en-CA" sz="1200" dirty="0" smtClean="0">
-                <a:latin typeface="Bookman Old Style" panose="02050604050505020204" pitchFamily="18" charset="0"/>
-                <a:ea typeface="Calibri" panose="020F0502020204030204" pitchFamily="34" charset="0"/>
-                <a:cs typeface="Times New Roman" panose="02020603050405020304" pitchFamily="18" charset="0"/>
-              </a:rPr>
-              <a:t>8. Unguarded blower door test</a:t>
+              <a:t>Figure 8. Unguarded blower door test</a:t>
             </a:r>
             <a:endParaRPr lang="en-CA" sz="1200" dirty="0"/>
           </a:p>
@@ -7458,31 +7274,7 @@
                 <a:ea typeface="Calibri" panose="020F0502020204030204" pitchFamily="34" charset="0"/>
                 <a:cs typeface="Times New Roman" panose="02020603050405020304" pitchFamily="18" charset="0"/>
               </a:rPr>
-              <a:t>Figure </a:t>
-            </a:r>
-            <a:r>
-              <a:rPr lang="en-CA" sz="1200" dirty="0" smtClean="0">
-                <a:latin typeface="Bookman Old Style" panose="02050604050505020204" pitchFamily="18" charset="0"/>
-                <a:ea typeface="Calibri" panose="020F0502020204030204" pitchFamily="34" charset="0"/>
-                <a:cs typeface="Times New Roman" panose="02020603050405020304" pitchFamily="18" charset="0"/>
-              </a:rPr>
-              <a:t>8. </a:t>
-            </a:r>
-            <a:r>
-              <a:rPr lang="en-CA" sz="1200" dirty="0">
-                <a:latin typeface="Bookman Old Style" panose="02050604050505020204" pitchFamily="18" charset="0"/>
-                <a:ea typeface="Calibri" panose="020F0502020204030204" pitchFamily="34" charset="0"/>
-                <a:cs typeface="Times New Roman" panose="02020603050405020304" pitchFamily="18" charset="0"/>
-              </a:rPr>
-              <a:t>G</a:t>
-            </a:r>
-            <a:r>
-              <a:rPr lang="en-CA" sz="1200" dirty="0" smtClean="0">
-                <a:latin typeface="Bookman Old Style" panose="02050604050505020204" pitchFamily="18" charset="0"/>
-                <a:ea typeface="Calibri" panose="020F0502020204030204" pitchFamily="34" charset="0"/>
-                <a:cs typeface="Times New Roman" panose="02020603050405020304" pitchFamily="18" charset="0"/>
-              </a:rPr>
-              <a:t>uarded blower door test</a:t>
+              <a:t>Figure 8. Guarded blower door test</a:t>
             </a:r>
             <a:endParaRPr lang="en-CA" sz="1200" dirty="0"/>
           </a:p>
@@ -7498,13 +7290,6 @@
   <p:clrMapOvr>
     <a:masterClrMapping/>
   </p:clrMapOvr>
-  <p:timing>
-    <p:tnLst>
-      <p:par>
-        <p:cTn id="1" dur="indefinite" restart="never" nodeType="tmRoot"/>
-      </p:par>
-    </p:tnLst>
-  </p:timing>
 </p:sld>
 </file>
 
@@ -7541,15 +7326,14 @@
           <a:lstStyle/>
           <a:p>
             <a:r>
-              <a:rPr lang="en-CA" dirty="0" smtClean="0"/>
+              <a:rPr lang="en-CA" dirty="0"/>
               <a:t>Exercise: Air leakage modelling</a:t>
             </a:r>
-            <a:endParaRPr lang="en-CA" dirty="0"/>
-          </a:p>
-        </p:txBody>
-      </p:sp>
-      <mc:AlternateContent xmlns:mc="http://schemas.openxmlformats.org/markup-compatibility/2006">
-        <mc:Choice xmlns:a14="http://schemas.microsoft.com/office/drawing/2010/main" Requires="a14">
+          </a:p>
+        </p:txBody>
+      </p:sp>
+      <mc:AlternateContent xmlns:mc="http://schemas.openxmlformats.org/markup-compatibility/2006" xmlns:a14="http://schemas.microsoft.com/office/drawing/2010/main">
+        <mc:Choice Requires="a14">
           <p:sp>
             <p:nvSpPr>
               <p:cNvPr id="3" name="Content Placeholder 2"/>
@@ -7576,7 +7360,7 @@
                   <a:buNone/>
                 </a:pPr>
                 <a:r>
-                  <a:rPr lang="en-CA" dirty="0" smtClean="0"/>
+                  <a:rPr lang="en-CA" dirty="0"/>
                   <a:t>Characterizing the air leakage rate</a:t>
                 </a:r>
               </a:p>
@@ -8064,24 +7848,19 @@
                     </m:r>
                   </m:oMath>
                 </a14:m>
-                <a:endParaRPr lang="en-CA" dirty="0" smtClean="0"/>
+                <a:endParaRPr lang="en-CA" dirty="0"/>
               </a:p>
               <a:p>
-                <a:endParaRPr lang="en-CA" dirty="0" smtClean="0"/>
+                <a:endParaRPr lang="en-CA" dirty="0"/>
               </a:p>
               <a:p>
                 <a:pPr marL="0" indent="0">
                   <a:buNone/>
                 </a:pPr>
                 <a:r>
-                  <a:rPr lang="en-CA" dirty="0" smtClean="0"/>
-                  <a:t>Converting leakage rates from one pressure to </a:t>
+                  <a:rPr lang="en-CA" dirty="0"/>
+                  <a:t>Converting leakage rates from one pressure to another (4._os_envelope_exercise.pdf)</a:t>
                 </a:r>
-                <a:r>
-                  <a:rPr lang="en-CA" dirty="0" smtClean="0"/>
-                  <a:t>another (4._os_envelope_exercise.pdf)</a:t>
-                </a:r>
-                <a:endParaRPr lang="en-CA" dirty="0"/>
               </a:p>
               <a:p>
                 <a:pPr marL="0" indent="0">
@@ -8337,7 +8116,7 @@
             </p:txBody>
           </p:sp>
         </mc:Choice>
-        <mc:Fallback>
+        <mc:Fallback xmlns="">
           <p:sp>
             <p:nvSpPr>
               <p:cNvPr id="3" name="Content Placeholder 2"/>
@@ -8385,13 +8164,6 @@
   <p:clrMapOvr>
     <a:masterClrMapping/>
   </p:clrMapOvr>
-  <p:timing>
-    <p:tnLst>
-      <p:par>
-        <p:cTn id="1" dur="indefinite" restart="never" nodeType="tmRoot"/>
-      </p:par>
-    </p:tnLst>
-  </p:timing>
 </p:sld>
 </file>
 
@@ -8428,14 +8200,13 @@
           <a:lstStyle/>
           <a:p>
             <a:r>
-              <a:rPr lang="en-CA" dirty="0" err="1" smtClean="0"/>
+              <a:rPr lang="en-CA" dirty="0" err="1"/>
               <a:t>Openstudio</a:t>
             </a:r>
             <a:r>
-              <a:rPr lang="en-CA" dirty="0" smtClean="0"/>
+              <a:rPr lang="en-CA" dirty="0"/>
               <a:t> exercise: envelope </a:t>
             </a:r>
-            <a:endParaRPr lang="en-CA" dirty="0"/>
           </a:p>
         </p:txBody>
       </p:sp>
@@ -8457,46 +8228,19 @@
           <a:lstStyle/>
           <a:p>
             <a:r>
-              <a:rPr lang="en-CA" dirty="0" smtClean="0"/>
+              <a:rPr lang="en-CA" dirty="0"/>
               <a:t>Insulated surfaces</a:t>
             </a:r>
           </a:p>
           <a:p>
             <a:pPr lvl="1"/>
             <a:r>
-              <a:rPr lang="en-CA" dirty="0" err="1" smtClean="0"/>
+              <a:rPr lang="en-CA" dirty="0" err="1"/>
               <a:t>Blu_wall</a:t>
             </a:r>
             <a:r>
               <a:rPr lang="en-CA" dirty="0"/>
-              <a:t>:</a:t>
-            </a:r>
-            <a:r>
-              <a:rPr lang="en-CA" dirty="0" smtClean="0"/>
-              <a:t> R-28 (U-value 0.198 W/m</a:t>
-            </a:r>
-            <a:r>
-              <a:rPr lang="en-CA" baseline="30000" dirty="0" smtClean="0"/>
-              <a:t>2</a:t>
-            </a:r>
-            <a:r>
-              <a:rPr lang="en-CA" dirty="0" smtClean="0"/>
-              <a:t>∙K)</a:t>
-            </a:r>
-          </a:p>
-          <a:p>
-            <a:pPr lvl="1"/>
-            <a:r>
-              <a:rPr lang="en-CA" dirty="0" err="1" smtClean="0"/>
-              <a:t>Ground_floor</a:t>
-            </a:r>
-            <a:r>
-              <a:rPr lang="en-CA" dirty="0" smtClean="0"/>
-              <a:t>: R-18 (U-value 0.319 </a:t>
-            </a:r>
-            <a:r>
-              <a:rPr lang="en-CA" dirty="0"/>
-              <a:t>W/m</a:t>
+              <a:t>: R-28 (U-value 0.198 W/m</a:t>
             </a:r>
             <a:r>
               <a:rPr lang="en-CA" baseline="30000" dirty="0"/>
@@ -8504,22 +8248,18 @@
             </a:r>
             <a:r>
               <a:rPr lang="en-CA" dirty="0"/>
-              <a:t>∙</a:t>
-            </a:r>
-            <a:r>
-              <a:rPr lang="en-CA" dirty="0" smtClean="0"/>
-              <a:t>K)</a:t>
+              <a:t>∙K)</a:t>
             </a:r>
           </a:p>
           <a:p>
             <a:pPr lvl="1"/>
             <a:r>
-              <a:rPr lang="en-CA" dirty="0" smtClean="0"/>
-              <a:t>Attic floor/second storey ceiling - R-53 (U-value 0.106 </a:t>
-            </a:r>
-            <a:r>
-              <a:rPr lang="en-CA" dirty="0"/>
-              <a:t>W/m</a:t>
+              <a:rPr lang="en-CA" dirty="0" err="1"/>
+              <a:t>Ground_floor</a:t>
+            </a:r>
+            <a:r>
+              <a:rPr lang="en-CA" dirty="0"/>
+              <a:t>: R-18 (U-value 0.319 W/m</a:t>
             </a:r>
             <a:r>
               <a:rPr lang="en-CA" baseline="30000" dirty="0"/>
@@ -8527,61 +8267,14 @@
             </a:r>
             <a:r>
               <a:rPr lang="en-CA" dirty="0"/>
-              <a:t>∙K</a:t>
-            </a:r>
-            <a:r>
-              <a:rPr lang="en-CA" dirty="0" smtClean="0"/>
-              <a:t>)</a:t>
-            </a:r>
-          </a:p>
-          <a:p>
-            <a:r>
-              <a:rPr lang="en-CA" dirty="0" smtClean="0"/>
-              <a:t>Uninsulated surfaces</a:t>
+              <a:t>∙K)</a:t>
             </a:r>
           </a:p>
           <a:p>
             <a:pPr lvl="1"/>
             <a:r>
-              <a:rPr lang="en-CA" dirty="0" smtClean="0"/>
-              <a:t>Roof</a:t>
-            </a:r>
-          </a:p>
-          <a:p>
-            <a:pPr lvl="1"/>
-            <a:r>
-              <a:rPr lang="en-CA" dirty="0" smtClean="0"/>
-              <a:t>Interior surfaces</a:t>
-            </a:r>
-          </a:p>
-          <a:p>
-            <a:pPr lvl="1"/>
-            <a:r>
-              <a:rPr lang="en-CA" dirty="0" smtClean="0"/>
-              <a:t>doors</a:t>
-            </a:r>
-          </a:p>
-          <a:p>
-            <a:r>
-              <a:rPr lang="en-CA" dirty="0" smtClean="0"/>
-              <a:t>Adiabatic partitions </a:t>
-            </a:r>
-          </a:p>
-          <a:p>
-            <a:r>
-              <a:rPr lang="en-CA" dirty="0" smtClean="0"/>
-              <a:t>Window</a:t>
-            </a:r>
-          </a:p>
-          <a:p>
-            <a:pPr lvl="1"/>
-            <a:r>
-              <a:rPr lang="en-CA" dirty="0" smtClean="0"/>
-              <a:t>U-value 0.83 </a:t>
-            </a:r>
-            <a:r>
-              <a:rPr lang="en-CA" dirty="0"/>
-              <a:t>W/m</a:t>
+              <a:rPr lang="en-CA" dirty="0"/>
+              <a:t>Attic floor/second storey ceiling - R-53 (U-value 0.106 W/m</a:t>
             </a:r>
             <a:r>
               <a:rPr lang="en-CA" baseline="30000" dirty="0"/>
@@ -8589,19 +8282,69 @@
             </a:r>
             <a:r>
               <a:rPr lang="en-CA" dirty="0"/>
-              <a:t>∙</a:t>
-            </a:r>
-            <a:r>
-              <a:rPr lang="en-CA" dirty="0" smtClean="0"/>
-              <a:t>K</a:t>
+              <a:t>∙K)</a:t>
+            </a:r>
+          </a:p>
+          <a:p>
+            <a:r>
+              <a:rPr lang="en-CA" dirty="0"/>
+              <a:t>Uninsulated surfaces</a:t>
             </a:r>
           </a:p>
           <a:p>
             <a:pPr lvl="1"/>
-            <a:endParaRPr lang="en-CA" dirty="0" smtClean="0"/>
-          </a:p>
-          <a:p>
-            <a:endParaRPr lang="en-CA" dirty="0" smtClean="0"/>
+            <a:r>
+              <a:rPr lang="en-CA" dirty="0"/>
+              <a:t>Roof</a:t>
+            </a:r>
+          </a:p>
+          <a:p>
+            <a:pPr lvl="1"/>
+            <a:r>
+              <a:rPr lang="en-CA" dirty="0"/>
+              <a:t>Interior surfaces</a:t>
+            </a:r>
+          </a:p>
+          <a:p>
+            <a:pPr lvl="1"/>
+            <a:r>
+              <a:rPr lang="en-CA" dirty="0"/>
+              <a:t>doors</a:t>
+            </a:r>
+          </a:p>
+          <a:p>
+            <a:r>
+              <a:rPr lang="en-CA" dirty="0"/>
+              <a:t>Adiabatic partitions </a:t>
+            </a:r>
+          </a:p>
+          <a:p>
+            <a:r>
+              <a:rPr lang="en-CA" dirty="0"/>
+              <a:t>Window</a:t>
+            </a:r>
+          </a:p>
+          <a:p>
+            <a:pPr lvl="1"/>
+            <a:r>
+              <a:rPr lang="en-CA" dirty="0"/>
+              <a:t>U-value 0.83 W/m</a:t>
+            </a:r>
+            <a:r>
+              <a:rPr lang="en-CA" baseline="30000" dirty="0"/>
+              <a:t>2</a:t>
+            </a:r>
+            <a:r>
+              <a:rPr lang="en-CA" dirty="0"/>
+              <a:t>∙K</a:t>
+            </a:r>
+          </a:p>
+          <a:p>
+            <a:pPr lvl="1"/>
+            <a:endParaRPr lang="en-CA" dirty="0"/>
+          </a:p>
+          <a:p>
+            <a:endParaRPr lang="en-CA" dirty="0"/>
           </a:p>
           <a:p>
             <a:endParaRPr lang="en-CA" dirty="0"/>
@@ -8618,13 +8361,6 @@
   <p:clrMapOvr>
     <a:masterClrMapping/>
   </p:clrMapOvr>
-  <p:timing>
-    <p:tnLst>
-      <p:par>
-        <p:cTn id="1" dur="indefinite" restart="never" nodeType="tmRoot"/>
-      </p:par>
-    </p:tnLst>
-  </p:timing>
 </p:sld>
 </file>
 
@@ -8661,10 +8397,9 @@
           <a:lstStyle/>
           <a:p>
             <a:r>
-              <a:rPr lang="en-CA" dirty="0" smtClean="0"/>
+              <a:rPr lang="en-CA" dirty="0"/>
               <a:t>Who am I?</a:t>
             </a:r>
-            <a:endParaRPr lang="en-CA" dirty="0"/>
           </a:p>
         </p:txBody>
       </p:sp>
@@ -8689,82 +8424,82 @@
           <a:lstStyle/>
           <a:p>
             <a:r>
-              <a:rPr lang="en-CA" dirty="0" smtClean="0"/>
+              <a:rPr lang="en-CA" dirty="0"/>
               <a:t>What I do </a:t>
             </a:r>
           </a:p>
           <a:p>
             <a:pPr lvl="1"/>
             <a:r>
-              <a:rPr lang="en-CA" dirty="0" smtClean="0"/>
-              <a:t>Road cycling</a:t>
+              <a:rPr lang="en-CA" dirty="0"/>
+              <a:t>Whole building optimization </a:t>
+            </a:r>
+          </a:p>
+          <a:p>
+            <a:pPr lvl="2"/>
+            <a:r>
+              <a:rPr lang="en-CA" dirty="0"/>
+              <a:t>Codes development (Retrofit &amp; carbon code)</a:t>
+            </a:r>
+          </a:p>
+          <a:p>
+            <a:pPr lvl="2"/>
+            <a:r>
+              <a:rPr lang="en-CA" dirty="0"/>
+              <a:t>Heat pump</a:t>
+            </a:r>
+          </a:p>
+          <a:p>
+            <a:pPr lvl="2"/>
+            <a:r>
+              <a:rPr lang="en-CA" dirty="0"/>
+              <a:t>Arctic renewables</a:t>
+            </a:r>
+          </a:p>
+          <a:p>
+            <a:pPr lvl="2"/>
+            <a:r>
+              <a:rPr lang="en-CA" dirty="0"/>
+              <a:t>Modelling tool development</a:t>
+            </a:r>
+          </a:p>
+          <a:p>
+            <a:r>
+              <a:rPr lang="en-CA" dirty="0"/>
+              <a:t>What NRC’s Construction Research Centre does</a:t>
             </a:r>
           </a:p>
           <a:p>
             <a:pPr lvl="1"/>
             <a:r>
-              <a:rPr lang="en-CA" dirty="0" smtClean="0"/>
-              <a:t>Whole building optimization </a:t>
-            </a:r>
-          </a:p>
-          <a:p>
-            <a:pPr lvl="2"/>
-            <a:r>
-              <a:rPr lang="en-CA" dirty="0" smtClean="0"/>
-              <a:t>Codes development (Retrofit &amp; carbon code)</a:t>
-            </a:r>
-          </a:p>
-          <a:p>
-            <a:pPr lvl="2"/>
-            <a:r>
-              <a:rPr lang="en-CA" dirty="0" smtClean="0"/>
-              <a:t>Gas Heat pump</a:t>
-            </a:r>
-          </a:p>
-          <a:p>
-            <a:pPr lvl="2"/>
-            <a:r>
-              <a:rPr lang="en-CA" dirty="0" smtClean="0"/>
-              <a:t>Modelling tool development</a:t>
-            </a:r>
-          </a:p>
-          <a:p>
-            <a:r>
-              <a:rPr lang="en-CA" dirty="0" smtClean="0"/>
-              <a:t>What NRC’s Construction Research Centre does</a:t>
+              <a:rPr lang="en-CA" dirty="0"/>
+              <a:t>Building envelope material development/testing</a:t>
             </a:r>
           </a:p>
           <a:p>
             <a:pPr lvl="1"/>
             <a:r>
-              <a:rPr lang="en-CA" dirty="0" smtClean="0"/>
-              <a:t>Building envelope material development/testing</a:t>
+              <a:rPr lang="en-CA" dirty="0"/>
+              <a:t>Building acoustics (transmission prediction, signal processing, perception assessment)</a:t>
             </a:r>
           </a:p>
           <a:p>
             <a:pPr lvl="1"/>
             <a:r>
-              <a:rPr lang="en-CA" dirty="0" smtClean="0"/>
-              <a:t>Building acoustics (transmission prediction, signal processing, perception assessment)</a:t>
+              <a:rPr lang="en-CA" dirty="0"/>
+              <a:t>Indoor air quality (airborne transmission, arctic HRV/ERV application)</a:t>
             </a:r>
           </a:p>
           <a:p>
             <a:pPr lvl="1"/>
             <a:r>
-              <a:rPr lang="en-CA" dirty="0" smtClean="0"/>
-              <a:t>Indoor air quality (airborne transmission, arctic HRV/ERV application)</a:t>
+              <a:rPr lang="en-CA" dirty="0"/>
+              <a:t>Climate resiliency adaptation (overheating, resiliency, future looking climate data)</a:t>
             </a:r>
           </a:p>
           <a:p>
             <a:pPr lvl="1"/>
-            <a:r>
-              <a:rPr lang="en-CA" dirty="0" smtClean="0"/>
-              <a:t>Climate resiliency adaptation (overheating, resiliency, future looking climate data)</a:t>
-            </a:r>
-          </a:p>
-          <a:p>
-            <a:pPr lvl="1"/>
-            <a:endParaRPr lang="en-CA" dirty="0" smtClean="0"/>
+            <a:endParaRPr lang="en-CA" dirty="0"/>
           </a:p>
           <a:p>
             <a:pPr marL="0" indent="0">
@@ -8784,13 +8519,6 @@
   <p:clrMapOvr>
     <a:masterClrMapping/>
   </p:clrMapOvr>
-  <p:timing>
-    <p:tnLst>
-      <p:par>
-        <p:cTn id="1" dur="indefinite" restart="never" nodeType="tmRoot"/>
-      </p:par>
-    </p:tnLst>
-  </p:timing>
 </p:sld>
 </file>
 
@@ -8827,14 +8555,9 @@
           <a:lstStyle/>
           <a:p>
             <a:r>
-              <a:rPr lang="en-CA" dirty="0" smtClean="0"/>
-              <a:t>Internal </a:t>
-            </a:r>
-            <a:r>
-              <a:rPr lang="en-CA" dirty="0" smtClean="0"/>
-              <a:t>Loads in OpenStudio</a:t>
-            </a:r>
-            <a:endParaRPr lang="en-CA" dirty="0"/>
+              <a:rPr lang="en-CA" dirty="0"/>
+              <a:t>Internal Loads in OpenStudio</a:t>
+            </a:r>
           </a:p>
         </p:txBody>
       </p:sp>
@@ -8861,140 +8584,121 @@
           <a:lstStyle/>
           <a:p>
             <a:r>
-              <a:rPr lang="en-CA" dirty="0" smtClean="0"/>
+              <a:rPr lang="en-CA" dirty="0"/>
               <a:t>Sources of heat that warms up a building</a:t>
             </a:r>
           </a:p>
           <a:p>
             <a:pPr lvl="1"/>
             <a:r>
-              <a:rPr lang="en-CA" dirty="0" smtClean="0"/>
+              <a:rPr lang="en-CA" dirty="0"/>
               <a:t>Light</a:t>
             </a:r>
           </a:p>
           <a:p>
             <a:pPr lvl="1"/>
             <a:r>
-              <a:rPr lang="en-CA" dirty="0" smtClean="0"/>
+              <a:rPr lang="en-CA" dirty="0"/>
               <a:t>Occupants</a:t>
             </a:r>
           </a:p>
           <a:p>
             <a:pPr lvl="1"/>
             <a:r>
-              <a:rPr lang="en-CA" dirty="0" smtClean="0"/>
+              <a:rPr lang="en-CA" dirty="0"/>
               <a:t>Plug (receptacle) and process loads</a:t>
             </a:r>
           </a:p>
           <a:p>
             <a:r>
-              <a:rPr lang="en-CA" dirty="0" smtClean="0"/>
+              <a:rPr lang="en-CA" dirty="0"/>
               <a:t>Different “types of heat” in modelling</a:t>
             </a:r>
           </a:p>
           <a:p>
             <a:r>
-              <a:rPr lang="en-CA" dirty="0" smtClean="0"/>
+              <a:rPr lang="en-CA" dirty="0"/>
               <a:t>Lighting</a:t>
             </a:r>
           </a:p>
           <a:p>
             <a:pPr lvl="1"/>
             <a:r>
-              <a:rPr lang="en-CA" dirty="0" smtClean="0"/>
-              <a:t>Convected</a:t>
-            </a:r>
-            <a:r>
-              <a:rPr lang="en-CA" dirty="0" smtClean="0"/>
-              <a:t>, visible (short wave), long wave, return </a:t>
-            </a:r>
-            <a:r>
-              <a:rPr lang="en-CA" dirty="0" smtClean="0"/>
-              <a:t>air</a:t>
+              <a:rPr lang="en-CA" dirty="0"/>
+              <a:t>Convected, visible (short wave), long wave, return air</a:t>
             </a:r>
           </a:p>
           <a:p>
             <a:pPr lvl="1"/>
             <a:r>
-              <a:rPr lang="en-CA" dirty="0" smtClean="0"/>
+              <a:rPr lang="en-CA" dirty="0"/>
               <a:t>Max power </a:t>
             </a:r>
           </a:p>
           <a:p>
             <a:pPr lvl="2"/>
             <a:r>
-              <a:rPr lang="en-CA" dirty="0" smtClean="0"/>
+              <a:rPr lang="en-CA" dirty="0"/>
               <a:t>entered in internal gains object</a:t>
             </a:r>
-            <a:endParaRPr lang="en-CA" dirty="0" smtClean="0"/>
-          </a:p>
-          <a:p>
-            <a:r>
-              <a:rPr lang="en-CA" dirty="0" smtClean="0"/>
+          </a:p>
+          <a:p>
+            <a:r>
+              <a:rPr lang="en-CA" dirty="0"/>
               <a:t>Occupants</a:t>
             </a:r>
           </a:p>
           <a:p>
             <a:pPr lvl="1"/>
             <a:r>
-              <a:rPr lang="en-CA" dirty="0" smtClean="0"/>
-              <a:t>Sensible, latent, </a:t>
-            </a:r>
-            <a:r>
-              <a:rPr lang="en-CA" dirty="0" smtClean="0"/>
-              <a:t>radiant</a:t>
+              <a:rPr lang="en-CA" dirty="0"/>
+              <a:t>Sensible, latent, radiant</a:t>
             </a:r>
           </a:p>
           <a:p>
             <a:pPr lvl="1"/>
             <a:r>
-              <a:rPr lang="en-CA" dirty="0" smtClean="0"/>
+              <a:rPr lang="en-CA" dirty="0"/>
               <a:t>Activity level (W per person)</a:t>
             </a:r>
           </a:p>
           <a:p>
             <a:pPr lvl="2"/>
             <a:r>
-              <a:rPr lang="en-CA" dirty="0" smtClean="0"/>
+              <a:rPr lang="en-CA" dirty="0"/>
               <a:t>Entered as a schedule</a:t>
             </a:r>
-            <a:endParaRPr lang="en-CA" dirty="0" smtClean="0"/>
-          </a:p>
-          <a:p>
-            <a:r>
-              <a:rPr lang="en-CA" dirty="0" smtClean="0"/>
-              <a:t>Plug or process</a:t>
+          </a:p>
+          <a:p>
+            <a:r>
+              <a:rPr lang="en-CA" dirty="0" err="1"/>
+              <a:t>Receptacple</a:t>
+            </a:r>
+            <a:r>
+              <a:rPr lang="en-CA" dirty="0"/>
+              <a:t> or process</a:t>
             </a:r>
           </a:p>
           <a:p>
             <a:pPr lvl="1"/>
             <a:r>
-              <a:rPr lang="en-CA" dirty="0" smtClean="0"/>
-              <a:t>Convected</a:t>
-            </a:r>
-            <a:r>
-              <a:rPr lang="en-CA" dirty="0" smtClean="0"/>
-              <a:t>, radiant, loss (e.g. exhausted)</a:t>
+              <a:rPr lang="en-CA" dirty="0"/>
+              <a:t>Convected, radiant, loss (e.g. exhausted)</a:t>
             </a:r>
           </a:p>
           <a:p>
             <a:pPr lvl="1"/>
             <a:r>
-              <a:rPr lang="en-CA" dirty="0" smtClean="0"/>
+              <a:rPr lang="en-CA" dirty="0"/>
               <a:t>Don’t use the nameplate value (nominal power) </a:t>
             </a:r>
           </a:p>
           <a:p>
             <a:pPr lvl="2"/>
             <a:r>
-              <a:rPr lang="en-CA" dirty="0" smtClean="0"/>
-              <a:t>Exceptions: electric resistive, constant </a:t>
-            </a:r>
-            <a:r>
-              <a:rPr lang="en-CA" dirty="0" smtClean="0"/>
-              <a:t>load</a:t>
-            </a:r>
-            <a:endParaRPr lang="en-CA" dirty="0" smtClean="0"/>
+              <a:rPr lang="en-CA" dirty="0"/>
+              <a:t>Exceptions: electric resistive, constant load</a:t>
+            </a:r>
           </a:p>
         </p:txBody>
       </p:sp>
@@ -9008,13 +8712,6 @@
   <p:clrMapOvr>
     <a:masterClrMapping/>
   </p:clrMapOvr>
-  <p:timing>
-    <p:tnLst>
-      <p:par>
-        <p:cTn id="1" dur="indefinite" restart="never" nodeType="tmRoot"/>
-      </p:par>
-    </p:tnLst>
-  </p:timing>
 </p:sld>
 </file>
 
@@ -9056,10 +8753,9 @@
           <a:lstStyle/>
           <a:p>
             <a:r>
-              <a:rPr lang="en-CA" dirty="0" smtClean="0"/>
+              <a:rPr lang="en-CA" dirty="0"/>
               <a:t>Sources for internal gain data</a:t>
             </a:r>
-            <a:endParaRPr lang="en-CA" dirty="0"/>
           </a:p>
         </p:txBody>
       </p:sp>
@@ -9101,33 +8797,15 @@
             <a:pPr lvl="1"/>
             <a:r>
               <a:rPr lang="en-CA" dirty="0"/>
-              <a:t>EnergyPlus Input Output Reference document (Table 1.28</a:t>
-            </a:r>
-            <a:r>
-              <a:rPr lang="en-CA" dirty="0" smtClean="0"/>
-              <a:t>) (from ASHRAE 1282 RP)</a:t>
-            </a:r>
-            <a:endParaRPr lang="en-CA" dirty="0"/>
+              <a:t>EnergyPlus Input Output Reference document (Table 1.28) (from ASHRAE 1282 RP)</a:t>
+            </a:r>
           </a:p>
           <a:p>
             <a:pPr lvl="1"/>
             <a:r>
               <a:rPr lang="en-CA" dirty="0"/>
-              <a:t>ASHRAE Fundamental </a:t>
-            </a:r>
-            <a:r>
-              <a:rPr lang="en-CA" dirty="0" smtClean="0"/>
-              <a:t>2021: Chapter </a:t>
-            </a:r>
-            <a:r>
-              <a:rPr lang="en-CA" dirty="0"/>
-              <a:t>18 – Table  3 for lighting heat </a:t>
-            </a:r>
-            <a:r>
-              <a:rPr lang="en-CA" dirty="0" smtClean="0"/>
-              <a:t>gain</a:t>
-            </a:r>
-            <a:endParaRPr lang="en-CA" dirty="0"/>
+              <a:t>ASHRAE Fundamental 2021: Chapter 18 – Table  3 for lighting heat gain</a:t>
+            </a:r>
           </a:p>
           <a:p>
             <a:r>
@@ -9138,23 +8816,17 @@
           <a:p>
             <a:pPr lvl="1"/>
             <a:r>
-              <a:rPr lang="en-CA" dirty="0" smtClean="0"/>
+              <a:rPr lang="en-CA" dirty="0"/>
               <a:t>ASHRAE Fundamental 2021: Chapter 18 – Table 1</a:t>
             </a:r>
           </a:p>
           <a:p>
             <a:pPr lvl="1"/>
-            <a:r>
-              <a:rPr lang="en-CA" u="sng" dirty="0" smtClean="0">
-                <a:hlinkClick r:id="rId2"/>
-              </a:rPr>
-              <a:t>https</a:t>
-            </a:r>
             <a:r>
               <a:rPr lang="en-CA" u="sng" dirty="0">
                 <a:hlinkClick r:id="rId2"/>
               </a:rPr>
-              <a:t>://www.cambeep.eng.cam.ac.uk/system/files/documents/internalheat.pdf</a:t>
+              <a:t>https://www.cambeep.eng.cam.ac.uk/system/files/documents/internalheat.pdf</a:t>
             </a:r>
             <a:endParaRPr lang="en-CA" dirty="0"/>
           </a:p>
@@ -9167,52 +8839,40 @@
           <a:p>
             <a:pPr lvl="1"/>
             <a:r>
-              <a:rPr lang="en-CA" dirty="0" smtClean="0"/>
+              <a:rPr lang="en-CA" dirty="0"/>
               <a:t>ASHRAE Fundamental 2021 - Chapter 18 - Table 4A to Table 11</a:t>
             </a:r>
           </a:p>
           <a:p>
             <a:pPr lvl="1"/>
-            <a:r>
-              <a:rPr lang="en-CA" u="sng" dirty="0" smtClean="0">
-                <a:hlinkClick r:id="rId3"/>
-              </a:rPr>
-              <a:t>http</a:t>
-            </a:r>
             <a:r>
               <a:rPr lang="en-CA" u="sng" dirty="0">
                 <a:hlinkClick r:id="rId3"/>
               </a:rPr>
-              <a:t>://</a:t>
-            </a:r>
-            <a:r>
-              <a:rPr lang="en-CA" u="sng" dirty="0" smtClean="0">
-                <a:hlinkClick r:id="rId3"/>
-              </a:rPr>
-              <a:t>hes-documentation.lbl.gov/calculation-methodology/calculation-of-energy-consumption/heating-and-cooling-calculation/internal-gains</a:t>
-            </a:r>
-            <a:endParaRPr lang="en-CA" u="sng" dirty="0" smtClean="0"/>
-          </a:p>
-          <a:p>
-            <a:r>
-              <a:rPr lang="en-CA" dirty="0" smtClean="0"/>
+              <a:t>http://hes-documentation.lbl.gov/calculation-methodology/calculation-of-energy-consumption/heating-and-cooling-calculation/internal-gains</a:t>
+            </a:r>
+            <a:endParaRPr lang="en-CA" u="sng" dirty="0"/>
+          </a:p>
+          <a:p>
+            <a:r>
+              <a:rPr lang="en-CA" dirty="0"/>
               <a:t>NBC 2020 – Table 9.36.5.4 for Residential Buildings </a:t>
             </a:r>
           </a:p>
           <a:p>
             <a:pPr lvl="1"/>
             <a:r>
-              <a:rPr lang="en-CA" dirty="0" smtClean="0">
+              <a:rPr lang="en-CA" dirty="0">
                 <a:hlinkClick r:id="rId4"/>
               </a:rPr>
               <a:t>NBC 2020 and NECB 2020</a:t>
             </a:r>
-            <a:endParaRPr lang="en-CA" dirty="0" smtClean="0"/>
+            <a:endParaRPr lang="en-CA" dirty="0"/>
           </a:p>
           <a:p>
             <a:pPr lvl="1"/>
             <a:r>
-              <a:rPr lang="en-CA" dirty="0" smtClean="0"/>
+              <a:rPr lang="en-CA" dirty="0"/>
               <a:t>Code compliance modelling default</a:t>
             </a:r>
           </a:p>
@@ -9228,13 +8888,6 @@
   <p:clrMapOvr>
     <a:masterClrMapping/>
   </p:clrMapOvr>
-  <p:timing>
-    <p:tnLst>
-      <p:par>
-        <p:cTn id="1" dur="indefinite" restart="never" nodeType="tmRoot"/>
-      </p:par>
-    </p:tnLst>
-  </p:timing>
 </p:sld>
 </file>
 
@@ -9271,11 +8924,11 @@
           <a:lstStyle/>
           <a:p>
             <a:r>
-              <a:rPr lang="en-CA" dirty="0" smtClean="0"/>
+              <a:rPr lang="en-CA" dirty="0"/>
               <a:t>Schedules in </a:t>
             </a:r>
             <a:r>
-              <a:rPr lang="en-CA" dirty="0" err="1" smtClean="0"/>
+              <a:rPr lang="en-CA" dirty="0" err="1"/>
               <a:t>Openstudio</a:t>
             </a:r>
             <a:endParaRPr lang="en-CA" dirty="0"/>
@@ -9298,45 +8951,44 @@
           <a:lstStyle/>
           <a:p>
             <a:r>
-              <a:rPr lang="en-CA" dirty="0" smtClean="0"/>
+              <a:rPr lang="en-CA" dirty="0"/>
               <a:t>Control equipment and events</a:t>
             </a:r>
           </a:p>
           <a:p>
             <a:r>
-              <a:rPr lang="en-CA" dirty="0" smtClean="0"/>
+              <a:rPr lang="en-CA" dirty="0"/>
               <a:t>Control logic (1 for on, 0 for off)</a:t>
             </a:r>
           </a:p>
           <a:p>
             <a:r>
-              <a:rPr lang="en-CA" dirty="0" smtClean="0"/>
+              <a:rPr lang="en-CA" dirty="0"/>
               <a:t>Temperature </a:t>
             </a:r>
             <a:r>
-              <a:rPr lang="en-CA" dirty="0" err="1" smtClean="0"/>
+              <a:rPr lang="en-CA" dirty="0" err="1"/>
               <a:t>setpoints</a:t>
             </a:r>
-            <a:endParaRPr lang="en-CA" dirty="0" smtClean="0"/>
-          </a:p>
-          <a:p>
-            <a:r>
-              <a:rPr lang="en-CA" dirty="0" smtClean="0"/>
+            <a:endParaRPr lang="en-CA" dirty="0"/>
+          </a:p>
+          <a:p>
+            <a:r>
+              <a:rPr lang="en-CA" dirty="0"/>
               <a:t>Number of occupants</a:t>
             </a:r>
           </a:p>
           <a:p>
             <a:r>
-              <a:rPr lang="en-CA" dirty="0" smtClean="0"/>
+              <a:rPr lang="en-CA" dirty="0"/>
               <a:t>Occupant activity level</a:t>
             </a:r>
           </a:p>
           <a:p>
             <a:r>
-              <a:rPr lang="en-CA" dirty="0" smtClean="0"/>
+              <a:rPr lang="en-CA" dirty="0"/>
               <a:t>Temperature, power, fractions, dimensionless</a:t>
             </a:r>
-            <a:endParaRPr lang="en-CA" dirty="0"/>
           </a:p>
         </p:txBody>
       </p:sp>
@@ -9350,13 +9002,6 @@
   <p:clrMapOvr>
     <a:masterClrMapping/>
   </p:clrMapOvr>
-  <p:timing>
-    <p:tnLst>
-      <p:par>
-        <p:cTn id="1" dur="indefinite" restart="never" nodeType="tmRoot"/>
-      </p:par>
-    </p:tnLst>
-  </p:timing>
 </p:sld>
 </file>
 
@@ -9393,10 +9038,9 @@
           <a:lstStyle/>
           <a:p>
             <a:r>
-              <a:rPr lang="en-CA" dirty="0" smtClean="0"/>
+              <a:rPr lang="en-CA" dirty="0"/>
               <a:t>OpenStudio Exercise: Internal Loads</a:t>
             </a:r>
-            <a:endParaRPr lang="en-CA" dirty="0"/>
           </a:p>
         </p:txBody>
       </p:sp>
@@ -9416,48 +9060,47 @@
           <a:lstStyle/>
           <a:p>
             <a:r>
-              <a:rPr lang="en-CA" dirty="0" err="1" smtClean="0"/>
+              <a:rPr lang="en-CA" dirty="0" err="1"/>
               <a:t>OS_exercise</a:t>
             </a:r>
             <a:r>
-              <a:rPr lang="en-CA" dirty="0" smtClean="0"/>
+              <a:rPr lang="en-CA" dirty="0"/>
               <a:t> &gt; </a:t>
             </a:r>
             <a:r>
-              <a:rPr lang="en-CA" dirty="0" err="1" smtClean="0"/>
+              <a:rPr lang="en-CA" dirty="0" err="1"/>
               <a:t>openstudio</a:t>
             </a:r>
             <a:r>
-              <a:rPr lang="en-CA" dirty="0" smtClean="0"/>
+              <a:rPr lang="en-CA" dirty="0"/>
               <a:t>-gains</a:t>
             </a:r>
           </a:p>
           <a:p>
             <a:pPr lvl="1"/>
             <a:r>
-              <a:rPr lang="en-CA" dirty="0" smtClean="0"/>
+              <a:rPr lang="en-CA" dirty="0"/>
               <a:t>5_os_internal_gains_exercise.pdf</a:t>
             </a:r>
-            <a:endParaRPr lang="en-CA" dirty="0" smtClean="0"/>
           </a:p>
           <a:p>
             <a:pPr lvl="1"/>
             <a:r>
-              <a:rPr lang="en-CA" dirty="0" smtClean="0"/>
+              <a:rPr lang="en-CA" dirty="0"/>
               <a:t>internal_gains_schedule_data.xlsx</a:t>
             </a:r>
           </a:p>
           <a:p>
             <a:pPr lvl="2"/>
             <a:r>
-              <a:rPr lang="en-CA" dirty="0" smtClean="0"/>
+              <a:rPr lang="en-CA" dirty="0"/>
               <a:t>Heat gain fractions</a:t>
             </a:r>
           </a:p>
           <a:p>
             <a:pPr lvl="2"/>
             <a:r>
-              <a:rPr lang="en-CA" dirty="0" smtClean="0"/>
+              <a:rPr lang="en-CA" dirty="0"/>
               <a:t>Occupant activity</a:t>
             </a:r>
           </a:p>
@@ -9465,27 +9108,22 @@
             <a:pPr lvl="2"/>
             <a:r>
               <a:rPr lang="en-CA" dirty="0"/>
-              <a:t>Schedule </a:t>
-            </a:r>
-            <a:r>
-              <a:rPr lang="en-CA" dirty="0" smtClean="0"/>
-              <a:t>fractions</a:t>
+              <a:t>Schedule fractions</a:t>
             </a:r>
           </a:p>
           <a:p>
             <a:pPr lvl="1"/>
             <a:r>
-              <a:rPr lang="en-CA" dirty="0" smtClean="0"/>
+              <a:rPr lang="en-CA" dirty="0"/>
               <a:t>internal_gain_reference_tables.pdf</a:t>
             </a:r>
           </a:p>
           <a:p>
             <a:pPr lvl="2"/>
             <a:r>
-              <a:rPr lang="en-CA" dirty="0" smtClean="0"/>
+              <a:rPr lang="en-CA" dirty="0"/>
               <a:t>Data tables from ASHRAE Fundamentals and EnergyPlus I/O doc</a:t>
             </a:r>
-            <a:endParaRPr lang="en-CA" dirty="0"/>
           </a:p>
         </p:txBody>
       </p:sp>
@@ -9499,13 +9137,6 @@
   <p:clrMapOvr>
     <a:masterClrMapping/>
   </p:clrMapOvr>
-  <p:timing>
-    <p:tnLst>
-      <p:par>
-        <p:cTn id="1" dur="indefinite" restart="never" nodeType="tmRoot"/>
-      </p:par>
-    </p:tnLst>
-  </p:timing>
 </p:sld>
 </file>
 
@@ -9542,10 +9173,9 @@
           <a:lstStyle/>
           <a:p>
             <a:r>
-              <a:rPr lang="en-CA" dirty="0" smtClean="0"/>
+              <a:rPr lang="en-CA" dirty="0"/>
               <a:t>An Overview of HVAC systems and equipment</a:t>
             </a:r>
-            <a:endParaRPr lang="en-CA" dirty="0"/>
           </a:p>
         </p:txBody>
       </p:sp>
@@ -9567,20 +9197,20 @@
           <a:lstStyle/>
           <a:p>
             <a:r>
-              <a:rPr lang="en-CA" dirty="0" smtClean="0"/>
+              <a:rPr lang="en-CA" dirty="0"/>
               <a:t>Purpose: condition and ventilate a space</a:t>
             </a:r>
           </a:p>
           <a:p>
             <a:r>
-              <a:rPr lang="en-CA" dirty="0" smtClean="0"/>
+              <a:rPr lang="en-CA" dirty="0"/>
               <a:t>Types of HVAC: Centralized and Decentralized</a:t>
             </a:r>
           </a:p>
           <a:p>
             <a:pPr lvl="1"/>
             <a:r>
-              <a:rPr lang="en-CA" dirty="0" smtClean="0"/>
+              <a:rPr lang="en-CA" dirty="0"/>
               <a:t>Centralized</a:t>
             </a:r>
           </a:p>
@@ -9590,53 +9220,51 @@
               <a:rPr lang="en-CA" dirty="0"/>
               <a:t>Boiler + pump + baseboards/radiators </a:t>
             </a:r>
-            <a:endParaRPr lang="en-CA" dirty="0" smtClean="0"/>
           </a:p>
           <a:p>
             <a:pPr lvl="2"/>
             <a:r>
-              <a:rPr lang="en-CA" dirty="0" smtClean="0"/>
+              <a:rPr lang="en-CA" dirty="0"/>
               <a:t>Chillers + pumps + water coils</a:t>
             </a:r>
+          </a:p>
+          <a:p>
+            <a:pPr lvl="1"/>
+            <a:r>
+              <a:rPr lang="en-CA" dirty="0"/>
+              <a:t>Decentralized </a:t>
+            </a:r>
+          </a:p>
+          <a:p>
+            <a:pPr lvl="2"/>
+            <a:r>
+              <a:rPr lang="en-CA" dirty="0"/>
+              <a:t>Window air conditioners</a:t>
+            </a:r>
+          </a:p>
+          <a:p>
+            <a:pPr lvl="2"/>
+            <a:r>
+              <a:rPr lang="en-CA" dirty="0"/>
+              <a:t>Electric baseboards</a:t>
+            </a:r>
+          </a:p>
+          <a:p>
+            <a:r>
+              <a:rPr lang="en-CA" dirty="0"/>
+              <a:t>Packaged, Split, Unitary</a:t>
+            </a:r>
+          </a:p>
+          <a:p>
+            <a:pPr lvl="1"/>
+            <a:r>
+              <a:rPr lang="en-CA" dirty="0"/>
+              <a:t>Interchangeable? </a:t>
+            </a:r>
+          </a:p>
+          <a:p>
+            <a:pPr lvl="1"/>
             <a:endParaRPr lang="en-CA" dirty="0"/>
-          </a:p>
-          <a:p>
-            <a:pPr lvl="1"/>
-            <a:r>
-              <a:rPr lang="en-CA" dirty="0"/>
-              <a:t>Decentralized </a:t>
-            </a:r>
-          </a:p>
-          <a:p>
-            <a:pPr lvl="2"/>
-            <a:r>
-              <a:rPr lang="en-CA" dirty="0"/>
-              <a:t>Window air conditioners</a:t>
-            </a:r>
-          </a:p>
-          <a:p>
-            <a:pPr lvl="2"/>
-            <a:r>
-              <a:rPr lang="en-CA" dirty="0"/>
-              <a:t>Electric baseboards</a:t>
-            </a:r>
-          </a:p>
-          <a:p>
-            <a:r>
-              <a:rPr lang="en-CA" dirty="0" smtClean="0"/>
-              <a:t>Packaged, Split, Unitary</a:t>
-            </a:r>
-          </a:p>
-          <a:p>
-            <a:pPr lvl="1"/>
-            <a:r>
-              <a:rPr lang="en-CA" dirty="0" smtClean="0"/>
-              <a:t>Interchangeable? </a:t>
-            </a:r>
-          </a:p>
-          <a:p>
-            <a:pPr lvl="1"/>
-            <a:endParaRPr lang="en-CA" dirty="0" smtClean="0"/>
           </a:p>
           <a:p>
             <a:pPr lvl="2"/>
@@ -9644,7 +9272,7 @@
           </a:p>
           <a:p>
             <a:pPr lvl="2"/>
-            <a:endParaRPr lang="en-CA" dirty="0" smtClean="0"/>
+            <a:endParaRPr lang="en-CA" dirty="0"/>
           </a:p>
           <a:p>
             <a:endParaRPr lang="en-CA" dirty="0"/>
@@ -9661,13 +9289,6 @@
   <p:clrMapOvr>
     <a:masterClrMapping/>
   </p:clrMapOvr>
-  <p:timing>
-    <p:tnLst>
-      <p:par>
-        <p:cTn id="1" dur="indefinite" restart="never" nodeType="tmRoot"/>
-      </p:par>
-    </p:tnLst>
-  </p:timing>
 </p:sld>
 </file>
 
@@ -9704,10 +9325,9 @@
           <a:lstStyle/>
           <a:p>
             <a:r>
-              <a:rPr lang="en-CA" dirty="0" smtClean="0"/>
+              <a:rPr lang="en-CA" dirty="0"/>
               <a:t>An Overview of HVAC systems and equipment</a:t>
             </a:r>
-            <a:endParaRPr lang="en-CA" dirty="0"/>
           </a:p>
         </p:txBody>
       </p:sp>
@@ -9732,21 +9352,13 @@
               <a:buNone/>
             </a:pPr>
             <a:r>
-              <a:rPr lang="en-CA" dirty="0" smtClean="0"/>
-              <a:t>Unitary - </a:t>
-            </a:r>
-            <a:r>
-              <a:rPr lang="en-CA" dirty="0"/>
-              <a:t>An HVAC system comprised of one or more factory built </a:t>
-            </a:r>
-            <a:r>
-              <a:rPr lang="en-CA" dirty="0" smtClean="0"/>
-              <a:t>assemblies</a:t>
-            </a:r>
-          </a:p>
-          <a:p>
-            <a:r>
-              <a:rPr lang="en-CA" dirty="0" smtClean="0"/>
+              <a:rPr lang="en-CA" dirty="0"/>
+              <a:t>Unitary - An HVAC system comprised of one or more factory built assemblies</a:t>
+            </a:r>
+          </a:p>
+          <a:p>
+            <a:r>
+              <a:rPr lang="en-CA" dirty="0"/>
               <a:t>Packaged – a single package</a:t>
             </a:r>
           </a:p>
@@ -9754,7 +9366,7 @@
             <a:pPr marL="0" indent="0">
               <a:buNone/>
             </a:pPr>
-            <a:endParaRPr lang="en-CA" dirty="0" smtClean="0"/>
+            <a:endParaRPr lang="en-CA" dirty="0"/>
           </a:p>
           <a:p>
             <a:pPr marL="914400" lvl="2" indent="0">
@@ -9766,7 +9378,7 @@
             <a:pPr marL="914400" lvl="2" indent="0">
               <a:buNone/>
             </a:pPr>
-            <a:endParaRPr lang="en-CA" dirty="0" smtClean="0"/>
+            <a:endParaRPr lang="en-CA" dirty="0"/>
           </a:p>
           <a:p>
             <a:pPr lvl="2"/>
@@ -9776,7 +9388,7 @@
             <a:endParaRPr lang="en-CA" dirty="0"/>
           </a:p>
           <a:p>
-            <a:endParaRPr lang="en-CA" dirty="0" smtClean="0"/>
+            <a:endParaRPr lang="en-CA" dirty="0"/>
           </a:p>
           <a:p>
             <a:pPr lvl="2"/>
@@ -9784,7 +9396,7 @@
           </a:p>
           <a:p>
             <a:pPr lvl="2"/>
-            <a:endParaRPr lang="en-CA" dirty="0" smtClean="0"/>
+            <a:endParaRPr lang="en-CA" dirty="0"/>
           </a:p>
           <a:p>
             <a:endParaRPr lang="en-CA" dirty="0"/>
@@ -9854,20 +9466,12 @@
               </a:spcAft>
             </a:pPr>
             <a:r>
-              <a:rPr lang="en-CA" sz="1200" dirty="0" smtClean="0">
-                <a:latin typeface="Bookman Old Style" panose="02050604050505020204" pitchFamily="18" charset="0"/>
-                <a:ea typeface="Calibri" panose="020F0502020204030204" pitchFamily="34" charset="0"/>
-                <a:cs typeface="Times New Roman" panose="02020603050405020304" pitchFamily="18" charset="0"/>
-              </a:rPr>
-              <a:t>Figure 9. Packaged system (Petro </a:t>
-            </a:r>
-            <a:r>
               <a:rPr lang="en-CA" sz="1200" dirty="0">
                 <a:latin typeface="Bookman Old Style" panose="02050604050505020204" pitchFamily="18" charset="0"/>
                 <a:ea typeface="Calibri" panose="020F0502020204030204" pitchFamily="34" charset="0"/>
                 <a:cs typeface="Times New Roman" panose="02020603050405020304" pitchFamily="18" charset="0"/>
               </a:rPr>
-              <a:t>Home Services, 2023)</a:t>
+              <a:t>Figure 9. Packaged system (Petro Home Services, 2023)</a:t>
             </a:r>
             <a:endParaRPr lang="en-CA" sz="1200" dirty="0">
               <a:effectLst/>
@@ -9888,13 +9492,6 @@
   <p:clrMapOvr>
     <a:masterClrMapping/>
   </p:clrMapOvr>
-  <p:timing>
-    <p:tnLst>
-      <p:par>
-        <p:cTn id="1" dur="indefinite" restart="never" nodeType="tmRoot"/>
-      </p:par>
-    </p:tnLst>
-  </p:timing>
 </p:sld>
 </file>
 
@@ -9931,10 +9528,9 @@
           <a:lstStyle/>
           <a:p>
             <a:r>
-              <a:rPr lang="en-CA" dirty="0" smtClean="0"/>
+              <a:rPr lang="en-CA" dirty="0"/>
               <a:t>An Overview of HVAC systems and equipment</a:t>
             </a:r>
-            <a:endParaRPr lang="en-CA" dirty="0"/>
           </a:p>
         </p:txBody>
       </p:sp>
@@ -9961,7 +9557,7 @@
           <a:lstStyle/>
           <a:p>
             <a:r>
-              <a:rPr lang="en-CA" dirty="0" smtClean="0"/>
+              <a:rPr lang="en-CA" dirty="0"/>
               <a:t>Split system</a:t>
             </a:r>
           </a:p>
@@ -9969,31 +9565,27 @@
             <a:pPr lvl="1"/>
             <a:r>
               <a:rPr lang="en-CA" dirty="0"/>
-              <a:t>M</a:t>
-            </a:r>
-            <a:r>
-              <a:rPr lang="en-CA" dirty="0" smtClean="0"/>
-              <a:t>ore than one assembly </a:t>
+              <a:t>More than one assembly </a:t>
             </a:r>
           </a:p>
           <a:p>
             <a:pPr lvl="1"/>
             <a:r>
-              <a:rPr lang="en-CA" dirty="0" smtClean="0"/>
+              <a:rPr lang="en-CA" dirty="0"/>
               <a:t>Indoor separated from outdoor</a:t>
             </a:r>
           </a:p>
           <a:p>
             <a:pPr lvl="1"/>
             <a:r>
-              <a:rPr lang="en-CA" dirty="0" smtClean="0"/>
+              <a:rPr lang="en-CA" dirty="0"/>
               <a:t>Multi-split</a:t>
             </a:r>
           </a:p>
           <a:p>
             <a:pPr lvl="1"/>
             <a:r>
-              <a:rPr lang="en-CA" dirty="0" smtClean="0"/>
+              <a:rPr lang="en-CA" dirty="0"/>
               <a:t>Ducted</a:t>
             </a:r>
           </a:p>
@@ -10007,7 +9599,7 @@
             <a:pPr marL="914400" lvl="2" indent="0">
               <a:buNone/>
             </a:pPr>
-            <a:endParaRPr lang="en-CA" dirty="0" smtClean="0"/>
+            <a:endParaRPr lang="en-CA" dirty="0"/>
           </a:p>
           <a:p>
             <a:pPr lvl="2"/>
@@ -10017,7 +9609,7 @@
             <a:endParaRPr lang="en-CA" dirty="0"/>
           </a:p>
           <a:p>
-            <a:endParaRPr lang="en-CA" dirty="0" smtClean="0"/>
+            <a:endParaRPr lang="en-CA" dirty="0"/>
           </a:p>
           <a:p>
             <a:pPr lvl="2"/>
@@ -10025,7 +9617,7 @@
           </a:p>
           <a:p>
             <a:pPr lvl="2"/>
-            <a:endParaRPr lang="en-CA" dirty="0" smtClean="0"/>
+            <a:endParaRPr lang="en-CA" dirty="0"/>
           </a:p>
           <a:p>
             <a:endParaRPr lang="en-CA" dirty="0"/>
@@ -10095,20 +9687,12 @@
               </a:spcAft>
             </a:pPr>
             <a:r>
-              <a:rPr lang="en-CA" sz="1200" dirty="0" smtClean="0">
-                <a:latin typeface="Bookman Old Style" panose="02050604050505020204" pitchFamily="18" charset="0"/>
-                <a:ea typeface="Calibri" panose="020F0502020204030204" pitchFamily="34" charset="0"/>
-                <a:cs typeface="Times New Roman" panose="02020603050405020304" pitchFamily="18" charset="0"/>
-              </a:rPr>
-              <a:t>Figure 10. Split system (Petro </a:t>
-            </a:r>
-            <a:r>
               <a:rPr lang="en-CA" sz="1200" dirty="0">
                 <a:latin typeface="Bookman Old Style" panose="02050604050505020204" pitchFamily="18" charset="0"/>
                 <a:ea typeface="Calibri" panose="020F0502020204030204" pitchFamily="34" charset="0"/>
                 <a:cs typeface="Times New Roman" panose="02020603050405020304" pitchFamily="18" charset="0"/>
               </a:rPr>
-              <a:t>Home Services, 2023)</a:t>
+              <a:t>Figure 10. Split system (Petro Home Services, 2023)</a:t>
             </a:r>
             <a:endParaRPr lang="en-CA" sz="1200" dirty="0">
               <a:effectLst/>
@@ -10129,13 +9713,6 @@
   <p:clrMapOvr>
     <a:masterClrMapping/>
   </p:clrMapOvr>
-  <p:timing>
-    <p:tnLst>
-      <p:par>
-        <p:cTn id="1" dur="indefinite" restart="never" nodeType="tmRoot"/>
-      </p:par>
-    </p:tnLst>
-  </p:timing>
 </p:sld>
 </file>
 
@@ -10172,10 +9749,9 @@
           <a:lstStyle/>
           <a:p>
             <a:r>
-              <a:rPr lang="en-CA" dirty="0" smtClean="0"/>
+              <a:rPr lang="en-CA" dirty="0"/>
               <a:t>An Overview of HVAC systems and equipment</a:t>
             </a:r>
-            <a:endParaRPr lang="en-CA" dirty="0"/>
           </a:p>
         </p:txBody>
       </p:sp>
@@ -10202,14 +9778,14 @@
           <a:lstStyle/>
           <a:p>
             <a:r>
-              <a:rPr lang="en-CA" dirty="0" smtClean="0"/>
+              <a:rPr lang="en-CA" dirty="0"/>
               <a:t>Split cont.</a:t>
             </a:r>
           </a:p>
           <a:p>
             <a:pPr lvl="1"/>
             <a:r>
-              <a:rPr lang="en-CA" dirty="0" smtClean="0"/>
+              <a:rPr lang="en-CA" dirty="0"/>
               <a:t>Ductless </a:t>
             </a:r>
           </a:p>
@@ -10217,7 +9793,7 @@
             <a:pPr marL="0" indent="0">
               <a:buNone/>
             </a:pPr>
-            <a:endParaRPr lang="en-CA" dirty="0" smtClean="0"/>
+            <a:endParaRPr lang="en-CA" dirty="0"/>
           </a:p>
           <a:p>
             <a:pPr marL="914400" lvl="2" indent="0">
@@ -10229,7 +9805,7 @@
             <a:pPr marL="914400" lvl="2" indent="0">
               <a:buNone/>
             </a:pPr>
-            <a:endParaRPr lang="en-CA" dirty="0" smtClean="0"/>
+            <a:endParaRPr lang="en-CA" dirty="0"/>
           </a:p>
           <a:p>
             <a:pPr lvl="2"/>
@@ -10239,7 +9815,7 @@
             <a:endParaRPr lang="en-CA" dirty="0"/>
           </a:p>
           <a:p>
-            <a:endParaRPr lang="en-CA" dirty="0" smtClean="0"/>
+            <a:endParaRPr lang="en-CA" dirty="0"/>
           </a:p>
           <a:p>
             <a:pPr lvl="2"/>
@@ -10247,7 +9823,7 @@
           </a:p>
           <a:p>
             <a:pPr lvl="2"/>
-            <a:endParaRPr lang="en-CA" dirty="0" smtClean="0"/>
+            <a:endParaRPr lang="en-CA" dirty="0"/>
           </a:p>
           <a:p>
             <a:endParaRPr lang="en-CA" dirty="0"/>
@@ -10317,36 +9893,12 @@
               </a:spcAft>
             </a:pPr>
             <a:r>
-              <a:rPr lang="en-CA" sz="1200" dirty="0" smtClean="0">
-                <a:latin typeface="Bookman Old Style" panose="02050604050505020204" pitchFamily="18" charset="0"/>
-                <a:ea typeface="Calibri" panose="020F0502020204030204" pitchFamily="34" charset="0"/>
-                <a:cs typeface="Times New Roman" panose="02020603050405020304" pitchFamily="18" charset="0"/>
-              </a:rPr>
-              <a:t>Figure 11. </a:t>
-            </a:r>
-            <a:r>
               <a:rPr lang="en-CA" sz="1200" dirty="0">
                 <a:latin typeface="Bookman Old Style" panose="02050604050505020204" pitchFamily="18" charset="0"/>
                 <a:ea typeface="Calibri" panose="020F0502020204030204" pitchFamily="34" charset="0"/>
                 <a:cs typeface="Times New Roman" panose="02020603050405020304" pitchFamily="18" charset="0"/>
               </a:rPr>
-              <a:t>M</a:t>
-            </a:r>
-            <a:r>
-              <a:rPr lang="en-CA" sz="1200" dirty="0" smtClean="0">
-                <a:latin typeface="Bookman Old Style" panose="02050604050505020204" pitchFamily="18" charset="0"/>
-                <a:ea typeface="Calibri" panose="020F0502020204030204" pitchFamily="34" charset="0"/>
-                <a:cs typeface="Times New Roman" panose="02020603050405020304" pitchFamily="18" charset="0"/>
-              </a:rPr>
-              <a:t>ini-split (Fujitsu </a:t>
-            </a:r>
-            <a:r>
-              <a:rPr lang="en-CA" sz="1200" dirty="0">
-                <a:latin typeface="Bookman Old Style" panose="02050604050505020204" pitchFamily="18" charset="0"/>
-                <a:ea typeface="Calibri" panose="020F0502020204030204" pitchFamily="34" charset="0"/>
-                <a:cs typeface="Times New Roman" panose="02020603050405020304" pitchFamily="18" charset="0"/>
-              </a:rPr>
-              <a:t>General , 2023)</a:t>
+              <a:t>Figure 11. Mini-split (Fujitsu General , 2023)</a:t>
             </a:r>
             <a:endParaRPr lang="en-CA" sz="1200" dirty="0">
               <a:effectLst/>
@@ -10367,13 +9919,6 @@
   <p:clrMapOvr>
     <a:masterClrMapping/>
   </p:clrMapOvr>
-  <p:timing>
-    <p:tnLst>
-      <p:par>
-        <p:cTn id="1" dur="indefinite" restart="never" nodeType="tmRoot"/>
-      </p:par>
-    </p:tnLst>
-  </p:timing>
 </p:sld>
 </file>
 
@@ -10410,14 +9955,13 @@
           <a:lstStyle/>
           <a:p>
             <a:r>
-              <a:rPr lang="en-CA" dirty="0" err="1" smtClean="0"/>
+              <a:rPr lang="en-CA" dirty="0" err="1"/>
               <a:t>OpensTudio</a:t>
             </a:r>
             <a:r>
-              <a:rPr lang="en-CA" dirty="0" smtClean="0"/>
+              <a:rPr lang="en-CA" dirty="0"/>
               <a:t> HVAC</a:t>
             </a:r>
-            <a:endParaRPr lang="en-CA" dirty="0"/>
           </a:p>
         </p:txBody>
       </p:sp>
@@ -10437,46 +9981,46 @@
           <a:lstStyle/>
           <a:p>
             <a:r>
-              <a:rPr lang="en-CA" dirty="0" smtClean="0"/>
+              <a:rPr lang="en-CA" dirty="0"/>
               <a:t>Air and water based</a:t>
             </a:r>
           </a:p>
           <a:p>
             <a:pPr lvl="1"/>
             <a:r>
-              <a:rPr lang="en-CA" dirty="0" smtClean="0"/>
+              <a:rPr lang="en-CA" dirty="0"/>
               <a:t>Conditioning air/water and circulating it</a:t>
             </a:r>
           </a:p>
           <a:p>
             <a:pPr lvl="1"/>
             <a:r>
-              <a:rPr lang="en-CA" dirty="0" smtClean="0"/>
+              <a:rPr lang="en-CA" dirty="0"/>
               <a:t>Sometimes brine instead of water</a:t>
             </a:r>
           </a:p>
           <a:p>
             <a:r>
-              <a:rPr lang="en-CA" dirty="0" smtClean="0"/>
+              <a:rPr lang="en-CA" dirty="0"/>
               <a:t>Fundamental/component level view</a:t>
             </a:r>
           </a:p>
           <a:p>
             <a:r>
-              <a:rPr lang="en-CA" dirty="0" smtClean="0"/>
+              <a:rPr lang="en-CA" dirty="0"/>
               <a:t>Heating</a:t>
             </a:r>
           </a:p>
           <a:p>
             <a:pPr lvl="1"/>
             <a:r>
-              <a:rPr lang="en-CA" dirty="0" smtClean="0"/>
+              <a:rPr lang="en-CA" dirty="0"/>
               <a:t>Electric coil, gas coil, direct expansion coil, water coil</a:t>
             </a:r>
           </a:p>
           <a:p>
             <a:r>
-              <a:rPr lang="en-CA" dirty="0" smtClean="0"/>
+              <a:rPr lang="en-CA" dirty="0"/>
               <a:t>Cooling</a:t>
             </a:r>
           </a:p>
@@ -10484,24 +10028,12 @@
             <a:pPr lvl="1"/>
             <a:r>
               <a:rPr lang="en-CA" dirty="0"/>
-              <a:t>C</a:t>
-            </a:r>
-            <a:r>
-              <a:rPr lang="en-CA" dirty="0" smtClean="0"/>
-              <a:t>ooling tower, chiller, direct </a:t>
-            </a:r>
-            <a:r>
-              <a:rPr lang="en-CA" dirty="0"/>
-              <a:t>expansion </a:t>
-            </a:r>
-            <a:r>
-              <a:rPr lang="en-CA" dirty="0" smtClean="0"/>
-              <a:t>coil, water coil</a:t>
+              <a:t>Cooling tower, chiller, direct expansion coil, water coil</a:t>
             </a:r>
           </a:p>
           <a:p>
             <a:pPr lvl="1"/>
-            <a:endParaRPr lang="en-CA" dirty="0" smtClean="0"/>
+            <a:endParaRPr lang="en-CA" dirty="0"/>
           </a:p>
           <a:p>
             <a:endParaRPr lang="en-CA" dirty="0"/>
@@ -10518,13 +10050,6 @@
   <p:clrMapOvr>
     <a:masterClrMapping/>
   </p:clrMapOvr>
-  <p:timing>
-    <p:tnLst>
-      <p:par>
-        <p:cTn id="1" dur="indefinite" restart="never" nodeType="tmRoot"/>
-      </p:par>
-    </p:tnLst>
-  </p:timing>
 </p:sld>
 </file>
 
@@ -10561,10 +10086,9 @@
           <a:lstStyle/>
           <a:p>
             <a:r>
-              <a:rPr lang="en-CA" dirty="0" smtClean="0"/>
+              <a:rPr lang="en-CA" dirty="0"/>
               <a:t>Ventilation: HRV &amp; ERV</a:t>
             </a:r>
-            <a:endParaRPr lang="en-CA" dirty="0"/>
           </a:p>
         </p:txBody>
       </p:sp>
@@ -10584,42 +10108,41 @@
           <a:lstStyle/>
           <a:p>
             <a:r>
-              <a:rPr lang="en-CA" dirty="0" smtClean="0"/>
+              <a:rPr lang="en-CA" dirty="0"/>
               <a:t>Introduce outdoor air</a:t>
             </a:r>
           </a:p>
           <a:p>
-            <a:endParaRPr lang="en-CA" dirty="0" smtClean="0"/>
-          </a:p>
-          <a:p>
-            <a:r>
-              <a:rPr lang="en-CA" dirty="0" smtClean="0"/>
+            <a:endParaRPr lang="en-CA" dirty="0"/>
+          </a:p>
+          <a:p>
+            <a:r>
+              <a:rPr lang="en-CA" dirty="0"/>
               <a:t>Exhaust stale indoor air </a:t>
             </a:r>
           </a:p>
           <a:p>
-            <a:endParaRPr lang="en-CA" dirty="0" smtClean="0"/>
-          </a:p>
-          <a:p>
-            <a:r>
-              <a:rPr lang="en-CA" dirty="0" smtClean="0"/>
+            <a:endParaRPr lang="en-CA" dirty="0"/>
+          </a:p>
+          <a:p>
+            <a:r>
+              <a:rPr lang="en-CA" dirty="0"/>
               <a:t>Opportunity to save energy by preheat/cooling </a:t>
             </a:r>
           </a:p>
           <a:p>
             <a:pPr lvl="1"/>
             <a:r>
-              <a:rPr lang="en-CA" dirty="0" smtClean="0"/>
+              <a:rPr lang="en-CA" dirty="0"/>
               <a:t>Heat recovery ventilator (HRV)</a:t>
             </a:r>
           </a:p>
           <a:p>
             <a:pPr lvl="1"/>
             <a:r>
-              <a:rPr lang="en-CA" dirty="0" smtClean="0"/>
+              <a:rPr lang="en-CA" dirty="0"/>
               <a:t>Energy recovery ventilator (ERV)</a:t>
             </a:r>
-            <a:endParaRPr lang="en-CA" dirty="0"/>
           </a:p>
         </p:txBody>
       </p:sp>
@@ -10633,13 +10156,6 @@
   <p:clrMapOvr>
     <a:masterClrMapping/>
   </p:clrMapOvr>
-  <p:timing>
-    <p:tnLst>
-      <p:par>
-        <p:cTn id="1" dur="indefinite" restart="never" nodeType="tmRoot"/>
-      </p:par>
-    </p:tnLst>
-  </p:timing>
 </p:sld>
 </file>
 
@@ -10665,10 +10181,10 @@
           <p:cNvPr id="10" name="Picture 9" descr="curled page">
             <a:extLst>
               <a:ext uri="{FF2B5EF4-FFF2-40B4-BE49-F238E27FC236}">
-                <a16:creationId xmlns="" xmlns:a16="http://schemas.microsoft.com/office/drawing/2014/main" id="{F54CE4C8-2431-43FB-87C3-391A3BFF806C}"/>
+                <a16:creationId xmlns:a16="http://schemas.microsoft.com/office/drawing/2014/main" id="{F54CE4C8-2431-43FB-87C3-391A3BFF806C}"/>
               </a:ext>
               <a:ext uri="{C183D7F6-B498-43B3-948B-1728B52AA6E4}">
-                <adec:decorative xmlns="" xmlns:adec="http://schemas.microsoft.com/office/drawing/2017/decorative" val="1"/>
+                <adec:decorative xmlns:adec="http://schemas.microsoft.com/office/drawing/2017/decorative" val="1"/>
               </a:ext>
             </a:extLst>
           </p:cNvPr>
@@ -10698,7 +10214,7 @@
           <p:cNvPr id="2" name="Title 1">
             <a:extLst>
               <a:ext uri="{FF2B5EF4-FFF2-40B4-BE49-F238E27FC236}">
-                <a16:creationId xmlns="" xmlns:a16="http://schemas.microsoft.com/office/drawing/2014/main" id="{DFF32E04-E3CE-4175-B0D3-33D69BCB059A}"/>
+                <a16:creationId xmlns:a16="http://schemas.microsoft.com/office/drawing/2014/main" id="{DFF32E04-E3CE-4175-B0D3-33D69BCB059A}"/>
               </a:ext>
             </a:extLst>
           </p:cNvPr>
@@ -10715,10 +10231,9 @@
           <a:lstStyle/>
           <a:p>
             <a:r>
-              <a:rPr lang="en-US" dirty="0" smtClean="0"/>
+              <a:rPr lang="en-US" dirty="0"/>
               <a:t>The Goal of this Workshop</a:t>
             </a:r>
-            <a:endParaRPr lang="en-US" dirty="0"/>
           </a:p>
         </p:txBody>
       </p:sp>
@@ -10727,7 +10242,7 @@
           <p:cNvPr id="4" name="Text Placeholder 3">
             <a:extLst>
               <a:ext uri="{FF2B5EF4-FFF2-40B4-BE49-F238E27FC236}">
-                <a16:creationId xmlns="" xmlns:a16="http://schemas.microsoft.com/office/drawing/2014/main" id="{5BA0452F-E4D7-4ED7-A292-A7A5A20AC516}"/>
+                <a16:creationId xmlns:a16="http://schemas.microsoft.com/office/drawing/2014/main" id="{5BA0452F-E4D7-4ED7-A292-A7A5A20AC516}"/>
               </a:ext>
             </a:extLst>
           </p:cNvPr>
@@ -10750,7 +10265,7 @@
           <a:p>
             <a:pPr algn="l"/>
             <a:r>
-              <a:rPr lang="en-US" dirty="0" smtClean="0"/>
+              <a:rPr lang="en-US" dirty="0"/>
               <a:t>By the end, participants should be able to:</a:t>
             </a:r>
           </a:p>
@@ -10760,7 +10275,7 @@
               <a:buChar char="•"/>
             </a:pPr>
             <a:r>
-              <a:rPr lang="en-US" dirty="0" smtClean="0"/>
+              <a:rPr lang="en-US" dirty="0"/>
               <a:t>Model using OpenStudio </a:t>
             </a:r>
           </a:p>
@@ -10770,24 +10285,23 @@
               <a:buChar char="•"/>
             </a:pPr>
             <a:r>
-              <a:rPr lang="en-US" dirty="0" smtClean="0"/>
+              <a:rPr lang="en-US" dirty="0"/>
               <a:t>Ask questions</a:t>
             </a:r>
-            <a:endParaRPr lang="en-US" dirty="0" smtClean="0"/>
           </a:p>
           <a:p>
             <a:pPr marL="285750" indent="-285750" algn="l">
               <a:buFont typeface="Arial" panose="020B0604020202020204" pitchFamily="34" charset="0"/>
               <a:buChar char="•"/>
             </a:pPr>
-            <a:endParaRPr lang="en-US" dirty="0" smtClean="0"/>
+            <a:endParaRPr lang="en-US" dirty="0"/>
           </a:p>
           <a:p>
             <a:pPr marL="285750" indent="-285750">
               <a:buFont typeface="Arial" panose="020B0604020202020204" pitchFamily="34" charset="0"/>
               <a:buChar char="•"/>
             </a:pPr>
-            <a:endParaRPr lang="en-US" dirty="0" smtClean="0"/>
+            <a:endParaRPr lang="en-US" dirty="0"/>
           </a:p>
         </p:txBody>
       </p:sp>
@@ -10796,7 +10310,7 @@
           <p:cNvPr id="6" name="Content Placeholder 5" descr="Mathematics workings">
             <a:extLst>
               <a:ext uri="{FF2B5EF4-FFF2-40B4-BE49-F238E27FC236}">
-                <a16:creationId xmlns="" xmlns:a16="http://schemas.microsoft.com/office/drawing/2014/main" id="{E4523323-1EB5-4AAF-95C6-A31523B3F695}"/>
+                <a16:creationId xmlns:a16="http://schemas.microsoft.com/office/drawing/2014/main" id="{E4523323-1EB5-4AAF-95C6-A31523B3F695}"/>
               </a:ext>
             </a:extLst>
           </p:cNvPr>
@@ -10892,21 +10406,8 @@
                   <a:schemeClr val="bg1"/>
                 </a:solidFill>
               </a:rPr>
-              <a:t>Figure 1. Energy transfers in a building (Payette, </a:t>
-            </a:r>
-            <a:r>
-              <a:rPr lang="en-CA" sz="1200" dirty="0" smtClean="0">
-                <a:solidFill>
-                  <a:schemeClr val="bg1"/>
-                </a:solidFill>
-              </a:rPr>
-              <a:t>2018)</a:t>
-            </a:r>
-            <a:endParaRPr lang="en-CA" sz="1200" dirty="0">
-              <a:solidFill>
-                <a:schemeClr val="bg1"/>
-              </a:solidFill>
-            </a:endParaRPr>
+              <a:t>Figure 1. Energy transfers in a building (Payette, 2018)</a:t>
+            </a:r>
           </a:p>
         </p:txBody>
       </p:sp>
@@ -10920,13 +10421,6 @@
   <p:clrMapOvr>
     <a:masterClrMapping/>
   </p:clrMapOvr>
-  <p:timing>
-    <p:tnLst>
-      <p:par>
-        <p:cTn id="1" dur="indefinite" restart="never" nodeType="tmRoot"/>
-      </p:par>
-    </p:tnLst>
-  </p:timing>
 </p:sld>
 </file>
 
@@ -10963,10 +10457,9 @@
           <a:lstStyle/>
           <a:p>
             <a:r>
-              <a:rPr lang="en-CA" dirty="0" smtClean="0"/>
+              <a:rPr lang="en-CA" dirty="0"/>
               <a:t>Ventilation: HRV</a:t>
             </a:r>
-            <a:endParaRPr lang="en-CA" dirty="0"/>
           </a:p>
         </p:txBody>
       </p:sp>
@@ -11023,11 +10516,11 @@
               <a:buChar char="•"/>
             </a:pPr>
             <a:r>
-              <a:rPr lang="en-CA" dirty="0" smtClean="0"/>
+              <a:rPr lang="en-CA" dirty="0"/>
               <a:t>Thermal energy only </a:t>
             </a:r>
             <a:r>
-              <a:rPr lang="en-CA" dirty="0" smtClean="0">
+              <a:rPr lang="en-CA" dirty="0">
                 <a:sym typeface="Wingdings" panose="05000000000000000000" pitchFamily="2" charset="2"/>
               </a:rPr>
               <a:t> heat</a:t>
@@ -11038,7 +10531,7 @@
               <a:buFont typeface="Arial" panose="020B0604020202020204" pitchFamily="34" charset="0"/>
               <a:buChar char="•"/>
             </a:pPr>
-            <a:endParaRPr lang="en-CA" dirty="0" smtClean="0">
+            <a:endParaRPr lang="en-CA" dirty="0">
               <a:sym typeface="Wingdings" panose="05000000000000000000" pitchFamily="2" charset="2"/>
             </a:endParaRPr>
           </a:p>
@@ -11048,7 +10541,7 @@
               <a:buChar char="•"/>
             </a:pPr>
             <a:r>
-              <a:rPr lang="en-CA" dirty="0" smtClean="0">
+              <a:rPr lang="en-CA" dirty="0">
                 <a:sym typeface="Wingdings" panose="05000000000000000000" pitchFamily="2" charset="2"/>
               </a:rPr>
               <a:t>Leakage (cross contamination) </a:t>
@@ -11093,20 +10586,12 @@
               </a:spcAft>
             </a:pPr>
             <a:r>
-              <a:rPr lang="en-CA" sz="1200" dirty="0" smtClean="0">
-                <a:latin typeface="Bookman Old Style" panose="02050604050505020204" pitchFamily="18" charset="0"/>
-                <a:ea typeface="Calibri" panose="020F0502020204030204" pitchFamily="34" charset="0"/>
-                <a:cs typeface="Times New Roman" panose="02020603050405020304" pitchFamily="18" charset="0"/>
-              </a:rPr>
-              <a:t>Figure 12. ERV schematic (U.S</a:t>
-            </a:r>
-            <a:r>
               <a:rPr lang="en-CA" sz="1200" dirty="0">
                 <a:latin typeface="Bookman Old Style" panose="02050604050505020204" pitchFamily="18" charset="0"/>
                 <a:ea typeface="Calibri" panose="020F0502020204030204" pitchFamily="34" charset="0"/>
                 <a:cs typeface="Times New Roman" panose="02020603050405020304" pitchFamily="18" charset="0"/>
               </a:rPr>
-              <a:t>. Department of Energy, 2021)</a:t>
+              <a:t>Figure 12. ERV schematic (U.S. Department of Energy, 2021)</a:t>
             </a:r>
             <a:endParaRPr lang="en-CA" sz="1200" dirty="0">
               <a:effectLst/>
@@ -11127,13 +10612,6 @@
   <p:clrMapOvr>
     <a:masterClrMapping/>
   </p:clrMapOvr>
-  <p:timing>
-    <p:tnLst>
-      <p:par>
-        <p:cTn id="1" dur="indefinite" restart="never" nodeType="tmRoot"/>
-      </p:par>
-    </p:tnLst>
-  </p:timing>
 </p:sld>
 </file>
 
@@ -11170,10 +10648,9 @@
           <a:lstStyle/>
           <a:p>
             <a:r>
-              <a:rPr lang="en-CA" dirty="0" smtClean="0"/>
+              <a:rPr lang="en-CA" dirty="0"/>
               <a:t>Ventilation: ERV</a:t>
             </a:r>
-            <a:endParaRPr lang="en-CA" dirty="0"/>
           </a:p>
         </p:txBody>
       </p:sp>
@@ -11193,73 +10670,72 @@
           <a:lstStyle/>
           <a:p>
             <a:r>
-              <a:rPr lang="en-CA" dirty="0" smtClean="0"/>
+              <a:rPr lang="en-CA" dirty="0"/>
               <a:t>Heat and moisture </a:t>
             </a:r>
             <a:r>
-              <a:rPr lang="en-CA" dirty="0" smtClean="0">
+              <a:rPr lang="en-CA" dirty="0">
                 <a:sym typeface="Wingdings" panose="05000000000000000000" pitchFamily="2" charset="2"/>
               </a:rPr>
               <a:t> energy exchange</a:t>
             </a:r>
-            <a:endParaRPr lang="en-CA" dirty="0" smtClean="0"/>
-          </a:p>
-          <a:p>
-            <a:r>
-              <a:rPr lang="en-CA" dirty="0" smtClean="0"/>
+            <a:endParaRPr lang="en-CA" dirty="0"/>
+          </a:p>
+          <a:p>
+            <a:r>
+              <a:rPr lang="en-CA" dirty="0"/>
               <a:t>ERV core</a:t>
             </a:r>
           </a:p>
           <a:p>
             <a:pPr lvl="1"/>
             <a:r>
-              <a:rPr lang="en-CA" dirty="0" smtClean="0"/>
+              <a:rPr lang="en-CA" dirty="0"/>
               <a:t>Cross flow</a:t>
             </a:r>
           </a:p>
           <a:p>
             <a:pPr lvl="1"/>
             <a:r>
-              <a:rPr lang="en-CA" dirty="0" smtClean="0"/>
+              <a:rPr lang="en-CA" dirty="0"/>
               <a:t>Moisture wicking material</a:t>
             </a:r>
           </a:p>
           <a:p>
             <a:r>
-              <a:rPr lang="en-CA" dirty="0" smtClean="0"/>
+              <a:rPr lang="en-CA" dirty="0"/>
               <a:t>Enthalpy wheel</a:t>
             </a:r>
           </a:p>
           <a:p>
             <a:pPr lvl="1"/>
             <a:r>
-              <a:rPr lang="en-CA" dirty="0" smtClean="0"/>
+              <a:rPr lang="en-CA" dirty="0"/>
               <a:t>Rotating wheel</a:t>
             </a:r>
           </a:p>
           <a:p>
             <a:pPr lvl="1"/>
             <a:r>
-              <a:rPr lang="en-CA" dirty="0" smtClean="0"/>
+              <a:rPr lang="en-CA" dirty="0"/>
               <a:t>Same type of material as a core</a:t>
             </a:r>
           </a:p>
           <a:p>
             <a:pPr lvl="1"/>
             <a:r>
-              <a:rPr lang="en-CA" dirty="0" smtClean="0">
+              <a:rPr lang="en-CA" dirty="0">
                 <a:hlinkClick r:id="rId2"/>
               </a:rPr>
               <a:t>Inside view </a:t>
             </a:r>
-            <a:endParaRPr lang="en-CA" dirty="0" smtClean="0"/>
-          </a:p>
-          <a:p>
-            <a:r>
-              <a:rPr lang="en-CA" dirty="0" smtClean="0"/>
+            <a:endParaRPr lang="en-CA" dirty="0"/>
+          </a:p>
+          <a:p>
+            <a:r>
+              <a:rPr lang="en-CA" dirty="0"/>
               <a:t>Cross contamination </a:t>
             </a:r>
-            <a:endParaRPr lang="en-CA" dirty="0"/>
           </a:p>
         </p:txBody>
       </p:sp>
@@ -11315,20 +10791,12 @@
               </a:spcAft>
             </a:pPr>
             <a:r>
-              <a:rPr lang="en-CA" sz="1200" dirty="0" smtClean="0">
-                <a:latin typeface="Bookman Old Style" panose="02050604050505020204" pitchFamily="18" charset="0"/>
-                <a:ea typeface="Calibri" panose="020F0502020204030204" pitchFamily="34" charset="0"/>
-                <a:cs typeface="Times New Roman" panose="02020603050405020304" pitchFamily="18" charset="0"/>
-              </a:rPr>
-              <a:t>Figure 13. ERV core (Mitsubishi </a:t>
-            </a:r>
-            <a:r>
               <a:rPr lang="en-CA" sz="1200" dirty="0">
                 <a:latin typeface="Bookman Old Style" panose="02050604050505020204" pitchFamily="18" charset="0"/>
                 <a:ea typeface="Calibri" panose="020F0502020204030204" pitchFamily="34" charset="0"/>
                 <a:cs typeface="Times New Roman" panose="02020603050405020304" pitchFamily="18" charset="0"/>
               </a:rPr>
-              <a:t>Electric Sales Canada, 2021)</a:t>
+              <a:t>Figure 13. ERV core (Mitsubishi Electric Sales Canada, 2021)</a:t>
             </a:r>
             <a:endParaRPr lang="en-CA" sz="1200" dirty="0">
               <a:effectLst/>
@@ -11349,13 +10817,6 @@
   <p:clrMapOvr>
     <a:masterClrMapping/>
   </p:clrMapOvr>
-  <p:timing>
-    <p:tnLst>
-      <p:par>
-        <p:cTn id="1" dur="indefinite" restart="never" nodeType="tmRoot"/>
-      </p:par>
-    </p:tnLst>
-  </p:timing>
 </p:sld>
 </file>
 
@@ -11392,10 +10853,9 @@
           <a:lstStyle/>
           <a:p>
             <a:r>
-              <a:rPr lang="en-CA" dirty="0" smtClean="0"/>
+              <a:rPr lang="en-CA" dirty="0"/>
               <a:t>Examples of HVAC systems</a:t>
             </a:r>
-            <a:endParaRPr lang="en-CA" dirty="0"/>
           </a:p>
         </p:txBody>
       </p:sp>
@@ -11417,21 +10877,21 @@
               <a:lstStyle/>
               <a:p>
                 <a:r>
-                  <a:rPr lang="en-CA" dirty="0" smtClean="0"/>
+                  <a:rPr lang="en-CA" dirty="0"/>
                   <a:t>Central air conditioner (AC) and furnace</a:t>
                 </a:r>
               </a:p>
               <a:p>
                 <a:pPr lvl="1"/>
                 <a:r>
-                  <a:rPr lang="en-CA" dirty="0" smtClean="0"/>
+                  <a:rPr lang="en-CA" dirty="0"/>
                   <a:t>Common</a:t>
                 </a:r>
               </a:p>
               <a:p>
                 <a:pPr lvl="1"/>
                 <a:r>
-                  <a:rPr lang="en-CA" dirty="0" smtClean="0"/>
+                  <a:rPr lang="en-CA" dirty="0"/>
                   <a:t>Single package or separate equipment </a:t>
                 </a:r>
               </a:p>
@@ -11439,40 +10899,19 @@
                 <a:pPr marL="457200" lvl="1" indent="0">
                   <a:buNone/>
                 </a:pPr>
-                <a:endParaRPr lang="en-CA" dirty="0" smtClean="0"/>
+                <a:endParaRPr lang="en-CA" dirty="0"/>
               </a:p>
               <a:p>
                 <a:r>
-                  <a:rPr lang="en-CA" dirty="0" smtClean="0"/>
+                  <a:rPr lang="en-CA" dirty="0"/>
                   <a:t>Cold climate air source heat pump </a:t>
                 </a:r>
               </a:p>
               <a:p>
                 <a:pPr lvl="1"/>
                 <a:r>
-                  <a:rPr lang="en-CA" dirty="0" smtClean="0"/>
-                  <a:t>No formal definition</a:t>
-                </a:r>
-              </a:p>
-              <a:p>
-                <a:pPr lvl="1"/>
-                <a:r>
                   <a:rPr lang="en-CA" dirty="0"/>
-                  <a:t>Rated capacity </a:t>
-                </a:r>
-                <a14:m>
-                  <m:oMath xmlns:m="http://schemas.openxmlformats.org/officeDocument/2006/math">
-                    <m:r>
-                      <a:rPr lang="en-CA" i="1">
-                        <a:latin typeface="Cambria Math" panose="02040503050406030204" pitchFamily="18" charset="0"/>
-                      </a:rPr>
-                      <m:t>≥</m:t>
-                    </m:r>
-                  </m:oMath>
-                </a14:m>
-                <a:r>
-                  <a:rPr lang="en-CA" dirty="0"/>
-                  <a:t> 3.52 kW @ -8.3 </a:t>
+                  <a:t>70% of the 8.3 </a:t>
                 </a:r>
                 <a:r>
                   <a:rPr lang="en-CA" baseline="30000" dirty="0" err="1"/>
@@ -11482,29 +10921,9 @@
                   <a:rPr lang="en-CA" dirty="0" err="1"/>
                   <a:t>C</a:t>
                 </a:r>
-                <a:endParaRPr lang="en-CA" dirty="0"/>
-              </a:p>
-              <a:p>
-                <a:pPr lvl="1"/>
                 <a:r>
                   <a:rPr lang="en-CA" dirty="0"/>
-                  <a:t>70% of the -8.3 </a:t>
-                </a:r>
-                <a:r>
-                  <a:rPr lang="en-CA" baseline="30000" dirty="0" err="1" smtClean="0"/>
-                  <a:t>o</a:t>
-                </a:r>
-                <a:r>
-                  <a:rPr lang="en-CA" dirty="0" err="1" smtClean="0"/>
-                  <a:t>C</a:t>
-                </a:r>
-                <a:r>
-                  <a:rPr lang="en-CA" dirty="0" smtClean="0"/>
-                  <a:t> rated </a:t>
-                </a:r>
-                <a:r>
-                  <a:rPr lang="en-CA" dirty="0"/>
-                  <a:t>capacity @ -15 </a:t>
+                  <a:t> rated capacity @ -15 </a:t>
                 </a:r>
                 <a:r>
                   <a:rPr lang="en-CA" baseline="30000" dirty="0" err="1"/>
@@ -11537,17 +10956,17 @@
                   <a:t> 1.8 @ -15 </a:t>
                 </a:r>
                 <a:r>
-                  <a:rPr lang="en-CA" baseline="30000" dirty="0" err="1" smtClean="0"/>
+                  <a:rPr lang="en-CA" baseline="30000" dirty="0" err="1"/>
                   <a:t>o</a:t>
                 </a:r>
                 <a:r>
-                  <a:rPr lang="en-CA" dirty="0" err="1" smtClean="0"/>
+                  <a:rPr lang="en-CA" dirty="0" err="1"/>
                   <a:t>C</a:t>
                 </a:r>
-                <a:endParaRPr lang="en-CA" dirty="0" smtClean="0"/>
+                <a:endParaRPr lang="en-CA" dirty="0"/>
               </a:p>
               <a:p>
-                <a:endParaRPr lang="en-CA" dirty="0" smtClean="0"/>
+                <a:endParaRPr lang="en-CA" dirty="0"/>
               </a:p>
               <a:p>
                 <a:pPr lvl="1"/>
@@ -11568,7 +10987,7 @@
               </p:nvPr>
             </p:nvSpPr>
             <p:spPr>
-              <a:blipFill rotWithShape="0">
+              <a:blipFill>
                 <a:blip r:embed="rId2"/>
                 <a:stretch>
                   <a:fillRect l="-394" t="-933"/>
@@ -11600,13 +11019,6 @@
   <p:clrMapOvr>
     <a:masterClrMapping/>
   </p:clrMapOvr>
-  <p:timing>
-    <p:tnLst>
-      <p:par>
-        <p:cTn id="1" dur="indefinite" restart="never" nodeType="tmRoot"/>
-      </p:par>
-    </p:tnLst>
-  </p:timing>
 </p:sld>
 </file>
 
@@ -11643,14 +11055,13 @@
           <a:lstStyle/>
           <a:p>
             <a:r>
-              <a:rPr lang="en-CA" dirty="0" err="1" smtClean="0"/>
+              <a:rPr lang="en-CA" dirty="0" err="1"/>
               <a:t>Openstudio</a:t>
             </a:r>
             <a:r>
-              <a:rPr lang="en-CA" dirty="0" smtClean="0"/>
+              <a:rPr lang="en-CA" dirty="0"/>
               <a:t> exercise: HVAC + DHW</a:t>
             </a:r>
-            <a:endParaRPr lang="en-CA" dirty="0"/>
           </a:p>
         </p:txBody>
       </p:sp>
@@ -11666,8 +11077,8 @@
         </p:nvSpPr>
         <p:spPr>
           <a:xfrm>
-            <a:off x="685801" y="1869601"/>
-            <a:ext cx="5439972" cy="4898668"/>
+            <a:off x="685800" y="1869601"/>
+            <a:ext cx="5877369" cy="4898668"/>
           </a:xfrm>
         </p:spPr>
         <p:txBody>
@@ -11677,112 +11088,90 @@
           <a:lstStyle/>
           <a:p>
             <a:r>
-              <a:rPr lang="en-CA" dirty="0" smtClean="0"/>
-              <a:t>Constant volume central AC + NG furnace</a:t>
+              <a:rPr lang="en-CA" dirty="0"/>
+              <a:t>Constant volume central air conditioner with a natural gas furnace</a:t>
             </a:r>
           </a:p>
           <a:p>
             <a:pPr lvl="1"/>
             <a:r>
-              <a:rPr lang="en-CA" dirty="0" smtClean="0"/>
+              <a:rPr lang="en-CA" dirty="0"/>
               <a:t>Air conditioner: COP 3</a:t>
             </a:r>
           </a:p>
           <a:p>
             <a:pPr lvl="1"/>
             <a:r>
-              <a:rPr lang="en-CA" dirty="0" smtClean="0"/>
+              <a:rPr lang="en-CA" dirty="0"/>
               <a:t>Condensing furnace: AFUE 96%</a:t>
             </a:r>
           </a:p>
           <a:p>
             <a:pPr lvl="1"/>
             <a:r>
-              <a:rPr lang="en-CA" dirty="0" smtClean="0"/>
-              <a:t>Rotary </a:t>
-            </a:r>
-            <a:r>
-              <a:rPr lang="en-CA" dirty="0" smtClean="0"/>
-              <a:t>ERV (~ 50% effectiveness</a:t>
+              <a:rPr lang="en-CA" dirty="0"/>
+              <a:t>Rotary ERV (~ 50% effectiveness</a:t>
             </a:r>
           </a:p>
           <a:p>
             <a:pPr lvl="1"/>
             <a:r>
-              <a:rPr lang="en-CA" dirty="0" smtClean="0"/>
-              <a:t>Only f</a:t>
-            </a:r>
-            <a:r>
-              <a:rPr lang="en-CA" dirty="0" smtClean="0"/>
-              <a:t>irst and second floor conditioned</a:t>
-            </a:r>
-            <a:endParaRPr lang="en-CA" dirty="0" smtClean="0"/>
+              <a:rPr lang="en-CA" dirty="0"/>
+              <a:t>Only first and second floor conditioned</a:t>
+            </a:r>
           </a:p>
           <a:p>
             <a:pPr lvl="1"/>
             <a:r>
-              <a:rPr lang="en-CA" dirty="0" smtClean="0"/>
-              <a:t>Single t</a:t>
-            </a:r>
-            <a:r>
-              <a:rPr lang="en-CA" dirty="0" smtClean="0"/>
-              <a:t>hermostat</a:t>
-            </a:r>
-            <a:endParaRPr lang="en-CA" dirty="0" smtClean="0"/>
+              <a:rPr lang="en-CA" dirty="0"/>
+              <a:t>Single thermostat</a:t>
+            </a:r>
           </a:p>
           <a:p>
             <a:pPr lvl="2"/>
             <a:r>
-              <a:rPr lang="en-CA" dirty="0" smtClean="0"/>
-              <a:t>Heating</a:t>
-            </a:r>
-            <a:r>
-              <a:rPr lang="en-CA" dirty="0" smtClean="0"/>
-              <a:t>: 21 </a:t>
-            </a:r>
-            <a:r>
-              <a:rPr lang="en-CA" baseline="30000" dirty="0" err="1" smtClean="0"/>
+              <a:rPr lang="en-CA" dirty="0"/>
+              <a:t>Heating: 21 </a:t>
+            </a:r>
+            <a:r>
+              <a:rPr lang="en-CA" baseline="30000" dirty="0" err="1"/>
               <a:t>o</a:t>
             </a:r>
             <a:r>
-              <a:rPr lang="en-CA" dirty="0" err="1" smtClean="0"/>
+              <a:rPr lang="en-CA" dirty="0" err="1"/>
               <a:t>C</a:t>
             </a:r>
             <a:r>
-              <a:rPr lang="en-CA" dirty="0" smtClean="0"/>
-              <a:t>; </a:t>
-            </a:r>
-            <a:r>
-              <a:rPr lang="en-CA" dirty="0"/>
-              <a:t>Cooling: 24 </a:t>
-            </a:r>
-            <a:r>
-              <a:rPr lang="en-CA" baseline="30000" dirty="0" err="1" smtClean="0"/>
+              <a:rPr lang="en-CA" dirty="0"/>
+              <a:t>; Cooling: 24 </a:t>
+            </a:r>
+            <a:r>
+              <a:rPr lang="en-CA" baseline="30000" dirty="0" err="1"/>
               <a:t>o</a:t>
             </a:r>
             <a:r>
-              <a:rPr lang="en-CA" dirty="0" err="1" smtClean="0"/>
+              <a:rPr lang="en-CA" dirty="0" err="1"/>
               <a:t>C</a:t>
             </a:r>
-            <a:endParaRPr lang="en-CA" dirty="0" smtClean="0"/>
-          </a:p>
-          <a:p>
-            <a:r>
-              <a:rPr lang="en-CA" dirty="0" smtClean="0"/>
+            <a:endParaRPr lang="en-CA" dirty="0"/>
+          </a:p>
+          <a:p>
+            <a:r>
+              <a:rPr lang="en-CA" dirty="0"/>
               <a:t>Domestic hot water</a:t>
             </a:r>
           </a:p>
           <a:p>
             <a:pPr lvl="1"/>
             <a:r>
-              <a:rPr lang="en-CA" dirty="0" smtClean="0"/>
+              <a:rPr lang="en-CA" dirty="0"/>
               <a:t>Demand</a:t>
             </a:r>
           </a:p>
           <a:p>
             <a:pPr lvl="2"/>
             <a:r>
-              <a:rPr lang="en-CA" dirty="0" smtClean="0"/>
+              <a:rPr lang="en-CA" dirty="0"/>
               <a:t>Peak flow demand: 0.000083 ~ 300 L/hr</a:t>
             </a:r>
           </a:p>
@@ -11805,59 +11194,55 @@
           <a:p>
             <a:pPr lvl="3"/>
             <a:r>
-              <a:rPr lang="en-CA" dirty="0" err="1" smtClean="0"/>
+              <a:rPr lang="en-CA" dirty="0" err="1"/>
               <a:t>dhw_load_profile.osm</a:t>
             </a:r>
-            <a:endParaRPr lang="en-CA" dirty="0" smtClean="0"/>
+            <a:endParaRPr lang="en-CA" dirty="0"/>
           </a:p>
           <a:p>
             <a:pPr lvl="1"/>
             <a:r>
-              <a:rPr lang="en-CA" dirty="0" smtClean="0"/>
+              <a:rPr lang="en-CA" dirty="0"/>
               <a:t>Electric water heater</a:t>
             </a:r>
           </a:p>
           <a:p>
             <a:pPr lvl="2"/>
             <a:r>
-              <a:rPr lang="en-CA" dirty="0" smtClean="0"/>
+              <a:rPr lang="en-CA" dirty="0"/>
               <a:t>UA-factor: 1.3 W/K</a:t>
             </a:r>
           </a:p>
           <a:p>
             <a:pPr lvl="2"/>
             <a:r>
-              <a:rPr lang="en-CA" dirty="0" smtClean="0"/>
+              <a:rPr lang="en-CA" dirty="0"/>
               <a:t>100 % efficiency</a:t>
             </a:r>
           </a:p>
           <a:p>
             <a:pPr lvl="2"/>
             <a:r>
-              <a:rPr lang="en-CA" dirty="0" smtClean="0"/>
+              <a:rPr lang="en-CA" dirty="0"/>
               <a:t>Located in </a:t>
             </a:r>
             <a:r>
-              <a:rPr lang="en-CA" dirty="0" err="1" smtClean="0"/>
+              <a:rPr lang="en-CA" dirty="0" err="1"/>
               <a:t>first_storey</a:t>
             </a:r>
-            <a:endParaRPr lang="en-CA" dirty="0" smtClean="0"/>
+            <a:endParaRPr lang="en-CA" dirty="0"/>
           </a:p>
           <a:p>
             <a:pPr lvl="2"/>
             <a:r>
               <a:rPr lang="en-CA" dirty="0"/>
-              <a:t>2 hour </a:t>
-            </a:r>
-            <a:r>
-              <a:rPr lang="en-CA" dirty="0" smtClean="0"/>
-              <a:t>recovery (for sizing)</a:t>
+              <a:t>2 hour recovery (for sizing)</a:t>
             </a:r>
           </a:p>
           <a:p>
             <a:pPr lvl="1"/>
             <a:r>
-              <a:rPr lang="en-CA" dirty="0" smtClean="0"/>
+              <a:rPr lang="en-CA" dirty="0"/>
               <a:t>Pump head 300 Pa</a:t>
             </a:r>
           </a:p>
@@ -11869,7 +11254,7 @@
             <a:pPr marL="457200" lvl="1" indent="0">
               <a:buNone/>
             </a:pPr>
-            <a:endParaRPr lang="en-CA" dirty="0" smtClean="0"/>
+            <a:endParaRPr lang="en-CA" dirty="0"/>
           </a:p>
           <a:p>
             <a:pPr lvl="1"/>
@@ -11877,7 +11262,7 @@
           </a:p>
           <a:p>
             <a:pPr lvl="1"/>
-            <a:endParaRPr lang="en-CA" dirty="0" smtClean="0"/>
+            <a:endParaRPr lang="en-CA" dirty="0"/>
           </a:p>
           <a:p>
             <a:pPr lvl="1"/>
@@ -11885,7 +11270,7 @@
           </a:p>
           <a:p>
             <a:pPr lvl="1"/>
-            <a:endParaRPr lang="en-CA" dirty="0" smtClean="0"/>
+            <a:endParaRPr lang="en-CA" dirty="0"/>
           </a:p>
           <a:p>
             <a:pPr lvl="1"/>
@@ -11909,7 +11294,7 @@
         </p:nvGraphicFramePr>
         <p:xfrm>
           <a:off x="7635987" y="3356837"/>
-          <a:ext cx="3560849" cy="717552"/>
+          <a:ext cx="3560849" cy="690253"/>
         </p:xfrm>
         <a:graphic>
           <a:graphicData uri="http://schemas.openxmlformats.org/drawingml/2006/table">
@@ -11918,9 +11303,27 @@
                 <a:tableStyleId>{F5AB1C69-6EDB-4FF4-983F-18BD219EF322}</a:tableStyleId>
               </a:tblPr>
               <a:tblGrid>
-                <a:gridCol w="1597010"/>
-                <a:gridCol w="1038860"/>
-                <a:gridCol w="924979"/>
+                <a:gridCol w="1597010">
+                  <a:extLst>
+                    <a:ext uri="{9D8B030D-6E8A-4147-A177-3AD203B41FA5}">
+                      <a16:colId xmlns:a16="http://schemas.microsoft.com/office/drawing/2014/main" val="20000"/>
+                    </a:ext>
+                  </a:extLst>
+                </a:gridCol>
+                <a:gridCol w="1038860">
+                  <a:extLst>
+                    <a:ext uri="{9D8B030D-6E8A-4147-A177-3AD203B41FA5}">
+                      <a16:colId xmlns:a16="http://schemas.microsoft.com/office/drawing/2014/main" val="20001"/>
+                    </a:ext>
+                  </a:extLst>
+                </a:gridCol>
+                <a:gridCol w="924979">
+                  <a:extLst>
+                    <a:ext uri="{9D8B030D-6E8A-4147-A177-3AD203B41FA5}">
+                      <a16:colId xmlns:a16="http://schemas.microsoft.com/office/drawing/2014/main" val="20002"/>
+                    </a:ext>
+                  </a:extLst>
+                </a:gridCol>
               </a:tblGrid>
               <a:tr h="171634">
                 <a:tc>
@@ -12034,6 +11437,11 @@
                   </a:txBody>
                   <a:tcPr marL="68580" marR="68580" marT="0" marB="0"/>
                 </a:tc>
+                <a:extLst>
+                  <a:ext uri="{0D108BD9-81ED-4DB2-BD59-A6C34878D82A}">
+                    <a16:rowId xmlns:a16="http://schemas.microsoft.com/office/drawing/2014/main" val="10000"/>
+                  </a:ext>
+                </a:extLst>
               </a:tr>
               <a:tr h="172873">
                 <a:tc>
@@ -12123,6 +11531,11 @@
                   </a:txBody>
                   <a:tcPr marL="68580" marR="68580" marT="0" marB="0"/>
                 </a:tc>
+                <a:extLst>
+                  <a:ext uri="{0D108BD9-81ED-4DB2-BD59-A6C34878D82A}">
+                    <a16:rowId xmlns:a16="http://schemas.microsoft.com/office/drawing/2014/main" val="10001"/>
+                  </a:ext>
+                </a:extLst>
               </a:tr>
               <a:tr h="172873">
                 <a:tc>
@@ -12212,6 +11625,11 @@
                   </a:txBody>
                   <a:tcPr marL="68580" marR="68580" marT="0" marB="0"/>
                 </a:tc>
+                <a:extLst>
+                  <a:ext uri="{0D108BD9-81ED-4DB2-BD59-A6C34878D82A}">
+                    <a16:rowId xmlns:a16="http://schemas.microsoft.com/office/drawing/2014/main" val="10002"/>
+                  </a:ext>
+                </a:extLst>
               </a:tr>
               <a:tr h="172873">
                 <a:tc>
@@ -12301,6 +11719,11 @@
                   </a:txBody>
                   <a:tcPr marL="68580" marR="68580" marT="0" marB="0"/>
                 </a:tc>
+                <a:extLst>
+                  <a:ext uri="{0D108BD9-81ED-4DB2-BD59-A6C34878D82A}">
+                    <a16:rowId xmlns:a16="http://schemas.microsoft.com/office/drawing/2014/main" val="10003"/>
+                  </a:ext>
+                </a:extLst>
               </a:tr>
             </a:tbl>
           </a:graphicData>
@@ -12333,7 +11756,7 @@
               <a:buChar char="•"/>
             </a:pPr>
             <a:r>
-              <a:rPr lang="en-CA" dirty="0" smtClean="0"/>
+              <a:rPr lang="en-CA" dirty="0"/>
               <a:t>Misc.</a:t>
             </a:r>
           </a:p>
@@ -12343,14 +11766,9 @@
               <a:buChar char="•"/>
             </a:pPr>
             <a:r>
-              <a:rPr lang="en-CA" dirty="0" smtClean="0"/>
-              <a:t>Air </a:t>
-            </a:r>
-            <a:r>
-              <a:rPr lang="en-CA" dirty="0"/>
-              <a:t>leakage test results: </a:t>
-            </a:r>
-            <a:endParaRPr lang="en-CA" dirty="0" smtClean="0"/>
+              <a:rPr lang="en-CA" dirty="0"/>
+              <a:t>Air leakage test results: </a:t>
+            </a:r>
           </a:p>
           <a:p>
             <a:pPr marL="1200150" lvl="2" indent="-285750">
@@ -12358,22 +11776,14 @@
               <a:buChar char="•"/>
             </a:pPr>
             <a:r>
-              <a:rPr lang="en-CA" dirty="0" smtClean="0"/>
-              <a:t>Whole </a:t>
-            </a:r>
-            <a:r>
-              <a:rPr lang="en-CA" dirty="0"/>
-              <a:t>building ELA = 134 </a:t>
-            </a:r>
-            <a:r>
-              <a:rPr lang="en-CA" dirty="0" smtClean="0"/>
-              <a:t>cm</a:t>
-            </a:r>
-            <a:r>
-              <a:rPr lang="en-CA" baseline="30000" dirty="0" smtClean="0"/>
+              <a:rPr lang="en-CA" dirty="0"/>
+              <a:t>Whole building ELA = 134 cm</a:t>
+            </a:r>
+            <a:r>
+              <a:rPr lang="en-CA" baseline="30000" dirty="0"/>
               <a:t>2</a:t>
             </a:r>
-            <a:endParaRPr lang="en-CA" dirty="0" smtClean="0"/>
+            <a:endParaRPr lang="en-CA" dirty="0"/>
           </a:p>
           <a:p>
             <a:pPr marL="1657350" lvl="3" indent="-285750">
@@ -12381,20 +11791,8 @@
               <a:buChar char="•"/>
             </a:pPr>
             <a:r>
-              <a:rPr lang="en-CA" dirty="0" smtClean="0"/>
-              <a:t>Assume </a:t>
-            </a:r>
-            <a:r>
-              <a:rPr lang="en-CA" dirty="0"/>
-              <a:t>cracks/gaps </a:t>
-            </a:r>
-            <a:r>
-              <a:rPr lang="en-CA" dirty="0" smtClean="0"/>
-              <a:t>uniformly distributed </a:t>
-            </a:r>
-            <a:r>
-              <a:rPr lang="en-CA" dirty="0"/>
-              <a:t>based on volume</a:t>
+              <a:rPr lang="en-CA" dirty="0"/>
+              <a:t>Assume cracks/gaps uniformly distributed based on volume</a:t>
             </a:r>
           </a:p>
           <a:p>
@@ -12416,13 +11814,6 @@
   <p:clrMapOvr>
     <a:masterClrMapping/>
   </p:clrMapOvr>
-  <p:timing>
-    <p:tnLst>
-      <p:par>
-        <p:cTn id="1" dur="indefinite" restart="never" nodeType="tmRoot"/>
-      </p:par>
-    </p:tnLst>
-  </p:timing>
 </p:sld>
 </file>
 
@@ -12459,10 +11850,9 @@
           <a:lstStyle/>
           <a:p>
             <a:r>
-              <a:rPr lang="en-CA" dirty="0" smtClean="0"/>
+              <a:rPr lang="en-CA" dirty="0"/>
               <a:t>Things to be mindful of</a:t>
             </a:r>
-            <a:endParaRPr lang="en-CA" dirty="0"/>
           </a:p>
         </p:txBody>
       </p:sp>
@@ -12487,11 +11877,11 @@
           <a:lstStyle/>
           <a:p>
             <a:r>
-              <a:rPr lang="en-CA" dirty="0" smtClean="0"/>
+              <a:rPr lang="en-CA" dirty="0"/>
               <a:t>NZER </a:t>
             </a:r>
             <a:r>
-              <a:rPr lang="en-CA" dirty="0" smtClean="0">
+              <a:rPr lang="en-CA" dirty="0">
                 <a:sym typeface="Wingdings" panose="05000000000000000000" pitchFamily="2" charset="2"/>
               </a:rPr>
               <a:t> low EUI</a:t>
@@ -12500,7 +11890,7 @@
           <a:p>
             <a:pPr lvl="1"/>
             <a:r>
-              <a:rPr lang="en-CA" dirty="0" smtClean="0">
+              <a:rPr lang="en-CA" dirty="0">
                 <a:sym typeface="Wingdings" panose="05000000000000000000" pitchFamily="2" charset="2"/>
               </a:rPr>
               <a:t>ERV defrost model limited (no degradation due to ice)</a:t>
@@ -12509,66 +11899,64 @@
           <a:p>
             <a:pPr lvl="1"/>
             <a:r>
-              <a:rPr lang="en-CA" dirty="0" smtClean="0">
+              <a:rPr lang="en-CA" dirty="0">
                 <a:sym typeface="Wingdings" panose="05000000000000000000" pitchFamily="2" charset="2"/>
               </a:rPr>
               <a:t>Ground temperature 18</a:t>
             </a:r>
             <a:r>
-              <a:rPr lang="en-CA" baseline="30000" dirty="0" smtClean="0"/>
+              <a:rPr lang="en-CA" baseline="30000" dirty="0"/>
               <a:t>o</a:t>
             </a:r>
             <a:r>
-              <a:rPr lang="en-CA" dirty="0" smtClean="0"/>
+              <a:rPr lang="en-CA" dirty="0"/>
               <a:t>C</a:t>
             </a:r>
           </a:p>
           <a:p>
             <a:pPr lvl="2"/>
             <a:r>
-              <a:rPr lang="en-CA" dirty="0" smtClean="0"/>
+              <a:rPr lang="en-CA" dirty="0"/>
               <a:t>Difficult to capture</a:t>
             </a:r>
           </a:p>
           <a:p>
             <a:pPr lvl="2"/>
             <a:r>
-              <a:rPr lang="en-CA" dirty="0" smtClean="0"/>
+              <a:rPr lang="en-CA" dirty="0"/>
               <a:t>Kiva model</a:t>
             </a:r>
-            <a:endParaRPr lang="en-CA" dirty="0"/>
-          </a:p>
-          <a:p>
-            <a:r>
-              <a:rPr lang="en-CA" dirty="0" smtClean="0"/>
+          </a:p>
+          <a:p>
+            <a:r>
+              <a:rPr lang="en-CA" dirty="0"/>
               <a:t>HVAC control is basic</a:t>
             </a:r>
           </a:p>
           <a:p>
             <a:pPr lvl="1"/>
             <a:r>
-              <a:rPr lang="en-CA" dirty="0" smtClean="0"/>
+              <a:rPr lang="en-CA" dirty="0"/>
               <a:t>EnergyPlus EMS</a:t>
             </a:r>
           </a:p>
           <a:p>
             <a:r>
-              <a:rPr lang="en-CA" dirty="0" smtClean="0"/>
+              <a:rPr lang="en-CA" dirty="0"/>
               <a:t>Rigid loop structure </a:t>
             </a:r>
           </a:p>
           <a:p>
             <a:r>
-              <a:rPr lang="en-CA" dirty="0" smtClean="0"/>
+              <a:rPr lang="en-CA" dirty="0"/>
               <a:t>Limited features in OpenStudio App</a:t>
             </a:r>
           </a:p>
           <a:p>
             <a:r>
-              <a:rPr lang="en-CA" dirty="0" smtClean="0"/>
+              <a:rPr lang="en-CA" dirty="0"/>
               <a:t>Work-a-rounds</a:t>
             </a:r>
-            <a:endParaRPr lang="en-CA" dirty="0"/>
           </a:p>
         </p:txBody>
       </p:sp>
@@ -12582,13 +11970,6 @@
   <p:clrMapOvr>
     <a:masterClrMapping/>
   </p:clrMapOvr>
-  <p:timing>
-    <p:tnLst>
-      <p:par>
-        <p:cTn id="1" dur="indefinite" restart="never" nodeType="tmRoot"/>
-      </p:par>
-    </p:tnLst>
-  </p:timing>
 </p:sld>
 </file>
 
@@ -12625,14 +12006,13 @@
           <a:lstStyle/>
           <a:p>
             <a:r>
-              <a:rPr lang="en-CA" dirty="0" err="1" smtClean="0"/>
+              <a:rPr lang="en-CA" dirty="0" err="1"/>
               <a:t>Openstudio</a:t>
             </a:r>
             <a:r>
-              <a:rPr lang="en-CA" dirty="0" smtClean="0"/>
+              <a:rPr lang="en-CA" dirty="0"/>
               <a:t> (EnergyPlus) Results</a:t>
             </a:r>
-            <a:endParaRPr lang="en-CA" dirty="0"/>
           </a:p>
         </p:txBody>
       </p:sp>
@@ -12652,45 +12032,45 @@
           <a:lstStyle/>
           <a:p>
             <a:r>
-              <a:rPr lang="en-CA" dirty="0" smtClean="0"/>
+              <a:rPr lang="en-CA" dirty="0"/>
               <a:t>EnergyPlus output files</a:t>
             </a:r>
           </a:p>
           <a:p>
             <a:r>
-              <a:rPr lang="en-CA" dirty="0" err="1" smtClean="0"/>
+              <a:rPr lang="en-CA" dirty="0" err="1"/>
               <a:t>DesignBuilder</a:t>
             </a:r>
             <a:r>
-              <a:rPr lang="en-CA" dirty="0" smtClean="0"/>
+              <a:rPr lang="en-CA" dirty="0"/>
               <a:t> results viewer (free)</a:t>
             </a:r>
           </a:p>
           <a:p>
             <a:r>
-              <a:rPr lang="en-CA" dirty="0" smtClean="0"/>
+              <a:rPr lang="en-CA" dirty="0"/>
               <a:t>EnergyPlus Reports</a:t>
             </a:r>
           </a:p>
           <a:p>
             <a:pPr lvl="1"/>
             <a:r>
-              <a:rPr lang="en-CA" dirty="0" smtClean="0"/>
+              <a:rPr lang="en-CA" dirty="0"/>
               <a:t>Summary tables</a:t>
             </a:r>
           </a:p>
           <a:p>
             <a:pPr lvl="1"/>
             <a:r>
-              <a:rPr lang="en-CA" dirty="0" smtClean="0"/>
+              <a:rPr lang="en-CA" dirty="0"/>
               <a:t>LEED summary</a:t>
             </a:r>
           </a:p>
           <a:p>
-            <a:endParaRPr lang="en-CA" dirty="0" smtClean="0"/>
-          </a:p>
-          <a:p>
-            <a:endParaRPr lang="en-CA" dirty="0" smtClean="0"/>
+            <a:endParaRPr lang="en-CA" dirty="0"/>
+          </a:p>
+          <a:p>
+            <a:endParaRPr lang="en-CA" dirty="0"/>
           </a:p>
         </p:txBody>
       </p:sp>
@@ -12704,13 +12084,6 @@
   <p:clrMapOvr>
     <a:masterClrMapping/>
   </p:clrMapOvr>
-  <p:timing>
-    <p:tnLst>
-      <p:par>
-        <p:cTn id="1" dur="indefinite" restart="never" nodeType="tmRoot"/>
-      </p:par>
-    </p:tnLst>
-  </p:timing>
 </p:sld>
 </file>
 
@@ -12747,10 +12120,9 @@
           <a:lstStyle/>
           <a:p>
             <a:r>
-              <a:rPr lang="en-CA" dirty="0" smtClean="0"/>
+              <a:rPr lang="en-CA" dirty="0"/>
               <a:t>BEM and Standards/Guidelines</a:t>
             </a:r>
-            <a:endParaRPr lang="en-CA" dirty="0"/>
           </a:p>
         </p:txBody>
       </p:sp>
@@ -12770,41 +12142,41 @@
           <a:lstStyle/>
           <a:p>
             <a:r>
-              <a:rPr lang="en-CA" dirty="0" smtClean="0"/>
+              <a:rPr lang="en-CA" dirty="0"/>
               <a:t>ASHRAE Standard 140 </a:t>
             </a:r>
           </a:p>
           <a:p>
             <a:pPr lvl="1"/>
             <a:r>
-              <a:rPr lang="en-CA" dirty="0" smtClean="0"/>
+              <a:rPr lang="en-CA" dirty="0"/>
               <a:t>“Pseudo-standard” for BEM</a:t>
             </a:r>
           </a:p>
           <a:p>
             <a:r>
-              <a:rPr lang="en-CA" dirty="0" smtClean="0"/>
+              <a:rPr lang="en-CA" dirty="0"/>
               <a:t>ASHARE Guideline 14 (calibration)</a:t>
             </a:r>
           </a:p>
           <a:p>
             <a:pPr lvl="1"/>
             <a:r>
-              <a:rPr lang="en-CA" dirty="0" smtClean="0"/>
+              <a:rPr lang="en-CA" dirty="0"/>
               <a:t>Procedure and standard for estimating energy, water and demand savings</a:t>
             </a:r>
           </a:p>
           <a:p>
             <a:pPr lvl="1"/>
             <a:r>
-              <a:rPr lang="en-CA" dirty="0" smtClean="0"/>
+              <a:rPr lang="en-CA" dirty="0"/>
               <a:t>Normalized mean bias error (NME)– 10%</a:t>
             </a:r>
           </a:p>
           <a:p>
             <a:pPr lvl="1"/>
             <a:r>
-              <a:rPr lang="en-CA" dirty="0" smtClean="0"/>
+              <a:rPr lang="en-CA" dirty="0"/>
               <a:t>Coefficient of variation of the root-mean-square error (CV-RSME)– 30%</a:t>
             </a:r>
           </a:p>
@@ -12843,13 +12215,6 @@
   <p:clrMapOvr>
     <a:masterClrMapping/>
   </p:clrMapOvr>
-  <p:timing>
-    <p:tnLst>
-      <p:par>
-        <p:cTn id="1" dur="indefinite" restart="never" nodeType="tmRoot"/>
-      </p:par>
-    </p:tnLst>
-  </p:timing>
 </p:sld>
 </file>
 
@@ -12886,10 +12251,9 @@
           <a:lstStyle/>
           <a:p>
             <a:r>
-              <a:rPr lang="en-CA" dirty="0" smtClean="0"/>
+              <a:rPr lang="en-CA" dirty="0"/>
               <a:t>OpenStudio references and help</a:t>
             </a:r>
-            <a:endParaRPr lang="en-CA" dirty="0"/>
           </a:p>
         </p:txBody>
       </p:sp>
@@ -12916,7 +12280,7 @@
           <a:lstStyle/>
           <a:p>
             <a:r>
-              <a:rPr lang="en-CA" dirty="0" smtClean="0"/>
+              <a:rPr lang="en-CA" dirty="0"/>
               <a:t>EnergyPlus Documentation</a:t>
             </a:r>
           </a:p>
@@ -12933,74 +12297,73 @@
           <a:p>
             <a:pPr lvl="1"/>
             <a:r>
-              <a:rPr lang="en-CA" dirty="0" smtClean="0">
+              <a:rPr lang="en-CA" dirty="0">
                 <a:hlinkClick r:id="rId3"/>
               </a:rPr>
               <a:t>Official </a:t>
             </a:r>
             <a:r>
-              <a:rPr lang="en-CA" dirty="0" err="1" smtClean="0">
+              <a:rPr lang="en-CA" dirty="0" err="1">
                 <a:hlinkClick r:id="rId3"/>
               </a:rPr>
               <a:t>Quickstart</a:t>
             </a:r>
-            <a:endParaRPr lang="en-CA" dirty="0" smtClean="0"/>
+            <a:endParaRPr lang="en-CA" dirty="0"/>
           </a:p>
           <a:p>
             <a:pPr lvl="1"/>
             <a:r>
-              <a:rPr lang="en-CA" dirty="0" smtClean="0">
+              <a:rPr lang="en-CA" dirty="0">
                 <a:hlinkClick r:id="rId4"/>
               </a:rPr>
               <a:t>Lecture </a:t>
             </a:r>
             <a:r>
-              <a:rPr lang="en-CA" dirty="0" err="1" smtClean="0">
+              <a:rPr lang="en-CA" dirty="0" err="1">
                 <a:hlinkClick r:id="rId4"/>
               </a:rPr>
               <a:t>ppt</a:t>
             </a:r>
             <a:r>
-              <a:rPr lang="en-CA" dirty="0" smtClean="0">
+              <a:rPr lang="en-CA" dirty="0">
                 <a:hlinkClick r:id="rId4"/>
               </a:rPr>
               <a:t> </a:t>
             </a:r>
-            <a:endParaRPr lang="en-CA" dirty="0" smtClean="0"/>
+            <a:endParaRPr lang="en-CA" dirty="0"/>
           </a:p>
           <a:p>
             <a:pPr lvl="1"/>
             <a:r>
-              <a:rPr lang="en-CA" dirty="0" smtClean="0">
+              <a:rPr lang="en-CA" dirty="0">
                 <a:hlinkClick r:id="rId5"/>
               </a:rPr>
               <a:t>Kiva ground heat transfer model</a:t>
             </a:r>
-            <a:endParaRPr lang="en-CA" dirty="0" smtClean="0"/>
-          </a:p>
-          <a:p>
-            <a:r>
-              <a:rPr lang="en-CA" dirty="0" smtClean="0"/>
+            <a:endParaRPr lang="en-CA" dirty="0"/>
+          </a:p>
+          <a:p>
+            <a:r>
+              <a:rPr lang="en-CA" dirty="0"/>
               <a:t>OpenStudio Documentation</a:t>
             </a:r>
           </a:p>
           <a:p>
             <a:pPr lvl="1"/>
             <a:r>
-              <a:rPr lang="en-CA" dirty="0" smtClean="0">
+              <a:rPr lang="en-CA" dirty="0">
                 <a:hlinkClick r:id="rId6"/>
               </a:rPr>
               <a:t>OpenStudio App + SketchUp for OS</a:t>
             </a:r>
-            <a:endParaRPr lang="en-CA" dirty="0" smtClean="0"/>
+            <a:endParaRPr lang="en-CA" dirty="0"/>
           </a:p>
           <a:p>
             <a:pPr lvl="1"/>
             <a:r>
-              <a:rPr lang="en-CA" dirty="0" smtClean="0"/>
+              <a:rPr lang="en-CA" dirty="0"/>
               <a:t>YouTube</a:t>
             </a:r>
-            <a:endParaRPr lang="en-CA" dirty="0"/>
           </a:p>
           <a:p>
             <a:pPr lvl="2"/>
@@ -13028,33 +12391,26 @@
           <a:p>
             <a:pPr lvl="1"/>
             <a:r>
-              <a:rPr lang="en-CA" dirty="0" smtClean="0">
+              <a:rPr lang="en-CA" dirty="0">
                 <a:hlinkClick r:id="rId9"/>
               </a:rPr>
               <a:t>OpenStudio SDK</a:t>
             </a:r>
-            <a:endParaRPr lang="en-CA" dirty="0" smtClean="0"/>
+            <a:endParaRPr lang="en-CA" dirty="0"/>
           </a:p>
           <a:p>
             <a:r>
               <a:rPr lang="en-CA" dirty="0"/>
               <a:t>OpenStudio Support </a:t>
             </a:r>
-            <a:endParaRPr lang="en-CA" dirty="0" smtClean="0"/>
           </a:p>
           <a:p>
             <a:pPr lvl="1"/>
-            <a:r>
-              <a:rPr lang="en-CA" dirty="0" smtClean="0">
-                <a:hlinkClick r:id="rId10"/>
-              </a:rPr>
-              <a:t>Unmet </a:t>
-            </a:r>
             <a:r>
               <a:rPr lang="en-CA" dirty="0">
                 <a:hlinkClick r:id="rId10"/>
               </a:rPr>
-              <a:t>Hours</a:t>
+              <a:t>Unmet Hours</a:t>
             </a:r>
             <a:endParaRPr lang="en-CA" dirty="0"/>
           </a:p>
@@ -13077,18 +12433,12 @@
           <a:p>
             <a:pPr lvl="1"/>
             <a:r>
-              <a:rPr lang="en-CA" dirty="0" smtClean="0">
-                <a:hlinkClick r:id="rId12"/>
-              </a:rPr>
-              <a:t>Official </a:t>
-            </a:r>
-            <a:r>
               <a:rPr lang="en-CA" dirty="0">
                 <a:hlinkClick r:id="rId12"/>
               </a:rPr>
-              <a:t>EnergyPlus Support </a:t>
-            </a:r>
-            <a:endParaRPr lang="en-CA" dirty="0" smtClean="0"/>
+              <a:t>Official EnergyPlus Support </a:t>
+            </a:r>
+            <a:endParaRPr lang="en-CA" dirty="0"/>
           </a:p>
         </p:txBody>
       </p:sp>
@@ -13102,13 +12452,6 @@
   <p:clrMapOvr>
     <a:masterClrMapping/>
   </p:clrMapOvr>
-  <p:timing>
-    <p:tnLst>
-      <p:par>
-        <p:cTn id="1" dur="indefinite" restart="never" nodeType="tmRoot"/>
-      </p:par>
-    </p:tnLst>
-  </p:timing>
 </p:sld>
 </file>
 
@@ -13145,10 +12488,9 @@
           <a:lstStyle/>
           <a:p>
             <a:r>
-              <a:rPr lang="en-CA" dirty="0" smtClean="0"/>
+              <a:rPr lang="en-CA" dirty="0"/>
               <a:t>Energy Conservation Measures (ECM)</a:t>
             </a:r>
-            <a:endParaRPr lang="en-CA" dirty="0"/>
           </a:p>
         </p:txBody>
       </p:sp>
@@ -13175,83 +12517,75 @@
           <a:lstStyle/>
           <a:p>
             <a:r>
-              <a:rPr lang="en-CA" dirty="0" smtClean="0"/>
-              <a:t>aka Energy </a:t>
-            </a:r>
-            <a:r>
-              <a:rPr lang="en-CA" dirty="0"/>
-              <a:t>efficiency measures </a:t>
-            </a:r>
-            <a:r>
-              <a:rPr lang="en-CA" dirty="0" smtClean="0"/>
-              <a:t>(EEM)</a:t>
-            </a:r>
-          </a:p>
-          <a:p>
-            <a:r>
-              <a:rPr lang="en-CA" dirty="0" smtClean="0"/>
+              <a:rPr lang="en-CA" dirty="0"/>
+              <a:t>aka Energy efficiency measures (EEM)</a:t>
+            </a:r>
+          </a:p>
+          <a:p>
+            <a:r>
+              <a:rPr lang="en-CA" dirty="0"/>
               <a:t>Strategies for saving energy</a:t>
             </a:r>
           </a:p>
           <a:p>
             <a:pPr lvl="1"/>
             <a:r>
-              <a:rPr lang="en-CA" dirty="0" smtClean="0"/>
+              <a:rPr lang="en-CA" dirty="0"/>
               <a:t>Upgrade</a:t>
             </a:r>
           </a:p>
           <a:p>
             <a:pPr lvl="1"/>
             <a:r>
-              <a:rPr lang="en-CA" dirty="0" smtClean="0"/>
+              <a:rPr lang="en-CA" dirty="0"/>
               <a:t>New system</a:t>
             </a:r>
           </a:p>
           <a:p>
             <a:pPr lvl="1"/>
             <a:r>
-              <a:rPr lang="en-CA" dirty="0" smtClean="0"/>
+              <a:rPr lang="en-CA" dirty="0"/>
               <a:t>Repair?</a:t>
             </a:r>
           </a:p>
           <a:p>
             <a:r>
-              <a:rPr lang="en-CA" dirty="0" smtClean="0"/>
+              <a:rPr lang="en-CA" dirty="0"/>
               <a:t>Examples</a:t>
             </a:r>
           </a:p>
           <a:p>
             <a:pPr lvl="1"/>
             <a:r>
-              <a:rPr lang="en-CA" dirty="0" smtClean="0"/>
+              <a:rPr lang="en-CA" dirty="0"/>
               <a:t>Windows &amp; insulation </a:t>
             </a:r>
           </a:p>
           <a:p>
             <a:pPr lvl="1"/>
             <a:r>
-              <a:rPr lang="en-CA" dirty="0" smtClean="0"/>
+              <a:rPr lang="en-CA" dirty="0"/>
               <a:t>Better boiler/water heater/fans</a:t>
             </a:r>
           </a:p>
           <a:p>
             <a:pPr lvl="1"/>
             <a:r>
-              <a:rPr lang="en-CA" dirty="0" smtClean="0"/>
+              <a:rPr lang="en-CA" dirty="0"/>
               <a:t>Window-wall ratio </a:t>
             </a:r>
           </a:p>
           <a:p>
             <a:pPr lvl="1"/>
             <a:r>
-              <a:rPr lang="en-CA" dirty="0" smtClean="0"/>
+              <a:rPr lang="en-CA" dirty="0"/>
               <a:t>Leakage control</a:t>
             </a:r>
           </a:p>
           <a:p>
             <a:pPr lvl="1"/>
             <a:r>
-              <a:rPr lang="en-CA" dirty="0" smtClean="0"/>
+              <a:rPr lang="en-CA" dirty="0"/>
               <a:t>Better control/automation </a:t>
             </a:r>
           </a:p>
@@ -13267,13 +12601,6 @@
   <p:clrMapOvr>
     <a:masterClrMapping/>
   </p:clrMapOvr>
-  <p:timing>
-    <p:tnLst>
-      <p:par>
-        <p:cTn id="1" dur="indefinite" restart="never" nodeType="tmRoot"/>
-      </p:par>
-    </p:tnLst>
-  </p:timing>
 </p:sld>
 </file>
 
@@ -13310,19 +12637,11 @@
           <a:lstStyle/>
           <a:p>
             <a:r>
-              <a:rPr lang="en-CA" dirty="0" smtClean="0"/>
-              <a:t>Applying </a:t>
-            </a:r>
-            <a:r>
-              <a:rPr lang="en-CA" dirty="0" smtClean="0"/>
-              <a:t>ECM </a:t>
-            </a:r>
-            <a:r>
-              <a:rPr lang="en-CA" dirty="0" smtClean="0"/>
-              <a:t>in </a:t>
-            </a:r>
-            <a:r>
-              <a:rPr lang="en-CA" dirty="0" err="1" smtClean="0"/>
+              <a:rPr lang="en-CA" dirty="0"/>
+              <a:t>Applying ECM in </a:t>
+            </a:r>
+            <a:r>
+              <a:rPr lang="en-CA" dirty="0" err="1"/>
               <a:t>Openstudio</a:t>
             </a:r>
             <a:endParaRPr lang="en-CA" dirty="0"/>
@@ -13347,51 +12666,47 @@
           <a:lstStyle/>
           <a:p>
             <a:r>
-              <a:rPr lang="en-CA" dirty="0" smtClean="0"/>
-              <a:t>Changing </a:t>
-            </a:r>
-            <a:r>
-              <a:rPr lang="en-CA" dirty="0" smtClean="0"/>
-              <a:t>insulation</a:t>
+              <a:rPr lang="en-CA" dirty="0"/>
+              <a:t>Changing insulation</a:t>
             </a:r>
           </a:p>
           <a:p>
             <a:pPr lvl="1"/>
             <a:r>
-              <a:rPr lang="en-CA" dirty="0" smtClean="0"/>
+              <a:rPr lang="en-CA" dirty="0"/>
               <a:t>Increase material thickness</a:t>
             </a:r>
           </a:p>
           <a:p>
             <a:pPr lvl="1"/>
             <a:r>
-              <a:rPr lang="en-CA" dirty="0" smtClean="0"/>
+              <a:rPr lang="en-CA" dirty="0"/>
               <a:t>Swap material</a:t>
             </a:r>
           </a:p>
           <a:p>
             <a:pPr lvl="1"/>
             <a:r>
-              <a:rPr lang="en-CA" dirty="0" smtClean="0"/>
+              <a:rPr lang="en-CA" dirty="0"/>
               <a:t>New construction</a:t>
             </a:r>
           </a:p>
           <a:p>
             <a:r>
-              <a:rPr lang="en-CA" dirty="0" smtClean="0"/>
+              <a:rPr lang="en-CA" dirty="0"/>
               <a:t>Changing the window-wall ratio</a:t>
             </a:r>
           </a:p>
           <a:p>
             <a:pPr lvl="1"/>
             <a:r>
-              <a:rPr lang="en-CA" dirty="0" smtClean="0"/>
-              <a:t>Delete/add new window (redraw)</a:t>
-            </a:r>
-          </a:p>
-          <a:p>
-            <a:r>
-              <a:rPr lang="en-CA" dirty="0" smtClean="0"/>
+              <a:rPr lang="en-CA" dirty="0"/>
+              <a:t>Delete/add new window (re-draw)</a:t>
+            </a:r>
+          </a:p>
+          <a:p>
+            <a:r>
+              <a:rPr lang="en-CA" dirty="0"/>
               <a:t>OpenStudio Measures </a:t>
             </a:r>
           </a:p>
@@ -13399,11 +12714,7 @@
             <a:pPr lvl="1"/>
             <a:r>
               <a:rPr lang="en-CA" dirty="0"/>
-              <a:t>De-risk, synergize, </a:t>
-            </a:r>
-            <a:r>
-              <a:rPr lang="en-CA" dirty="0" smtClean="0"/>
-              <a:t>scale</a:t>
+              <a:t>De-risk, synergize, scale</a:t>
             </a:r>
           </a:p>
           <a:p>
@@ -13416,32 +12727,23 @@
           <a:p>
             <a:pPr lvl="1"/>
             <a:r>
-              <a:rPr lang="en-CA" dirty="0" smtClean="0"/>
-              <a:t>Commands delete/add/swap/alter </a:t>
-            </a:r>
-            <a:r>
-              <a:rPr lang="en-CA" dirty="0" smtClean="0"/>
-              <a:t>a </a:t>
-            </a:r>
-            <a:r>
-              <a:rPr lang="en-CA" dirty="0" smtClean="0"/>
-              <a:t>model </a:t>
-            </a:r>
-            <a:r>
-              <a:rPr lang="en-CA" dirty="0" smtClean="0">
+              <a:rPr lang="en-CA" dirty="0"/>
+              <a:t>Commands delete/add/swap/alter a model </a:t>
+            </a:r>
+            <a:r>
+              <a:rPr lang="en-CA" dirty="0">
                 <a:sym typeface="Wingdings" panose="05000000000000000000" pitchFamily="2" charset="2"/>
               </a:rPr>
               <a:t> single package</a:t>
             </a:r>
-            <a:endParaRPr lang="en-CA" dirty="0" smtClean="0"/>
+            <a:endParaRPr lang="en-CA" dirty="0"/>
           </a:p>
           <a:p>
             <a:pPr lvl="1"/>
             <a:r>
-              <a:rPr lang="en-CA" dirty="0" smtClean="0"/>
+              <a:rPr lang="en-CA" dirty="0"/>
               <a:t>Go through an example</a:t>
             </a:r>
-            <a:endParaRPr lang="en-CA" dirty="0"/>
           </a:p>
         </p:txBody>
       </p:sp>
@@ -13455,13 +12757,6 @@
   <p:clrMapOvr>
     <a:masterClrMapping/>
   </p:clrMapOvr>
-  <p:timing>
-    <p:tnLst>
-      <p:par>
-        <p:cTn id="1" dur="indefinite" restart="never" nodeType="tmRoot"/>
-      </p:par>
-    </p:tnLst>
-  </p:timing>
 </p:sld>
 </file>
 
@@ -13498,10 +12793,9 @@
           <a:lstStyle/>
           <a:p>
             <a:r>
-              <a:rPr lang="en-CA" dirty="0" smtClean="0"/>
+              <a:rPr lang="en-CA" dirty="0"/>
               <a:t>Overview</a:t>
             </a:r>
-            <a:endParaRPr lang="en-CA" dirty="0"/>
           </a:p>
         </p:txBody>
       </p:sp>
@@ -13525,10 +12819,9 @@
               <a:buAutoNum type="arabicPeriod"/>
             </a:pPr>
             <a:r>
-              <a:rPr lang="en-CA" dirty="0" smtClean="0"/>
-              <a:t>What is BEM?</a:t>
-            </a:r>
-            <a:endParaRPr lang="en-CA" dirty="0" smtClean="0"/>
+              <a:rPr lang="en-CA" dirty="0"/>
+              <a:t>What is BEM and BPS?</a:t>
+            </a:r>
           </a:p>
           <a:p>
             <a:pPr marL="342900" indent="-342900">
@@ -13536,7 +12829,7 @@
               <a:buAutoNum type="arabicPeriod"/>
             </a:pPr>
             <a:r>
-              <a:rPr lang="en-CA" dirty="0" smtClean="0"/>
+              <a:rPr lang="en-CA" dirty="0"/>
               <a:t>SketchUp our building (exercise) </a:t>
             </a:r>
           </a:p>
@@ -13546,22 +12839,9 @@
               <a:buAutoNum type="arabicPeriod"/>
             </a:pPr>
             <a:r>
-              <a:rPr lang="en-CA" dirty="0" smtClean="0"/>
-              <a:t>OpenStudio </a:t>
-            </a:r>
-            <a:r>
-              <a:rPr lang="en-CA" dirty="0"/>
-              <a:t>– </a:t>
-            </a:r>
-            <a:r>
-              <a:rPr lang="en-CA" dirty="0" smtClean="0"/>
-              <a:t>Envelope </a:t>
-            </a:r>
-            <a:r>
-              <a:rPr lang="en-CA" dirty="0"/>
-              <a:t>(exercise) </a:t>
-            </a:r>
-            <a:endParaRPr lang="en-CA" dirty="0" smtClean="0"/>
+              <a:rPr lang="en-CA" dirty="0"/>
+              <a:t>OpenStudio – Envelope (exercise) </a:t>
+            </a:r>
           </a:p>
           <a:p>
             <a:pPr marL="342900" indent="-342900">
@@ -13569,18 +12849,9 @@
               <a:buAutoNum type="arabicPeriod"/>
             </a:pPr>
             <a:r>
-              <a:rPr lang="en-CA" dirty="0" smtClean="0"/>
-              <a:t>OpenStudio – Internal </a:t>
-            </a:r>
-            <a:r>
-              <a:rPr lang="en-CA" dirty="0" smtClean="0"/>
-              <a:t>loads </a:t>
-            </a:r>
-            <a:r>
-              <a:rPr lang="en-CA" dirty="0"/>
-              <a:t>(exercise) </a:t>
-            </a:r>
-            <a:endParaRPr lang="en-CA" dirty="0" smtClean="0"/>
+              <a:rPr lang="en-CA" dirty="0"/>
+              <a:t>OpenStudio – Internal loads (exercise) </a:t>
+            </a:r>
           </a:p>
           <a:p>
             <a:pPr marL="342900" indent="-342900">
@@ -13588,7 +12859,7 @@
               <a:buAutoNum type="arabicPeriod"/>
             </a:pPr>
             <a:r>
-              <a:rPr lang="en-CA" dirty="0" smtClean="0"/>
+              <a:rPr lang="en-CA" dirty="0"/>
               <a:t>HVAC Overview </a:t>
             </a:r>
           </a:p>
@@ -13598,16 +12869,8 @@
               <a:buAutoNum type="arabicPeriod"/>
             </a:pPr>
             <a:r>
-              <a:rPr lang="en-CA" dirty="0" smtClean="0"/>
-              <a:t>OpenStudio – HVAC </a:t>
-            </a:r>
-            <a:r>
-              <a:rPr lang="en-CA" dirty="0"/>
-              <a:t>(exercise</a:t>
-            </a:r>
-            <a:r>
-              <a:rPr lang="en-CA" dirty="0" smtClean="0"/>
-              <a:t>)</a:t>
+              <a:rPr lang="en-CA" dirty="0"/>
+              <a:t>OpenStudio – HVAC (exercise)</a:t>
             </a:r>
           </a:p>
           <a:p>
@@ -13616,14 +12879,9 @@
               <a:buAutoNum type="arabicPeriod"/>
             </a:pPr>
             <a:r>
-              <a:rPr lang="en-CA" dirty="0" smtClean="0"/>
-              <a:t>Energy Conservation </a:t>
-            </a:r>
-            <a:r>
-              <a:rPr lang="en-CA" dirty="0" smtClean="0"/>
-              <a:t>Measures </a:t>
-            </a:r>
-            <a:endParaRPr lang="en-CA" dirty="0" smtClean="0"/>
+              <a:rPr lang="en-CA" dirty="0"/>
+              <a:t>Energy Conservation Measures </a:t>
+            </a:r>
           </a:p>
           <a:p>
             <a:pPr marL="342900" indent="-342900">
@@ -13631,14 +12889,9 @@
               <a:buAutoNum type="arabicPeriod"/>
             </a:pPr>
             <a:r>
-              <a:rPr lang="en-CA" dirty="0" smtClean="0"/>
-              <a:t>OpenStudio Parametric Analysis </a:t>
-            </a:r>
-            <a:r>
-              <a:rPr lang="en-CA" dirty="0" smtClean="0"/>
-              <a:t>Tool (exercise)</a:t>
-            </a:r>
-            <a:endParaRPr lang="en-CA" dirty="0" smtClean="0"/>
+              <a:rPr lang="en-CA" dirty="0"/>
+              <a:t>OpenStudio Parametric Analysis Tool (exercise)</a:t>
+            </a:r>
           </a:p>
           <a:p>
             <a:pPr marL="342900" indent="-342900">
@@ -13659,13 +12912,6 @@
   <p:clrMapOvr>
     <a:masterClrMapping/>
   </p:clrMapOvr>
-  <p:timing>
-    <p:tnLst>
-      <p:par>
-        <p:cTn id="1" dur="indefinite" restart="never" nodeType="tmRoot"/>
-      </p:par>
-    </p:tnLst>
-  </p:timing>
 </p:sld>
 </file>
 
@@ -13702,10 +12948,9 @@
           <a:lstStyle/>
           <a:p>
             <a:r>
-              <a:rPr lang="en-CA" dirty="0" smtClean="0"/>
+              <a:rPr lang="en-CA" dirty="0"/>
               <a:t>OpenStudio measures</a:t>
             </a:r>
-            <a:endParaRPr lang="en-CA" dirty="0"/>
           </a:p>
         </p:txBody>
       </p:sp>
@@ -13727,99 +12972,88 @@
           <a:lstStyle/>
           <a:p>
             <a:r>
-              <a:rPr lang="en-CA" dirty="0" smtClean="0"/>
+              <a:rPr lang="en-CA" dirty="0"/>
               <a:t>Ruby script</a:t>
             </a:r>
           </a:p>
           <a:p>
             <a:pPr lvl="1"/>
             <a:r>
-              <a:rPr lang="en-CA" dirty="0" smtClean="0"/>
+              <a:rPr lang="en-CA" dirty="0"/>
               <a:t>Instructions that control programs</a:t>
             </a:r>
           </a:p>
           <a:p>
             <a:pPr lvl="1"/>
             <a:r>
-              <a:rPr lang="en-CA" dirty="0" smtClean="0"/>
+              <a:rPr lang="en-CA" dirty="0"/>
               <a:t>Interpreted vs compiled (program)</a:t>
             </a:r>
           </a:p>
           <a:p>
             <a:pPr lvl="1"/>
             <a:r>
-              <a:rPr lang="en-CA" dirty="0" smtClean="0"/>
+              <a:rPr lang="en-CA" dirty="0"/>
               <a:t>Ruby is an interpreted language e.g. python, </a:t>
             </a:r>
             <a:r>
-              <a:rPr lang="en-CA" dirty="0" err="1" smtClean="0"/>
+              <a:rPr lang="en-CA" dirty="0" err="1"/>
               <a:t>matlab</a:t>
             </a:r>
             <a:r>
-              <a:rPr lang="en-CA" dirty="0" smtClean="0"/>
+              <a:rPr lang="en-CA" dirty="0"/>
               <a:t>, </a:t>
             </a:r>
             <a:r>
-              <a:rPr lang="en-CA" dirty="0" err="1" smtClean="0"/>
+              <a:rPr lang="en-CA" dirty="0" err="1"/>
               <a:t>javascript</a:t>
             </a:r>
-            <a:endParaRPr lang="en-CA" dirty="0" smtClean="0"/>
-          </a:p>
-          <a:p>
-            <a:r>
-              <a:rPr lang="en-CA" dirty="0" smtClean="0"/>
-              <a:t>Sources </a:t>
-            </a:r>
-            <a:r>
-              <a:rPr lang="en-CA" dirty="0" smtClean="0"/>
-              <a:t>for OpenStudio </a:t>
-            </a:r>
-            <a:r>
-              <a:rPr lang="en-CA" dirty="0" smtClean="0"/>
-              <a:t>measures</a:t>
-            </a:r>
-          </a:p>
-          <a:p>
-            <a:r>
-              <a:rPr lang="en-CA" dirty="0" smtClean="0"/>
+            <a:endParaRPr lang="en-CA" dirty="0"/>
+          </a:p>
+          <a:p>
+            <a:r>
+              <a:rPr lang="en-CA" dirty="0"/>
+              <a:t>Sources for OpenStudio measures</a:t>
+            </a:r>
+          </a:p>
+          <a:p>
+            <a:r>
+              <a:rPr lang="en-CA" dirty="0"/>
               <a:t>Measure writers are not omnipotent </a:t>
             </a:r>
-            <a:endParaRPr lang="en-CA" dirty="0" smtClean="0"/>
-          </a:p>
-          <a:p>
-            <a:r>
-              <a:rPr lang="en-CA" dirty="0" smtClean="0"/>
+          </a:p>
+          <a:p>
+            <a:r>
+              <a:rPr lang="en-CA" dirty="0"/>
               <a:t>Example: multiple measures</a:t>
             </a:r>
           </a:p>
           <a:p>
             <a:r>
-              <a:rPr lang="en-CA" dirty="0" smtClean="0"/>
+              <a:rPr lang="en-CA" dirty="0"/>
               <a:t>Example: create prototype </a:t>
             </a:r>
-            <a:endParaRPr lang="en-CA" dirty="0" smtClean="0"/>
-          </a:p>
-          <a:p>
-            <a:r>
-              <a:rPr lang="en-CA" dirty="0" smtClean="0"/>
+          </a:p>
+          <a:p>
+            <a:r>
+              <a:rPr lang="en-CA" dirty="0"/>
               <a:t>Measure walkthrough &amp; OpenStudio-Standards</a:t>
             </a:r>
-            <a:endParaRPr lang="en-CA" dirty="0" smtClean="0"/>
           </a:p>
           <a:p>
             <a:endParaRPr lang="en-CA" dirty="0"/>
           </a:p>
           <a:p>
-            <a:endParaRPr lang="en-CA" dirty="0" smtClean="0"/>
-          </a:p>
-          <a:p>
-            <a:endParaRPr lang="en-CA" dirty="0" smtClean="0"/>
-          </a:p>
-          <a:p>
-            <a:endParaRPr lang="en-CA" dirty="0" smtClean="0"/>
-          </a:p>
-          <a:p>
-            <a:endParaRPr lang="en-CA" dirty="0" smtClean="0"/>
+            <a:endParaRPr lang="en-CA" dirty="0"/>
+          </a:p>
+          <a:p>
+            <a:endParaRPr lang="en-CA" dirty="0"/>
+          </a:p>
+          <a:p>
+            <a:endParaRPr lang="en-CA" dirty="0"/>
+          </a:p>
+          <a:p>
+            <a:endParaRPr lang="en-CA" dirty="0"/>
           </a:p>
           <a:p>
             <a:endParaRPr lang="en-CA" dirty="0"/>
@@ -13843,13 +13077,6 @@
   <p:clrMapOvr>
     <a:masterClrMapping/>
   </p:clrMapOvr>
-  <p:timing>
-    <p:tnLst>
-      <p:par>
-        <p:cTn id="1" dur="indefinite" restart="never" nodeType="tmRoot"/>
-      </p:par>
-    </p:tnLst>
-  </p:timing>
 </p:sld>
 </file>
 
@@ -13886,14 +13113,9 @@
           <a:lstStyle/>
           <a:p>
             <a:r>
-              <a:rPr lang="en-CA" dirty="0" smtClean="0"/>
-              <a:t>Parametric </a:t>
-            </a:r>
-            <a:r>
-              <a:rPr lang="en-CA" dirty="0" smtClean="0"/>
-              <a:t>Study</a:t>
-            </a:r>
-            <a:endParaRPr lang="en-CA" dirty="0"/>
+              <a:rPr lang="en-CA" dirty="0"/>
+              <a:t>Parametric Study</a:t>
+            </a:r>
           </a:p>
         </p:txBody>
       </p:sp>
@@ -13920,11 +13142,11 @@
           <a:lstStyle/>
           <a:p>
             <a:r>
-              <a:rPr lang="en-CA" dirty="0" smtClean="0"/>
+              <a:rPr lang="en-CA" dirty="0"/>
               <a:t>Multiple ECMs and inputs </a:t>
             </a:r>
             <a:r>
-              <a:rPr lang="en-CA" dirty="0" smtClean="0">
+              <a:rPr lang="en-CA" dirty="0">
                 <a:sym typeface="Wingdings" panose="05000000000000000000" pitchFamily="2" charset="2"/>
               </a:rPr>
               <a:t> combinations</a:t>
@@ -13932,7 +13154,7 @@
           </a:p>
           <a:p>
             <a:r>
-              <a:rPr lang="en-CA" dirty="0" smtClean="0">
+              <a:rPr lang="en-CA" dirty="0">
                 <a:sym typeface="Wingdings" panose="05000000000000000000" pitchFamily="2" charset="2"/>
               </a:rPr>
               <a:t>Small scale parametric study</a:t>
@@ -13941,22 +13163,16 @@
           <a:p>
             <a:pPr lvl="1"/>
             <a:r>
-              <a:rPr lang="en-CA" dirty="0" smtClean="0">
+              <a:rPr lang="en-CA" dirty="0">
                 <a:sym typeface="Wingdings" panose="05000000000000000000" pitchFamily="2" charset="2"/>
               </a:rPr>
-              <a:t>Improve </a:t>
-            </a:r>
-            <a:r>
-              <a:rPr lang="en-CA" dirty="0" smtClean="0">
-                <a:sym typeface="Wingdings" panose="05000000000000000000" pitchFamily="2" charset="2"/>
-              </a:rPr>
-              <a:t>CCHT F’s envelope</a:t>
+              <a:t>Improve CCHT F’s envelope</a:t>
             </a:r>
           </a:p>
           <a:p>
             <a:pPr lvl="1"/>
             <a:r>
-              <a:rPr lang="en-CA" dirty="0" smtClean="0">
+              <a:rPr lang="en-CA" dirty="0">
                 <a:sym typeface="Wingdings" panose="05000000000000000000" pitchFamily="2" charset="2"/>
               </a:rPr>
               <a:t>A few ECMs</a:t>
@@ -13965,22 +13181,16 @@
           <a:p>
             <a:pPr lvl="2"/>
             <a:r>
-              <a:rPr lang="en-CA" dirty="0" smtClean="0">
+              <a:rPr lang="en-CA" dirty="0">
                 <a:sym typeface="Wingdings" panose="05000000000000000000" pitchFamily="2" charset="2"/>
               </a:rPr>
-              <a:t>South </a:t>
-            </a:r>
-            <a:r>
-              <a:rPr lang="en-CA" dirty="0" smtClean="0">
-                <a:sym typeface="Wingdings" panose="05000000000000000000" pitchFamily="2" charset="2"/>
-              </a:rPr>
-              <a:t>WWR (0.35, 0.45, 0.55, 0.65)</a:t>
+              <a:t>South WWR (0.35, 0.45, 0.55, 0.65)</a:t>
             </a:r>
           </a:p>
           <a:p>
             <a:pPr lvl="2"/>
             <a:r>
-              <a:rPr lang="en-CA" dirty="0" smtClean="0">
+              <a:rPr lang="en-CA" dirty="0">
                 <a:sym typeface="Wingdings" panose="05000000000000000000" pitchFamily="2" charset="2"/>
               </a:rPr>
               <a:t>Wall R-value (R-20, R-40, R-60)</a:t>
@@ -13989,7 +13199,7 @@
           <a:p>
             <a:pPr lvl="1"/>
             <a:r>
-              <a:rPr lang="en-CA" dirty="0" smtClean="0">
+              <a:rPr lang="en-CA" dirty="0">
                 <a:sym typeface="Wingdings" panose="05000000000000000000" pitchFamily="2" charset="2"/>
               </a:rPr>
               <a:t>OpenStudio App </a:t>
@@ -13998,7 +13208,7 @@
           <a:p>
             <a:pPr lvl="2"/>
             <a:r>
-              <a:rPr lang="en-CA" dirty="0" smtClean="0">
+              <a:rPr lang="en-CA" dirty="0">
                 <a:sym typeface="Wingdings" panose="05000000000000000000" pitchFamily="2" charset="2"/>
               </a:rPr>
               <a:t>12 simulations in series</a:t>
@@ -14007,7 +13217,7 @@
           <a:p>
             <a:pPr lvl="2"/>
             <a:r>
-              <a:rPr lang="en-CA" dirty="0" smtClean="0">
+              <a:rPr lang="en-CA" dirty="0">
                 <a:sym typeface="Wingdings" panose="05000000000000000000" pitchFamily="2" charset="2"/>
               </a:rPr>
               <a:t>12 files in parallel </a:t>
@@ -14015,7 +13225,7 @@
           </a:p>
           <a:p>
             <a:r>
-              <a:rPr lang="en-CA" dirty="0" smtClean="0">
+              <a:rPr lang="en-CA" dirty="0">
                 <a:sym typeface="Wingdings" panose="05000000000000000000" pitchFamily="2" charset="2"/>
               </a:rPr>
               <a:t>Parametric Analysis Tool </a:t>
@@ -14024,7 +13234,7 @@
           <a:p>
             <a:pPr lvl="1"/>
             <a:r>
-              <a:rPr lang="en-CA" dirty="0" smtClean="0">
+              <a:rPr lang="en-CA" dirty="0">
                 <a:sym typeface="Wingdings" panose="05000000000000000000" pitchFamily="2" charset="2"/>
               </a:rPr>
               <a:t>1 file</a:t>
@@ -14033,7 +13243,7 @@
           <a:p>
             <a:pPr lvl="1"/>
             <a:r>
-              <a:rPr lang="en-CA" dirty="0" smtClean="0">
+              <a:rPr lang="en-CA" dirty="0">
                 <a:sym typeface="Wingdings" panose="05000000000000000000" pitchFamily="2" charset="2"/>
               </a:rPr>
               <a:t>12 alternatives</a:t>
@@ -14042,14 +13252,14 @@
           <a:p>
             <a:pPr lvl="1"/>
             <a:r>
-              <a:rPr lang="en-CA" dirty="0" smtClean="0">
+              <a:rPr lang="en-CA" dirty="0">
                 <a:sym typeface="Wingdings" panose="05000000000000000000" pitchFamily="2" charset="2"/>
               </a:rPr>
               <a:t>Example</a:t>
             </a:r>
           </a:p>
           <a:p>
-            <a:endParaRPr lang="en-CA" dirty="0" smtClean="0"/>
+            <a:endParaRPr lang="en-CA" dirty="0"/>
           </a:p>
         </p:txBody>
       </p:sp>
@@ -14078,9 +13288,27 @@
                 <a:tableStyleId>{F5AB1C69-6EDB-4FF4-983F-18BD219EF322}</a:tableStyleId>
               </a:tblPr>
               <a:tblGrid>
-                <a:gridCol w="1160092"/>
-                <a:gridCol w="957129"/>
-                <a:gridCol w="1051132"/>
+                <a:gridCol w="1160092">
+                  <a:extLst>
+                    <a:ext uri="{9D8B030D-6E8A-4147-A177-3AD203B41FA5}">
+                      <a16:colId xmlns:a16="http://schemas.microsoft.com/office/drawing/2014/main" val="20000"/>
+                    </a:ext>
+                  </a:extLst>
+                </a:gridCol>
+                <a:gridCol w="957129">
+                  <a:extLst>
+                    <a:ext uri="{9D8B030D-6E8A-4147-A177-3AD203B41FA5}">
+                      <a16:colId xmlns:a16="http://schemas.microsoft.com/office/drawing/2014/main" val="20001"/>
+                    </a:ext>
+                  </a:extLst>
+                </a:gridCol>
+                <a:gridCol w="1051132">
+                  <a:extLst>
+                    <a:ext uri="{9D8B030D-6E8A-4147-A177-3AD203B41FA5}">
+                      <a16:colId xmlns:a16="http://schemas.microsoft.com/office/drawing/2014/main" val="20002"/>
+                    </a:ext>
+                  </a:extLst>
+                </a:gridCol>
               </a:tblGrid>
               <a:tr h="470174">
                 <a:tc>
@@ -14170,6 +13398,11 @@
                   </a:txBody>
                   <a:tcPr marL="6356" marR="6356" marT="6356" marB="0" anchor="b"/>
                 </a:tc>
+                <a:extLst>
+                  <a:ext uri="{0D108BD9-81ED-4DB2-BD59-A6C34878D82A}">
+                    <a16:rowId xmlns:a16="http://schemas.microsoft.com/office/drawing/2014/main" val="10000"/>
+                  </a:ext>
+                </a:extLst>
               </a:tr>
               <a:tr h="233860">
                 <a:tc>
@@ -14259,6 +13492,11 @@
                   </a:txBody>
                   <a:tcPr marL="6356" marR="6356" marT="6356" marB="0" anchor="b"/>
                 </a:tc>
+                <a:extLst>
+                  <a:ext uri="{0D108BD9-81ED-4DB2-BD59-A6C34878D82A}">
+                    <a16:rowId xmlns:a16="http://schemas.microsoft.com/office/drawing/2014/main" val="10001"/>
+                  </a:ext>
+                </a:extLst>
               </a:tr>
               <a:tr h="233860">
                 <a:tc>
@@ -14348,6 +13586,11 @@
                   </a:txBody>
                   <a:tcPr marL="6356" marR="6356" marT="6356" marB="0" anchor="b"/>
                 </a:tc>
+                <a:extLst>
+                  <a:ext uri="{0D108BD9-81ED-4DB2-BD59-A6C34878D82A}">
+                    <a16:rowId xmlns:a16="http://schemas.microsoft.com/office/drawing/2014/main" val="10002"/>
+                  </a:ext>
+                </a:extLst>
               </a:tr>
               <a:tr h="233860">
                 <a:tc>
@@ -14437,6 +13680,11 @@
                   </a:txBody>
                   <a:tcPr marL="6356" marR="6356" marT="6356" marB="0" anchor="b"/>
                 </a:tc>
+                <a:extLst>
+                  <a:ext uri="{0D108BD9-81ED-4DB2-BD59-A6C34878D82A}">
+                    <a16:rowId xmlns:a16="http://schemas.microsoft.com/office/drawing/2014/main" val="10003"/>
+                  </a:ext>
+                </a:extLst>
               </a:tr>
               <a:tr h="233860">
                 <a:tc>
@@ -14526,6 +13774,11 @@
                   </a:txBody>
                   <a:tcPr marL="6356" marR="6356" marT="6356" marB="0" anchor="b"/>
                 </a:tc>
+                <a:extLst>
+                  <a:ext uri="{0D108BD9-81ED-4DB2-BD59-A6C34878D82A}">
+                    <a16:rowId xmlns:a16="http://schemas.microsoft.com/office/drawing/2014/main" val="10004"/>
+                  </a:ext>
+                </a:extLst>
               </a:tr>
               <a:tr h="233860">
                 <a:tc>
@@ -14615,6 +13868,11 @@
                   </a:txBody>
                   <a:tcPr marL="6356" marR="6356" marT="6356" marB="0" anchor="b"/>
                 </a:tc>
+                <a:extLst>
+                  <a:ext uri="{0D108BD9-81ED-4DB2-BD59-A6C34878D82A}">
+                    <a16:rowId xmlns:a16="http://schemas.microsoft.com/office/drawing/2014/main" val="10005"/>
+                  </a:ext>
+                </a:extLst>
               </a:tr>
               <a:tr h="233860">
                 <a:tc>
@@ -14704,6 +13962,11 @@
                   </a:txBody>
                   <a:tcPr marL="6356" marR="6356" marT="6356" marB="0" anchor="b"/>
                 </a:tc>
+                <a:extLst>
+                  <a:ext uri="{0D108BD9-81ED-4DB2-BD59-A6C34878D82A}">
+                    <a16:rowId xmlns:a16="http://schemas.microsoft.com/office/drawing/2014/main" val="10006"/>
+                  </a:ext>
+                </a:extLst>
               </a:tr>
               <a:tr h="233860">
                 <a:tc>
@@ -14793,6 +14056,11 @@
                   </a:txBody>
                   <a:tcPr marL="6356" marR="6356" marT="6356" marB="0" anchor="b"/>
                 </a:tc>
+                <a:extLst>
+                  <a:ext uri="{0D108BD9-81ED-4DB2-BD59-A6C34878D82A}">
+                    <a16:rowId xmlns:a16="http://schemas.microsoft.com/office/drawing/2014/main" val="10007"/>
+                  </a:ext>
+                </a:extLst>
               </a:tr>
               <a:tr h="233860">
                 <a:tc>
@@ -14882,6 +14150,11 @@
                   </a:txBody>
                   <a:tcPr marL="6356" marR="6356" marT="6356" marB="0" anchor="b"/>
                 </a:tc>
+                <a:extLst>
+                  <a:ext uri="{0D108BD9-81ED-4DB2-BD59-A6C34878D82A}">
+                    <a16:rowId xmlns:a16="http://schemas.microsoft.com/office/drawing/2014/main" val="10008"/>
+                  </a:ext>
+                </a:extLst>
               </a:tr>
               <a:tr h="233860">
                 <a:tc>
@@ -14971,6 +14244,11 @@
                   </a:txBody>
                   <a:tcPr marL="6356" marR="6356" marT="6356" marB="0" anchor="b"/>
                 </a:tc>
+                <a:extLst>
+                  <a:ext uri="{0D108BD9-81ED-4DB2-BD59-A6C34878D82A}">
+                    <a16:rowId xmlns:a16="http://schemas.microsoft.com/office/drawing/2014/main" val="10009"/>
+                  </a:ext>
+                </a:extLst>
               </a:tr>
               <a:tr h="233860">
                 <a:tc>
@@ -15060,6 +14338,11 @@
                   </a:txBody>
                   <a:tcPr marL="6356" marR="6356" marT="6356" marB="0" anchor="b"/>
                 </a:tc>
+                <a:extLst>
+                  <a:ext uri="{0D108BD9-81ED-4DB2-BD59-A6C34878D82A}">
+                    <a16:rowId xmlns:a16="http://schemas.microsoft.com/office/drawing/2014/main" val="10010"/>
+                  </a:ext>
+                </a:extLst>
               </a:tr>
               <a:tr h="233860">
                 <a:tc>
@@ -15149,6 +14432,11 @@
                   </a:txBody>
                   <a:tcPr marL="6356" marR="6356" marT="6356" marB="0" anchor="b"/>
                 </a:tc>
+                <a:extLst>
+                  <a:ext uri="{0D108BD9-81ED-4DB2-BD59-A6C34878D82A}">
+                    <a16:rowId xmlns:a16="http://schemas.microsoft.com/office/drawing/2014/main" val="10011"/>
+                  </a:ext>
+                </a:extLst>
               </a:tr>
               <a:tr h="233860">
                 <a:tc>
@@ -15238,6 +14526,11 @@
                   </a:txBody>
                   <a:tcPr marL="6356" marR="6356" marT="6356" marB="0" anchor="b"/>
                 </a:tc>
+                <a:extLst>
+                  <a:ext uri="{0D108BD9-81ED-4DB2-BD59-A6C34878D82A}">
+                    <a16:rowId xmlns:a16="http://schemas.microsoft.com/office/drawing/2014/main" val="10012"/>
+                  </a:ext>
+                </a:extLst>
               </a:tr>
             </a:tbl>
           </a:graphicData>
@@ -15253,13 +14546,6 @@
   <p:clrMapOvr>
     <a:masterClrMapping/>
   </p:clrMapOvr>
-  <p:timing>
-    <p:tnLst>
-      <p:par>
-        <p:cTn id="1" dur="indefinite" restart="never" nodeType="tmRoot"/>
-      </p:par>
-    </p:tnLst>
-  </p:timing>
 </p:sld>
 </file>
 
@@ -15296,10 +14582,9 @@
           <a:lstStyle/>
           <a:p>
             <a:r>
-              <a:rPr lang="en-CA" dirty="0" smtClean="0"/>
+              <a:rPr lang="en-CA" dirty="0"/>
               <a:t>Parametric Analysis Tool</a:t>
             </a:r>
-            <a:endParaRPr lang="en-CA" dirty="0"/>
           </a:p>
         </p:txBody>
       </p:sp>
@@ -15326,87 +14611,86 @@
           <a:lstStyle/>
           <a:p>
             <a:r>
-              <a:rPr lang="en-CA" dirty="0" smtClean="0"/>
+              <a:rPr lang="en-CA" dirty="0"/>
               <a:t>Large(r) scale analyses</a:t>
             </a:r>
           </a:p>
           <a:p>
             <a:pPr lvl="1"/>
             <a:r>
-              <a:rPr lang="en-CA" dirty="0" smtClean="0"/>
+              <a:rPr lang="en-CA" dirty="0"/>
               <a:t>More than a few ECMs</a:t>
             </a:r>
           </a:p>
           <a:p>
             <a:pPr lvl="1"/>
             <a:r>
-              <a:rPr lang="en-CA" dirty="0" smtClean="0"/>
+              <a:rPr lang="en-CA" dirty="0"/>
               <a:t>Investigating the performance of a system (as a measure)</a:t>
             </a:r>
+          </a:p>
+          <a:p>
+            <a:pPr lvl="2"/>
+            <a:r>
+              <a:rPr lang="en-CA" dirty="0"/>
+              <a:t>Vary building</a:t>
+            </a:r>
+          </a:p>
+          <a:p>
+            <a:pPr lvl="2"/>
+            <a:r>
+              <a:rPr lang="en-CA" dirty="0"/>
+              <a:t>Vary location</a:t>
+            </a:r>
+          </a:p>
+          <a:p>
+            <a:pPr lvl="1"/>
+            <a:r>
+              <a:rPr lang="en-CA" dirty="0"/>
+              <a:t>Retrofit portfolio of buildings</a:t>
+            </a:r>
+          </a:p>
+          <a:p>
+            <a:pPr lvl="2"/>
+            <a:r>
+              <a:rPr lang="en-CA" dirty="0"/>
+              <a:t>Building type, location</a:t>
+            </a:r>
+          </a:p>
+          <a:p>
+            <a:pPr lvl="1"/>
+            <a:r>
+              <a:rPr lang="en-CA" dirty="0"/>
+              <a:t>Automated optimization</a:t>
+            </a:r>
+          </a:p>
+          <a:p>
+            <a:pPr lvl="2"/>
+            <a:r>
+              <a:rPr lang="en-CA" dirty="0"/>
+              <a:t>Full factorial experiment</a:t>
+            </a:r>
+          </a:p>
+          <a:p>
+            <a:pPr lvl="2"/>
+            <a:r>
+              <a:rPr lang="en-CA" dirty="0"/>
+              <a:t>Particle swarm </a:t>
+            </a:r>
+          </a:p>
+          <a:p>
+            <a:pPr lvl="2"/>
+            <a:r>
+              <a:rPr lang="en-CA" dirty="0"/>
+              <a:t>Genetic algorithm</a:t>
+            </a:r>
+          </a:p>
+          <a:p>
+            <a:pPr lvl="2"/>
             <a:endParaRPr lang="en-CA" dirty="0"/>
           </a:p>
           <a:p>
-            <a:pPr lvl="2"/>
-            <a:r>
-              <a:rPr lang="en-CA" dirty="0" smtClean="0"/>
-              <a:t>Vary building</a:t>
-            </a:r>
-          </a:p>
-          <a:p>
-            <a:pPr lvl="2"/>
-            <a:r>
-              <a:rPr lang="en-CA" dirty="0" smtClean="0"/>
-              <a:t>Vary location</a:t>
-            </a:r>
-          </a:p>
-          <a:p>
-            <a:pPr lvl="1"/>
-            <a:r>
-              <a:rPr lang="en-CA" dirty="0" smtClean="0"/>
-              <a:t>Retrofit portfolio of buildings</a:t>
-            </a:r>
-          </a:p>
-          <a:p>
-            <a:pPr lvl="2"/>
-            <a:r>
-              <a:rPr lang="en-CA" dirty="0" smtClean="0"/>
-              <a:t>Building type, location</a:t>
-            </a:r>
-          </a:p>
-          <a:p>
-            <a:pPr lvl="1"/>
-            <a:r>
-              <a:rPr lang="en-CA" dirty="0" smtClean="0"/>
-              <a:t>Automated optimization</a:t>
-            </a:r>
-          </a:p>
-          <a:p>
-            <a:pPr lvl="2"/>
-            <a:r>
-              <a:rPr lang="en-CA" dirty="0" smtClean="0"/>
-              <a:t>Full factorial experiment</a:t>
-            </a:r>
-          </a:p>
-          <a:p>
-            <a:pPr lvl="2"/>
-            <a:r>
-              <a:rPr lang="en-CA" dirty="0" smtClean="0"/>
-              <a:t>Particle swarm </a:t>
-            </a:r>
-          </a:p>
-          <a:p>
-            <a:pPr lvl="2"/>
-            <a:r>
-              <a:rPr lang="en-CA" dirty="0" smtClean="0"/>
-              <a:t>Genetic algorithm</a:t>
-            </a:r>
-          </a:p>
-          <a:p>
-            <a:pPr lvl="2"/>
-            <a:endParaRPr lang="en-CA" dirty="0" smtClean="0"/>
-          </a:p>
-          <a:p>
-            <a:endParaRPr lang="en-CA" dirty="0" smtClean="0"/>
+            <a:endParaRPr lang="en-CA" dirty="0"/>
           </a:p>
           <a:p>
             <a:pPr lvl="1"/>
@@ -15424,13 +14708,6 @@
   <p:clrMapOvr>
     <a:masterClrMapping/>
   </p:clrMapOvr>
-  <p:timing>
-    <p:tnLst>
-      <p:par>
-        <p:cTn id="1" dur="indefinite" restart="never" nodeType="tmRoot"/>
-      </p:par>
-    </p:tnLst>
-  </p:timing>
 </p:sld>
 </file>
 
@@ -15472,10 +14749,9 @@
           <a:lstStyle/>
           <a:p>
             <a:r>
-              <a:rPr lang="en-CA" dirty="0" smtClean="0"/>
+              <a:rPr lang="en-CA" dirty="0"/>
               <a:t>References</a:t>
             </a:r>
-            <a:endParaRPr lang="en-CA" dirty="0"/>
           </a:p>
         </p:txBody>
       </p:sp>
@@ -15674,7 +14950,7 @@
               <a:buAutoNum type="arabicPeriod"/>
             </a:pPr>
             <a:r>
-              <a:rPr kumimoji="0" lang="en-CA" altLang="en-US" sz="1200" b="0" i="0" u="none" strike="noStrike" cap="none" normalizeH="0" baseline="0" dirty="0" smtClean="0">
+              <a:rPr kumimoji="0" lang="en-CA" altLang="en-US" sz="1200" b="0" i="0" u="none" strike="noStrike" cap="none" normalizeH="0" baseline="0" dirty="0">
                 <a:ln>
                   <a:noFill/>
                 </a:ln>
@@ -15689,7 +14965,7 @@
               <a:t>Fujitsu General . (2023). </a:t>
             </a:r>
             <a:r>
-              <a:rPr kumimoji="0" lang="en-CA" altLang="en-US" sz="1200" b="0" i="1" u="none" strike="noStrike" cap="none" normalizeH="0" baseline="0" dirty="0" smtClean="0">
+              <a:rPr kumimoji="0" lang="en-CA" altLang="en-US" sz="1200" b="0" i="1" u="none" strike="noStrike" cap="none" normalizeH="0" baseline="0" dirty="0">
                 <a:ln>
                   <a:noFill/>
                 </a:ln>
@@ -15704,7 +14980,7 @@
               <a:t>What is a Mini-Split?</a:t>
             </a:r>
             <a:r>
-              <a:rPr kumimoji="0" lang="en-CA" altLang="en-US" sz="1200" b="0" i="0" u="none" strike="noStrike" cap="none" normalizeH="0" baseline="0" dirty="0" smtClean="0">
+              <a:rPr kumimoji="0" lang="en-CA" altLang="en-US" sz="1200" b="0" i="0" u="none" strike="noStrike" cap="none" normalizeH="0" baseline="0" dirty="0">
                 <a:ln>
                   <a:noFill/>
                 </a:ln>
@@ -15748,49 +15024,6 @@
               </a:rPr>
               <a:t>. </a:t>
             </a:r>
-            <a:endParaRPr lang="en-CA" sz="1200" dirty="0" smtClean="0">
-              <a:latin typeface="Bookman Old Style" panose="02050604050505020204" pitchFamily="18" charset="0"/>
-            </a:endParaRPr>
-          </a:p>
-          <a:p>
-            <a:pPr defTabSz="914400">
-              <a:buClrTx/>
-              <a:buSzTx/>
-              <a:buFont typeface="+mj-lt"/>
-              <a:buAutoNum type="arabicPeriod"/>
-            </a:pPr>
-            <a:endParaRPr lang="en-CA" sz="1200" dirty="0" smtClean="0">
-              <a:latin typeface="Bookman Old Style" panose="02050604050505020204" pitchFamily="18" charset="0"/>
-            </a:endParaRPr>
-          </a:p>
-          <a:p>
-            <a:pPr defTabSz="914400">
-              <a:buClrTx/>
-              <a:buSzTx/>
-              <a:buFont typeface="+mj-lt"/>
-              <a:buAutoNum type="arabicPeriod"/>
-            </a:pPr>
-            <a:r>
-              <a:rPr lang="en-CA" sz="1200" i="1" dirty="0" smtClean="0">
-                <a:latin typeface="Bookman Old Style" panose="02050604050505020204" pitchFamily="18" charset="0"/>
-              </a:rPr>
-              <a:t>EnergyPlus </a:t>
-            </a:r>
-            <a:r>
-              <a:rPr lang="en-CA" sz="1200" i="1" dirty="0">
-                <a:latin typeface="Bookman Old Style" panose="02050604050505020204" pitchFamily="18" charset="0"/>
-              </a:rPr>
-              <a:t>University Course Teaching Material</a:t>
-            </a:r>
-            <a:r>
-              <a:rPr lang="en-CA" sz="1200" dirty="0">
-                <a:latin typeface="Bookman Old Style" panose="02050604050505020204" pitchFamily="18" charset="0"/>
-              </a:rPr>
-              <a:t>. Retrieved from https://energyplus.net/assets/nrel_custom/eplus_files/university_course.zip. </a:t>
-            </a:r>
-            <a:endParaRPr lang="en-CA" sz="1200" dirty="0" smtClean="0">
-              <a:latin typeface="Bookman Old Style" panose="02050604050505020204" pitchFamily="18" charset="0"/>
-            </a:endParaRPr>
           </a:p>
           <a:p>
             <a:pPr defTabSz="914400">
@@ -15804,6 +15037,37 @@
             </a:endParaRPr>
           </a:p>
           <a:p>
+            <a:pPr defTabSz="914400">
+              <a:buClrTx/>
+              <a:buSzTx/>
+              <a:buFont typeface="+mj-lt"/>
+              <a:buAutoNum type="arabicPeriod"/>
+            </a:pPr>
+            <a:r>
+              <a:rPr lang="en-CA" sz="1200" i="1" dirty="0">
+                <a:latin typeface="Bookman Old Style" panose="02050604050505020204" pitchFamily="18" charset="0"/>
+              </a:rPr>
+              <a:t>EnergyPlus University Course Teaching Material</a:t>
+            </a:r>
+            <a:r>
+              <a:rPr lang="en-CA" sz="1200" dirty="0">
+                <a:latin typeface="Bookman Old Style" panose="02050604050505020204" pitchFamily="18" charset="0"/>
+              </a:rPr>
+              <a:t>. Retrieved from https://energyplus.net/assets/nrel_custom/eplus_files/university_course.zip. </a:t>
+            </a:r>
+          </a:p>
+          <a:p>
+            <a:pPr defTabSz="914400">
+              <a:buClrTx/>
+              <a:buSzTx/>
+              <a:buFont typeface="+mj-lt"/>
+              <a:buAutoNum type="arabicPeriod"/>
+            </a:pPr>
+            <a:endParaRPr lang="en-CA" sz="1200" dirty="0">
+              <a:latin typeface="Bookman Old Style" panose="02050604050505020204" pitchFamily="18" charset="0"/>
+            </a:endParaRPr>
+          </a:p>
+          <a:p>
             <a:pPr>
               <a:buFont typeface="+mj-lt"/>
               <a:buAutoNum type="arabicPeriod"/>
@@ -15831,16 +15095,9 @@
                 <a:latin typeface="Bookman Old Style" panose="02050604050505020204" pitchFamily="18" charset="0"/>
                 <a:hlinkClick r:id="rId2"/>
               </a:rPr>
-              <a:t>https://</a:t>
-            </a:r>
-            <a:r>
-              <a:rPr lang="en-CA" sz="1200" dirty="0" smtClean="0">
-                <a:latin typeface="Bookman Old Style" panose="02050604050505020204" pitchFamily="18" charset="0"/>
-                <a:hlinkClick r:id="rId2"/>
-              </a:rPr>
-              <a:t>www.fujitsugeneral.com/us/residential/what-is-a-mini-split.html</a:t>
-            </a:r>
-            <a:endParaRPr lang="en-CA" sz="1200" dirty="0" smtClean="0">
+              <a:t>https://www.fujitsugeneral.com/us/residential/what-is-a-mini-split.html</a:t>
+            </a:r>
+            <a:endParaRPr lang="en-CA" sz="1200" dirty="0">
               <a:latin typeface="Bookman Old Style" panose="02050604050505020204" pitchFamily="18" charset="0"/>
             </a:endParaRPr>
           </a:p>
@@ -15861,7 +15118,7 @@
               <a:buAutoNum type="arabicPeriod"/>
             </a:pPr>
             <a:r>
-              <a:rPr kumimoji="0" lang="en-CA" altLang="en-US" sz="1200" b="0" i="0" u="none" strike="noStrike" cap="none" normalizeH="0" baseline="0" dirty="0" smtClean="0">
+              <a:rPr kumimoji="0" lang="en-CA" altLang="en-US" sz="1200" b="0" i="0" u="none" strike="noStrike" cap="none" normalizeH="0" baseline="0" dirty="0">
                 <a:ln>
                   <a:noFill/>
                 </a:ln>
@@ -15876,7 +15133,7 @@
               <a:t>Mitsubishi Electric Sales Canada. (2021). </a:t>
             </a:r>
             <a:r>
-              <a:rPr kumimoji="0" lang="en-CA" altLang="en-US" sz="1200" b="0" i="1" u="none" strike="noStrike" cap="none" normalizeH="0" baseline="0" dirty="0" smtClean="0">
+              <a:rPr kumimoji="0" lang="en-CA" altLang="en-US" sz="1200" b="0" i="1" u="none" strike="noStrike" cap="none" normalizeH="0" baseline="0" dirty="0">
                 <a:ln>
                   <a:noFill/>
                 </a:ln>
@@ -15891,7 +15148,7 @@
               <a:t>How it works: Energy Recovery Ventilator Cores.</a:t>
             </a:r>
             <a:r>
-              <a:rPr kumimoji="0" lang="en-CA" altLang="en-US" sz="1200" b="0" i="0" u="none" strike="noStrike" cap="none" normalizeH="0" baseline="0" dirty="0" smtClean="0">
+              <a:rPr kumimoji="0" lang="en-CA" altLang="en-US" sz="1200" b="0" i="0" u="none" strike="noStrike" cap="none" normalizeH="0" baseline="0" dirty="0">
                 <a:ln>
                   <a:noFill/>
                 </a:ln>
@@ -15906,7 +15163,7 @@
               <a:t> Markham: Mitsubishi Electric Sales Canada. Retrieved from </a:t>
             </a:r>
             <a:r>
-              <a:rPr kumimoji="0" lang="en-CA" altLang="en-US" sz="1200" b="0" i="0" u="none" strike="noStrike" cap="none" normalizeH="0" baseline="0" dirty="0" smtClean="0">
+              <a:rPr kumimoji="0" lang="en-CA" altLang="en-US" sz="1200" b="0" i="0" u="none" strike="noStrike" cap="none" normalizeH="0" baseline="0" dirty="0">
                 <a:ln>
                   <a:noFill/>
                 </a:ln>
@@ -15921,7 +15178,7 @@
               </a:rPr>
               <a:t>https://www.mitsubishitechinfo.ca/sites/default/files/010_HiW%20Energy%20Recovery%20Cores.pdf</a:t>
             </a:r>
-            <a:endParaRPr kumimoji="0" lang="en-CA" altLang="en-US" sz="1200" b="0" i="0" u="none" strike="noStrike" cap="none" normalizeH="0" baseline="0" dirty="0" smtClean="0">
+            <a:endParaRPr kumimoji="0" lang="en-CA" altLang="en-US" sz="1200" b="0" i="0" u="none" strike="noStrike" cap="none" normalizeH="0" baseline="0" dirty="0">
               <a:ln>
                 <a:noFill/>
               </a:ln>
@@ -15941,7 +15198,7 @@
               <a:buFont typeface="+mj-lt"/>
               <a:buAutoNum type="arabicPeriod"/>
             </a:pPr>
-            <a:endParaRPr kumimoji="0" lang="en-CA" altLang="en-US" sz="1200" b="0" i="0" u="none" strike="noStrike" cap="none" normalizeH="0" baseline="0" dirty="0" smtClean="0">
+            <a:endParaRPr kumimoji="0" lang="en-CA" altLang="en-US" sz="1200" b="0" i="0" u="none" strike="noStrike" cap="none" normalizeH="0" baseline="0" dirty="0">
               <a:ln>
                 <a:noFill/>
               </a:ln>
@@ -16006,18 +15263,9 @@
                 <a:cs typeface="Times New Roman" panose="02020603050405020304" pitchFamily="18" charset="0"/>
                 <a:hlinkClick r:id="rId4"/>
               </a:rPr>
-              <a:t>https://</a:t>
-            </a:r>
-            <a:r>
-              <a:rPr lang="en-CA" altLang="en-US" sz="1200" dirty="0" smtClean="0">
-                <a:latin typeface="Bookman Old Style" panose="02050604050505020204" pitchFamily="18" charset="0"/>
-                <a:ea typeface="Calibri" panose="020F0502020204030204" pitchFamily="34" charset="0"/>
-                <a:cs typeface="Times New Roman" panose="02020603050405020304" pitchFamily="18" charset="0"/>
-                <a:hlinkClick r:id="rId4"/>
-              </a:rPr>
-              <a:t>www.bchydro.com/content/dam/BCHydro/customer-portal/documents/power-smart/builders-developers/building-envelope-thermal-bridging-guide-v1-6.pdf</a:t>
-            </a:r>
-            <a:endParaRPr lang="en-CA" altLang="en-US" sz="1200" dirty="0" smtClean="0">
+              <a:t>https://www.bchydro.com/content/dam/BCHydro/customer-portal/documents/power-smart/builders-developers/building-envelope-thermal-bridging-guide-v1-6.pdf</a:t>
+            </a:r>
+            <a:endParaRPr lang="en-CA" altLang="en-US" sz="1200" dirty="0">
               <a:latin typeface="Bookman Old Style" panose="02050604050505020204" pitchFamily="18" charset="0"/>
               <a:ea typeface="Calibri" panose="020F0502020204030204" pitchFamily="34" charset="0"/>
               <a:cs typeface="Times New Roman" panose="02020603050405020304" pitchFamily="18" charset="0"/>
@@ -16044,16 +15292,10 @@
               <a:buAutoNum type="arabicPeriod"/>
             </a:pPr>
             <a:r>
-              <a:rPr lang="en-CA" sz="1200" dirty="0" smtClean="0">
-                <a:latin typeface="Bookman Old Style" panose="02050604050505020204" pitchFamily="18" charset="0"/>
-              </a:rPr>
-              <a:t>Payette</a:t>
-            </a:r>
-            <a:r>
               <a:rPr lang="en-CA" sz="1200" dirty="0">
                 <a:latin typeface="Bookman Old Style" panose="02050604050505020204" pitchFamily="18" charset="0"/>
               </a:rPr>
-              <a:t>. (2018, November 7). </a:t>
+              <a:t>Payette. (2018, November 7). </a:t>
             </a:r>
             <a:r>
               <a:rPr lang="en-CA" sz="1200" i="1" dirty="0">
@@ -16067,9 +15309,6 @@
               </a:rPr>
               <a:t>. Energy Modeling and the Whole Building Approach to Energy Efficiency. Retrieved February 19, 2023, from https://www.payette.com/news/energy-modeling-and-the-whole-building-approach-to-energy-efficiency/ </a:t>
             </a:r>
-            <a:endParaRPr lang="en-CA" sz="1200" dirty="0" smtClean="0">
-              <a:latin typeface="Bookman Old Style" panose="02050604050505020204" pitchFamily="18" charset="0"/>
-            </a:endParaRPr>
           </a:p>
           <a:p>
             <a:pPr defTabSz="914400">
@@ -16090,7 +15329,7 @@
               <a:buAutoNum type="arabicPeriod"/>
             </a:pPr>
             <a:r>
-              <a:rPr kumimoji="0" lang="en-CA" altLang="en-US" sz="1200" b="0" i="0" u="none" strike="noStrike" cap="none" normalizeH="0" baseline="0" dirty="0" smtClean="0">
+              <a:rPr kumimoji="0" lang="en-CA" altLang="en-US" sz="1200" b="0" i="0" u="none" strike="noStrike" cap="none" normalizeH="0" baseline="0" dirty="0">
                 <a:ln>
                   <a:noFill/>
                 </a:ln>
@@ -16105,7 +15344,7 @@
               <a:t>Petro Home Services. (2023). </a:t>
             </a:r>
             <a:r>
-              <a:rPr kumimoji="0" lang="en-CA" altLang="en-US" sz="1200" b="0" i="1" u="none" strike="noStrike" cap="none" normalizeH="0" baseline="0" dirty="0" smtClean="0">
+              <a:rPr kumimoji="0" lang="en-CA" altLang="en-US" sz="1200" b="0" i="1" u="none" strike="noStrike" cap="none" normalizeH="0" baseline="0" dirty="0">
                 <a:ln>
                   <a:noFill/>
                 </a:ln>
@@ -16120,7 +15359,7 @@
               <a:t>HVAC Packaged Unit vs. Split System: Differences, benefits, and how to choose.</a:t>
             </a:r>
             <a:r>
-              <a:rPr kumimoji="0" lang="en-CA" altLang="en-US" sz="1200" b="0" i="0" u="none" strike="noStrike" cap="none" normalizeH="0" baseline="0" dirty="0" smtClean="0">
+              <a:rPr kumimoji="0" lang="en-CA" altLang="en-US" sz="1200" b="0" i="0" u="none" strike="noStrike" cap="none" normalizeH="0" baseline="0" dirty="0">
                 <a:ln>
                   <a:noFill/>
                 </a:ln>
@@ -16135,7 +15374,7 @@
               <a:t> Retrieved from Petro Home Services: </a:t>
             </a:r>
             <a:r>
-              <a:rPr kumimoji="0" lang="en-CA" altLang="en-US" sz="1200" b="0" i="0" u="none" strike="noStrike" cap="none" normalizeH="0" baseline="0" dirty="0" smtClean="0">
+              <a:rPr kumimoji="0" lang="en-CA" altLang="en-US" sz="1200" b="0" i="0" u="none" strike="noStrike" cap="none" normalizeH="0" baseline="0" dirty="0">
                 <a:ln>
                   <a:noFill/>
                 </a:ln>
@@ -16150,7 +15389,7 @@
               </a:rPr>
               <a:t>https://www.petro.com/resource-center/hvac-packaged-unit-vs-split-system</a:t>
             </a:r>
-            <a:endParaRPr kumimoji="0" lang="en-CA" altLang="en-US" sz="1200" b="0" i="0" u="none" strike="noStrike" cap="none" normalizeH="0" baseline="0" dirty="0" smtClean="0">
+            <a:endParaRPr kumimoji="0" lang="en-CA" altLang="en-US" sz="1200" b="0" i="0" u="none" strike="noStrike" cap="none" normalizeH="0" baseline="0" dirty="0">
               <a:ln>
                 <a:noFill/>
               </a:ln>
@@ -16170,7 +15409,7 @@
               <a:buFont typeface="+mj-lt"/>
               <a:buAutoNum type="arabicPeriod"/>
             </a:pPr>
-            <a:endParaRPr kumimoji="0" lang="en-CA" altLang="en-US" sz="1200" b="0" i="0" u="none" strike="noStrike" cap="none" normalizeH="0" baseline="0" dirty="0" smtClean="0">
+            <a:endParaRPr kumimoji="0" lang="en-CA" altLang="en-US" sz="1200" b="0" i="0" u="none" strike="noStrike" cap="none" normalizeH="0" baseline="0" dirty="0">
               <a:ln>
                 <a:noFill/>
               </a:ln>
@@ -16189,7 +15428,7 @@
               <a:buAutoNum type="arabicPeriod"/>
             </a:pPr>
             <a:r>
-              <a:rPr kumimoji="0" lang="en-CA" altLang="en-US" sz="1200" b="0" i="0" u="none" strike="noStrike" cap="none" normalizeH="0" baseline="0" dirty="0" smtClean="0">
+              <a:rPr kumimoji="0" lang="en-CA" altLang="en-US" sz="1200" b="0" i="0" u="none" strike="noStrike" cap="none" normalizeH="0" baseline="0" dirty="0">
                 <a:ln>
                   <a:noFill/>
                 </a:ln>
@@ -16204,7 +15443,7 @@
               <a:t>Tec tube. (2017, September 26). Fundamentals of Energy Recovery Ventilators (ERVs) [Video]. US: </a:t>
             </a:r>
             <a:r>
-              <a:rPr kumimoji="0" lang="en-CA" altLang="en-US" sz="1200" b="0" i="0" u="none" strike="noStrike" cap="none" normalizeH="0" baseline="0" dirty="0" err="1" smtClean="0">
+              <a:rPr kumimoji="0" lang="en-CA" altLang="en-US" sz="1200" b="0" i="0" u="none" strike="noStrike" cap="none" normalizeH="0" baseline="0" dirty="0" err="1">
                 <a:ln>
                   <a:noFill/>
                 </a:ln>
@@ -16219,7 +15458,7 @@
               <a:t>Youtube</a:t>
             </a:r>
             <a:r>
-              <a:rPr kumimoji="0" lang="en-CA" altLang="en-US" sz="1200" b="0" i="0" u="none" strike="noStrike" cap="none" normalizeH="0" baseline="0" dirty="0" smtClean="0">
+              <a:rPr kumimoji="0" lang="en-CA" altLang="en-US" sz="1200" b="0" i="0" u="none" strike="noStrike" cap="none" normalizeH="0" baseline="0" dirty="0">
                 <a:ln>
                   <a:noFill/>
                 </a:ln>
@@ -16234,7 +15473,7 @@
               <a:t>. Retrieved from </a:t>
             </a:r>
             <a:r>
-              <a:rPr kumimoji="0" lang="en-CA" altLang="en-US" sz="1200" b="0" i="0" u="none" strike="noStrike" cap="none" normalizeH="0" baseline="0" dirty="0" smtClean="0">
+              <a:rPr kumimoji="0" lang="en-CA" altLang="en-US" sz="1200" b="0" i="0" u="none" strike="noStrike" cap="none" normalizeH="0" baseline="0" dirty="0">
                 <a:ln>
                   <a:noFill/>
                 </a:ln>
@@ -16249,7 +15488,7 @@
               </a:rPr>
               <a:t>https://www.youtube.com/watch?v=QOSelUK6dpQ&amp;t=100s</a:t>
             </a:r>
-            <a:endParaRPr kumimoji="0" lang="en-CA" altLang="en-US" sz="1200" b="0" i="0" u="none" strike="noStrike" cap="none" normalizeH="0" baseline="0" dirty="0" smtClean="0">
+            <a:endParaRPr kumimoji="0" lang="en-CA" altLang="en-US" sz="1200" b="0" i="0" u="none" strike="noStrike" cap="none" normalizeH="0" baseline="0" dirty="0">
               <a:ln>
                 <a:noFill/>
               </a:ln>
@@ -16269,7 +15508,7 @@
               <a:buFont typeface="+mj-lt"/>
               <a:buAutoNum type="arabicPeriod"/>
             </a:pPr>
-            <a:endParaRPr kumimoji="0" lang="en-CA" altLang="en-US" sz="1200" b="0" i="0" u="none" strike="noStrike" cap="none" normalizeH="0" baseline="0" dirty="0" smtClean="0">
+            <a:endParaRPr kumimoji="0" lang="en-CA" altLang="en-US" sz="1200" b="0" i="0" u="none" strike="noStrike" cap="none" normalizeH="0" baseline="0" dirty="0">
               <a:ln>
                 <a:noFill/>
               </a:ln>
@@ -16288,7 +15527,7 @@
               <a:buAutoNum type="arabicPeriod"/>
             </a:pPr>
             <a:r>
-              <a:rPr kumimoji="0" lang="en-CA" altLang="en-US" sz="1200" b="0" i="0" u="none" strike="noStrike" cap="none" normalizeH="0" baseline="0" dirty="0" smtClean="0">
+              <a:rPr kumimoji="0" lang="en-CA" altLang="en-US" sz="1200" b="0" i="0" u="none" strike="noStrike" cap="none" normalizeH="0" baseline="0" dirty="0">
                 <a:ln>
                   <a:noFill/>
                 </a:ln>
@@ -16303,7 +15542,7 @@
               <a:t>U.S. Department of Energy. (2021). </a:t>
             </a:r>
             <a:r>
-              <a:rPr kumimoji="0" lang="en-CA" altLang="en-US" sz="1200" b="0" i="1" u="none" strike="noStrike" cap="none" normalizeH="0" baseline="0" dirty="0" smtClean="0">
+              <a:rPr kumimoji="0" lang="en-CA" altLang="en-US" sz="1200" b="0" i="1" u="none" strike="noStrike" cap="none" normalizeH="0" baseline="0" dirty="0">
                 <a:ln>
                   <a:noFill/>
                 </a:ln>
@@ -16318,7 +15557,7 @@
               <a:t>EnergyPlus Version 9.6.0 Documentation: Input Output Reference.</a:t>
             </a:r>
             <a:r>
-              <a:rPr kumimoji="0" lang="en-CA" altLang="en-US" sz="1200" b="0" i="0" u="none" strike="noStrike" cap="none" normalizeH="0" baseline="0" dirty="0" smtClean="0">
+              <a:rPr kumimoji="0" lang="en-CA" altLang="en-US" sz="1200" b="0" i="0" u="none" strike="noStrike" cap="none" normalizeH="0" baseline="0" dirty="0">
                 <a:ln>
                   <a:noFill/>
                 </a:ln>
@@ -16332,7 +15571,7 @@
               </a:rPr>
               <a:t> NREL.</a:t>
             </a:r>
-            <a:endParaRPr kumimoji="0" lang="en-CA" altLang="en-US" sz="1200" b="0" i="0" u="none" strike="noStrike" cap="none" normalizeH="0" baseline="0" dirty="0" smtClean="0">
+            <a:endParaRPr kumimoji="0" lang="en-CA" altLang="en-US" sz="1200" b="0" i="0" u="none" strike="noStrike" cap="none" normalizeH="0" baseline="0" dirty="0">
               <a:ln>
                 <a:noFill/>
               </a:ln>
@@ -16360,7 +15599,7 @@
               <a:buNone/>
               <a:tabLst/>
             </a:pPr>
-            <a:endParaRPr kumimoji="0" lang="en-CA" altLang="en-US" sz="1800" b="0" i="0" u="none" strike="noStrike" cap="none" normalizeH="0" baseline="0" dirty="0" smtClean="0">
+            <a:endParaRPr kumimoji="0" lang="en-CA" altLang="en-US" sz="1800" b="0" i="0" u="none" strike="noStrike" cap="none" normalizeH="0" baseline="0" dirty="0">
               <a:ln>
                 <a:noFill/>
               </a:ln>
@@ -16383,13 +15622,6 @@
   <p:clrMapOvr>
     <a:masterClrMapping/>
   </p:clrMapOvr>
-  <p:timing>
-    <p:tnLst>
-      <p:par>
-        <p:cTn id="1" dur="indefinite" restart="never" nodeType="tmRoot"/>
-      </p:par>
-    </p:tnLst>
-  </p:timing>
 </p:sld>
 </file>
 
@@ -16427,14 +15659,15 @@
           </a:xfrm>
         </p:spPr>
         <p:txBody>
-          <a:bodyPr/>
+          <a:bodyPr>
+            <a:normAutofit/>
+          </a:bodyPr>
           <a:lstStyle/>
           <a:p>
             <a:r>
-              <a:rPr lang="en-CA" dirty="0" smtClean="0"/>
-              <a:t>Building energy modelling (BEM)</a:t>
-            </a:r>
-            <a:endParaRPr lang="en-CA" dirty="0"/>
+              <a:rPr lang="en-CA" dirty="0"/>
+              <a:t>BEM and BPS</a:t>
+            </a:r>
           </a:p>
         </p:txBody>
       </p:sp>
@@ -16448,7 +15681,12 @@
             <p:ph type="body" sz="half" idx="2"/>
           </p:nvPr>
         </p:nvSpPr>
-        <p:spPr/>
+        <p:spPr>
+          <a:xfrm>
+            <a:off x="6655914" y="2493360"/>
+            <a:ext cx="4848225" cy="3476617"/>
+          </a:xfrm>
+        </p:spPr>
         <p:txBody>
           <a:bodyPr>
             <a:normAutofit/>
@@ -16460,8 +15698,8 @@
               <a:buChar char="•"/>
             </a:pPr>
             <a:r>
-              <a:rPr lang="en-CA" dirty="0" smtClean="0"/>
-              <a:t>Characterize energy and moisture</a:t>
+              <a:rPr lang="en-CA" dirty="0"/>
+              <a:t>Building Energy Modelling (BEM)</a:t>
             </a:r>
           </a:p>
           <a:p>
@@ -16471,7 +15709,7 @@
             </a:pPr>
             <a:r>
               <a:rPr lang="en-CA" sz="1600" dirty="0"/>
-              <a:t>Between the building and the external environment</a:t>
+              <a:t>Characterize energy and moisture transfer between the building and the external environment</a:t>
             </a:r>
           </a:p>
           <a:p>
@@ -16490,8 +15728,8 @@
               <a:buChar char="•"/>
             </a:pPr>
             <a:r>
-              <a:rPr lang="en-CA" dirty="0" smtClean="0"/>
-              <a:t>For example…</a:t>
+              <a:rPr lang="en-CA" dirty="0"/>
+              <a:t>Building Performance Simulation (BPS)</a:t>
             </a:r>
           </a:p>
           <a:p>
@@ -16500,8 +15738,8 @@
               <a:buChar char="•"/>
             </a:pPr>
             <a:r>
-              <a:rPr lang="en-CA" sz="1600" dirty="0" smtClean="0"/>
-              <a:t>Power generation</a:t>
+              <a:rPr lang="en-CA" sz="1600" dirty="0"/>
+              <a:t>More expansive</a:t>
             </a:r>
           </a:p>
           <a:p>
@@ -16510,8 +15748,8 @@
               <a:buChar char="•"/>
             </a:pPr>
             <a:r>
-              <a:rPr lang="en-CA" sz="1600" dirty="0" smtClean="0"/>
-              <a:t>Battery charging</a:t>
+              <a:rPr lang="en-CA" sz="1600" dirty="0"/>
+              <a:t>Thermal comfort, contaminant concentration, GHG emissions, lighting</a:t>
             </a:r>
           </a:p>
           <a:p>
@@ -16519,38 +15757,17 @@
               <a:buFont typeface="Arial" panose="020B0604020202020204" pitchFamily="34" charset="0"/>
               <a:buChar char="•"/>
             </a:pPr>
-            <a:r>
-              <a:rPr lang="en-CA" sz="1600" dirty="0" smtClean="0"/>
-              <a:t>People </a:t>
-            </a:r>
+            <a:endParaRPr lang="en-CA" sz="1600" dirty="0"/>
           </a:p>
           <a:p>
             <a:pPr marL="742950" lvl="1" indent="-285750">
               <a:buFont typeface="Arial" panose="020B0604020202020204" pitchFamily="34" charset="0"/>
               <a:buChar char="•"/>
             </a:pPr>
-            <a:r>
-              <a:rPr lang="en-CA" sz="1600" dirty="0" smtClean="0"/>
-              <a:t>“everything”</a:t>
-            </a:r>
             <a:endParaRPr lang="en-CA" sz="1600" dirty="0"/>
           </a:p>
           <a:p>
-            <a:pPr marL="742950" lvl="1" indent="-285750">
-              <a:buFont typeface="Arial" panose="020B0604020202020204" pitchFamily="34" charset="0"/>
-              <a:buChar char="•"/>
-            </a:pPr>
-            <a:endParaRPr lang="en-CA" sz="1600" dirty="0" smtClean="0"/>
-          </a:p>
-          <a:p>
-            <a:pPr marL="742950" lvl="1" indent="-285750">
-              <a:buFont typeface="Arial" panose="020B0604020202020204" pitchFamily="34" charset="0"/>
-              <a:buChar char="•"/>
-            </a:pPr>
-            <a:endParaRPr lang="en-CA" sz="1600" dirty="0" smtClean="0"/>
-          </a:p>
-          <a:p>
-            <a:endParaRPr lang="en-CA" dirty="0" smtClean="0"/>
+            <a:endParaRPr lang="en-CA" dirty="0"/>
           </a:p>
           <a:p>
             <a:pPr marL="742950" lvl="1" indent="-285750">
@@ -16616,12 +15833,8 @@
           <a:lstStyle/>
           <a:p>
             <a:r>
-              <a:rPr lang="en-CA" sz="1200" dirty="0" smtClean="0"/>
-              <a:t>Figure 1. Energy transfers in a building (Payette</a:t>
-            </a:r>
-            <a:r>
               <a:rPr lang="en-CA" sz="1200" dirty="0"/>
-              <a:t>, 2018)</a:t>
+              <a:t>Figure 1. Energy transfers in a building (Payette, 2018)</a:t>
             </a:r>
           </a:p>
         </p:txBody>
@@ -16636,13 +15849,6 @@
   <p:clrMapOvr>
     <a:masterClrMapping/>
   </p:clrMapOvr>
-  <p:timing>
-    <p:tnLst>
-      <p:par>
-        <p:cTn id="1" dur="indefinite" restart="never" nodeType="tmRoot"/>
-      </p:par>
-    </p:tnLst>
-  </p:timing>
 </p:sld>
 </file>
 
@@ -16679,10 +15885,9 @@
           <a:lstStyle/>
           <a:p>
             <a:r>
-              <a:rPr lang="en-CA" dirty="0" smtClean="0"/>
+              <a:rPr lang="en-CA" dirty="0"/>
               <a:t>When to….</a:t>
             </a:r>
-            <a:endParaRPr lang="en-CA" dirty="0"/>
           </a:p>
         </p:txBody>
       </p:sp>
@@ -16702,10 +15907,9 @@
           <a:lstStyle/>
           <a:p>
             <a:r>
-              <a:rPr lang="en-CA" dirty="0" smtClean="0"/>
+              <a:rPr lang="en-CA" dirty="0"/>
               <a:t>Skip BEM</a:t>
             </a:r>
-            <a:endParaRPr lang="en-CA" dirty="0"/>
           </a:p>
         </p:txBody>
       </p:sp>
@@ -16721,56 +15925,58 @@
         </p:nvSpPr>
         <p:spPr/>
         <p:txBody>
-          <a:bodyPr/>
+          <a:bodyPr>
+            <a:normAutofit fontScale="92500" lnSpcReduction="10000"/>
+          </a:bodyPr>
           <a:lstStyle/>
           <a:p>
             <a:r>
-              <a:rPr lang="en-CA" dirty="0" smtClean="0"/>
+              <a:rPr lang="en-CA" dirty="0"/>
               <a:t>Measurement and verification</a:t>
             </a:r>
           </a:p>
           <a:p>
             <a:r>
-              <a:rPr lang="en-CA" dirty="0" smtClean="0"/>
+              <a:rPr lang="en-CA" dirty="0"/>
               <a:t>Alterations/Retrofit</a:t>
             </a:r>
           </a:p>
           <a:p>
             <a:pPr lvl="1"/>
             <a:r>
-              <a:rPr lang="en-CA" dirty="0" smtClean="0"/>
+              <a:rPr lang="en-CA" dirty="0"/>
               <a:t>Heuristics</a:t>
             </a:r>
           </a:p>
           <a:p>
             <a:pPr lvl="1"/>
             <a:r>
-              <a:rPr lang="en-CA" dirty="0" smtClean="0"/>
+              <a:rPr lang="en-CA" dirty="0"/>
               <a:t>Utility bills</a:t>
             </a:r>
           </a:p>
           <a:p>
             <a:r>
-              <a:rPr lang="en-CA" dirty="0" smtClean="0"/>
+              <a:rPr lang="en-CA" dirty="0"/>
               <a:t>Garbage input (garbage output)</a:t>
             </a:r>
           </a:p>
           <a:p>
             <a:pPr lvl="1"/>
             <a:r>
-              <a:rPr lang="en-CA" dirty="0" smtClean="0"/>
+              <a:rPr lang="en-CA" dirty="0"/>
               <a:t>Uncertain input</a:t>
             </a:r>
           </a:p>
           <a:p>
             <a:r>
-              <a:rPr lang="en-CA" dirty="0" smtClean="0"/>
+              <a:rPr lang="en-CA" dirty="0"/>
               <a:t>Simpler alternative </a:t>
             </a:r>
           </a:p>
           <a:p>
             <a:pPr lvl="1"/>
-            <a:endParaRPr lang="en-CA" dirty="0" smtClean="0"/>
+            <a:endParaRPr lang="en-CA" dirty="0"/>
           </a:p>
         </p:txBody>
       </p:sp>
@@ -16790,10 +15996,9 @@
           <a:lstStyle/>
           <a:p>
             <a:r>
-              <a:rPr lang="en-CA" dirty="0" smtClean="0"/>
+              <a:rPr lang="en-CA" dirty="0"/>
               <a:t>USE BEM</a:t>
             </a:r>
-            <a:endParaRPr lang="en-CA" dirty="0"/>
           </a:p>
         </p:txBody>
       </p:sp>
@@ -16815,53 +16020,48 @@
           <a:lstStyle/>
           <a:p>
             <a:r>
-              <a:rPr lang="en-CA" dirty="0" smtClean="0"/>
+              <a:rPr lang="en-CA" dirty="0"/>
               <a:t>Code compliance</a:t>
             </a:r>
           </a:p>
           <a:p>
             <a:r>
-              <a:rPr lang="en-CA" dirty="0" smtClean="0"/>
-              <a:t>Explain </a:t>
-            </a:r>
-            <a:r>
-              <a:rPr lang="en-CA" dirty="0" smtClean="0"/>
-              <a:t>or justify</a:t>
+              <a:rPr lang="en-CA" dirty="0"/>
+              <a:t>Explain or justify</a:t>
             </a:r>
           </a:p>
           <a:p>
             <a:pPr lvl="1"/>
             <a:r>
-              <a:rPr lang="en-CA" dirty="0" smtClean="0"/>
+              <a:rPr lang="en-CA" dirty="0"/>
               <a:t>Physical phenomenon (academic)</a:t>
             </a:r>
           </a:p>
           <a:p>
             <a:pPr lvl="1"/>
             <a:r>
-              <a:rPr lang="en-CA" dirty="0" smtClean="0"/>
-              <a:t>What happens to X when Y occurs? (professional)</a:t>
+              <a:rPr lang="en-CA" dirty="0"/>
+              <a:t>What happens to X when Y occurs? (practical)</a:t>
             </a:r>
           </a:p>
           <a:p>
             <a:pPr lvl="1"/>
             <a:r>
-              <a:rPr lang="en-CA" dirty="0" smtClean="0"/>
-              <a:t>Forecast/predict hypotheticals (academic + professional)</a:t>
-            </a:r>
-          </a:p>
-          <a:p>
-            <a:r>
-              <a:rPr lang="en-CA" dirty="0" smtClean="0"/>
+              <a:rPr lang="en-CA" dirty="0"/>
+              <a:t>Forecast/predict hypotheticals (academic + practical)</a:t>
+            </a:r>
+          </a:p>
+          <a:p>
+            <a:r>
+              <a:rPr lang="en-CA" dirty="0"/>
               <a:t>Exploratory</a:t>
             </a:r>
           </a:p>
           <a:p>
             <a:r>
-              <a:rPr lang="en-CA" dirty="0" smtClean="0"/>
+              <a:rPr lang="en-CA" dirty="0"/>
               <a:t>Calibration</a:t>
             </a:r>
-            <a:endParaRPr lang="en-CA" dirty="0" smtClean="0"/>
           </a:p>
         </p:txBody>
       </p:sp>
@@ -16875,13 +16075,6 @@
   <p:clrMapOvr>
     <a:masterClrMapping/>
   </p:clrMapOvr>
-  <p:timing>
-    <p:tnLst>
-      <p:par>
-        <p:cTn id="1" dur="indefinite" restart="never" nodeType="tmRoot"/>
-      </p:par>
-    </p:tnLst>
-  </p:timing>
 </p:sld>
 </file>
 
@@ -16918,10 +16111,9 @@
           <a:lstStyle/>
           <a:p>
             <a:r>
-              <a:rPr lang="en-CA" dirty="0" smtClean="0"/>
-              <a:t>BEM Tools: EnergyPlus &amp; OpenStudio	</a:t>
-            </a:r>
-            <a:endParaRPr lang="en-CA" dirty="0"/>
+              <a:rPr lang="en-CA" dirty="0"/>
+              <a:t>BPS Tools: EnergyPlus &amp; OpenStudio	</a:t>
+            </a:r>
           </a:p>
         </p:txBody>
       </p:sp>
@@ -16951,44 +16143,35 @@
               <a:buNone/>
             </a:pPr>
             <a:r>
-              <a:rPr lang="en-CA" dirty="0" smtClean="0"/>
-              <a:t>E+ is a building energy simulation </a:t>
-            </a:r>
-            <a:r>
-              <a:rPr lang="en-CA" dirty="0" smtClean="0"/>
-              <a:t>program</a:t>
-            </a:r>
-            <a:endParaRPr lang="en-CA" dirty="0" smtClean="0"/>
-          </a:p>
-          <a:p>
-            <a:r>
-              <a:rPr lang="en-CA" dirty="0" smtClean="0"/>
+              <a:rPr lang="en-CA" dirty="0"/>
+              <a:t>E+ is a building performance simulation program</a:t>
+            </a:r>
+          </a:p>
+          <a:p>
+            <a:r>
+              <a:rPr lang="en-CA" dirty="0"/>
               <a:t>Detail physics</a:t>
             </a:r>
           </a:p>
           <a:p>
             <a:r>
-              <a:rPr lang="en-CA" dirty="0" smtClean="0"/>
-              <a:t>Funded </a:t>
-            </a:r>
-            <a:r>
-              <a:rPr lang="en-CA" dirty="0" smtClean="0"/>
-              <a:t>by the US DOE: 1997- present</a:t>
-            </a:r>
-          </a:p>
-          <a:p>
-            <a:r>
-              <a:rPr lang="en-CA" dirty="0" smtClean="0"/>
+              <a:rPr lang="en-CA" dirty="0"/>
+              <a:t>Funded by the US DOE: 1997- present</a:t>
+            </a:r>
+          </a:p>
+          <a:p>
+            <a:r>
+              <a:rPr lang="en-CA" dirty="0"/>
               <a:t>Open-source </a:t>
             </a:r>
           </a:p>
           <a:p>
             <a:r>
-              <a:rPr lang="en-CA" dirty="0" smtClean="0"/>
+              <a:rPr lang="en-CA" dirty="0"/>
               <a:t>“No user interface” </a:t>
             </a:r>
             <a:r>
-              <a:rPr lang="en-CA" dirty="0" smtClean="0">
+              <a:rPr lang="en-CA" dirty="0">
                 <a:sym typeface="Wingdings" panose="05000000000000000000" pitchFamily="2" charset="2"/>
               </a:rPr>
               <a:t> intended as an engine</a:t>
@@ -16997,13 +16180,13 @@
           <a:p>
             <a:pPr lvl="1"/>
             <a:r>
-              <a:rPr lang="en-CA" dirty="0" err="1" smtClean="0">
+              <a:rPr lang="en-CA" dirty="0" err="1">
                 <a:sym typeface="Wingdings" panose="05000000000000000000" pitchFamily="2" charset="2"/>
               </a:rPr>
               <a:t>DesignBuilder</a:t>
             </a:r>
             <a:r>
-              <a:rPr lang="en-CA" dirty="0" smtClean="0">
+              <a:rPr lang="en-CA" dirty="0">
                 <a:sym typeface="Wingdings" panose="05000000000000000000" pitchFamily="2" charset="2"/>
               </a:rPr>
               <a:t>, Autodesk Revit, Trace3D Plus</a:t>
@@ -17013,7 +16196,7 @@
             <a:pPr marL="0" indent="0">
               <a:buNone/>
             </a:pPr>
-            <a:endParaRPr lang="en-CA" dirty="0" smtClean="0">
+            <a:endParaRPr lang="en-CA" dirty="0">
               <a:sym typeface="Wingdings" panose="05000000000000000000" pitchFamily="2" charset="2"/>
             </a:endParaRPr>
           </a:p>
@@ -17022,7 +16205,7 @@
               <a:buNone/>
             </a:pPr>
             <a:r>
-              <a:rPr lang="en-CA" dirty="0" smtClean="0">
+              <a:rPr lang="en-CA" dirty="0">
                 <a:sym typeface="Wingdings" panose="05000000000000000000" pitchFamily="2" charset="2"/>
               </a:rPr>
               <a:t>OpenStudio Project</a:t>
@@ -17030,7 +16213,7 @@
           </a:p>
           <a:p>
             <a:r>
-              <a:rPr lang="en-CA" dirty="0" smtClean="0">
+              <a:rPr lang="en-CA" dirty="0">
                 <a:sym typeface="Wingdings" panose="05000000000000000000" pitchFamily="2" charset="2"/>
               </a:rPr>
               <a:t>US DOE: 2008 – present; open-source</a:t>
@@ -17038,16 +16221,10 @@
           </a:p>
           <a:p>
             <a:r>
-              <a:rPr lang="en-CA" dirty="0" smtClean="0">
+              <a:rPr lang="en-CA" dirty="0">
                 <a:sym typeface="Wingdings" panose="05000000000000000000" pitchFamily="2" charset="2"/>
               </a:rPr>
-              <a:t>Several </a:t>
-            </a:r>
-            <a:r>
-              <a:rPr lang="en-CA" dirty="0" smtClean="0">
-                <a:sym typeface="Wingdings" panose="05000000000000000000" pitchFamily="2" charset="2"/>
-              </a:rPr>
-              <a:t>pieces of software and tools</a:t>
+              <a:t>Several pieces of software and tools</a:t>
             </a:r>
           </a:p>
           <a:p>
@@ -17075,16 +16252,12 @@
             <a:pPr lvl="1"/>
             <a:r>
               <a:rPr lang="en-CA" dirty="0"/>
-              <a:t>OpenStudio SDK, OpenStudio-Standards, OpenStudio </a:t>
-            </a:r>
-            <a:r>
-              <a:rPr lang="en-CA" dirty="0" smtClean="0"/>
-              <a:t>Server</a:t>
-            </a:r>
-          </a:p>
-          <a:p>
-            <a:r>
-              <a:rPr lang="en-CA" dirty="0" smtClean="0">
+              <a:t>OpenStudio SDK, OpenStudio-Standards, OpenStudio Server</a:t>
+            </a:r>
+          </a:p>
+          <a:p>
+            <a:r>
+              <a:rPr lang="en-CA" dirty="0">
                 <a:sym typeface="Wingdings" panose="05000000000000000000" pitchFamily="2" charset="2"/>
               </a:rPr>
               <a:t>The rest of “car”</a:t>
@@ -17092,7 +16265,7 @@
           </a:p>
           <a:p>
             <a:pPr lvl="1"/>
-            <a:endParaRPr lang="en-CA" dirty="0" smtClean="0"/>
+            <a:endParaRPr lang="en-CA" dirty="0"/>
           </a:p>
         </p:txBody>
       </p:sp>
@@ -17106,13 +16279,6 @@
   <p:clrMapOvr>
     <a:masterClrMapping/>
   </p:clrMapOvr>
-  <p:timing>
-    <p:tnLst>
-      <p:par>
-        <p:cTn id="1" dur="indefinite" restart="never" nodeType="tmRoot"/>
-      </p:par>
-    </p:tnLst>
-  </p:timing>
 </p:sld>
 </file>
 
@@ -17149,10 +16315,9 @@
           <a:lstStyle/>
           <a:p>
             <a:r>
-              <a:rPr lang="en-CA" dirty="0" smtClean="0"/>
-              <a:t>BEM Tools: EnergyPlus &amp; OpenStudio</a:t>
-            </a:r>
-            <a:endParaRPr lang="en-CA" dirty="0"/>
+              <a:rPr lang="en-CA" dirty="0"/>
+              <a:t>BPM Tools: EnergyPlus &amp; OpenStudio</a:t>
+            </a:r>
           </a:p>
         </p:txBody>
       </p:sp>
@@ -17182,7 +16347,7 @@
               <a:buNone/>
             </a:pPr>
             <a:r>
-              <a:rPr lang="en-CA" dirty="0" smtClean="0">
+              <a:rPr lang="en-CA" dirty="0">
                 <a:sym typeface="Wingdings" panose="05000000000000000000" pitchFamily="2" charset="2"/>
               </a:rPr>
               <a:t>OpenStudio Project (cont.)</a:t>
@@ -17206,26 +16371,14 @@
             <a:pPr lvl="2"/>
             <a:r>
               <a:rPr lang="en-CA" dirty="0"/>
-              <a:t>P</a:t>
-            </a:r>
-            <a:r>
-              <a:rPr lang="en-CA" dirty="0" smtClean="0"/>
-              <a:t>rivate </a:t>
-            </a:r>
-            <a:r>
-              <a:rPr lang="en-CA" dirty="0"/>
-              <a:t>organizations (OpenStudio-Coalition)</a:t>
+              <a:t>Private organizations (OpenStudio-Coalition)</a:t>
             </a:r>
           </a:p>
           <a:p>
             <a:pPr lvl="2"/>
             <a:r>
-              <a:rPr lang="en-CA" dirty="0" smtClean="0"/>
-              <a:t>Industry &amp; academia </a:t>
-            </a:r>
-            <a:r>
-              <a:rPr lang="en-CA" dirty="0"/>
-              <a:t>(Autodesk, Carrier, Trane, individual firms, professionals/academics)</a:t>
+              <a:rPr lang="en-CA" dirty="0"/>
+              <a:t>Industry &amp; academia (Autodesk, Carrier, Trane, individual firms, professionals/academics)</a:t>
             </a:r>
           </a:p>
           <a:p>
@@ -17274,7 +16427,7 @@
               <a:buNone/>
             </a:pPr>
             <a:r>
-              <a:rPr lang="en-CA" dirty="0" smtClean="0">
+              <a:rPr lang="en-CA" dirty="0">
                 <a:sym typeface="Wingdings" panose="05000000000000000000" pitchFamily="2" charset="2"/>
               </a:rPr>
               <a:t>SketchUp</a:t>
@@ -17283,7 +16436,7 @@
           <a:p>
             <a:pPr lvl="1"/>
             <a:r>
-              <a:rPr lang="en-CA" dirty="0" smtClean="0">
+              <a:rPr lang="en-CA" dirty="0">
                 <a:sym typeface="Wingdings" panose="05000000000000000000" pitchFamily="2" charset="2"/>
               </a:rPr>
               <a:t>3D CAD</a:t>
@@ -17292,7 +16445,7 @@
           <a:p>
             <a:pPr lvl="1"/>
             <a:r>
-              <a:rPr lang="en-CA" dirty="0" smtClean="0">
+              <a:rPr lang="en-CA" dirty="0">
                 <a:sym typeface="Wingdings" panose="05000000000000000000" pitchFamily="2" charset="2"/>
               </a:rPr>
               <a:t>Architectural/interior design</a:t>
@@ -17301,7 +16454,7 @@
           <a:p>
             <a:pPr lvl="1"/>
             <a:r>
-              <a:rPr lang="en-CA" dirty="0" smtClean="0">
+              <a:rPr lang="en-CA" dirty="0">
                 <a:sym typeface="Wingdings" panose="05000000000000000000" pitchFamily="2" charset="2"/>
               </a:rPr>
               <a:t>Plug-ins</a:t>
@@ -17319,13 +16472,6 @@
   <p:clrMapOvr>
     <a:masterClrMapping/>
   </p:clrMapOvr>
-  <p:timing>
-    <p:tnLst>
-      <p:par>
-        <p:cTn id="1" dur="indefinite" restart="never" nodeType="tmRoot"/>
-      </p:par>
-    </p:tnLst>
-  </p:timing>
 </p:sld>
 </file>
 
@@ -17362,10 +16508,9 @@
           <a:lstStyle/>
           <a:p>
             <a:r>
-              <a:rPr lang="en-CA" dirty="0" smtClean="0"/>
+              <a:rPr lang="en-CA" dirty="0"/>
               <a:t>General procedures for modelling buildings</a:t>
             </a:r>
-            <a:endParaRPr lang="en-CA" dirty="0"/>
           </a:p>
         </p:txBody>
       </p:sp>
@@ -17388,26 +16533,26 @@
               <a:buNone/>
             </a:pPr>
             <a:r>
-              <a:rPr lang="en-CA" dirty="0" smtClean="0"/>
+              <a:rPr lang="en-CA" dirty="0"/>
               <a:t>Building information need:</a:t>
             </a:r>
           </a:p>
           <a:p>
             <a:r>
-              <a:rPr lang="en-CA" dirty="0" smtClean="0"/>
+              <a:rPr lang="en-CA" dirty="0"/>
               <a:t>Geometry</a:t>
             </a:r>
           </a:p>
           <a:p>
             <a:r>
-              <a:rPr lang="en-CA" dirty="0" smtClean="0"/>
+              <a:rPr lang="en-CA" dirty="0"/>
               <a:t>Construction details</a:t>
             </a:r>
           </a:p>
           <a:p>
             <a:pPr lvl="1"/>
             <a:r>
-              <a:rPr lang="en-CA" dirty="0" smtClean="0"/>
+              <a:rPr lang="en-CA" dirty="0"/>
               <a:t>Air leakage</a:t>
             </a:r>
           </a:p>
@@ -17419,31 +16564,31 @@
           </a:p>
           <a:p>
             <a:r>
-              <a:rPr lang="en-CA" dirty="0" smtClean="0"/>
+              <a:rPr lang="en-CA" dirty="0"/>
               <a:t>Schedule and </a:t>
             </a:r>
             <a:r>
-              <a:rPr lang="en-CA" dirty="0" err="1" smtClean="0"/>
+              <a:rPr lang="en-CA" dirty="0" err="1"/>
               <a:t>setpoints</a:t>
             </a:r>
-            <a:endParaRPr lang="en-CA" dirty="0" smtClean="0"/>
-          </a:p>
-          <a:p>
-            <a:r>
-              <a:rPr lang="en-CA" dirty="0" smtClean="0"/>
+            <a:endParaRPr lang="en-CA" dirty="0"/>
+          </a:p>
+          <a:p>
+            <a:r>
+              <a:rPr lang="en-CA" dirty="0"/>
               <a:t>HVAC</a:t>
             </a:r>
           </a:p>
           <a:p>
             <a:pPr lvl="1"/>
             <a:r>
-              <a:rPr lang="en-CA" dirty="0" smtClean="0"/>
+              <a:rPr lang="en-CA" dirty="0"/>
               <a:t>Components, HVAC drawings (zoning)</a:t>
             </a:r>
           </a:p>
           <a:p>
             <a:r>
-              <a:rPr lang="en-CA" dirty="0" smtClean="0"/>
+              <a:rPr lang="en-CA" dirty="0"/>
               <a:t>Domestic hot water</a:t>
             </a:r>
           </a:p>
@@ -17462,13 +16607,6 @@
   <p:clrMapOvr>
     <a:masterClrMapping/>
   </p:clrMapOvr>
-  <p:timing>
-    <p:tnLst>
-      <p:par>
-        <p:cTn id="1" dur="indefinite" restart="never" nodeType="tmRoot"/>
-      </p:par>
-    </p:tnLst>
-  </p:timing>
 </p:sld>
 </file>
 
@@ -18342,23 +17480,6 @@
 </file>
 
 <file path=customXml/item1.xml><?xml version="1.0" encoding="utf-8"?>
-<?mso-contentType ?>
-<FormTemplates xmlns="http://schemas.microsoft.com/sharepoint/v3/contenttype/forms">
-  <Display>DocumentLibraryForm</Display>
-  <Edit>DocumentLibraryForm</Edit>
-  <New>DocumentLibraryForm</New>
-</FormTemplates>
-</file>
-
-<file path=customXml/item2.xml><?xml version="1.0" encoding="utf-8"?>
-<p:properties xmlns:p="http://schemas.microsoft.com/office/2006/metadata/properties" xmlns:xsi="http://www.w3.org/2001/XMLSchema-instance" xmlns:pc="http://schemas.microsoft.com/office/infopath/2007/PartnerControls">
-  <documentManagement>
-    <MediaServiceKeyPoints xmlns="71af3243-3dd4-4a8d-8c0d-dd76da1f02a5" xsi:nil="true"/>
-  </documentManagement>
-</p:properties>
-</file>
-
-<file path=customXml/item3.xml><?xml version="1.0" encoding="utf-8"?>
 <ct:contentTypeSchema xmlns:ct="http://schemas.microsoft.com/office/2006/metadata/contentType" xmlns:ma="http://schemas.microsoft.com/office/2006/metadata/properties/metaAttributes" ct:_="" ma:_="" ma:contentTypeName="Document" ma:contentTypeID="0x01010079F111ED35F8CC479449609E8A0923A6" ma:contentTypeVersion="11" ma:contentTypeDescription="Create a new document." ma:contentTypeScope="" ma:versionID="96291512c1ee715ab617f4c07df79fc1">
   <xsd:schema xmlns:xsd="http://www.w3.org/2001/XMLSchema" xmlns:xs="http://www.w3.org/2001/XMLSchema" xmlns:p="http://schemas.microsoft.com/office/2006/metadata/properties" xmlns:ns2="71af3243-3dd4-4a8d-8c0d-dd76da1f02a5" xmlns:ns3="16c05727-aa75-4e4a-9b5f-8a80a1165891" targetNamespace="http://schemas.microsoft.com/office/2006/metadata/properties" ma:root="true" ma:fieldsID="8256c27c40ca5c40ce1cf6c44f0205df" ns2:_="" ns3:_="">
     <xsd:import namespace="71af3243-3dd4-4a8d-8c0d-dd76da1f02a5"/>
@@ -18569,32 +17690,24 @@
 </ct:contentTypeSchema>
 </file>
 
-<file path=customXml/itemProps1.xml><?xml version="1.0" encoding="utf-8"?>
-<ds:datastoreItem xmlns:ds="http://schemas.openxmlformats.org/officeDocument/2006/customXml" ds:itemID="{38C25A74-1E0C-4362-AFA3-6197BD285F3A}">
-  <ds:schemaRefs>
-    <ds:schemaRef ds:uri="http://schemas.microsoft.com/sharepoint/v3/contenttype/forms"/>
-  </ds:schemaRefs>
-</ds:datastoreItem>
+<file path=customXml/item2.xml><?xml version="1.0" encoding="utf-8"?>
+<?mso-contentType ?>
+<FormTemplates xmlns="http://schemas.microsoft.com/sharepoint/v3/contenttype/forms">
+  <Display>DocumentLibraryForm</Display>
+  <Edit>DocumentLibraryForm</Edit>
+  <New>DocumentLibraryForm</New>
+</FormTemplates>
 </file>
 
-<file path=customXml/itemProps2.xml><?xml version="1.0" encoding="utf-8"?>
-<ds:datastoreItem xmlns:ds="http://schemas.openxmlformats.org/officeDocument/2006/customXml" ds:itemID="{0EC94942-C689-461B-8649-1FD863C6BA2B}">
-  <ds:schemaRefs>
-    <ds:schemaRef ds:uri="http://purl.org/dc/elements/1.1/"/>
-    <ds:schemaRef ds:uri="http://schemas.microsoft.com/office/2006/metadata/properties"/>
-    <ds:schemaRef ds:uri="http://purl.org/dc/terms/"/>
-    <ds:schemaRef ds:uri="http://schemas.openxmlformats.org/package/2006/metadata/core-properties"/>
-    <ds:schemaRef ds:uri="16c05727-aa75-4e4a-9b5f-8a80a1165891"/>
-    <ds:schemaRef ds:uri="http://schemas.microsoft.com/office/2006/documentManagement/types"/>
-    <ds:schemaRef ds:uri="http://schemas.microsoft.com/office/infopath/2007/PartnerControls"/>
-    <ds:schemaRef ds:uri="71af3243-3dd4-4a8d-8c0d-dd76da1f02a5"/>
-    <ds:schemaRef ds:uri="http://www.w3.org/XML/1998/namespace"/>
-    <ds:schemaRef ds:uri="http://purl.org/dc/dcmitype/"/>
-  </ds:schemaRefs>
-</ds:datastoreItem>
+<file path=customXml/item3.xml><?xml version="1.0" encoding="utf-8"?>
+<p:properties xmlns:p="http://schemas.microsoft.com/office/2006/metadata/properties" xmlns:xsi="http://www.w3.org/2001/XMLSchema-instance" xmlns:pc="http://schemas.microsoft.com/office/infopath/2007/PartnerControls">
+  <documentManagement>
+    <MediaServiceKeyPoints xmlns="71af3243-3dd4-4a8d-8c0d-dd76da1f02a5" xsi:nil="true"/>
+  </documentManagement>
+</p:properties>
 </file>
 
-<file path=customXml/itemProps3.xml><?xml version="1.0" encoding="utf-8"?>
+<file path=customXml/itemProps1.xml><?xml version="1.0" encoding="utf-8"?>
 <ds:datastoreItem xmlns:ds="http://schemas.openxmlformats.org/officeDocument/2006/customXml" ds:itemID="{096277B9-27DA-47CA-9593-62E4BB44ABEA}">
   <ds:schemaRefs>
     <ds:schemaRef ds:uri="http://schemas.microsoft.com/office/2006/metadata/contentType"/>
@@ -18611,4 +17724,29 @@
     <ds:schemaRef ds:uri="http://schemas.microsoft.com/internal/obd"/>
   </ds:schemaRefs>
 </ds:datastoreItem>
+</file>
+
+<file path=customXml/itemProps2.xml><?xml version="1.0" encoding="utf-8"?>
+<ds:datastoreItem xmlns:ds="http://schemas.openxmlformats.org/officeDocument/2006/customXml" ds:itemID="{38C25A74-1E0C-4362-AFA3-6197BD285F3A}">
+  <ds:schemaRefs>
+    <ds:schemaRef ds:uri="http://schemas.microsoft.com/sharepoint/v3/contenttype/forms"/>
+  </ds:schemaRefs>
+</ds:datastoreItem>
+</file>
+
+<file path=customXml/itemProps3.xml><?xml version="1.0" encoding="utf-8"?>
+<ds:datastoreItem xmlns:ds="http://schemas.openxmlformats.org/officeDocument/2006/customXml" ds:itemID="{0EC94942-C689-461B-8649-1FD863C6BA2B}">
+  <ds:schemaRefs>
+    <ds:schemaRef ds:uri="http://purl.org/dc/elements/1.1/"/>
+    <ds:schemaRef ds:uri="http://schemas.microsoft.com/office/2006/metadata/properties"/>
+    <ds:schemaRef ds:uri="http://purl.org/dc/terms/"/>
+    <ds:schemaRef ds:uri="http://schemas.openxmlformats.org/package/2006/metadata/core-properties"/>
+    <ds:schemaRef ds:uri="16c05727-aa75-4e4a-9b5f-8a80a1165891"/>
+    <ds:schemaRef ds:uri="http://schemas.microsoft.com/office/2006/documentManagement/types"/>
+    <ds:schemaRef ds:uri="http://schemas.microsoft.com/office/infopath/2007/PartnerControls"/>
+    <ds:schemaRef ds:uri="71af3243-3dd4-4a8d-8c0d-dd76da1f02a5"/>
+    <ds:schemaRef ds:uri="http://www.w3.org/XML/1998/namespace"/>
+    <ds:schemaRef ds:uri="http://purl.org/dc/dcmitype/"/>
+  </ds:schemaRefs>
+</ds:datastoreItem>
 </file>
--- a/An introduction to  OpenStudio & Energyplus.pptx
+++ b/An introduction to  OpenStudio & Energyplus.pptx
@@ -6469,7 +6469,7 @@
         <p:spPr>
           <a:xfrm>
             <a:off x="716692" y="1919072"/>
-            <a:ext cx="4794422" cy="4801314"/>
+            <a:ext cx="4794422" cy="4524315"/>
           </a:xfrm>
           <a:prstGeom prst="rect">
             <a:avLst/>
@@ -6503,23 +6503,18 @@
               <a:t>Dview</a:t>
             </a:r>
             <a:r>
-              <a:rPr lang="en-CA" dirty="0">
+              <a:rPr lang="en-CA">
                 <a:solidFill>
                   <a:srgbClr val="FF0000"/>
                 </a:solidFill>
               </a:rPr>
-              <a:t> and default libraries) </a:t>
-            </a:r>
-          </a:p>
-          <a:p>
-            <a:pPr marL="285750" indent="-285750">
-              <a:buFont typeface="Arial" panose="020B0604020202020204" pitchFamily="34" charset="0"/>
-              <a:buChar char="•"/>
-            </a:pPr>
-            <a:r>
-              <a:rPr lang="en-CA" dirty="0"/>
-              <a:t>Create a model </a:t>
-            </a:r>
+              <a:t>, default libraries, weather file) </a:t>
+            </a:r>
+            <a:endParaRPr lang="en-CA" dirty="0">
+              <a:solidFill>
+                <a:srgbClr val="FF0000"/>
+              </a:solidFill>
+            </a:endParaRPr>
           </a:p>
           <a:p>
             <a:pPr marL="285750" indent="-285750">
@@ -17480,6 +17475,23 @@
 </file>
 
 <file path=customXml/item1.xml><?xml version="1.0" encoding="utf-8"?>
+<?mso-contentType ?>
+<FormTemplates xmlns="http://schemas.microsoft.com/sharepoint/v3/contenttype/forms">
+  <Display>DocumentLibraryForm</Display>
+  <Edit>DocumentLibraryForm</Edit>
+  <New>DocumentLibraryForm</New>
+</FormTemplates>
+</file>
+
+<file path=customXml/item2.xml><?xml version="1.0" encoding="utf-8"?>
+<p:properties xmlns:p="http://schemas.microsoft.com/office/2006/metadata/properties" xmlns:xsi="http://www.w3.org/2001/XMLSchema-instance" xmlns:pc="http://schemas.microsoft.com/office/infopath/2007/PartnerControls">
+  <documentManagement>
+    <MediaServiceKeyPoints xmlns="71af3243-3dd4-4a8d-8c0d-dd76da1f02a5" xsi:nil="true"/>
+  </documentManagement>
+</p:properties>
+</file>
+
+<file path=customXml/item3.xml><?xml version="1.0" encoding="utf-8"?>
 <ct:contentTypeSchema xmlns:ct="http://schemas.microsoft.com/office/2006/metadata/contentType" xmlns:ma="http://schemas.microsoft.com/office/2006/metadata/properties/metaAttributes" ct:_="" ma:_="" ma:contentTypeName="Document" ma:contentTypeID="0x01010079F111ED35F8CC479449609E8A0923A6" ma:contentTypeVersion="11" ma:contentTypeDescription="Create a new document." ma:contentTypeScope="" ma:versionID="96291512c1ee715ab617f4c07df79fc1">
   <xsd:schema xmlns:xsd="http://www.w3.org/2001/XMLSchema" xmlns:xs="http://www.w3.org/2001/XMLSchema" xmlns:p="http://schemas.microsoft.com/office/2006/metadata/properties" xmlns:ns2="71af3243-3dd4-4a8d-8c0d-dd76da1f02a5" xmlns:ns3="16c05727-aa75-4e4a-9b5f-8a80a1165891" targetNamespace="http://schemas.microsoft.com/office/2006/metadata/properties" ma:root="true" ma:fieldsID="8256c27c40ca5c40ce1cf6c44f0205df" ns2:_="" ns3:_="">
     <xsd:import namespace="71af3243-3dd4-4a8d-8c0d-dd76da1f02a5"/>
@@ -17690,24 +17702,32 @@
 </ct:contentTypeSchema>
 </file>
 
-<file path=customXml/item2.xml><?xml version="1.0" encoding="utf-8"?>
-<?mso-contentType ?>
-<FormTemplates xmlns="http://schemas.microsoft.com/sharepoint/v3/contenttype/forms">
-  <Display>DocumentLibraryForm</Display>
-  <Edit>DocumentLibraryForm</Edit>
-  <New>DocumentLibraryForm</New>
-</FormTemplates>
+<file path=customXml/itemProps1.xml><?xml version="1.0" encoding="utf-8"?>
+<ds:datastoreItem xmlns:ds="http://schemas.openxmlformats.org/officeDocument/2006/customXml" ds:itemID="{38C25A74-1E0C-4362-AFA3-6197BD285F3A}">
+  <ds:schemaRefs>
+    <ds:schemaRef ds:uri="http://schemas.microsoft.com/sharepoint/v3/contenttype/forms"/>
+  </ds:schemaRefs>
+</ds:datastoreItem>
 </file>
 
-<file path=customXml/item3.xml><?xml version="1.0" encoding="utf-8"?>
-<p:properties xmlns:p="http://schemas.microsoft.com/office/2006/metadata/properties" xmlns:xsi="http://www.w3.org/2001/XMLSchema-instance" xmlns:pc="http://schemas.microsoft.com/office/infopath/2007/PartnerControls">
-  <documentManagement>
-    <MediaServiceKeyPoints xmlns="71af3243-3dd4-4a8d-8c0d-dd76da1f02a5" xsi:nil="true"/>
-  </documentManagement>
-</p:properties>
+<file path=customXml/itemProps2.xml><?xml version="1.0" encoding="utf-8"?>
+<ds:datastoreItem xmlns:ds="http://schemas.openxmlformats.org/officeDocument/2006/customXml" ds:itemID="{0EC94942-C689-461B-8649-1FD863C6BA2B}">
+  <ds:schemaRefs>
+    <ds:schemaRef ds:uri="http://purl.org/dc/elements/1.1/"/>
+    <ds:schemaRef ds:uri="http://schemas.microsoft.com/office/2006/metadata/properties"/>
+    <ds:schemaRef ds:uri="http://purl.org/dc/terms/"/>
+    <ds:schemaRef ds:uri="http://schemas.openxmlformats.org/package/2006/metadata/core-properties"/>
+    <ds:schemaRef ds:uri="16c05727-aa75-4e4a-9b5f-8a80a1165891"/>
+    <ds:schemaRef ds:uri="http://schemas.microsoft.com/office/2006/documentManagement/types"/>
+    <ds:schemaRef ds:uri="http://schemas.microsoft.com/office/infopath/2007/PartnerControls"/>
+    <ds:schemaRef ds:uri="71af3243-3dd4-4a8d-8c0d-dd76da1f02a5"/>
+    <ds:schemaRef ds:uri="http://www.w3.org/XML/1998/namespace"/>
+    <ds:schemaRef ds:uri="http://purl.org/dc/dcmitype/"/>
+  </ds:schemaRefs>
+</ds:datastoreItem>
 </file>
 
-<file path=customXml/itemProps1.xml><?xml version="1.0" encoding="utf-8"?>
+<file path=customXml/itemProps3.xml><?xml version="1.0" encoding="utf-8"?>
 <ds:datastoreItem xmlns:ds="http://schemas.openxmlformats.org/officeDocument/2006/customXml" ds:itemID="{096277B9-27DA-47CA-9593-62E4BB44ABEA}">
   <ds:schemaRefs>
     <ds:schemaRef ds:uri="http://schemas.microsoft.com/office/2006/metadata/contentType"/>
@@ -17724,29 +17744,4 @@
     <ds:schemaRef ds:uri="http://schemas.microsoft.com/internal/obd"/>
   </ds:schemaRefs>
 </ds:datastoreItem>
-</file>
-
-<file path=customXml/itemProps2.xml><?xml version="1.0" encoding="utf-8"?>
-<ds:datastoreItem xmlns:ds="http://schemas.openxmlformats.org/officeDocument/2006/customXml" ds:itemID="{38C25A74-1E0C-4362-AFA3-6197BD285F3A}">
-  <ds:schemaRefs>
-    <ds:schemaRef ds:uri="http://schemas.microsoft.com/sharepoint/v3/contenttype/forms"/>
-  </ds:schemaRefs>
-</ds:datastoreItem>
-</file>
-
-<file path=customXml/itemProps3.xml><?xml version="1.0" encoding="utf-8"?>
-<ds:datastoreItem xmlns:ds="http://schemas.openxmlformats.org/officeDocument/2006/customXml" ds:itemID="{0EC94942-C689-461B-8649-1FD863C6BA2B}">
-  <ds:schemaRefs>
-    <ds:schemaRef ds:uri="http://purl.org/dc/elements/1.1/"/>
-    <ds:schemaRef ds:uri="http://schemas.microsoft.com/office/2006/metadata/properties"/>
-    <ds:schemaRef ds:uri="http://purl.org/dc/terms/"/>
-    <ds:schemaRef ds:uri="http://schemas.openxmlformats.org/package/2006/metadata/core-properties"/>
-    <ds:schemaRef ds:uri="16c05727-aa75-4e4a-9b5f-8a80a1165891"/>
-    <ds:schemaRef ds:uri="http://schemas.microsoft.com/office/2006/documentManagement/types"/>
-    <ds:schemaRef ds:uri="http://schemas.microsoft.com/office/infopath/2007/PartnerControls"/>
-    <ds:schemaRef ds:uri="71af3243-3dd4-4a8d-8c0d-dd76da1f02a5"/>
-    <ds:schemaRef ds:uri="http://www.w3.org/XML/1998/namespace"/>
-    <ds:schemaRef ds:uri="http://purl.org/dc/dcmitype/"/>
-  </ds:schemaRefs>
-</ds:datastoreItem>
 </file>
--- a/An introduction to  OpenStudio & Energyplus.pptx
+++ b/An introduction to  OpenStudio & Energyplus.pptx
@@ -5,10 +5,10 @@
     <p:sldMasterId id="2147483660" r:id="rId4"/>
   </p:sldMasterIdLst>
   <p:notesMasterIdLst>
-    <p:notesMasterId r:id="rId48"/>
+    <p:notesMasterId r:id="rId47"/>
   </p:notesMasterIdLst>
   <p:handoutMasterIdLst>
-    <p:handoutMasterId r:id="rId49"/>
+    <p:handoutMasterId r:id="rId48"/>
   </p:handoutMasterIdLst>
   <p:sldIdLst>
     <p:sldId id="268" r:id="rId5"/>
@@ -33,27 +33,26 @@
     <p:sldId id="310" r:id="rId24"/>
     <p:sldId id="311" r:id="rId25"/>
     <p:sldId id="312" r:id="rId26"/>
-    <p:sldId id="313" r:id="rId27"/>
-    <p:sldId id="290" r:id="rId28"/>
-    <p:sldId id="292" r:id="rId29"/>
-    <p:sldId id="293" r:id="rId30"/>
-    <p:sldId id="294" r:id="rId31"/>
-    <p:sldId id="295" r:id="rId32"/>
-    <p:sldId id="296" r:id="rId33"/>
-    <p:sldId id="298" r:id="rId34"/>
-    <p:sldId id="299" r:id="rId35"/>
-    <p:sldId id="300" r:id="rId36"/>
-    <p:sldId id="304" r:id="rId37"/>
-    <p:sldId id="320" r:id="rId38"/>
-    <p:sldId id="318" r:id="rId39"/>
-    <p:sldId id="319" r:id="rId40"/>
-    <p:sldId id="316" r:id="rId41"/>
-    <p:sldId id="301" r:id="rId42"/>
-    <p:sldId id="302" r:id="rId43"/>
-    <p:sldId id="303" r:id="rId44"/>
-    <p:sldId id="314" r:id="rId45"/>
-    <p:sldId id="315" r:id="rId46"/>
-    <p:sldId id="321" r:id="rId47"/>
+    <p:sldId id="290" r:id="rId27"/>
+    <p:sldId id="292" r:id="rId28"/>
+    <p:sldId id="293" r:id="rId29"/>
+    <p:sldId id="294" r:id="rId30"/>
+    <p:sldId id="295" r:id="rId31"/>
+    <p:sldId id="296" r:id="rId32"/>
+    <p:sldId id="298" r:id="rId33"/>
+    <p:sldId id="299" r:id="rId34"/>
+    <p:sldId id="300" r:id="rId35"/>
+    <p:sldId id="304" r:id="rId36"/>
+    <p:sldId id="320" r:id="rId37"/>
+    <p:sldId id="318" r:id="rId38"/>
+    <p:sldId id="319" r:id="rId39"/>
+    <p:sldId id="316" r:id="rId40"/>
+    <p:sldId id="301" r:id="rId41"/>
+    <p:sldId id="302" r:id="rId42"/>
+    <p:sldId id="303" r:id="rId43"/>
+    <p:sldId id="314" r:id="rId44"/>
+    <p:sldId id="315" r:id="rId45"/>
+    <p:sldId id="321" r:id="rId46"/>
   </p:sldIdLst>
   <p:sldSz cx="12192000" cy="6858000"/>
   <p:notesSz cx="6858000" cy="9144000"/>
@@ -8431,28 +8430,28 @@
             </a:r>
           </a:p>
           <a:p>
-            <a:pPr lvl="2"/>
+            <a:pPr lvl="1"/>
             <a:r>
               <a:rPr lang="en-CA" dirty="0"/>
               <a:t>Codes development (Retrofit &amp; carbon code)</a:t>
             </a:r>
           </a:p>
           <a:p>
-            <a:pPr lvl="2"/>
+            <a:pPr lvl="1"/>
             <a:r>
               <a:rPr lang="en-CA" dirty="0"/>
               <a:t>Heat pump</a:t>
             </a:r>
           </a:p>
           <a:p>
-            <a:pPr lvl="2"/>
+            <a:pPr lvl="1"/>
             <a:r>
               <a:rPr lang="en-CA" dirty="0"/>
               <a:t>Arctic renewables</a:t>
             </a:r>
           </a:p>
           <a:p>
-            <a:pPr lvl="2"/>
+            <a:pPr lvl="1"/>
             <a:r>
               <a:rPr lang="en-CA" dirty="0"/>
               <a:t>Modelling tool development</a:t>
@@ -9034,141 +9033,6 @@
           <a:p>
             <a:r>
               <a:rPr lang="en-CA" dirty="0"/>
-              <a:t>OpenStudio Exercise: Internal Loads</a:t>
-            </a:r>
-          </a:p>
-        </p:txBody>
-      </p:sp>
-      <p:sp>
-        <p:nvSpPr>
-          <p:cNvPr id="3" name="Content Placeholder 2"/>
-          <p:cNvSpPr>
-            <a:spLocks noGrp="1"/>
-          </p:cNvSpPr>
-          <p:nvPr>
-            <p:ph idx="1"/>
-          </p:nvPr>
-        </p:nvSpPr>
-        <p:spPr/>
-        <p:txBody>
-          <a:bodyPr/>
-          <a:lstStyle/>
-          <a:p>
-            <a:r>
-              <a:rPr lang="en-CA" dirty="0" err="1"/>
-              <a:t>OS_exercise</a:t>
-            </a:r>
-            <a:r>
-              <a:rPr lang="en-CA" dirty="0"/>
-              <a:t> &gt; </a:t>
-            </a:r>
-            <a:r>
-              <a:rPr lang="en-CA" dirty="0" err="1"/>
-              <a:t>openstudio</a:t>
-            </a:r>
-            <a:r>
-              <a:rPr lang="en-CA" dirty="0"/>
-              <a:t>-gains</a:t>
-            </a:r>
-          </a:p>
-          <a:p>
-            <a:pPr lvl="1"/>
-            <a:r>
-              <a:rPr lang="en-CA" dirty="0"/>
-              <a:t>5_os_internal_gains_exercise.pdf</a:t>
-            </a:r>
-          </a:p>
-          <a:p>
-            <a:pPr lvl="1"/>
-            <a:r>
-              <a:rPr lang="en-CA" dirty="0"/>
-              <a:t>internal_gains_schedule_data.xlsx</a:t>
-            </a:r>
-          </a:p>
-          <a:p>
-            <a:pPr lvl="2"/>
-            <a:r>
-              <a:rPr lang="en-CA" dirty="0"/>
-              <a:t>Heat gain fractions</a:t>
-            </a:r>
-          </a:p>
-          <a:p>
-            <a:pPr lvl="2"/>
-            <a:r>
-              <a:rPr lang="en-CA" dirty="0"/>
-              <a:t>Occupant activity</a:t>
-            </a:r>
-          </a:p>
-          <a:p>
-            <a:pPr lvl="2"/>
-            <a:r>
-              <a:rPr lang="en-CA" dirty="0"/>
-              <a:t>Schedule fractions</a:t>
-            </a:r>
-          </a:p>
-          <a:p>
-            <a:pPr lvl="1"/>
-            <a:r>
-              <a:rPr lang="en-CA" dirty="0"/>
-              <a:t>internal_gain_reference_tables.pdf</a:t>
-            </a:r>
-          </a:p>
-          <a:p>
-            <a:pPr lvl="2"/>
-            <a:r>
-              <a:rPr lang="en-CA" dirty="0"/>
-              <a:t>Data tables from ASHRAE Fundamentals and EnergyPlus I/O doc</a:t>
-            </a:r>
-          </a:p>
-        </p:txBody>
-      </p:sp>
-    </p:spTree>
-    <p:extLst>
-      <p:ext uri="{BB962C8B-B14F-4D97-AF65-F5344CB8AC3E}">
-        <p14:creationId xmlns:p14="http://schemas.microsoft.com/office/powerpoint/2010/main" val="3460656491"/>
-      </p:ext>
-    </p:extLst>
-  </p:cSld>
-  <p:clrMapOvr>
-    <a:masterClrMapping/>
-  </p:clrMapOvr>
-</p:sld>
-</file>
-
-<file path=ppt/slides/slide24.xml><?xml version="1.0" encoding="utf-8"?>
-<p:sld xmlns:a="http://schemas.openxmlformats.org/drawingml/2006/main" xmlns:r="http://schemas.openxmlformats.org/officeDocument/2006/relationships" xmlns:p="http://schemas.openxmlformats.org/presentationml/2006/main">
-  <p:cSld>
-    <p:spTree>
-      <p:nvGrpSpPr>
-        <p:cNvPr id="1" name=""/>
-        <p:cNvGrpSpPr/>
-        <p:nvPr/>
-      </p:nvGrpSpPr>
-      <p:grpSpPr>
-        <a:xfrm>
-          <a:off x="0" y="0"/>
-          <a:ext cx="0" cy="0"/>
-          <a:chOff x="0" y="0"/>
-          <a:chExt cx="0" cy="0"/>
-        </a:xfrm>
-      </p:grpSpPr>
-      <p:sp>
-        <p:nvSpPr>
-          <p:cNvPr id="2" name="Title 1"/>
-          <p:cNvSpPr>
-            <a:spLocks noGrp="1"/>
-          </p:cNvSpPr>
-          <p:nvPr>
-            <p:ph type="title"/>
-          </p:nvPr>
-        </p:nvSpPr>
-        <p:spPr/>
-        <p:txBody>
-          <a:bodyPr/>
-          <a:lstStyle/>
-          <a:p>
-            <a:r>
-              <a:rPr lang="en-CA" dirty="0"/>
               <a:t>An Overview of HVAC systems and equipment</a:t>
             </a:r>
           </a:p>
@@ -9287,7 +9151,7 @@
 </p:sld>
 </file>
 
-<file path=ppt/slides/slide25.xml><?xml version="1.0" encoding="utf-8"?>
+<file path=ppt/slides/slide24.xml><?xml version="1.0" encoding="utf-8"?>
 <p:sld xmlns:a="http://schemas.openxmlformats.org/drawingml/2006/main" xmlns:r="http://schemas.openxmlformats.org/officeDocument/2006/relationships" xmlns:p="http://schemas.openxmlformats.org/presentationml/2006/main">
   <p:cSld>
     <p:spTree>
@@ -9490,7 +9354,7 @@
 </p:sld>
 </file>
 
-<file path=ppt/slides/slide26.xml><?xml version="1.0" encoding="utf-8"?>
+<file path=ppt/slides/slide25.xml><?xml version="1.0" encoding="utf-8"?>
 <p:sld xmlns:a="http://schemas.openxmlformats.org/drawingml/2006/main" xmlns:r="http://schemas.openxmlformats.org/officeDocument/2006/relationships" xmlns:p="http://schemas.openxmlformats.org/presentationml/2006/main">
   <p:cSld>
     <p:spTree>
@@ -9711,7 +9575,7 @@
 </p:sld>
 </file>
 
-<file path=ppt/slides/slide27.xml><?xml version="1.0" encoding="utf-8"?>
+<file path=ppt/slides/slide26.xml><?xml version="1.0" encoding="utf-8"?>
 <p:sld xmlns:a="http://schemas.openxmlformats.org/drawingml/2006/main" xmlns:r="http://schemas.openxmlformats.org/officeDocument/2006/relationships" xmlns:p="http://schemas.openxmlformats.org/presentationml/2006/main">
   <p:cSld>
     <p:spTree>
@@ -9917,6 +9781,137 @@
 </p:sld>
 </file>
 
+<file path=ppt/slides/slide27.xml><?xml version="1.0" encoding="utf-8"?>
+<p:sld xmlns:a="http://schemas.openxmlformats.org/drawingml/2006/main" xmlns:r="http://schemas.openxmlformats.org/officeDocument/2006/relationships" xmlns:p="http://schemas.openxmlformats.org/presentationml/2006/main">
+  <p:cSld>
+    <p:spTree>
+      <p:nvGrpSpPr>
+        <p:cNvPr id="1" name=""/>
+        <p:cNvGrpSpPr/>
+        <p:nvPr/>
+      </p:nvGrpSpPr>
+      <p:grpSpPr>
+        <a:xfrm>
+          <a:off x="0" y="0"/>
+          <a:ext cx="0" cy="0"/>
+          <a:chOff x="0" y="0"/>
+          <a:chExt cx="0" cy="0"/>
+        </a:xfrm>
+      </p:grpSpPr>
+      <p:sp>
+        <p:nvSpPr>
+          <p:cNvPr id="2" name="Title 1"/>
+          <p:cNvSpPr>
+            <a:spLocks noGrp="1"/>
+          </p:cNvSpPr>
+          <p:nvPr>
+            <p:ph type="title"/>
+          </p:nvPr>
+        </p:nvSpPr>
+        <p:spPr/>
+        <p:txBody>
+          <a:bodyPr/>
+          <a:lstStyle/>
+          <a:p>
+            <a:r>
+              <a:rPr lang="en-CA" dirty="0" err="1"/>
+              <a:t>OpensTudio</a:t>
+            </a:r>
+            <a:r>
+              <a:rPr lang="en-CA" dirty="0"/>
+              <a:t> HVAC</a:t>
+            </a:r>
+          </a:p>
+        </p:txBody>
+      </p:sp>
+      <p:sp>
+        <p:nvSpPr>
+          <p:cNvPr id="3" name="Content Placeholder 2"/>
+          <p:cNvSpPr>
+            <a:spLocks noGrp="1"/>
+          </p:cNvSpPr>
+          <p:nvPr>
+            <p:ph idx="1"/>
+          </p:nvPr>
+        </p:nvSpPr>
+        <p:spPr/>
+        <p:txBody>
+          <a:bodyPr/>
+          <a:lstStyle/>
+          <a:p>
+            <a:r>
+              <a:rPr lang="en-CA" dirty="0"/>
+              <a:t>Air and water based</a:t>
+            </a:r>
+          </a:p>
+          <a:p>
+            <a:pPr lvl="1"/>
+            <a:r>
+              <a:rPr lang="en-CA" dirty="0"/>
+              <a:t>Conditioning air/water and circulating it</a:t>
+            </a:r>
+          </a:p>
+          <a:p>
+            <a:pPr lvl="1"/>
+            <a:r>
+              <a:rPr lang="en-CA" dirty="0"/>
+              <a:t>Sometimes brine instead of water</a:t>
+            </a:r>
+          </a:p>
+          <a:p>
+            <a:r>
+              <a:rPr lang="en-CA" dirty="0"/>
+              <a:t>Fundamental/component level view</a:t>
+            </a:r>
+          </a:p>
+          <a:p>
+            <a:r>
+              <a:rPr lang="en-CA" dirty="0"/>
+              <a:t>Heating</a:t>
+            </a:r>
+          </a:p>
+          <a:p>
+            <a:pPr lvl="1"/>
+            <a:r>
+              <a:rPr lang="en-CA" dirty="0"/>
+              <a:t>Electric coil, gas coil, direct expansion coil, water coil</a:t>
+            </a:r>
+          </a:p>
+          <a:p>
+            <a:r>
+              <a:rPr lang="en-CA" dirty="0"/>
+              <a:t>Cooling</a:t>
+            </a:r>
+          </a:p>
+          <a:p>
+            <a:pPr lvl="1"/>
+            <a:r>
+              <a:rPr lang="en-CA" dirty="0"/>
+              <a:t>Cooling tower, chiller, direct expansion coil, water coil</a:t>
+            </a:r>
+          </a:p>
+          <a:p>
+            <a:pPr lvl="1"/>
+            <a:endParaRPr lang="en-CA" dirty="0"/>
+          </a:p>
+          <a:p>
+            <a:endParaRPr lang="en-CA" dirty="0"/>
+          </a:p>
+        </p:txBody>
+      </p:sp>
+    </p:spTree>
+    <p:extLst>
+      <p:ext uri="{BB962C8B-B14F-4D97-AF65-F5344CB8AC3E}">
+        <p14:creationId xmlns:p14="http://schemas.microsoft.com/office/powerpoint/2010/main" val="3623745064"/>
+      </p:ext>
+    </p:extLst>
+  </p:cSld>
+  <p:clrMapOvr>
+    <a:masterClrMapping/>
+  </p:clrMapOvr>
+</p:sld>
+</file>
+
 <file path=ppt/slides/slide28.xml><?xml version="1.0" encoding="utf-8"?>
 <p:sld xmlns:a="http://schemas.openxmlformats.org/drawingml/2006/main" xmlns:r="http://schemas.openxmlformats.org/officeDocument/2006/relationships" xmlns:p="http://schemas.openxmlformats.org/presentationml/2006/main">
   <p:cSld>
@@ -9950,12 +9945,8 @@
           <a:lstStyle/>
           <a:p>
             <a:r>
-              <a:rPr lang="en-CA" dirty="0" err="1"/>
-              <a:t>OpensTudio</a:t>
-            </a:r>
-            <a:r>
-              <a:rPr lang="en-CA" dirty="0"/>
-              <a:t> HVAC</a:t>
+              <a:rPr lang="en-CA" dirty="0"/>
+              <a:t>Ventilation: HRV &amp; ERV</a:t>
             </a:r>
           </a:p>
         </p:txBody>
@@ -9977,68 +9968,47 @@
           <a:p>
             <a:r>
               <a:rPr lang="en-CA" dirty="0"/>
-              <a:t>Air and water based</a:t>
+              <a:t>Introduce outdoor air</a:t>
+            </a:r>
+          </a:p>
+          <a:p>
+            <a:endParaRPr lang="en-CA" dirty="0"/>
+          </a:p>
+          <a:p>
+            <a:r>
+              <a:rPr lang="en-CA" dirty="0"/>
+              <a:t>Exhaust stale indoor air </a:t>
+            </a:r>
+          </a:p>
+          <a:p>
+            <a:endParaRPr lang="en-CA" dirty="0"/>
+          </a:p>
+          <a:p>
+            <a:r>
+              <a:rPr lang="en-CA" dirty="0"/>
+              <a:t>Opportunity to save energy by preheat/cooling </a:t>
             </a:r>
           </a:p>
           <a:p>
             <a:pPr lvl="1"/>
             <a:r>
               <a:rPr lang="en-CA" dirty="0"/>
-              <a:t>Conditioning air/water and circulating it</a:t>
+              <a:t>Heat recovery ventilator (HRV)</a:t>
             </a:r>
           </a:p>
           <a:p>
             <a:pPr lvl="1"/>
             <a:r>
               <a:rPr lang="en-CA" dirty="0"/>
-              <a:t>Sometimes brine instead of water</a:t>
-            </a:r>
-          </a:p>
-          <a:p>
-            <a:r>
-              <a:rPr lang="en-CA" dirty="0"/>
-              <a:t>Fundamental/component level view</a:t>
-            </a:r>
-          </a:p>
-          <a:p>
-            <a:r>
-              <a:rPr lang="en-CA" dirty="0"/>
-              <a:t>Heating</a:t>
-            </a:r>
-          </a:p>
-          <a:p>
-            <a:pPr lvl="1"/>
-            <a:r>
-              <a:rPr lang="en-CA" dirty="0"/>
-              <a:t>Electric coil, gas coil, direct expansion coil, water coil</a:t>
-            </a:r>
-          </a:p>
-          <a:p>
-            <a:r>
-              <a:rPr lang="en-CA" dirty="0"/>
-              <a:t>Cooling</a:t>
-            </a:r>
-          </a:p>
-          <a:p>
-            <a:pPr lvl="1"/>
-            <a:r>
-              <a:rPr lang="en-CA" dirty="0"/>
-              <a:t>Cooling tower, chiller, direct expansion coil, water coil</a:t>
-            </a:r>
-          </a:p>
-          <a:p>
-            <a:pPr lvl="1"/>
-            <a:endParaRPr lang="en-CA" dirty="0"/>
-          </a:p>
-          <a:p>
-            <a:endParaRPr lang="en-CA" dirty="0"/>
+              <a:t>Energy recovery ventilator (ERV)</a:t>
+            </a:r>
           </a:p>
         </p:txBody>
       </p:sp>
     </p:spTree>
     <p:extLst>
       <p:ext uri="{BB962C8B-B14F-4D97-AF65-F5344CB8AC3E}">
-        <p14:creationId xmlns:p14="http://schemas.microsoft.com/office/powerpoint/2010/main" val="3623745064"/>
+        <p14:creationId xmlns:p14="http://schemas.microsoft.com/office/powerpoint/2010/main" val="1546431130"/>
       </p:ext>
     </p:extLst>
   </p:cSld>
@@ -10082,69 +10052,154 @@
           <a:p>
             <a:r>
               <a:rPr lang="en-CA" dirty="0"/>
-              <a:t>Ventilation: HRV &amp; ERV</a:t>
-            </a:r>
-          </a:p>
-        </p:txBody>
-      </p:sp>
-      <p:sp>
-        <p:nvSpPr>
-          <p:cNvPr id="3" name="Content Placeholder 2"/>
-          <p:cNvSpPr>
-            <a:spLocks noGrp="1"/>
-          </p:cNvSpPr>
+              <a:t>Ventilation: HRV</a:t>
+            </a:r>
+          </a:p>
+        </p:txBody>
+      </p:sp>
+      <p:pic>
+        <p:nvPicPr>
+          <p:cNvPr id="4" name="Content Placeholder 3"/>
+          <p:cNvPicPr>
+            <a:picLocks noGrp="1"/>
+          </p:cNvPicPr>
           <p:nvPr>
             <p:ph idx="1"/>
           </p:nvPr>
-        </p:nvSpPr>
-        <p:spPr/>
-        <p:txBody>
-          <a:bodyPr/>
+        </p:nvPicPr>
+        <p:blipFill>
+          <a:blip r:embed="rId2"/>
+          <a:stretch>
+            <a:fillRect/>
+          </a:stretch>
+        </p:blipFill>
+        <p:spPr>
+          <a:xfrm>
+            <a:off x="5489448" y="1940827"/>
+            <a:ext cx="6187976" cy="3528366"/>
+          </a:xfrm>
+          <a:prstGeom prst="rect">
+            <a:avLst/>
+          </a:prstGeom>
+        </p:spPr>
+      </p:pic>
+      <p:sp>
+        <p:nvSpPr>
+          <p:cNvPr id="6" name="TextBox 5"/>
+          <p:cNvSpPr txBox="1"/>
+          <p:nvPr/>
+        </p:nvSpPr>
+        <p:spPr>
+          <a:xfrm>
+            <a:off x="848497" y="2232454"/>
+            <a:ext cx="4184822" cy="1200329"/>
+          </a:xfrm>
+          <a:prstGeom prst="rect">
+            <a:avLst/>
+          </a:prstGeom>
+          <a:noFill/>
+        </p:spPr>
+        <p:txBody>
+          <a:bodyPr wrap="square" rtlCol="0">
+            <a:spAutoFit/>
+          </a:bodyPr>
           <a:lstStyle/>
           <a:p>
-            <a:r>
-              <a:rPr lang="en-CA" dirty="0"/>
-              <a:t>Introduce outdoor air</a:t>
-            </a:r>
-          </a:p>
-          <a:p>
+            <a:pPr marL="285750" indent="-285750">
+              <a:buFont typeface="Arial" panose="020B0604020202020204" pitchFamily="34" charset="0"/>
+              <a:buChar char="•"/>
+            </a:pPr>
+            <a:r>
+              <a:rPr lang="en-CA" dirty="0"/>
+              <a:t>Thermal energy only </a:t>
+            </a:r>
+            <a:r>
+              <a:rPr lang="en-CA" dirty="0">
+                <a:sym typeface="Wingdings" panose="05000000000000000000" pitchFamily="2" charset="2"/>
+              </a:rPr>
+              <a:t> heat</a:t>
+            </a:r>
+          </a:p>
+          <a:p>
+            <a:pPr marL="285750" indent="-285750">
+              <a:buFont typeface="Arial" panose="020B0604020202020204" pitchFamily="34" charset="0"/>
+              <a:buChar char="•"/>
+            </a:pPr>
+            <a:endParaRPr lang="en-CA" dirty="0">
+              <a:sym typeface="Wingdings" panose="05000000000000000000" pitchFamily="2" charset="2"/>
+            </a:endParaRPr>
+          </a:p>
+          <a:p>
+            <a:pPr marL="285750" indent="-285750">
+              <a:buFont typeface="Arial" panose="020B0604020202020204" pitchFamily="34" charset="0"/>
+              <a:buChar char="•"/>
+            </a:pPr>
+            <a:r>
+              <a:rPr lang="en-CA" dirty="0">
+                <a:sym typeface="Wingdings" panose="05000000000000000000" pitchFamily="2" charset="2"/>
+              </a:rPr>
+              <a:t>Leakage (cross contamination) </a:t>
+            </a:r>
+          </a:p>
+          <a:p>
+            <a:pPr marL="285750" indent="-285750">
+              <a:buFont typeface="Arial" panose="020B0604020202020204" pitchFamily="34" charset="0"/>
+              <a:buChar char="•"/>
+            </a:pPr>
             <a:endParaRPr lang="en-CA" dirty="0"/>
           </a:p>
-          <a:p>
-            <a:r>
-              <a:rPr lang="en-CA" dirty="0"/>
-              <a:t>Exhaust stale indoor air </a:t>
-            </a:r>
-          </a:p>
-          <a:p>
-            <a:endParaRPr lang="en-CA" dirty="0"/>
-          </a:p>
-          <a:p>
-            <a:r>
-              <a:rPr lang="en-CA" dirty="0"/>
-              <a:t>Opportunity to save energy by preheat/cooling </a:t>
-            </a:r>
-          </a:p>
-          <a:p>
-            <a:pPr lvl="1"/>
-            <a:r>
-              <a:rPr lang="en-CA" dirty="0"/>
-              <a:t>Heat recovery ventilator (HRV)</a:t>
-            </a:r>
-          </a:p>
-          <a:p>
-            <a:pPr lvl="1"/>
-            <a:r>
-              <a:rPr lang="en-CA" dirty="0"/>
-              <a:t>Energy recovery ventilator (ERV)</a:t>
-            </a:r>
+        </p:txBody>
+      </p:sp>
+      <p:sp>
+        <p:nvSpPr>
+          <p:cNvPr id="5" name="Rectangle 4"/>
+          <p:cNvSpPr/>
+          <p:nvPr/>
+        </p:nvSpPr>
+        <p:spPr>
+          <a:xfrm>
+            <a:off x="6231670" y="5469193"/>
+            <a:ext cx="4799712" cy="289951"/>
+          </a:xfrm>
+          <a:prstGeom prst="rect">
+            <a:avLst/>
+          </a:prstGeom>
+        </p:spPr>
+        <p:txBody>
+          <a:bodyPr wrap="none">
+            <a:spAutoFit/>
+          </a:bodyPr>
+          <a:lstStyle/>
+          <a:p>
+            <a:pPr>
+              <a:lnSpc>
+                <a:spcPct val="107000"/>
+              </a:lnSpc>
+              <a:spcAft>
+                <a:spcPts val="800"/>
+              </a:spcAft>
+            </a:pPr>
+            <a:r>
+              <a:rPr lang="en-CA" sz="1200" dirty="0">
+                <a:latin typeface="Bookman Old Style" panose="02050604050505020204" pitchFamily="18" charset="0"/>
+                <a:ea typeface="Calibri" panose="020F0502020204030204" pitchFamily="34" charset="0"/>
+                <a:cs typeface="Times New Roman" panose="02020603050405020304" pitchFamily="18" charset="0"/>
+              </a:rPr>
+              <a:t>Figure 12. ERV schematic (U.S. Department of Energy, 2021)</a:t>
+            </a:r>
+            <a:endParaRPr lang="en-CA" sz="1200" dirty="0">
+              <a:effectLst/>
+              <a:latin typeface="Bookman Old Style" panose="02050604050505020204" pitchFamily="18" charset="0"/>
+              <a:ea typeface="Calibri" panose="020F0502020204030204" pitchFamily="34" charset="0"/>
+              <a:cs typeface="Times New Roman" panose="02020603050405020304" pitchFamily="18" charset="0"/>
+            </a:endParaRPr>
           </a:p>
         </p:txBody>
       </p:sp>
     </p:spTree>
     <p:extLst>
       <p:ext uri="{BB962C8B-B14F-4D97-AF65-F5344CB8AC3E}">
-        <p14:creationId xmlns:p14="http://schemas.microsoft.com/office/powerpoint/2010/main" val="1546431130"/>
+        <p14:creationId xmlns:p14="http://schemas.microsoft.com/office/powerpoint/2010/main" val="3341759701"/>
       </p:ext>
     </p:extLst>
   </p:cSld>
@@ -10453,197 +10508,6 @@
           <a:p>
             <a:r>
               <a:rPr lang="en-CA" dirty="0"/>
-              <a:t>Ventilation: HRV</a:t>
-            </a:r>
-          </a:p>
-        </p:txBody>
-      </p:sp>
-      <p:pic>
-        <p:nvPicPr>
-          <p:cNvPr id="4" name="Content Placeholder 3"/>
-          <p:cNvPicPr>
-            <a:picLocks noGrp="1"/>
-          </p:cNvPicPr>
-          <p:nvPr>
-            <p:ph idx="1"/>
-          </p:nvPr>
-        </p:nvPicPr>
-        <p:blipFill>
-          <a:blip r:embed="rId2"/>
-          <a:stretch>
-            <a:fillRect/>
-          </a:stretch>
-        </p:blipFill>
-        <p:spPr>
-          <a:xfrm>
-            <a:off x="5489448" y="1940827"/>
-            <a:ext cx="6187976" cy="3528366"/>
-          </a:xfrm>
-          <a:prstGeom prst="rect">
-            <a:avLst/>
-          </a:prstGeom>
-        </p:spPr>
-      </p:pic>
-      <p:sp>
-        <p:nvSpPr>
-          <p:cNvPr id="6" name="TextBox 5"/>
-          <p:cNvSpPr txBox="1"/>
-          <p:nvPr/>
-        </p:nvSpPr>
-        <p:spPr>
-          <a:xfrm>
-            <a:off x="848497" y="2232454"/>
-            <a:ext cx="4184822" cy="1200329"/>
-          </a:xfrm>
-          <a:prstGeom prst="rect">
-            <a:avLst/>
-          </a:prstGeom>
-          <a:noFill/>
-        </p:spPr>
-        <p:txBody>
-          <a:bodyPr wrap="square" rtlCol="0">
-            <a:spAutoFit/>
-          </a:bodyPr>
-          <a:lstStyle/>
-          <a:p>
-            <a:pPr marL="285750" indent="-285750">
-              <a:buFont typeface="Arial" panose="020B0604020202020204" pitchFamily="34" charset="0"/>
-              <a:buChar char="•"/>
-            </a:pPr>
-            <a:r>
-              <a:rPr lang="en-CA" dirty="0"/>
-              <a:t>Thermal energy only </a:t>
-            </a:r>
-            <a:r>
-              <a:rPr lang="en-CA" dirty="0">
-                <a:sym typeface="Wingdings" panose="05000000000000000000" pitchFamily="2" charset="2"/>
-              </a:rPr>
-              <a:t> heat</a:t>
-            </a:r>
-          </a:p>
-          <a:p>
-            <a:pPr marL="285750" indent="-285750">
-              <a:buFont typeface="Arial" panose="020B0604020202020204" pitchFamily="34" charset="0"/>
-              <a:buChar char="•"/>
-            </a:pPr>
-            <a:endParaRPr lang="en-CA" dirty="0">
-              <a:sym typeface="Wingdings" panose="05000000000000000000" pitchFamily="2" charset="2"/>
-            </a:endParaRPr>
-          </a:p>
-          <a:p>
-            <a:pPr marL="285750" indent="-285750">
-              <a:buFont typeface="Arial" panose="020B0604020202020204" pitchFamily="34" charset="0"/>
-              <a:buChar char="•"/>
-            </a:pPr>
-            <a:r>
-              <a:rPr lang="en-CA" dirty="0">
-                <a:sym typeface="Wingdings" panose="05000000000000000000" pitchFamily="2" charset="2"/>
-              </a:rPr>
-              <a:t>Leakage (cross contamination) </a:t>
-            </a:r>
-          </a:p>
-          <a:p>
-            <a:pPr marL="285750" indent="-285750">
-              <a:buFont typeface="Arial" panose="020B0604020202020204" pitchFamily="34" charset="0"/>
-              <a:buChar char="•"/>
-            </a:pPr>
-            <a:endParaRPr lang="en-CA" dirty="0"/>
-          </a:p>
-        </p:txBody>
-      </p:sp>
-      <p:sp>
-        <p:nvSpPr>
-          <p:cNvPr id="5" name="Rectangle 4"/>
-          <p:cNvSpPr/>
-          <p:nvPr/>
-        </p:nvSpPr>
-        <p:spPr>
-          <a:xfrm>
-            <a:off x="6231670" y="5469193"/>
-            <a:ext cx="4799712" cy="289951"/>
-          </a:xfrm>
-          <a:prstGeom prst="rect">
-            <a:avLst/>
-          </a:prstGeom>
-        </p:spPr>
-        <p:txBody>
-          <a:bodyPr wrap="none">
-            <a:spAutoFit/>
-          </a:bodyPr>
-          <a:lstStyle/>
-          <a:p>
-            <a:pPr>
-              <a:lnSpc>
-                <a:spcPct val="107000"/>
-              </a:lnSpc>
-              <a:spcAft>
-                <a:spcPts val="800"/>
-              </a:spcAft>
-            </a:pPr>
-            <a:r>
-              <a:rPr lang="en-CA" sz="1200" dirty="0">
-                <a:latin typeface="Bookman Old Style" panose="02050604050505020204" pitchFamily="18" charset="0"/>
-                <a:ea typeface="Calibri" panose="020F0502020204030204" pitchFamily="34" charset="0"/>
-                <a:cs typeface="Times New Roman" panose="02020603050405020304" pitchFamily="18" charset="0"/>
-              </a:rPr>
-              <a:t>Figure 12. ERV schematic (U.S. Department of Energy, 2021)</a:t>
-            </a:r>
-            <a:endParaRPr lang="en-CA" sz="1200" dirty="0">
-              <a:effectLst/>
-              <a:latin typeface="Bookman Old Style" panose="02050604050505020204" pitchFamily="18" charset="0"/>
-              <a:ea typeface="Calibri" panose="020F0502020204030204" pitchFamily="34" charset="0"/>
-              <a:cs typeface="Times New Roman" panose="02020603050405020304" pitchFamily="18" charset="0"/>
-            </a:endParaRPr>
-          </a:p>
-        </p:txBody>
-      </p:sp>
-    </p:spTree>
-    <p:extLst>
-      <p:ext uri="{BB962C8B-B14F-4D97-AF65-F5344CB8AC3E}">
-        <p14:creationId xmlns:p14="http://schemas.microsoft.com/office/powerpoint/2010/main" val="3341759701"/>
-      </p:ext>
-    </p:extLst>
-  </p:cSld>
-  <p:clrMapOvr>
-    <a:masterClrMapping/>
-  </p:clrMapOvr>
-</p:sld>
-</file>
-
-<file path=ppt/slides/slide31.xml><?xml version="1.0" encoding="utf-8"?>
-<p:sld xmlns:a="http://schemas.openxmlformats.org/drawingml/2006/main" xmlns:r="http://schemas.openxmlformats.org/officeDocument/2006/relationships" xmlns:p="http://schemas.openxmlformats.org/presentationml/2006/main">
-  <p:cSld>
-    <p:spTree>
-      <p:nvGrpSpPr>
-        <p:cNvPr id="1" name=""/>
-        <p:cNvGrpSpPr/>
-        <p:nvPr/>
-      </p:nvGrpSpPr>
-      <p:grpSpPr>
-        <a:xfrm>
-          <a:off x="0" y="0"/>
-          <a:ext cx="0" cy="0"/>
-          <a:chOff x="0" y="0"/>
-          <a:chExt cx="0" cy="0"/>
-        </a:xfrm>
-      </p:grpSpPr>
-      <p:sp>
-        <p:nvSpPr>
-          <p:cNvPr id="2" name="Title 1"/>
-          <p:cNvSpPr>
-            <a:spLocks noGrp="1"/>
-          </p:cNvSpPr>
-          <p:nvPr>
-            <p:ph type="title"/>
-          </p:nvPr>
-        </p:nvSpPr>
-        <p:spPr/>
-        <p:txBody>
-          <a:bodyPr/>
-          <a:lstStyle/>
-          <a:p>
-            <a:r>
-              <a:rPr lang="en-CA" dirty="0"/>
               <a:t>Ventilation: ERV</a:t>
             </a:r>
           </a:p>
@@ -10815,7 +10679,7 @@
 </p:sld>
 </file>
 
-<file path=ppt/slides/slide32.xml><?xml version="1.0" encoding="utf-8"?>
+<file path=ppt/slides/slide31.xml><?xml version="1.0" encoding="utf-8"?>
 <p:sld xmlns:a="http://schemas.openxmlformats.org/drawingml/2006/main" xmlns:r="http://schemas.openxmlformats.org/officeDocument/2006/relationships" xmlns:p="http://schemas.openxmlformats.org/presentationml/2006/main">
   <p:cSld>
     <p:spTree>
@@ -11017,7 +10881,7 @@
 </p:sld>
 </file>
 
-<file path=ppt/slides/slide33.xml><?xml version="1.0" encoding="utf-8"?>
+<file path=ppt/slides/slide32.xml><?xml version="1.0" encoding="utf-8"?>
 <p:sld xmlns:a="http://schemas.openxmlformats.org/drawingml/2006/main" xmlns:r="http://schemas.openxmlformats.org/officeDocument/2006/relationships" xmlns:p="http://schemas.openxmlformats.org/presentationml/2006/main">
   <p:cSld>
     <p:spTree>
@@ -11812,6 +11676,162 @@
 </p:sld>
 </file>
 
+<file path=ppt/slides/slide33.xml><?xml version="1.0" encoding="utf-8"?>
+<p:sld xmlns:a="http://schemas.openxmlformats.org/drawingml/2006/main" xmlns:r="http://schemas.openxmlformats.org/officeDocument/2006/relationships" xmlns:p="http://schemas.openxmlformats.org/presentationml/2006/main">
+  <p:cSld>
+    <p:spTree>
+      <p:nvGrpSpPr>
+        <p:cNvPr id="1" name=""/>
+        <p:cNvGrpSpPr/>
+        <p:nvPr/>
+      </p:nvGrpSpPr>
+      <p:grpSpPr>
+        <a:xfrm>
+          <a:off x="0" y="0"/>
+          <a:ext cx="0" cy="0"/>
+          <a:chOff x="0" y="0"/>
+          <a:chExt cx="0" cy="0"/>
+        </a:xfrm>
+      </p:grpSpPr>
+      <p:sp>
+        <p:nvSpPr>
+          <p:cNvPr id="2" name="Title 1"/>
+          <p:cNvSpPr>
+            <a:spLocks noGrp="1"/>
+          </p:cNvSpPr>
+          <p:nvPr>
+            <p:ph type="title"/>
+          </p:nvPr>
+        </p:nvSpPr>
+        <p:spPr/>
+        <p:txBody>
+          <a:bodyPr/>
+          <a:lstStyle/>
+          <a:p>
+            <a:r>
+              <a:rPr lang="en-CA" dirty="0"/>
+              <a:t>Things to be mindful of</a:t>
+            </a:r>
+          </a:p>
+        </p:txBody>
+      </p:sp>
+      <p:sp>
+        <p:nvSpPr>
+          <p:cNvPr id="3" name="Content Placeholder 2"/>
+          <p:cNvSpPr>
+            <a:spLocks noGrp="1"/>
+          </p:cNvSpPr>
+          <p:nvPr>
+            <p:ph idx="1"/>
+          </p:nvPr>
+        </p:nvSpPr>
+        <p:spPr>
+          <a:xfrm>
+            <a:off x="685801" y="1869601"/>
+            <a:ext cx="10591799" cy="3921600"/>
+          </a:xfrm>
+        </p:spPr>
+        <p:txBody>
+          <a:bodyPr/>
+          <a:lstStyle/>
+          <a:p>
+            <a:r>
+              <a:rPr lang="en-CA" dirty="0"/>
+              <a:t>NZER </a:t>
+            </a:r>
+            <a:r>
+              <a:rPr lang="en-CA" dirty="0">
+                <a:sym typeface="Wingdings" panose="05000000000000000000" pitchFamily="2" charset="2"/>
+              </a:rPr>
+              <a:t> low EUI</a:t>
+            </a:r>
+          </a:p>
+          <a:p>
+            <a:pPr lvl="1"/>
+            <a:r>
+              <a:rPr lang="en-CA" dirty="0">
+                <a:sym typeface="Wingdings" panose="05000000000000000000" pitchFamily="2" charset="2"/>
+              </a:rPr>
+              <a:t>ERV defrost model limited (no degradation due to ice)</a:t>
+            </a:r>
+          </a:p>
+          <a:p>
+            <a:pPr lvl="1"/>
+            <a:r>
+              <a:rPr lang="en-CA" dirty="0">
+                <a:sym typeface="Wingdings" panose="05000000000000000000" pitchFamily="2" charset="2"/>
+              </a:rPr>
+              <a:t>Ground temperature 18</a:t>
+            </a:r>
+            <a:r>
+              <a:rPr lang="en-CA" baseline="30000" dirty="0"/>
+              <a:t>o</a:t>
+            </a:r>
+            <a:r>
+              <a:rPr lang="en-CA" dirty="0"/>
+              <a:t>C</a:t>
+            </a:r>
+          </a:p>
+          <a:p>
+            <a:pPr lvl="2"/>
+            <a:r>
+              <a:rPr lang="en-CA" dirty="0"/>
+              <a:t>Difficult to capture</a:t>
+            </a:r>
+          </a:p>
+          <a:p>
+            <a:pPr lvl="2"/>
+            <a:r>
+              <a:rPr lang="en-CA" dirty="0"/>
+              <a:t>Kiva model</a:t>
+            </a:r>
+          </a:p>
+          <a:p>
+            <a:r>
+              <a:rPr lang="en-CA" dirty="0"/>
+              <a:t>HVAC control is basic</a:t>
+            </a:r>
+          </a:p>
+          <a:p>
+            <a:pPr lvl="1"/>
+            <a:r>
+              <a:rPr lang="en-CA" dirty="0"/>
+              <a:t>EnergyPlus EMS</a:t>
+            </a:r>
+          </a:p>
+          <a:p>
+            <a:r>
+              <a:rPr lang="en-CA" dirty="0"/>
+              <a:t>Rigid loop structure </a:t>
+            </a:r>
+          </a:p>
+          <a:p>
+            <a:r>
+              <a:rPr lang="en-CA" dirty="0"/>
+              <a:t>Limited features in OpenStudio App</a:t>
+            </a:r>
+          </a:p>
+          <a:p>
+            <a:r>
+              <a:rPr lang="en-CA" dirty="0"/>
+              <a:t>Work-a-rounds</a:t>
+            </a:r>
+          </a:p>
+        </p:txBody>
+      </p:sp>
+    </p:spTree>
+    <p:extLst>
+      <p:ext uri="{BB962C8B-B14F-4D97-AF65-F5344CB8AC3E}">
+        <p14:creationId xmlns:p14="http://schemas.microsoft.com/office/powerpoint/2010/main" val="3013113094"/>
+      </p:ext>
+    </p:extLst>
+  </p:cSld>
+  <p:clrMapOvr>
+    <a:masterClrMapping/>
+  </p:clrMapOvr>
+</p:sld>
+</file>
+
 <file path=ppt/slides/slide34.xml><?xml version="1.0" encoding="utf-8"?>
 <p:sld xmlns:a="http://schemas.openxmlformats.org/drawingml/2006/main" xmlns:r="http://schemas.openxmlformats.org/officeDocument/2006/relationships" xmlns:p="http://schemas.openxmlformats.org/presentationml/2006/main">
   <p:cSld>
@@ -11845,8 +11865,12 @@
           <a:lstStyle/>
           <a:p>
             <a:r>
-              <a:rPr lang="en-CA" dirty="0"/>
-              <a:t>Things to be mindful of</a:t>
+              <a:rPr lang="en-CA" dirty="0" err="1"/>
+              <a:t>Openstudio</a:t>
+            </a:r>
+            <a:r>
+              <a:rPr lang="en-CA" dirty="0"/>
+              <a:t> (EnergyPlus) Results</a:t>
             </a:r>
           </a:p>
         </p:txBody>
@@ -11861,104 +11885,58 @@
             <p:ph idx="1"/>
           </p:nvPr>
         </p:nvSpPr>
-        <p:spPr>
-          <a:xfrm>
-            <a:off x="685801" y="1869601"/>
-            <a:ext cx="10591799" cy="3921600"/>
-          </a:xfrm>
-        </p:spPr>
+        <p:spPr/>
         <p:txBody>
           <a:bodyPr/>
           <a:lstStyle/>
           <a:p>
             <a:r>
               <a:rPr lang="en-CA" dirty="0"/>
-              <a:t>NZER </a:t>
-            </a:r>
-            <a:r>
-              <a:rPr lang="en-CA" dirty="0">
-                <a:sym typeface="Wingdings" panose="05000000000000000000" pitchFamily="2" charset="2"/>
-              </a:rPr>
-              <a:t> low EUI</a:t>
+              <a:t>EnergyPlus output files</a:t>
+            </a:r>
+          </a:p>
+          <a:p>
+            <a:r>
+              <a:rPr lang="en-CA" dirty="0" err="1"/>
+              <a:t>DesignBuilder</a:t>
+            </a:r>
+            <a:r>
+              <a:rPr lang="en-CA" dirty="0"/>
+              <a:t> results viewer (free)</a:t>
+            </a:r>
+          </a:p>
+          <a:p>
+            <a:r>
+              <a:rPr lang="en-CA" dirty="0"/>
+              <a:t>EnergyPlus Reports</a:t>
             </a:r>
           </a:p>
           <a:p>
             <a:pPr lvl="1"/>
             <a:r>
-              <a:rPr lang="en-CA" dirty="0">
-                <a:sym typeface="Wingdings" panose="05000000000000000000" pitchFamily="2" charset="2"/>
-              </a:rPr>
-              <a:t>ERV defrost model limited (no degradation due to ice)</a:t>
+              <a:rPr lang="en-CA" dirty="0"/>
+              <a:t>Summary tables</a:t>
             </a:r>
           </a:p>
           <a:p>
             <a:pPr lvl="1"/>
             <a:r>
-              <a:rPr lang="en-CA" dirty="0">
-                <a:sym typeface="Wingdings" panose="05000000000000000000" pitchFamily="2" charset="2"/>
-              </a:rPr>
-              <a:t>Ground temperature 18</a:t>
-            </a:r>
-            <a:r>
-              <a:rPr lang="en-CA" baseline="30000" dirty="0"/>
-              <a:t>o</a:t>
-            </a:r>
-            <a:r>
-              <a:rPr lang="en-CA" dirty="0"/>
-              <a:t>C</a:t>
-            </a:r>
-          </a:p>
-          <a:p>
-            <a:pPr lvl="2"/>
-            <a:r>
-              <a:rPr lang="en-CA" dirty="0"/>
-              <a:t>Difficult to capture</a:t>
-            </a:r>
-          </a:p>
-          <a:p>
-            <a:pPr lvl="2"/>
-            <a:r>
-              <a:rPr lang="en-CA" dirty="0"/>
-              <a:t>Kiva model</a:t>
-            </a:r>
-          </a:p>
-          <a:p>
-            <a:r>
-              <a:rPr lang="en-CA" dirty="0"/>
-              <a:t>HVAC control is basic</a:t>
-            </a:r>
-          </a:p>
-          <a:p>
-            <a:pPr lvl="1"/>
-            <a:r>
-              <a:rPr lang="en-CA" dirty="0"/>
-              <a:t>EnergyPlus EMS</a:t>
-            </a:r>
-          </a:p>
-          <a:p>
-            <a:r>
-              <a:rPr lang="en-CA" dirty="0"/>
-              <a:t>Rigid loop structure </a:t>
-            </a:r>
-          </a:p>
-          <a:p>
-            <a:r>
-              <a:rPr lang="en-CA" dirty="0"/>
-              <a:t>Limited features in OpenStudio App</a:t>
-            </a:r>
-          </a:p>
-          <a:p>
-            <a:r>
-              <a:rPr lang="en-CA" dirty="0"/>
-              <a:t>Work-a-rounds</a:t>
-            </a:r>
+              <a:rPr lang="en-CA" dirty="0"/>
+              <a:t>LEED summary</a:t>
+            </a:r>
+          </a:p>
+          <a:p>
+            <a:endParaRPr lang="en-CA" dirty="0"/>
+          </a:p>
+          <a:p>
+            <a:endParaRPr lang="en-CA" dirty="0"/>
           </a:p>
         </p:txBody>
       </p:sp>
     </p:spTree>
     <p:extLst>
       <p:ext uri="{BB962C8B-B14F-4D97-AF65-F5344CB8AC3E}">
-        <p14:creationId xmlns:p14="http://schemas.microsoft.com/office/powerpoint/2010/main" val="3013113094"/>
+        <p14:creationId xmlns:p14="http://schemas.microsoft.com/office/powerpoint/2010/main" val="1880188622"/>
       </p:ext>
     </p:extLst>
   </p:cSld>
@@ -12001,12 +11979,8 @@
           <a:lstStyle/>
           <a:p>
             <a:r>
-              <a:rPr lang="en-CA" dirty="0" err="1"/>
-              <a:t>Openstudio</a:t>
-            </a:r>
-            <a:r>
-              <a:rPr lang="en-CA" dirty="0"/>
-              <a:t> (EnergyPlus) Results</a:t>
+              <a:rPr lang="en-CA" dirty="0"/>
+              <a:t>BEM and Standards/Guidelines</a:t>
             </a:r>
           </a:p>
         </p:txBody>
@@ -12028,41 +12002,55 @@
           <a:p>
             <a:r>
               <a:rPr lang="en-CA" dirty="0"/>
-              <a:t>EnergyPlus output files</a:t>
-            </a:r>
-          </a:p>
-          <a:p>
-            <a:r>
-              <a:rPr lang="en-CA" dirty="0" err="1"/>
-              <a:t>DesignBuilder</a:t>
-            </a:r>
-            <a:r>
-              <a:rPr lang="en-CA" dirty="0"/>
-              <a:t> results viewer (free)</a:t>
-            </a:r>
-          </a:p>
-          <a:p>
-            <a:r>
-              <a:rPr lang="en-CA" dirty="0"/>
-              <a:t>EnergyPlus Reports</a:t>
+              <a:t>ASHRAE Standard 140 </a:t>
+            </a:r>
+          </a:p>
+          <a:p>
+            <a:r>
+              <a:rPr lang="en-CA" dirty="0"/>
+              <a:t>ASHARE Guideline 14 (calibration)</a:t>
             </a:r>
           </a:p>
           <a:p>
             <a:pPr lvl="1"/>
             <a:r>
               <a:rPr lang="en-CA" dirty="0"/>
-              <a:t>Summary tables</a:t>
+              <a:t>Procedure and standard for estimating energy, water and demand savings</a:t>
             </a:r>
           </a:p>
           <a:p>
             <a:pPr lvl="1"/>
             <a:r>
               <a:rPr lang="en-CA" dirty="0"/>
-              <a:t>LEED summary</a:t>
-            </a:r>
-          </a:p>
-          <a:p>
-            <a:endParaRPr lang="en-CA" dirty="0"/>
+              <a:t>Normalized mean bias error (NME)– 10%</a:t>
+            </a:r>
+          </a:p>
+          <a:p>
+            <a:pPr lvl="1"/>
+            <a:r>
+              <a:rPr lang="en-CA" dirty="0"/>
+              <a:t>Coefficient of variation of the root-mean-square error (CV-RSME)– 30%</a:t>
+            </a:r>
+          </a:p>
+          <a:p>
+            <a:r>
+              <a:rPr lang="en-CA" dirty="0"/>
+              <a:t>Ruleset schema and checker – ASHRAE P229</a:t>
+            </a:r>
+          </a:p>
+          <a:p>
+            <a:pPr lvl="1"/>
+            <a:r>
+              <a:rPr lang="en-CA" dirty="0"/>
+              <a:t>Common ruleset model report (RMR) schema</a:t>
+            </a:r>
+          </a:p>
+          <a:p>
+            <a:pPr lvl="1"/>
+            <a:r>
+              <a:rPr lang="en-CA" dirty="0"/>
+              <a:t>Ruleset checking tool (RCT)</a:t>
+            </a:r>
           </a:p>
           <a:p>
             <a:endParaRPr lang="en-CA" dirty="0"/>
@@ -12072,7 +12060,7 @@
     </p:spTree>
     <p:extLst>
       <p:ext uri="{BB962C8B-B14F-4D97-AF65-F5344CB8AC3E}">
-        <p14:creationId xmlns:p14="http://schemas.microsoft.com/office/powerpoint/2010/main" val="1880188622"/>
+        <p14:creationId xmlns:p14="http://schemas.microsoft.com/office/powerpoint/2010/main" val="2957463265"/>
       </p:ext>
     </p:extLst>
   </p:cSld>
@@ -12116,7 +12104,7 @@
           <a:p>
             <a:r>
               <a:rPr lang="en-CA" dirty="0"/>
-              <a:t>BEM and Standards/Guidelines</a:t>
+              <a:t>OpenStudio references and help</a:t>
             </a:r>
           </a:p>
         </p:txBody>
@@ -12131,71 +12119,177 @@
             <p:ph idx="1"/>
           </p:nvPr>
         </p:nvSpPr>
-        <p:spPr/>
-        <p:txBody>
-          <a:bodyPr/>
+        <p:spPr>
+          <a:xfrm>
+            <a:off x="685801" y="1671480"/>
+            <a:ext cx="10840914" cy="4591021"/>
+          </a:xfrm>
+        </p:spPr>
+        <p:txBody>
+          <a:bodyPr>
+            <a:normAutofit fontScale="77500" lnSpcReduction="20000"/>
+          </a:bodyPr>
           <a:lstStyle/>
           <a:p>
             <a:r>
               <a:rPr lang="en-CA" dirty="0"/>
-              <a:t>ASHRAE Standard 140 </a:t>
+              <a:t>EnergyPlus Documentation</a:t>
             </a:r>
           </a:p>
           <a:p>
             <a:pPr lvl="1"/>
             <a:r>
-              <a:rPr lang="en-CA" dirty="0"/>
-              <a:t>“Pseudo-standard” for BEM</a:t>
-            </a:r>
-          </a:p>
-          <a:p>
-            <a:r>
-              <a:rPr lang="en-CA" dirty="0"/>
-              <a:t>ASHARE Guideline 14 (calibration)</a:t>
-            </a:r>
+              <a:rPr lang="en-CA" dirty="0">
+                <a:hlinkClick r:id="rId2"/>
+              </a:rPr>
+              <a:t>EnergyPlus web-based documentation </a:t>
+            </a:r>
+            <a:endParaRPr lang="en-CA" dirty="0"/>
           </a:p>
           <a:p>
             <a:pPr lvl="1"/>
             <a:r>
-              <a:rPr lang="en-CA" dirty="0"/>
-              <a:t>Procedure and standard for estimating energy, water and demand savings</a:t>
-            </a:r>
+              <a:rPr lang="en-CA" dirty="0">
+                <a:hlinkClick r:id="rId3"/>
+              </a:rPr>
+              <a:t>Official </a:t>
+            </a:r>
+            <a:r>
+              <a:rPr lang="en-CA" dirty="0" err="1">
+                <a:hlinkClick r:id="rId3"/>
+              </a:rPr>
+              <a:t>Quickstart</a:t>
+            </a:r>
+            <a:endParaRPr lang="en-CA" dirty="0"/>
           </a:p>
           <a:p>
             <a:pPr lvl="1"/>
             <a:r>
-              <a:rPr lang="en-CA" dirty="0"/>
-              <a:t>Normalized mean bias error (NME)– 10%</a:t>
-            </a:r>
+              <a:rPr lang="en-CA" dirty="0">
+                <a:hlinkClick r:id="rId4"/>
+              </a:rPr>
+              <a:t>Lecture </a:t>
+            </a:r>
+            <a:r>
+              <a:rPr lang="en-CA" dirty="0" err="1">
+                <a:hlinkClick r:id="rId4"/>
+              </a:rPr>
+              <a:t>ppt</a:t>
+            </a:r>
+            <a:r>
+              <a:rPr lang="en-CA" dirty="0">
+                <a:hlinkClick r:id="rId4"/>
+              </a:rPr>
+              <a:t> </a:t>
+            </a:r>
+            <a:endParaRPr lang="en-CA" dirty="0"/>
           </a:p>
           <a:p>
             <a:pPr lvl="1"/>
             <a:r>
-              <a:rPr lang="en-CA" dirty="0"/>
-              <a:t>Coefficient of variation of the root-mean-square error (CV-RSME)– 30%</a:t>
-            </a:r>
-          </a:p>
-          <a:p>
-            <a:r>
-              <a:rPr lang="en-CA" dirty="0"/>
-              <a:t>Ruleset schema and checker – ASHRAE P229</a:t>
+              <a:rPr lang="en-CA" dirty="0">
+                <a:hlinkClick r:id="rId5"/>
+              </a:rPr>
+              <a:t>Kiva ground heat transfer model</a:t>
+            </a:r>
+            <a:endParaRPr lang="en-CA" dirty="0"/>
+          </a:p>
+          <a:p>
+            <a:r>
+              <a:rPr lang="en-CA" dirty="0"/>
+              <a:t>OpenStudio Documentation</a:t>
             </a:r>
           </a:p>
           <a:p>
             <a:pPr lvl="1"/>
             <a:r>
-              <a:rPr lang="en-CA" dirty="0"/>
-              <a:t>Common ruleset model report (RMR) schema</a:t>
-            </a:r>
+              <a:rPr lang="en-CA" dirty="0">
+                <a:hlinkClick r:id="rId6"/>
+              </a:rPr>
+              <a:t>OpenStudio App + SketchUp for OS</a:t>
+            </a:r>
+            <a:endParaRPr lang="en-CA" dirty="0"/>
           </a:p>
           <a:p>
             <a:pPr lvl="1"/>
             <a:r>
               <a:rPr lang="en-CA" dirty="0"/>
-              <a:t>Ruleset checking tool (RCT)</a:t>
-            </a:r>
-          </a:p>
-          <a:p>
+              <a:t>YouTube</a:t>
+            </a:r>
+          </a:p>
+          <a:p>
+            <a:pPr lvl="2"/>
+            <a:r>
+              <a:rPr lang="en-CA" dirty="0">
+                <a:hlinkClick r:id="rId7"/>
+              </a:rPr>
+              <a:t>OpenStudio + SketchUp</a:t>
+            </a:r>
+            <a:endParaRPr lang="en-CA" dirty="0"/>
+          </a:p>
+          <a:p>
+            <a:pPr lvl="2"/>
+            <a:r>
+              <a:rPr lang="en-CA" dirty="0">
+                <a:hlinkClick r:id="rId8"/>
+              </a:rPr>
+              <a:t>NREL</a:t>
+            </a:r>
+            <a:r>
+              <a:rPr lang="en-CA" dirty="0"/>
+              <a:t> </a:t>
+            </a:r>
+          </a:p>
+          <a:p>
+            <a:pPr lvl="1"/>
+            <a:r>
+              <a:rPr lang="en-CA" dirty="0">
+                <a:hlinkClick r:id="rId9"/>
+              </a:rPr>
+              <a:t>OpenStudio SDK</a:t>
+            </a:r>
+            <a:endParaRPr lang="en-CA" dirty="0"/>
+          </a:p>
+          <a:p>
+            <a:r>
+              <a:rPr lang="en-CA" dirty="0"/>
+              <a:t>OpenStudio Support </a:t>
+            </a:r>
+          </a:p>
+          <a:p>
+            <a:pPr lvl="1"/>
+            <a:r>
+              <a:rPr lang="en-CA" dirty="0">
+                <a:hlinkClick r:id="rId10"/>
+              </a:rPr>
+              <a:t>Unmet Hours</a:t>
+            </a:r>
+            <a:endParaRPr lang="en-CA" dirty="0"/>
+          </a:p>
+          <a:p>
+            <a:pPr lvl="1"/>
+            <a:r>
+              <a:rPr lang="en-CA" dirty="0">
+                <a:hlinkClick r:id="rId11"/>
+              </a:rPr>
+              <a:t>Energy Models</a:t>
+            </a:r>
+            <a:endParaRPr lang="en-CA" dirty="0"/>
+          </a:p>
+          <a:p>
+            <a:r>
+              <a:rPr lang="en-CA" dirty="0"/>
+              <a:t>EnergyPlus Support</a:t>
+            </a:r>
+          </a:p>
+          <a:p>
+            <a:pPr lvl="1"/>
+            <a:r>
+              <a:rPr lang="en-CA" dirty="0">
+                <a:hlinkClick r:id="rId12"/>
+              </a:rPr>
+              <a:t>Official EnergyPlus Support </a:t>
+            </a:r>
             <a:endParaRPr lang="en-CA" dirty="0"/>
           </a:p>
         </p:txBody>
@@ -12203,7 +12297,7 @@
     </p:spTree>
     <p:extLst>
       <p:ext uri="{BB962C8B-B14F-4D97-AF65-F5344CB8AC3E}">
-        <p14:creationId xmlns:p14="http://schemas.microsoft.com/office/powerpoint/2010/main" val="2957463265"/>
+        <p14:creationId xmlns:p14="http://schemas.microsoft.com/office/powerpoint/2010/main" val="2394734825"/>
       </p:ext>
     </p:extLst>
   </p:cSld>
@@ -12247,7 +12341,7 @@
           <a:p>
             <a:r>
               <a:rPr lang="en-CA" dirty="0"/>
-              <a:t>OpenStudio references and help</a:t>
+              <a:t>Energy Conservation Measures (ECM)</a:t>
             </a:r>
           </a:p>
         </p:txBody>
@@ -12264,183 +12358,95 @@
         </p:nvSpPr>
         <p:spPr>
           <a:xfrm>
-            <a:off x="685801" y="1671480"/>
-            <a:ext cx="10840914" cy="4591021"/>
+            <a:off x="685801" y="1869600"/>
+            <a:ext cx="10840914" cy="4209923"/>
           </a:xfrm>
         </p:spPr>
         <p:txBody>
           <a:bodyPr>
-            <a:normAutofit fontScale="77500" lnSpcReduction="20000"/>
+            <a:normAutofit/>
           </a:bodyPr>
           <a:lstStyle/>
           <a:p>
             <a:r>
               <a:rPr lang="en-CA" dirty="0"/>
-              <a:t>EnergyPlus Documentation</a:t>
+              <a:t>aka Energy efficiency measures (EEM)</a:t>
+            </a:r>
+          </a:p>
+          <a:p>
+            <a:r>
+              <a:rPr lang="en-CA" dirty="0"/>
+              <a:t>Strategies for saving energy</a:t>
             </a:r>
           </a:p>
           <a:p>
             <a:pPr lvl="1"/>
             <a:r>
-              <a:rPr lang="en-CA" dirty="0">
-                <a:hlinkClick r:id="rId2"/>
-              </a:rPr>
-              <a:t>EnergyPlus web-based documentation </a:t>
-            </a:r>
-            <a:endParaRPr lang="en-CA" dirty="0"/>
+              <a:rPr lang="en-CA" dirty="0"/>
+              <a:t>Upgrade</a:t>
+            </a:r>
           </a:p>
           <a:p>
             <a:pPr lvl="1"/>
             <a:r>
-              <a:rPr lang="en-CA" dirty="0">
-                <a:hlinkClick r:id="rId3"/>
-              </a:rPr>
-              <a:t>Official </a:t>
-            </a:r>
-            <a:r>
-              <a:rPr lang="en-CA" dirty="0" err="1">
-                <a:hlinkClick r:id="rId3"/>
-              </a:rPr>
-              <a:t>Quickstart</a:t>
-            </a:r>
-            <a:endParaRPr lang="en-CA" dirty="0"/>
+              <a:rPr lang="en-CA" dirty="0"/>
+              <a:t>New system</a:t>
+            </a:r>
           </a:p>
           <a:p>
             <a:pPr lvl="1"/>
             <a:r>
-              <a:rPr lang="en-CA" dirty="0">
-                <a:hlinkClick r:id="rId4"/>
-              </a:rPr>
-              <a:t>Lecture </a:t>
-            </a:r>
-            <a:r>
-              <a:rPr lang="en-CA" dirty="0" err="1">
-                <a:hlinkClick r:id="rId4"/>
-              </a:rPr>
-              <a:t>ppt</a:t>
-            </a:r>
-            <a:r>
-              <a:rPr lang="en-CA" dirty="0">
-                <a:hlinkClick r:id="rId4"/>
-              </a:rPr>
-              <a:t> </a:t>
-            </a:r>
-            <a:endParaRPr lang="en-CA" dirty="0"/>
+              <a:rPr lang="en-CA" dirty="0"/>
+              <a:t>Repair?</a:t>
+            </a:r>
+          </a:p>
+          <a:p>
+            <a:r>
+              <a:rPr lang="en-CA" dirty="0"/>
+              <a:t>Examples</a:t>
+            </a:r>
           </a:p>
           <a:p>
             <a:pPr lvl="1"/>
             <a:r>
-              <a:rPr lang="en-CA" dirty="0">
-                <a:hlinkClick r:id="rId5"/>
-              </a:rPr>
-              <a:t>Kiva ground heat transfer model</a:t>
-            </a:r>
-            <a:endParaRPr lang="en-CA" dirty="0"/>
-          </a:p>
-          <a:p>
-            <a:r>
-              <a:rPr lang="en-CA" dirty="0"/>
-              <a:t>OpenStudio Documentation</a:t>
+              <a:rPr lang="en-CA" dirty="0"/>
+              <a:t>Windows &amp; insulation </a:t>
             </a:r>
           </a:p>
           <a:p>
             <a:pPr lvl="1"/>
             <a:r>
-              <a:rPr lang="en-CA" dirty="0">
-                <a:hlinkClick r:id="rId6"/>
-              </a:rPr>
-              <a:t>OpenStudio App + SketchUp for OS</a:t>
-            </a:r>
-            <a:endParaRPr lang="en-CA" dirty="0"/>
+              <a:rPr lang="en-CA" dirty="0"/>
+              <a:t>Better boiler/water heater/fans</a:t>
+            </a:r>
           </a:p>
           <a:p>
             <a:pPr lvl="1"/>
             <a:r>
               <a:rPr lang="en-CA" dirty="0"/>
-              <a:t>YouTube</a:t>
-            </a:r>
-          </a:p>
-          <a:p>
-            <a:pPr lvl="2"/>
-            <a:r>
-              <a:rPr lang="en-CA" dirty="0">
-                <a:hlinkClick r:id="rId7"/>
-              </a:rPr>
-              <a:t>OpenStudio + SketchUp</a:t>
-            </a:r>
-            <a:endParaRPr lang="en-CA" dirty="0"/>
-          </a:p>
-          <a:p>
-            <a:pPr lvl="2"/>
-            <a:r>
-              <a:rPr lang="en-CA" dirty="0">
-                <a:hlinkClick r:id="rId8"/>
-              </a:rPr>
-              <a:t>NREL</a:t>
-            </a:r>
-            <a:r>
-              <a:rPr lang="en-CA" dirty="0"/>
-              <a:t> </a:t>
+              <a:t>Window-wall ratio </a:t>
             </a:r>
           </a:p>
           <a:p>
             <a:pPr lvl="1"/>
             <a:r>
-              <a:rPr lang="en-CA" dirty="0">
-                <a:hlinkClick r:id="rId9"/>
-              </a:rPr>
-              <a:t>OpenStudio SDK</a:t>
-            </a:r>
-            <a:endParaRPr lang="en-CA" dirty="0"/>
-          </a:p>
-          <a:p>
-            <a:r>
-              <a:rPr lang="en-CA" dirty="0"/>
-              <a:t>OpenStudio Support </a:t>
+              <a:rPr lang="en-CA" dirty="0"/>
+              <a:t>Leakage control</a:t>
             </a:r>
           </a:p>
           <a:p>
             <a:pPr lvl="1"/>
             <a:r>
-              <a:rPr lang="en-CA" dirty="0">
-                <a:hlinkClick r:id="rId10"/>
-              </a:rPr>
-              <a:t>Unmet Hours</a:t>
-            </a:r>
-            <a:endParaRPr lang="en-CA" dirty="0"/>
-          </a:p>
-          <a:p>
-            <a:pPr lvl="1"/>
-            <a:r>
-              <a:rPr lang="en-CA" dirty="0">
-                <a:hlinkClick r:id="rId11"/>
-              </a:rPr>
-              <a:t>Energy Models</a:t>
-            </a:r>
-            <a:endParaRPr lang="en-CA" dirty="0"/>
-          </a:p>
-          <a:p>
-            <a:r>
-              <a:rPr lang="en-CA" dirty="0"/>
-              <a:t>EnergyPlus Support</a:t>
-            </a:r>
-          </a:p>
-          <a:p>
-            <a:pPr lvl="1"/>
-            <a:r>
-              <a:rPr lang="en-CA" dirty="0">
-                <a:hlinkClick r:id="rId12"/>
-              </a:rPr>
-              <a:t>Official EnergyPlus Support </a:t>
-            </a:r>
-            <a:endParaRPr lang="en-CA" dirty="0"/>
+              <a:rPr lang="en-CA" dirty="0"/>
+              <a:t>Better control/automation </a:t>
+            </a:r>
           </a:p>
         </p:txBody>
       </p:sp>
     </p:spTree>
     <p:extLst>
       <p:ext uri="{BB962C8B-B14F-4D97-AF65-F5344CB8AC3E}">
-        <p14:creationId xmlns:p14="http://schemas.microsoft.com/office/powerpoint/2010/main" val="2394734825"/>
+        <p14:creationId xmlns:p14="http://schemas.microsoft.com/office/powerpoint/2010/main" val="993994983"/>
       </p:ext>
     </p:extLst>
   </p:cSld>
@@ -12484,8 +12490,13 @@
           <a:p>
             <a:r>
               <a:rPr lang="en-CA" dirty="0"/>
-              <a:t>Energy Conservation Measures (ECM)</a:t>
-            </a:r>
+              <a:t>Applying ECM in </a:t>
+            </a:r>
+            <a:r>
+              <a:rPr lang="en-CA" dirty="0" err="1"/>
+              <a:t>Openstudio</a:t>
+            </a:r>
+            <a:endParaRPr lang="en-CA" dirty="0"/>
           </a:p>
         </p:txBody>
       </p:sp>
@@ -12499,89 +12510,91 @@
             <p:ph idx="1"/>
           </p:nvPr>
         </p:nvSpPr>
-        <p:spPr>
-          <a:xfrm>
-            <a:off x="685801" y="1869600"/>
-            <a:ext cx="10840914" cy="4209923"/>
-          </a:xfrm>
-        </p:spPr>
+        <p:spPr/>
         <p:txBody>
           <a:bodyPr>
-            <a:normAutofit/>
+            <a:normAutofit fontScale="92500" lnSpcReduction="10000"/>
           </a:bodyPr>
           <a:lstStyle/>
           <a:p>
             <a:r>
               <a:rPr lang="en-CA" dirty="0"/>
-              <a:t>aka Energy efficiency measures (EEM)</a:t>
-            </a:r>
-          </a:p>
-          <a:p>
-            <a:r>
-              <a:rPr lang="en-CA" dirty="0"/>
-              <a:t>Strategies for saving energy</a:t>
+              <a:t>Changing insulation</a:t>
             </a:r>
           </a:p>
           <a:p>
             <a:pPr lvl="1"/>
             <a:r>
               <a:rPr lang="en-CA" dirty="0"/>
-              <a:t>Upgrade</a:t>
+              <a:t>Increase material thickness</a:t>
             </a:r>
           </a:p>
           <a:p>
             <a:pPr lvl="1"/>
             <a:r>
               <a:rPr lang="en-CA" dirty="0"/>
-              <a:t>New system</a:t>
+              <a:t>Swap material</a:t>
             </a:r>
           </a:p>
           <a:p>
             <a:pPr lvl="1"/>
             <a:r>
               <a:rPr lang="en-CA" dirty="0"/>
-              <a:t>Repair?</a:t>
-            </a:r>
-          </a:p>
-          <a:p>
-            <a:r>
-              <a:rPr lang="en-CA" dirty="0"/>
-              <a:t>Examples</a:t>
+              <a:t>New construction</a:t>
+            </a:r>
+          </a:p>
+          <a:p>
+            <a:r>
+              <a:rPr lang="en-CA" dirty="0"/>
+              <a:t>Changing the window-wall ratio</a:t>
             </a:r>
           </a:p>
           <a:p>
             <a:pPr lvl="1"/>
             <a:r>
               <a:rPr lang="en-CA" dirty="0"/>
-              <a:t>Windows &amp; insulation </a:t>
+              <a:t>Delete/add new window (re-draw)</a:t>
+            </a:r>
+          </a:p>
+          <a:p>
+            <a:r>
+              <a:rPr lang="en-CA" dirty="0"/>
+              <a:t>OpenStudio Measures </a:t>
             </a:r>
           </a:p>
           <a:p>
             <a:pPr lvl="1"/>
             <a:r>
               <a:rPr lang="en-CA" dirty="0"/>
-              <a:t>Better boiler/water heater/fans</a:t>
+              <a:t>De-risk, synergize, scale</a:t>
+            </a:r>
+          </a:p>
+          <a:p>
+            <a:pPr lvl="2"/>
+            <a:r>
+              <a:rPr lang="en-CA" dirty="0"/>
+              <a:t>More data, consistency, productivity, shareable</a:t>
             </a:r>
           </a:p>
           <a:p>
             <a:pPr lvl="1"/>
             <a:r>
               <a:rPr lang="en-CA" dirty="0"/>
-              <a:t>Window-wall ratio </a:t>
-            </a:r>
+              <a:t>Commands delete/add/swap/alter a model </a:t>
+            </a:r>
+            <a:r>
+              <a:rPr lang="en-CA" dirty="0">
+                <a:sym typeface="Wingdings" panose="05000000000000000000" pitchFamily="2" charset="2"/>
+              </a:rPr>
+              <a:t> single package</a:t>
+            </a:r>
+            <a:endParaRPr lang="en-CA" dirty="0"/>
           </a:p>
           <a:p>
             <a:pPr lvl="1"/>
             <a:r>
               <a:rPr lang="en-CA" dirty="0"/>
-              <a:t>Leakage control</a:t>
-            </a:r>
-          </a:p>
-          <a:p>
-            <a:pPr lvl="1"/>
-            <a:r>
-              <a:rPr lang="en-CA" dirty="0"/>
-              <a:t>Better control/automation </a:t>
+              <a:t>Go through an example</a:t>
             </a:r>
           </a:p>
         </p:txBody>
@@ -12589,7 +12602,7 @@
     </p:spTree>
     <p:extLst>
       <p:ext uri="{BB962C8B-B14F-4D97-AF65-F5344CB8AC3E}">
-        <p14:creationId xmlns:p14="http://schemas.microsoft.com/office/powerpoint/2010/main" val="993994983"/>
+        <p14:creationId xmlns:p14="http://schemas.microsoft.com/office/powerpoint/2010/main" val="2679064752"/>
       </p:ext>
     </p:extLst>
   </p:cSld>
@@ -12633,13 +12646,8 @@
           <a:p>
             <a:r>
               <a:rPr lang="en-CA" dirty="0"/>
-              <a:t>Applying ECM in </a:t>
-            </a:r>
-            <a:r>
-              <a:rPr lang="en-CA" dirty="0" err="1"/>
-              <a:t>Openstudio</a:t>
-            </a:r>
-            <a:endParaRPr lang="en-CA" dirty="0"/>
+              <a:t>OpenStudio measures</a:t>
+            </a:r>
           </a:p>
         </p:txBody>
       </p:sp>
@@ -12656,96 +12664,110 @@
         <p:spPr/>
         <p:txBody>
           <a:bodyPr>
-            <a:normAutofit fontScale="92500" lnSpcReduction="10000"/>
+            <a:normAutofit/>
           </a:bodyPr>
           <a:lstStyle/>
           <a:p>
             <a:r>
               <a:rPr lang="en-CA" dirty="0"/>
-              <a:t>Changing insulation</a:t>
+              <a:t>Ruby script</a:t>
             </a:r>
           </a:p>
           <a:p>
             <a:pPr lvl="1"/>
             <a:r>
               <a:rPr lang="en-CA" dirty="0"/>
-              <a:t>Increase material thickness</a:t>
+              <a:t>Instructions that control programs</a:t>
             </a:r>
           </a:p>
           <a:p>
             <a:pPr lvl="1"/>
             <a:r>
               <a:rPr lang="en-CA" dirty="0"/>
-              <a:t>Swap material</a:t>
+              <a:t>Interpreted vs compiled (program)</a:t>
             </a:r>
           </a:p>
           <a:p>
             <a:pPr lvl="1"/>
             <a:r>
               <a:rPr lang="en-CA" dirty="0"/>
-              <a:t>New construction</a:t>
-            </a:r>
-          </a:p>
-          <a:p>
-            <a:r>
-              <a:rPr lang="en-CA" dirty="0"/>
-              <a:t>Changing the window-wall ratio</a:t>
-            </a:r>
+              <a:t>Ruby is an interpreted language e.g. python, </a:t>
+            </a:r>
+            <a:r>
+              <a:rPr lang="en-CA" dirty="0" err="1"/>
+              <a:t>matlab</a:t>
+            </a:r>
+            <a:r>
+              <a:rPr lang="en-CA" dirty="0"/>
+              <a:t>, </a:t>
+            </a:r>
+            <a:r>
+              <a:rPr lang="en-CA" dirty="0" err="1"/>
+              <a:t>javascript</a:t>
+            </a:r>
+            <a:endParaRPr lang="en-CA" dirty="0"/>
+          </a:p>
+          <a:p>
+            <a:r>
+              <a:rPr lang="en-CA" dirty="0"/>
+              <a:t>Sources for OpenStudio measures</a:t>
+            </a:r>
+          </a:p>
+          <a:p>
+            <a:r>
+              <a:rPr lang="en-CA" dirty="0"/>
+              <a:t>Measure writers are not omnipotent </a:t>
+            </a:r>
+          </a:p>
+          <a:p>
+            <a:r>
+              <a:rPr lang="en-CA" dirty="0"/>
+              <a:t>Example: multiple measures</a:t>
+            </a:r>
+          </a:p>
+          <a:p>
+            <a:r>
+              <a:rPr lang="en-CA" dirty="0"/>
+              <a:t>Example: create prototype </a:t>
+            </a:r>
+          </a:p>
+          <a:p>
+            <a:r>
+              <a:rPr lang="en-CA" dirty="0"/>
+              <a:t>Measure walkthrough &amp; OpenStudio-Standards</a:t>
+            </a:r>
+          </a:p>
+          <a:p>
+            <a:endParaRPr lang="en-CA" dirty="0"/>
+          </a:p>
+          <a:p>
+            <a:endParaRPr lang="en-CA" dirty="0"/>
+          </a:p>
+          <a:p>
+            <a:endParaRPr lang="en-CA" dirty="0"/>
+          </a:p>
+          <a:p>
+            <a:endParaRPr lang="en-CA" dirty="0"/>
+          </a:p>
+          <a:p>
+            <a:endParaRPr lang="en-CA" dirty="0"/>
+          </a:p>
+          <a:p>
+            <a:endParaRPr lang="en-CA" dirty="0"/>
           </a:p>
           <a:p>
             <a:pPr lvl="1"/>
-            <a:r>
-              <a:rPr lang="en-CA" dirty="0"/>
-              <a:t>Delete/add new window (re-draw)</a:t>
-            </a:r>
-          </a:p>
-          <a:p>
-            <a:r>
-              <a:rPr lang="en-CA" dirty="0"/>
-              <a:t>OpenStudio Measures </a:t>
-            </a:r>
-          </a:p>
-          <a:p>
-            <a:pPr lvl="1"/>
-            <a:r>
-              <a:rPr lang="en-CA" dirty="0"/>
-              <a:t>De-risk, synergize, scale</a:t>
-            </a:r>
-          </a:p>
-          <a:p>
-            <a:pPr lvl="2"/>
-            <a:r>
-              <a:rPr lang="en-CA" dirty="0"/>
-              <a:t>More data, consistency, productivity, shareable</a:t>
-            </a:r>
-          </a:p>
-          <a:p>
-            <a:pPr lvl="1"/>
-            <a:r>
-              <a:rPr lang="en-CA" dirty="0"/>
-              <a:t>Commands delete/add/swap/alter a model </a:t>
-            </a:r>
-            <a:r>
-              <a:rPr lang="en-CA" dirty="0">
-                <a:sym typeface="Wingdings" panose="05000000000000000000" pitchFamily="2" charset="2"/>
-              </a:rPr>
-              <a:t> single package</a:t>
-            </a:r>
             <a:endParaRPr lang="en-CA" dirty="0"/>
           </a:p>
           <a:p>
-            <a:pPr lvl="1"/>
-            <a:r>
-              <a:rPr lang="en-CA" dirty="0"/>
-              <a:t>Go through an example</a:t>
-            </a:r>
+            <a:endParaRPr lang="en-CA" dirty="0"/>
           </a:p>
         </p:txBody>
       </p:sp>
     </p:spTree>
     <p:extLst>
       <p:ext uri="{BB962C8B-B14F-4D97-AF65-F5344CB8AC3E}">
-        <p14:creationId xmlns:p14="http://schemas.microsoft.com/office/powerpoint/2010/main" val="2679064752"/>
+        <p14:creationId xmlns:p14="http://schemas.microsoft.com/office/powerpoint/2010/main" val="3525733902"/>
       </p:ext>
     </p:extLst>
   </p:cSld>
@@ -12911,171 +12933,6 @@
 </file>
 
 <file path=ppt/slides/slide40.xml><?xml version="1.0" encoding="utf-8"?>
-<p:sld xmlns:a="http://schemas.openxmlformats.org/drawingml/2006/main" xmlns:r="http://schemas.openxmlformats.org/officeDocument/2006/relationships" xmlns:p="http://schemas.openxmlformats.org/presentationml/2006/main">
-  <p:cSld>
-    <p:spTree>
-      <p:nvGrpSpPr>
-        <p:cNvPr id="1" name=""/>
-        <p:cNvGrpSpPr/>
-        <p:nvPr/>
-      </p:nvGrpSpPr>
-      <p:grpSpPr>
-        <a:xfrm>
-          <a:off x="0" y="0"/>
-          <a:ext cx="0" cy="0"/>
-          <a:chOff x="0" y="0"/>
-          <a:chExt cx="0" cy="0"/>
-        </a:xfrm>
-      </p:grpSpPr>
-      <p:sp>
-        <p:nvSpPr>
-          <p:cNvPr id="2" name="Title 1"/>
-          <p:cNvSpPr>
-            <a:spLocks noGrp="1"/>
-          </p:cNvSpPr>
-          <p:nvPr>
-            <p:ph type="title"/>
-          </p:nvPr>
-        </p:nvSpPr>
-        <p:spPr/>
-        <p:txBody>
-          <a:bodyPr/>
-          <a:lstStyle/>
-          <a:p>
-            <a:r>
-              <a:rPr lang="en-CA" dirty="0"/>
-              <a:t>OpenStudio measures</a:t>
-            </a:r>
-          </a:p>
-        </p:txBody>
-      </p:sp>
-      <p:sp>
-        <p:nvSpPr>
-          <p:cNvPr id="3" name="Content Placeholder 2"/>
-          <p:cNvSpPr>
-            <a:spLocks noGrp="1"/>
-          </p:cNvSpPr>
-          <p:nvPr>
-            <p:ph idx="1"/>
-          </p:nvPr>
-        </p:nvSpPr>
-        <p:spPr/>
-        <p:txBody>
-          <a:bodyPr>
-            <a:normAutofit/>
-          </a:bodyPr>
-          <a:lstStyle/>
-          <a:p>
-            <a:r>
-              <a:rPr lang="en-CA" dirty="0"/>
-              <a:t>Ruby script</a:t>
-            </a:r>
-          </a:p>
-          <a:p>
-            <a:pPr lvl="1"/>
-            <a:r>
-              <a:rPr lang="en-CA" dirty="0"/>
-              <a:t>Instructions that control programs</a:t>
-            </a:r>
-          </a:p>
-          <a:p>
-            <a:pPr lvl="1"/>
-            <a:r>
-              <a:rPr lang="en-CA" dirty="0"/>
-              <a:t>Interpreted vs compiled (program)</a:t>
-            </a:r>
-          </a:p>
-          <a:p>
-            <a:pPr lvl="1"/>
-            <a:r>
-              <a:rPr lang="en-CA" dirty="0"/>
-              <a:t>Ruby is an interpreted language e.g. python, </a:t>
-            </a:r>
-            <a:r>
-              <a:rPr lang="en-CA" dirty="0" err="1"/>
-              <a:t>matlab</a:t>
-            </a:r>
-            <a:r>
-              <a:rPr lang="en-CA" dirty="0"/>
-              <a:t>, </a:t>
-            </a:r>
-            <a:r>
-              <a:rPr lang="en-CA" dirty="0" err="1"/>
-              <a:t>javascript</a:t>
-            </a:r>
-            <a:endParaRPr lang="en-CA" dirty="0"/>
-          </a:p>
-          <a:p>
-            <a:r>
-              <a:rPr lang="en-CA" dirty="0"/>
-              <a:t>Sources for OpenStudio measures</a:t>
-            </a:r>
-          </a:p>
-          <a:p>
-            <a:r>
-              <a:rPr lang="en-CA" dirty="0"/>
-              <a:t>Measure writers are not omnipotent </a:t>
-            </a:r>
-          </a:p>
-          <a:p>
-            <a:r>
-              <a:rPr lang="en-CA" dirty="0"/>
-              <a:t>Example: multiple measures</a:t>
-            </a:r>
-          </a:p>
-          <a:p>
-            <a:r>
-              <a:rPr lang="en-CA" dirty="0"/>
-              <a:t>Example: create prototype </a:t>
-            </a:r>
-          </a:p>
-          <a:p>
-            <a:r>
-              <a:rPr lang="en-CA" dirty="0"/>
-              <a:t>Measure walkthrough &amp; OpenStudio-Standards</a:t>
-            </a:r>
-          </a:p>
-          <a:p>
-            <a:endParaRPr lang="en-CA" dirty="0"/>
-          </a:p>
-          <a:p>
-            <a:endParaRPr lang="en-CA" dirty="0"/>
-          </a:p>
-          <a:p>
-            <a:endParaRPr lang="en-CA" dirty="0"/>
-          </a:p>
-          <a:p>
-            <a:endParaRPr lang="en-CA" dirty="0"/>
-          </a:p>
-          <a:p>
-            <a:endParaRPr lang="en-CA" dirty="0"/>
-          </a:p>
-          <a:p>
-            <a:endParaRPr lang="en-CA" dirty="0"/>
-          </a:p>
-          <a:p>
-            <a:pPr lvl="1"/>
-            <a:endParaRPr lang="en-CA" dirty="0"/>
-          </a:p>
-          <a:p>
-            <a:endParaRPr lang="en-CA" dirty="0"/>
-          </a:p>
-        </p:txBody>
-      </p:sp>
-    </p:spTree>
-    <p:extLst>
-      <p:ext uri="{BB962C8B-B14F-4D97-AF65-F5344CB8AC3E}">
-        <p14:creationId xmlns:p14="http://schemas.microsoft.com/office/powerpoint/2010/main" val="3525733902"/>
-      </p:ext>
-    </p:extLst>
-  </p:cSld>
-  <p:clrMapOvr>
-    <a:masterClrMapping/>
-  </p:clrMapOvr>
-</p:sld>
-</file>
-
-<file path=ppt/slides/slide41.xml><?xml version="1.0" encoding="utf-8"?>
 <p:sld xmlns:a="http://schemas.openxmlformats.org/drawingml/2006/main" xmlns:r="http://schemas.openxmlformats.org/officeDocument/2006/relationships" xmlns:p="http://schemas.openxmlformats.org/presentationml/2006/main">
   <p:cSld>
     <p:spTree>
@@ -14544,7 +14401,7 @@
 </p:sld>
 </file>
 
-<file path=ppt/slides/slide42.xml><?xml version="1.0" encoding="utf-8"?>
+<file path=ppt/slides/slide41.xml><?xml version="1.0" encoding="utf-8"?>
 <p:sld xmlns:a="http://schemas.openxmlformats.org/drawingml/2006/main" xmlns:r="http://schemas.openxmlformats.org/officeDocument/2006/relationships" xmlns:p="http://schemas.openxmlformats.org/presentationml/2006/main">
   <p:cSld>
     <p:spTree>
@@ -14706,7 +14563,7 @@
 </p:sld>
 </file>
 
-<file path=ppt/slides/slide43.xml><?xml version="1.0" encoding="utf-8"?>
+<file path=ppt/slides/slide42.xml><?xml version="1.0" encoding="utf-8"?>
 <p:sld xmlns:a="http://schemas.openxmlformats.org/drawingml/2006/main" xmlns:r="http://schemas.openxmlformats.org/officeDocument/2006/relationships" xmlns:p="http://schemas.openxmlformats.org/presentationml/2006/main">
   <p:cSld>
     <p:spTree>
@@ -17475,15 +17332,6 @@
 </file>
 
 <file path=customXml/item1.xml><?xml version="1.0" encoding="utf-8"?>
-<?mso-contentType ?>
-<FormTemplates xmlns="http://schemas.microsoft.com/sharepoint/v3/contenttype/forms">
-  <Display>DocumentLibraryForm</Display>
-  <Edit>DocumentLibraryForm</Edit>
-  <New>DocumentLibraryForm</New>
-</FormTemplates>
-</file>
-
-<file path=customXml/item2.xml><?xml version="1.0" encoding="utf-8"?>
 <p:properties xmlns:p="http://schemas.microsoft.com/office/2006/metadata/properties" xmlns:xsi="http://www.w3.org/2001/XMLSchema-instance" xmlns:pc="http://schemas.microsoft.com/office/infopath/2007/PartnerControls">
   <documentManagement>
     <MediaServiceKeyPoints xmlns="71af3243-3dd4-4a8d-8c0d-dd76da1f02a5" xsi:nil="true"/>
@@ -17491,7 +17339,7 @@
 </p:properties>
 </file>
 
-<file path=customXml/item3.xml><?xml version="1.0" encoding="utf-8"?>
+<file path=customXml/item2.xml><?xml version="1.0" encoding="utf-8"?>
 <ct:contentTypeSchema xmlns:ct="http://schemas.microsoft.com/office/2006/metadata/contentType" xmlns:ma="http://schemas.microsoft.com/office/2006/metadata/properties/metaAttributes" ct:_="" ma:_="" ma:contentTypeName="Document" ma:contentTypeID="0x01010079F111ED35F8CC479449609E8A0923A6" ma:contentTypeVersion="11" ma:contentTypeDescription="Create a new document." ma:contentTypeScope="" ma:versionID="96291512c1ee715ab617f4c07df79fc1">
   <xsd:schema xmlns:xsd="http://www.w3.org/2001/XMLSchema" xmlns:xs="http://www.w3.org/2001/XMLSchema" xmlns:p="http://schemas.microsoft.com/office/2006/metadata/properties" xmlns:ns2="71af3243-3dd4-4a8d-8c0d-dd76da1f02a5" xmlns:ns3="16c05727-aa75-4e4a-9b5f-8a80a1165891" targetNamespace="http://schemas.microsoft.com/office/2006/metadata/properties" ma:root="true" ma:fieldsID="8256c27c40ca5c40ce1cf6c44f0205df" ns2:_="" ns3:_="">
     <xsd:import namespace="71af3243-3dd4-4a8d-8c0d-dd76da1f02a5"/>
@@ -17702,15 +17550,16 @@
 </ct:contentTypeSchema>
 </file>
 
-<file path=customXml/itemProps1.xml><?xml version="1.0" encoding="utf-8"?>
-<ds:datastoreItem xmlns:ds="http://schemas.openxmlformats.org/officeDocument/2006/customXml" ds:itemID="{38C25A74-1E0C-4362-AFA3-6197BD285F3A}">
-  <ds:schemaRefs>
-    <ds:schemaRef ds:uri="http://schemas.microsoft.com/sharepoint/v3/contenttype/forms"/>
-  </ds:schemaRefs>
-</ds:datastoreItem>
+<file path=customXml/item3.xml><?xml version="1.0" encoding="utf-8"?>
+<?mso-contentType ?>
+<FormTemplates xmlns="http://schemas.microsoft.com/sharepoint/v3/contenttype/forms">
+  <Display>DocumentLibraryForm</Display>
+  <Edit>DocumentLibraryForm</Edit>
+  <New>DocumentLibraryForm</New>
+</FormTemplates>
 </file>
 
-<file path=customXml/itemProps2.xml><?xml version="1.0" encoding="utf-8"?>
+<file path=customXml/itemProps1.xml><?xml version="1.0" encoding="utf-8"?>
 <ds:datastoreItem xmlns:ds="http://schemas.openxmlformats.org/officeDocument/2006/customXml" ds:itemID="{0EC94942-C689-461B-8649-1FD863C6BA2B}">
   <ds:schemaRefs>
     <ds:schemaRef ds:uri="http://purl.org/dc/elements/1.1/"/>
@@ -17727,7 +17576,7 @@
 </ds:datastoreItem>
 </file>
 
-<file path=customXml/itemProps3.xml><?xml version="1.0" encoding="utf-8"?>
+<file path=customXml/itemProps2.xml><?xml version="1.0" encoding="utf-8"?>
 <ds:datastoreItem xmlns:ds="http://schemas.openxmlformats.org/officeDocument/2006/customXml" ds:itemID="{096277B9-27DA-47CA-9593-62E4BB44ABEA}">
   <ds:schemaRefs>
     <ds:schemaRef ds:uri="http://schemas.microsoft.com/office/2006/metadata/contentType"/>
@@ -17744,4 +17593,12 @@
     <ds:schemaRef ds:uri="http://schemas.microsoft.com/internal/obd"/>
   </ds:schemaRefs>
 </ds:datastoreItem>
+</file>
+
+<file path=customXml/itemProps3.xml><?xml version="1.0" encoding="utf-8"?>
+<ds:datastoreItem xmlns:ds="http://schemas.openxmlformats.org/officeDocument/2006/customXml" ds:itemID="{38C25A74-1E0C-4362-AFA3-6197BD285F3A}">
+  <ds:schemaRefs>
+    <ds:schemaRef ds:uri="http://schemas.microsoft.com/sharepoint/v3/contenttype/forms"/>
+  </ds:schemaRefs>
+</ds:datastoreItem>
 </file>